--- a/lecons/LSA/Climatology/04_LSA_CLIM_L21_Mountain_Climates.pptx
+++ b/lecons/LSA/Climatology/04_LSA_CLIM_L21_Mountain_Climates.pptx
@@ -59,9 +59,18 @@
     <p:sldId id="307" r:id="rId53"/>
     <p:sldId id="308" r:id="rId54"/>
     <p:sldId id="309" r:id="rId55"/>
+    <p:sldId id="310" r:id="rId56"/>
+    <p:sldId id="311" r:id="rId57"/>
+    <p:sldId id="312" r:id="rId58"/>
+    <p:sldId id="313" r:id="rId59"/>
+    <p:sldId id="314" r:id="rId60"/>
+    <p:sldId id="315" r:id="rId61"/>
+    <p:sldId id="316" r:id="rId62"/>
+    <p:sldId id="317" r:id="rId63"/>
+    <p:sldId id="318" r:id="rId64"/>
   </p:sldIdLst>
   <p:notesMasterIdLst>
-    <p:notesMasterId r:id="rId56"/>
+    <p:notesMasterId r:id="rId65"/>
   </p:notesMasterIdLst>
   <p:sldSz cx="12192000" cy="6858000"/>
   <p:notesSz cx="6858000" cy="12192000"/>
@@ -643,7 +652,7 @@
           <a:p>
             <a:r>
               <a:rPr lang="en-US" dirty="0"/>
-              <a:t>Listen carefully to this situation from real life. Tea grows well at Ndu and Djuttitsa in the highlands, but not in Douala. Farmers say the highlands are "cool like Europe" although they are close to the Equator. Think about it, because I am going to ask you some questions.</a:t>
+              <a:t>Take your time to copy this part; we will continue together.</a:t>
             </a:r>
             <a:endParaRPr lang="en-US" dirty="0"/>
           </a:p>
@@ -731,7 +740,7 @@
           <a:p>
             <a:r>
               <a:rPr lang="en-US" dirty="0"/>
-              <a:t>Question 1: What is the problem in the situation? Think for a moment, then raise your hand to answer.</a:t>
+              <a:t>Listen carefully to this situation from real life. Your family travels from Garoua to Mokolo in the Mandara Mountains. In Garoua the air is hot and dusty, but as the car climbs the winding road, the air through the window becomes cooler and fresher. Yet the sun on your arm feels sharper than in Garoua. You ask: "Why is the air cooler in the mountains while the sun burns more, and how does the climate change so much over such a short distance?" Think about it, because I am going to ask you some questions.</a:t>
             </a:r>
             <a:endParaRPr lang="en-US" dirty="0"/>
           </a:p>
@@ -819,7 +828,7 @@
           <a:p>
             <a:r>
               <a:rPr lang="en-US" dirty="0"/>
-              <a:t>Good. Highlands near the Equator have a cool climate.</a:t>
+              <a:t>Question 1: What is the problem in the situation? Think for a moment, then raise your hand to answer.</a:t>
             </a:r>
             <a:endParaRPr lang="en-US" dirty="0"/>
           </a:p>
@@ -907,7 +916,7 @@
           <a:p>
             <a:r>
               <a:rPr lang="en-US" dirty="0"/>
-              <a:t>Question 2: Why are the highlands cool? Think for a moment, then raise your hand to answer.</a:t>
+              <a:t>Good. The learner does not know the characteristics and factors of mountain climates.</a:t>
             </a:r>
             <a:endParaRPr lang="en-US" dirty="0"/>
           </a:p>
@@ -995,7 +1004,7 @@
           <a:p>
             <a:r>
               <a:rPr lang="en-US" dirty="0"/>
-              <a:t>Good. Because of their high altitude.</a:t>
+              <a:t>Question 2: Why is the air cooler in the mountains? Think for a moment, then raise your hand to answer.</a:t>
             </a:r>
             <a:endParaRPr lang="en-US" dirty="0"/>
           </a:p>
@@ -1083,7 +1092,7 @@
           <a:p>
             <a:r>
               <a:rPr lang="en-US" dirty="0"/>
-              <a:t>Question 3: Why does tea grow well there? Think for a moment, then raise your hand to answer.</a:t>
+              <a:t>Good. Because of altitude: temperature falls as height increases.</a:t>
             </a:r>
             <a:endParaRPr lang="en-US" dirty="0"/>
           </a:p>
@@ -1171,7 +1180,7 @@
           <a:p>
             <a:r>
               <a:rPr lang="en-US" dirty="0"/>
-              <a:t>Good. It needs a cool, wet climate.</a:t>
+              <a:t>Question 3: Why does the sun burn more? Think for a moment, then raise your hand to answer.</a:t>
             </a:r>
             <a:endParaRPr lang="en-US" dirty="0"/>
           </a:p>
@@ -1259,7 +1268,7 @@
           <a:p>
             <a:r>
               <a:rPr lang="en-US" dirty="0"/>
-              <a:t>From this situation, the action we are working towards in this lesson is the following: use mountain climates for farming and tourism while protecting mountain environments.</a:t>
+              <a:t>Good. The thin, clean air filters less of the Sun's ultraviolet rays.</a:t>
             </a:r>
             <a:endParaRPr lang="en-US" dirty="0"/>
           </a:p>
@@ -1347,7 +1356,7 @@
           <a:p>
             <a:r>
               <a:rPr lang="en-US" dirty="0"/>
-              <a:t>Why is this lesson important for you? This lesson helps us to understand the climate of the Cameroon highlands and its use for farming and tourism.</a:t>
+              <a:t>From this situation, the action we are working towards in this lesson is the following: protect your skin from strong sun in the mountains and carry warm clothes for cold nights.</a:t>
             </a:r>
             <a:endParaRPr lang="en-US" dirty="0"/>
           </a:p>
@@ -1435,7 +1444,7 @@
           <a:p>
             <a:r>
               <a:rPr lang="en-US" dirty="0"/>
-              <a:t>Activity 1. Look carefully at this diagram: temperature on Mount Cameroon. Observe every detail before I ask the question.</a:t>
+              <a:t>Why is this lesson important for you? This lesson explains the cool, wet highland climates of Cameroon that support dense populations, tea, coffee and tourism.</a:t>
             </a:r>
             <a:endParaRPr lang="en-US" dirty="0"/>
           </a:p>
@@ -1611,7 +1620,7 @@
           <a:p>
             <a:r>
               <a:rPr lang="en-US" dirty="0"/>
-              <a:t>Here is the question for Activity 1: Describe the temperature near the top of Mount Cameroon. Take one minute to think and write your answer in your rough notebook.</a:t>
+              <a:t>Activity 1. Look carefully at this diagram: temperature and height. Observe every detail before I ask the question.</a:t>
             </a:r>
             <a:endParaRPr lang="en-US" dirty="0"/>
           </a:p>
@@ -1699,7 +1708,7 @@
           <a:p>
             <a:r>
               <a:rPr lang="en-US" dirty="0"/>
-              <a:t>Let us check the answer together. Near 0 °C, much colder than the coast.</a:t>
+              <a:t>Here is the question for Activity 1: If Garoua (about 200 m) is at 34 °C, what is the temperature at Mokolo (about 800 m)? Take one minute to think and write your answer in your rough notebook.</a:t>
             </a:r>
             <a:endParaRPr lang="en-US" dirty="0"/>
           </a:p>
@@ -1787,7 +1796,7 @@
           <a:p>
             <a:r>
               <a:rPr lang="en-US" dirty="0"/>
-              <a:t>Activity 2. Look carefully at this picture: snow on Kilimanjaro, near the Equator. Observe every detail before I ask the question.</a:t>
+              <a:t>Let us check the answer together. 34 − (0.6 × 6.5) ≈ 30 °C.</a:t>
             </a:r>
             <a:endParaRPr lang="en-US" dirty="0"/>
           </a:p>
@@ -1875,7 +1884,7 @@
           <a:p>
             <a:r>
               <a:rPr lang="en-US" dirty="0"/>
-              <a:t>Here is the question for Activity 2: Why is there snow on this equatorial mountain? Take one minute to think and write your answer in your rough notebook.</a:t>
+              <a:t>Activity 2. Look carefully at this diagram: relief rain and rain shadow. Observe every detail before I ask the question.</a:t>
             </a:r>
             <a:endParaRPr lang="en-US" dirty="0"/>
           </a:p>
@@ -1963,7 +1972,7 @@
           <a:p>
             <a:r>
               <a:rPr lang="en-US" dirty="0"/>
-              <a:t>Let us check the answer together. The top is very high (5,895 m), so it is below freezing.</a:t>
+              <a:t>Here is the question for Activity 2: Which side of a mountain receives more rain? Take one minute to think and write your answer in your rough notebook.</a:t>
             </a:r>
             <a:endParaRPr lang="en-US" dirty="0"/>
           </a:p>
@@ -2051,7 +2060,7 @@
           <a:p>
             <a:r>
               <a:rPr lang="en-US" dirty="0"/>
-              <a:t>Activity 3. Look carefully at this diagram: relief rain on a mountain. Observe every detail before I ask the question.</a:t>
+              <a:t>Let us check the answer together. The windward side.</a:t>
             </a:r>
             <a:endParaRPr lang="en-US" dirty="0"/>
           </a:p>
@@ -2139,7 +2148,7 @@
           <a:p>
             <a:r>
               <a:rPr lang="en-US" dirty="0"/>
-              <a:t>Here is the question for Activity 3: Why are the windward slopes of mountains wet? Take one minute to think and write your answer in your rough notebook.</a:t>
+              <a:t>Activity 3. Look carefully at this picture: characteristics of mountain climates. Observe every detail before I ask the question.</a:t>
             </a:r>
             <a:endParaRPr lang="en-US" dirty="0"/>
           </a:p>
@@ -2227,7 +2236,7 @@
           <a:p>
             <a:r>
               <a:rPr lang="en-US" dirty="0"/>
-              <a:t>Let us check the answer together. Wet air is forced to rise, cools and forms rain.</a:t>
+              <a:t>Here is the question for Activity 3: Why are mountain nights very cold? Take one minute to think and write your answer in your rough notebook.</a:t>
             </a:r>
             <a:endParaRPr lang="en-US" dirty="0"/>
           </a:p>
@@ -2315,7 +2324,7 @@
           <a:p>
             <a:r>
               <a:rPr lang="en-US" dirty="0"/>
-              <a:t>Activity 4. Look carefully at this diagram: a sunny slope and a shady slope. Observe every detail before I ask the question.</a:t>
+              <a:t>Let us check the answer together. The thin air cannot keep the heat, which escapes quickly.</a:t>
             </a:r>
             <a:endParaRPr lang="en-US" dirty="0"/>
           </a:p>
@@ -2403,7 +2412,7 @@
           <a:p>
             <a:r>
               <a:rPr lang="en-US" dirty="0"/>
-              <a:t>Here is the question for Activity 4: How does aspect change the climate of a mountain? Take one minute to think and write your answer in your rough notebook.</a:t>
+              <a:t>Activity 4. Look carefully at this diagram: vegetation zones on Mount Cameroon. Observe every detail before I ask the question.</a:t>
             </a:r>
             <a:endParaRPr lang="en-US" dirty="0"/>
           </a:p>
@@ -2491,7 +2500,7 @@
           <a:p>
             <a:r>
               <a:rPr lang="en-US" dirty="0"/>
-              <a:t>Our topic is Climates, and the sub-topic is Concept of Micro-climate. The key notions we shall use today are: mountain climate, altitude, aspect, relief rain, rain shadow, altitudinal zonation. At the end, you should be able to do this: learners are able to describe mountain climates and explain their factors, with examples from Cameroon.</a:t>
+              <a:t>Our topic is Climates, and the sub-topic is Concept of Micro-climate. The key notions we shall use today are: mountain (highland) climate, lapse rate, air pressure, orographic rain, rain shadow, ultraviolet radiation, daily range, vertical zonation, altitude, relief, aspect, latitude. At the end, you should be able to do this: learners are able to explain the climate of mountains such as the Mandara Mountains and Mount Cameroon and its effects on vegetation and people.</a:t>
             </a:r>
             <a:endParaRPr lang="en-US" dirty="0"/>
           </a:p>
@@ -2579,7 +2588,7 @@
           <a:p>
             <a:r>
               <a:rPr lang="en-US" dirty="0"/>
-              <a:t>Let us check the answer together. Sunny slopes are warmer and drier than shady slopes.</a:t>
+              <a:t>Here is the question for Activity 4: What is found near the summit of Mount Cameroon? Take one minute to think and write your answer in your rough notebook.</a:t>
             </a:r>
             <a:endParaRPr lang="en-US" dirty="0"/>
           </a:p>
@@ -2667,7 +2676,7 @@
           <a:p>
             <a:r>
               <a:rPr lang="en-US" dirty="0"/>
-              <a:t>Activity 5. Look carefully at this picture: tea on cool highlands. Observe every detail before I ask the question.</a:t>
+              <a:t>Let us check the answer together. Bare lava and rock (with montane grassland below).</a:t>
             </a:r>
             <a:endParaRPr lang="en-US" dirty="0"/>
           </a:p>
@@ -2755,7 +2764,7 @@
           <a:p>
             <a:r>
               <a:rPr lang="en-US" dirty="0"/>
-              <a:t>Here is the question for Activity 5: Give two ways people use the cool mountain climate. Take one minute to think and write your answer in your rough notebook.</a:t>
+              <a:t>Activity 5. Look carefully at this diagram: the aspect of slopes. Observe every detail before I ask the question.</a:t>
             </a:r>
             <a:endParaRPr lang="en-US" dirty="0"/>
           </a:p>
@@ -2843,7 +2852,7 @@
           <a:p>
             <a:r>
               <a:rPr lang="en-US" dirty="0"/>
-              <a:t>Let us check the answer together. Growing tea, coffee and vegetables; tourism and healthy living (few mosquitoes).</a:t>
+              <a:t>Here is the question for Activity 5: Which slope is warmer and drier: the one facing the sun or the one facing away? Take one minute to think and write your answer in your rough notebook.</a:t>
             </a:r>
             <a:endParaRPr lang="en-US" dirty="0"/>
           </a:p>
@@ -2931,7 +2940,7 @@
           <a:p>
             <a:r>
               <a:rPr lang="en-US" dirty="0"/>
-              <a:t>Now we are going to copy the board summary. Write the title and the headings neatly in your notebooks. I will give you enough time for each slide, so do not rush.</a:t>
+              <a:t>Let us check the answer together. The one facing the sun.</a:t>
             </a:r>
             <a:endParaRPr lang="en-US" dirty="0"/>
           </a:p>
@@ -3019,7 +3028,7 @@
           <a:p>
             <a:r>
               <a:rPr lang="en-US" dirty="0"/>
-              <a:t>Let us copy the definitions. The key terms of this lesson are defined as follows. On this slide we have Mountain climate and Mountain barrier. Write each point on a new line, with the key term first, and explain it in your own words when we revise.</a:t>
+              <a:t>Now we are going to copy the board summary. Write the title and the headings neatly in your notebooks. I will give you enough time for each slide, so do not rush.</a:t>
             </a:r>
             <a:endParaRPr lang="en-US" dirty="0"/>
           </a:p>
@@ -3107,7 +3116,7 @@
           <a:p>
             <a:r>
               <a:rPr lang="en-US" dirty="0"/>
-              <a:t>Let us copy Characteristics of Mountain Climates. Mountain climates have the following characteristics. On this slide we have Low temperatures. Write each point on a new line, with the key term first, and explain it in your own words when we revise. When you finish, we go to the next slide.</a:t>
+              <a:t>Let us copy the definitions. The key terms of this lesson are defined as follows. On this slide we have Mountain climate. Write each point on a new line, with the key term first, and explain it in your own words when we revise. When you finish, we go to the next slide.</a:t>
             </a:r>
             <a:endParaRPr lang="en-US" dirty="0"/>
           </a:p>
@@ -3195,7 +3204,7 @@
           <a:p>
             <a:r>
               <a:rPr lang="en-US" dirty="0"/>
-              <a:t>We continue with Characteristics of Mountain Climates. On this slide we have High rainfall on windward slopes and Strong sunshine and winds. Write each point on a new line, with the key term first, and explain it in your own words when we revise. When you finish, we go to the next slide.</a:t>
+              <a:t>We continue with the definitions. On this slide we have Vertical zonation, Windward side and Leeward side. Write each point on a new line, with the key term first, and explain it in your own words when we revise.</a:t>
             </a:r>
             <a:endParaRPr lang="en-US" dirty="0"/>
           </a:p>
@@ -3283,7 +3292,7 @@
           <a:p>
             <a:r>
               <a:rPr lang="en-US" dirty="0"/>
-              <a:t>We continue with Characteristics of Mountain Climates. On this slide we have Vertical zonation. Write each point on a new line, with the key term first, and explain it in your own words when we revise.</a:t>
+              <a:t>Let us copy Characteristics of Mountain Climates. Mountain climates have the following characteristics. Copy the point on Lower temperatures on the left, then draw the diagram on the right: temperature and height. Give it a title and label it clearly.</a:t>
             </a:r>
             <a:endParaRPr lang="en-US" dirty="0"/>
           </a:p>
@@ -3371,7 +3380,7 @@
           <a:p>
             <a:r>
               <a:rPr lang="en-US" dirty="0"/>
-              <a:t>Now draw this illustration in your notebook: temperature falls with altitude. Give it a title and label it clearly.</a:t>
+              <a:t>We continue with Characteristics of Mountain Climates. On this slide we have Lower air pressure. Write each point on a new line, with the key term first, and explain it in your own words when we revise.</a:t>
             </a:r>
             <a:endParaRPr lang="en-US" dirty="0"/>
           </a:p>
@@ -3459,7 +3468,7 @@
           <a:p>
             <a:r>
               <a:rPr lang="en-US" dirty="0"/>
-              <a:t>Before we start the new lesson, let us correct the homework I gave you at the end of Lesson 20: Micro-climates. The question was: Measure the temperature at noon in a sunny yard and under a tree. Explain the difference. Take out your exercise books.</a:t>
+              <a:t>Before we start the new lesson, let us correct the homework I gave you at the end of Lesson 20: Micro-climates. The question was: State how temperature changes with altitude. Take out your exercise books.</a:t>
             </a:r>
             <a:endParaRPr lang="en-US" dirty="0"/>
           </a:p>
@@ -3547,7 +3556,7 @@
           <a:p>
             <a:r>
               <a:rPr lang="en-US" dirty="0"/>
-              <a:t>Let us copy Factors of Mountain Climates. The main factors of mountain climates are. On this slide we have Altitude and Relief barrier. Write each point on a new line, with the key term first, and explain it in your own words when we revise. When you finish, we go to the next slide.</a:t>
+              <a:t>Copy the point on Heavy rain on windward slopes on the left, then draw the diagram on the right: relief rain. Give it a title and label it clearly.</a:t>
             </a:r>
             <a:endParaRPr lang="en-US" dirty="0"/>
           </a:p>
@@ -3635,7 +3644,7 @@
           <a:p>
             <a:r>
               <a:rPr lang="en-US" dirty="0"/>
-              <a:t>We continue with Factors of Mountain Climates. On this slide we have Aspect and slope. Write each point on a new line, with the key term first, and explain it in your own words when we revise.</a:t>
+              <a:t>We continue with Characteristics of Mountain Climates. On this slide we have Strong solar radiation. Write each point on a new line, with the key term first, and explain it in your own words when we revise.</a:t>
             </a:r>
             <a:endParaRPr lang="en-US" dirty="0"/>
           </a:p>
@@ -3723,7 +3732,7 @@
           <a:p>
             <a:r>
               <a:rPr lang="en-US" dirty="0"/>
-              <a:t>Now draw this illustration in your notebook: relief rain and rain shadow. Give it a title and label it clearly.</a:t>
+              <a:t>Copy the point on Large daily range on the left, then draw the diagram on the right: characteristics of mountain climates. Give it a title and label it clearly.</a:t>
             </a:r>
             <a:endParaRPr lang="en-US" dirty="0"/>
           </a:p>
@@ -3811,7 +3820,7 @@
           <a:p>
             <a:r>
               <a:rPr lang="en-US" dirty="0"/>
-              <a:t>Now let us check what you have understood. Question 1: Give three characteristics of mountain climates. Answer in your exercise book.</a:t>
+              <a:t>We continue with Characteristics of Mountain Climates. On this slide we have Vertical zonation. Write each point on a new line, with the key term first, and explain it in your own words when we revise.</a:t>
             </a:r>
             <a:endParaRPr lang="en-US" dirty="0"/>
           </a:p>
@@ -3899,7 +3908,7 @@
           <a:p>
             <a:r>
               <a:rPr lang="en-US" dirty="0"/>
-              <a:t>The expected answer is: cooler temperatures, more rain on windward slopes, strong winds (and mist). If you got it right, well done.</a:t>
+              <a:t>Let us copy Vertical Zonation: Mount Cameroon. On Mount Cameroon, climate and vegetation change with height as follows. Copy the point on Lower slopes (0–800 m) on the left, then draw the diagram on the right: vegetation zones on Mount Cameroon. Give it a title and label it clearly.</a:t>
             </a:r>
             <a:endParaRPr lang="en-US" dirty="0"/>
           </a:p>
@@ -3987,7 +3996,7 @@
           <a:p>
             <a:r>
               <a:rPr lang="en-US" dirty="0"/>
-              <a:t>Now let us check what you have understood. Question 2: Why is the leeward side of a mountain drier? Answer in your exercise book.</a:t>
+              <a:t>We continue with Vertical Zonation: Mount Cameroon. On this slide we have Middle slopes (800–2,400 m), Upper slopes (2,400–3,800 m) and Summit (above 3,800 m). Write each point on a new line, with the key term first, and explain it in your own words when we revise.</a:t>
             </a:r>
             <a:endParaRPr lang="en-US" dirty="0"/>
           </a:p>
@@ -4075,7 +4084,7 @@
           <a:p>
             <a:r>
               <a:rPr lang="en-US" dirty="0"/>
-              <a:t>The expected answer is: air has lost its rain on the windward side and warms as it sinks. If you got it right, well done.</a:t>
+              <a:t>Let us copy Factors of Mountain Climates. Mountain climates are controlled by the following factors. On this slide we have Altitude. Write each point on a new line, with the key term first, and explain it in your own words when we revise. When you finish, we go to the next slide.</a:t>
             </a:r>
             <a:endParaRPr lang="en-US" dirty="0"/>
           </a:p>
@@ -4163,7 +4172,7 @@
           <a:p>
             <a:r>
               <a:rPr lang="en-US" dirty="0"/>
-              <a:t>For those who need more practice, fill in the blanks in your exercise book. The answers are: number 1, altitude; number 2, windward; number 3, highlands.</a:t>
+              <a:t>We continue with Factors of Mountain Climates. On this slide we have Relief. Write each point on a new line, with the key term first, and explain it in your own words when we revise.</a:t>
             </a:r>
             <a:endParaRPr lang="en-US" dirty="0"/>
           </a:p>
@@ -4251,7 +4260,7 @@
           <a:p>
             <a:r>
               <a:rPr lang="en-US" dirty="0"/>
-              <a:t>For your homework: Compare the climate of Buea and Douala and explain two differences. We shall correct it at the beginning of our next lesson.</a:t>
+              <a:t>Copy the point on Aspect on the left, then draw the diagram on the right: the aspect of slopes. Give it a title and label it clearly.</a:t>
             </a:r>
             <a:endParaRPr lang="en-US" dirty="0"/>
           </a:p>
@@ -4339,7 +4348,7 @@
           <a:p>
             <a:r>
               <a:rPr lang="en-US" dirty="0"/>
-              <a:t>Our next lesson will be on Further Study 2: Weather Observation, Prediction, Modification and Mapping. Thank you for your attention, and see you next time.</a:t>
+              <a:t>We continue with Factors of Mountain Climates. On this slide we have Latitude. Write each point on a new line, with the key term first, and explain it in your own words when we revise.</a:t>
             </a:r>
             <a:endParaRPr lang="en-US" dirty="0"/>
           </a:p>
@@ -4427,7 +4436,7 @@
           <a:p>
             <a:r>
               <a:rPr lang="en-US" dirty="0"/>
-              <a:t>Here is a good answer. The temperature is higher in the sunny yard than under the tree. The tree shades the ground from the sun and cools the air by transpiration. Compare it with your own answer and correct your work in red.</a:t>
+              <a:t>Here is a good answer. Temperature decreases as altitude increases, by about 6.5 °C per 1,000 m. Compare it with your own answer and correct your work in red.</a:t>
             </a:r>
             <a:endParaRPr lang="en-US" dirty="0"/>
           </a:p>
@@ -4515,7 +4524,7 @@
           <a:p>
             <a:r>
               <a:rPr lang="en-US" dirty="0"/>
-              <a:t>Let us play the bilingual game. I say a word in English, and you give me the French word. Then we do the reverse.</a:t>
+              <a:t>Copy the point on Human use on the left, then draw the diagram on the right: tea on highlands. Give it a title and label it clearly.</a:t>
             </a:r>
             <a:endParaRPr lang="en-US" dirty="0"/>
           </a:p>
@@ -4603,7 +4612,7 @@
           <a:p>
             <a:r>
               <a:rPr lang="en-US" dirty="0"/>
-              <a:t>I record this information in the official logbook of the class after the lesson.</a:t>
+              <a:t>Now let us check what you have understood. Question 1: Give three characteristics of mountain climates. Answer in your exercise book.</a:t>
             </a:r>
             <a:endParaRPr lang="en-US" dirty="0"/>
           </a:p>
@@ -4691,7 +4700,7 @@
           <a:p>
             <a:r>
               <a:rPr lang="en-US" dirty="0"/>
-              <a:t>I complete the second page of the logbook: the matter taught, the evaluation, the homework and the attendance.</a:t>
+              <a:t>The expected answer is: lower temperatures, lower pressure, heavy windward rain, strong sunshine, large daily range (any three). If you got it right, well done.</a:t>
             </a:r>
             <a:endParaRPr lang="en-US" dirty="0"/>
           </a:p>
@@ -4779,7 +4788,7 @@
           <a:p>
             <a:r>
               <a:rPr lang="en-US" dirty="0"/>
-              <a:t>This slide is for me, the teacher: it gives the timing of the lesson and what to do if the projector is not available.</a:t>
+              <a:t>Now let us check what you have understood. Question 2: Explain why the sun feels stronger in the mountains although the air is cooler. Answer in your exercise book.</a:t>
             </a:r>
             <a:endParaRPr lang="en-US" dirty="0"/>
           </a:p>
@@ -4867,7 +4876,7 @@
           <a:p>
             <a:r>
               <a:rPr lang="en-US" dirty="0"/>
-              <a:t>These are the references and picture credits used to prepare this lesson.</a:t>
+              <a:t>The expected answer is: the thin, clean air filters less solar and ultraviolet radiation. If you got it right, well done.</a:t>
             </a:r>
             <a:endParaRPr lang="en-US" dirty="0"/>
           </a:p>
@@ -4891,6 +4900,446 @@
             <a:fld id="{F7021451-1387-4CA6-816F-3879F97B5CBC}" type="slidenum">
               <a:rPr lang="en-US"/>
               <a:t>54</a:t>
+            </a:fld>
+            <a:endParaRPr lang="en-US"/>
+          </a:p>
+        </p:txBody>
+      </p:sp>
+    </p:spTree>
+    <p:extLst>
+      <p:ext uri="{BB962C8B-B14F-4D97-AF65-F5344CB8AC3E}">
+        <p14:creationId xmlns:p14="http://schemas.microsoft.com/office/powerpoint/2010/main" val="1024086991"/>
+      </p:ext>
+    </p:extLst>
+  </p:cSld>
+  <p:clrMapOvr>
+    <a:masterClrMapping/>
+  </p:clrMapOvr>
+</p:notes>
+</file>
+
+<file path=ppt/notesSlides/notesSlide55.xml><?xml version="1.0" encoding="utf-8"?>
+<p:notes xmlns:a="http://schemas.openxmlformats.org/drawingml/2006/main" xmlns:r="http://schemas.openxmlformats.org/officeDocument/2006/relationships" xmlns:p="http://schemas.openxmlformats.org/presentationml/2006/main">
+  <p:cSld>
+    <p:spTree>
+      <p:nvGrpSpPr>
+        <p:cNvPr id="1" name=""/>
+        <p:cNvGrpSpPr/>
+        <p:nvPr/>
+      </p:nvGrpSpPr>
+      <p:grpSpPr>
+        <a:xfrm>
+          <a:off x="0" y="0"/>
+          <a:ext cx="0" cy="0"/>
+          <a:chOff x="0" y="0"/>
+          <a:chExt cx="0" cy="0"/>
+        </a:xfrm>
+      </p:grpSpPr>
+      <p:sp>
+        <p:nvSpPr>
+          <p:cNvPr id="2" name="Slide Image Placeholder 1"/>
+          <p:cNvSpPr>
+            <a:spLocks noGrp="1" noRot="1" noChangeAspect="1"/>
+          </p:cNvSpPr>
+          <p:nvPr>
+            <p:ph type="sldImg"/>
+          </p:nvPr>
+        </p:nvSpPr>
+        <p:spPr/>
+      </p:sp>
+      <p:sp>
+        <p:nvSpPr>
+          <p:cNvPr id="3" name="Notes Placeholder 2"/>
+          <p:cNvSpPr>
+            <a:spLocks noGrp="1"/>
+          </p:cNvSpPr>
+          <p:nvPr>
+            <p:ph type="body" idx="1"/>
+          </p:nvPr>
+        </p:nvSpPr>
+        <p:spPr/>
+        <p:txBody>
+          <a:bodyPr/>
+          <a:lstStyle/>
+          <a:p>
+            <a:r>
+              <a:rPr lang="en-US" dirty="0"/>
+              <a:t>Take your time to copy this part; we will continue together.</a:t>
+            </a:r>
+            <a:endParaRPr lang="en-US" dirty="0"/>
+          </a:p>
+        </p:txBody>
+      </p:sp>
+      <p:sp>
+        <p:nvSpPr>
+          <p:cNvPr id="4" name="Slide Number Placeholder 3"/>
+          <p:cNvSpPr>
+            <a:spLocks noGrp="1"/>
+          </p:cNvSpPr>
+          <p:nvPr>
+            <p:ph type="sldNum" sz="quarter" idx="10"/>
+          </p:nvPr>
+        </p:nvSpPr>
+        <p:spPr/>
+        <p:txBody>
+          <a:bodyPr/>
+          <a:lstStyle/>
+          <a:p>
+            <a:fld id="{F7021451-1387-4CA6-816F-3879F97B5CBC}" type="slidenum">
+              <a:rPr lang="en-US"/>
+              <a:t>55</a:t>
+            </a:fld>
+            <a:endParaRPr lang="en-US"/>
+          </a:p>
+        </p:txBody>
+      </p:sp>
+    </p:spTree>
+    <p:extLst>
+      <p:ext uri="{BB962C8B-B14F-4D97-AF65-F5344CB8AC3E}">
+        <p14:creationId xmlns:p14="http://schemas.microsoft.com/office/powerpoint/2010/main" val="1024086991"/>
+      </p:ext>
+    </p:extLst>
+  </p:cSld>
+  <p:clrMapOvr>
+    <a:masterClrMapping/>
+  </p:clrMapOvr>
+</p:notes>
+</file>
+
+<file path=ppt/notesSlides/notesSlide56.xml><?xml version="1.0" encoding="utf-8"?>
+<p:notes xmlns:a="http://schemas.openxmlformats.org/drawingml/2006/main" xmlns:r="http://schemas.openxmlformats.org/officeDocument/2006/relationships" xmlns:p="http://schemas.openxmlformats.org/presentationml/2006/main">
+  <p:cSld>
+    <p:spTree>
+      <p:nvGrpSpPr>
+        <p:cNvPr id="1" name=""/>
+        <p:cNvGrpSpPr/>
+        <p:nvPr/>
+      </p:nvGrpSpPr>
+      <p:grpSpPr>
+        <a:xfrm>
+          <a:off x="0" y="0"/>
+          <a:ext cx="0" cy="0"/>
+          <a:chOff x="0" y="0"/>
+          <a:chExt cx="0" cy="0"/>
+        </a:xfrm>
+      </p:grpSpPr>
+      <p:sp>
+        <p:nvSpPr>
+          <p:cNvPr id="2" name="Slide Image Placeholder 1"/>
+          <p:cNvSpPr>
+            <a:spLocks noGrp="1" noRot="1" noChangeAspect="1"/>
+          </p:cNvSpPr>
+          <p:nvPr>
+            <p:ph type="sldImg"/>
+          </p:nvPr>
+        </p:nvSpPr>
+        <p:spPr/>
+      </p:sp>
+      <p:sp>
+        <p:nvSpPr>
+          <p:cNvPr id="3" name="Notes Placeholder 2"/>
+          <p:cNvSpPr>
+            <a:spLocks noGrp="1"/>
+          </p:cNvSpPr>
+          <p:nvPr>
+            <p:ph type="body" idx="1"/>
+          </p:nvPr>
+        </p:nvSpPr>
+        <p:spPr/>
+        <p:txBody>
+          <a:bodyPr/>
+          <a:lstStyle/>
+          <a:p>
+            <a:r>
+              <a:rPr lang="en-US" dirty="0"/>
+              <a:t>For those who need more practice, fill in the blanks in your exercise book. The answers are: number 1, altitude; number 2, leeward; number 3, zonation.</a:t>
+            </a:r>
+            <a:endParaRPr lang="en-US" dirty="0"/>
+          </a:p>
+        </p:txBody>
+      </p:sp>
+      <p:sp>
+        <p:nvSpPr>
+          <p:cNvPr id="4" name="Slide Number Placeholder 3"/>
+          <p:cNvSpPr>
+            <a:spLocks noGrp="1"/>
+          </p:cNvSpPr>
+          <p:nvPr>
+            <p:ph type="sldNum" sz="quarter" idx="10"/>
+          </p:nvPr>
+        </p:nvSpPr>
+        <p:spPr/>
+        <p:txBody>
+          <a:bodyPr/>
+          <a:lstStyle/>
+          <a:p>
+            <a:fld id="{F7021451-1387-4CA6-816F-3879F97B5CBC}" type="slidenum">
+              <a:rPr lang="en-US"/>
+              <a:t>56</a:t>
+            </a:fld>
+            <a:endParaRPr lang="en-US"/>
+          </a:p>
+        </p:txBody>
+      </p:sp>
+    </p:spTree>
+    <p:extLst>
+      <p:ext uri="{BB962C8B-B14F-4D97-AF65-F5344CB8AC3E}">
+        <p14:creationId xmlns:p14="http://schemas.microsoft.com/office/powerpoint/2010/main" val="1024086991"/>
+      </p:ext>
+    </p:extLst>
+  </p:cSld>
+  <p:clrMapOvr>
+    <a:masterClrMapping/>
+  </p:clrMapOvr>
+</p:notes>
+</file>
+
+<file path=ppt/notesSlides/notesSlide57.xml><?xml version="1.0" encoding="utf-8"?>
+<p:notes xmlns:a="http://schemas.openxmlformats.org/drawingml/2006/main" xmlns:r="http://schemas.openxmlformats.org/officeDocument/2006/relationships" xmlns:p="http://schemas.openxmlformats.org/presentationml/2006/main">
+  <p:cSld>
+    <p:spTree>
+      <p:nvGrpSpPr>
+        <p:cNvPr id="1" name=""/>
+        <p:cNvGrpSpPr/>
+        <p:nvPr/>
+      </p:nvGrpSpPr>
+      <p:grpSpPr>
+        <a:xfrm>
+          <a:off x="0" y="0"/>
+          <a:ext cx="0" cy="0"/>
+          <a:chOff x="0" y="0"/>
+          <a:chExt cx="0" cy="0"/>
+        </a:xfrm>
+      </p:grpSpPr>
+      <p:sp>
+        <p:nvSpPr>
+          <p:cNvPr id="2" name="Slide Image Placeholder 1"/>
+          <p:cNvSpPr>
+            <a:spLocks noGrp="1" noRot="1" noChangeAspect="1"/>
+          </p:cNvSpPr>
+          <p:nvPr>
+            <p:ph type="sldImg"/>
+          </p:nvPr>
+        </p:nvSpPr>
+        <p:spPr/>
+      </p:sp>
+      <p:sp>
+        <p:nvSpPr>
+          <p:cNvPr id="3" name="Notes Placeholder 2"/>
+          <p:cNvSpPr>
+            <a:spLocks noGrp="1"/>
+          </p:cNvSpPr>
+          <p:nvPr>
+            <p:ph type="body" idx="1"/>
+          </p:nvPr>
+        </p:nvSpPr>
+        <p:spPr/>
+        <p:txBody>
+          <a:bodyPr/>
+          <a:lstStyle/>
+          <a:p>
+            <a:r>
+              <a:rPr lang="en-US" dirty="0"/>
+              <a:t>For your homework: Name one instrument of a weather station. We shall correct it at the beginning of our next lesson.</a:t>
+            </a:r>
+            <a:endParaRPr lang="en-US" dirty="0"/>
+          </a:p>
+        </p:txBody>
+      </p:sp>
+      <p:sp>
+        <p:nvSpPr>
+          <p:cNvPr id="4" name="Slide Number Placeholder 3"/>
+          <p:cNvSpPr>
+            <a:spLocks noGrp="1"/>
+          </p:cNvSpPr>
+          <p:nvPr>
+            <p:ph type="sldNum" sz="quarter" idx="10"/>
+          </p:nvPr>
+        </p:nvSpPr>
+        <p:spPr/>
+        <p:txBody>
+          <a:bodyPr/>
+          <a:lstStyle/>
+          <a:p>
+            <a:fld id="{F7021451-1387-4CA6-816F-3879F97B5CBC}" type="slidenum">
+              <a:rPr lang="en-US"/>
+              <a:t>57</a:t>
+            </a:fld>
+            <a:endParaRPr lang="en-US"/>
+          </a:p>
+        </p:txBody>
+      </p:sp>
+    </p:spTree>
+    <p:extLst>
+      <p:ext uri="{BB962C8B-B14F-4D97-AF65-F5344CB8AC3E}">
+        <p14:creationId xmlns:p14="http://schemas.microsoft.com/office/powerpoint/2010/main" val="1024086991"/>
+      </p:ext>
+    </p:extLst>
+  </p:cSld>
+  <p:clrMapOvr>
+    <a:masterClrMapping/>
+  </p:clrMapOvr>
+</p:notes>
+</file>
+
+<file path=ppt/notesSlides/notesSlide58.xml><?xml version="1.0" encoding="utf-8"?>
+<p:notes xmlns:a="http://schemas.openxmlformats.org/drawingml/2006/main" xmlns:r="http://schemas.openxmlformats.org/officeDocument/2006/relationships" xmlns:p="http://schemas.openxmlformats.org/presentationml/2006/main">
+  <p:cSld>
+    <p:spTree>
+      <p:nvGrpSpPr>
+        <p:cNvPr id="1" name=""/>
+        <p:cNvGrpSpPr/>
+        <p:nvPr/>
+      </p:nvGrpSpPr>
+      <p:grpSpPr>
+        <a:xfrm>
+          <a:off x="0" y="0"/>
+          <a:ext cx="0" cy="0"/>
+          <a:chOff x="0" y="0"/>
+          <a:chExt cx="0" cy="0"/>
+        </a:xfrm>
+      </p:grpSpPr>
+      <p:sp>
+        <p:nvSpPr>
+          <p:cNvPr id="2" name="Slide Image Placeholder 1"/>
+          <p:cNvSpPr>
+            <a:spLocks noGrp="1" noRot="1" noChangeAspect="1"/>
+          </p:cNvSpPr>
+          <p:nvPr>
+            <p:ph type="sldImg"/>
+          </p:nvPr>
+        </p:nvSpPr>
+        <p:spPr/>
+      </p:sp>
+      <p:sp>
+        <p:nvSpPr>
+          <p:cNvPr id="3" name="Notes Placeholder 2"/>
+          <p:cNvSpPr>
+            <a:spLocks noGrp="1"/>
+          </p:cNvSpPr>
+          <p:nvPr>
+            <p:ph type="body" idx="1"/>
+          </p:nvPr>
+        </p:nvSpPr>
+        <p:spPr/>
+        <p:txBody>
+          <a:bodyPr/>
+          <a:lstStyle/>
+          <a:p>
+            <a:r>
+              <a:rPr lang="en-US" dirty="0"/>
+              <a:t>Our next lesson will be on Further Study 2: Weather Observation, Prediction, Modification and Mapping. Thank you for your attention, and see you next time.</a:t>
+            </a:r>
+            <a:endParaRPr lang="en-US" dirty="0"/>
+          </a:p>
+        </p:txBody>
+      </p:sp>
+      <p:sp>
+        <p:nvSpPr>
+          <p:cNvPr id="4" name="Slide Number Placeholder 3"/>
+          <p:cNvSpPr>
+            <a:spLocks noGrp="1"/>
+          </p:cNvSpPr>
+          <p:nvPr>
+            <p:ph type="sldNum" sz="quarter" idx="10"/>
+          </p:nvPr>
+        </p:nvSpPr>
+        <p:spPr/>
+        <p:txBody>
+          <a:bodyPr/>
+          <a:lstStyle/>
+          <a:p>
+            <a:fld id="{F7021451-1387-4CA6-816F-3879F97B5CBC}" type="slidenum">
+              <a:rPr lang="en-US"/>
+              <a:t>58</a:t>
+            </a:fld>
+            <a:endParaRPr lang="en-US"/>
+          </a:p>
+        </p:txBody>
+      </p:sp>
+    </p:spTree>
+    <p:extLst>
+      <p:ext uri="{BB962C8B-B14F-4D97-AF65-F5344CB8AC3E}">
+        <p14:creationId xmlns:p14="http://schemas.microsoft.com/office/powerpoint/2010/main" val="1024086991"/>
+      </p:ext>
+    </p:extLst>
+  </p:cSld>
+  <p:clrMapOvr>
+    <a:masterClrMapping/>
+  </p:clrMapOvr>
+</p:notes>
+</file>
+
+<file path=ppt/notesSlides/notesSlide59.xml><?xml version="1.0" encoding="utf-8"?>
+<p:notes xmlns:a="http://schemas.openxmlformats.org/drawingml/2006/main" xmlns:r="http://schemas.openxmlformats.org/officeDocument/2006/relationships" xmlns:p="http://schemas.openxmlformats.org/presentationml/2006/main">
+  <p:cSld>
+    <p:spTree>
+      <p:nvGrpSpPr>
+        <p:cNvPr id="1" name=""/>
+        <p:cNvGrpSpPr/>
+        <p:nvPr/>
+      </p:nvGrpSpPr>
+      <p:grpSpPr>
+        <a:xfrm>
+          <a:off x="0" y="0"/>
+          <a:ext cx="0" cy="0"/>
+          <a:chOff x="0" y="0"/>
+          <a:chExt cx="0" cy="0"/>
+        </a:xfrm>
+      </p:grpSpPr>
+      <p:sp>
+        <p:nvSpPr>
+          <p:cNvPr id="2" name="Slide Image Placeholder 1"/>
+          <p:cNvSpPr>
+            <a:spLocks noGrp="1" noRot="1" noChangeAspect="1"/>
+          </p:cNvSpPr>
+          <p:nvPr>
+            <p:ph type="sldImg"/>
+          </p:nvPr>
+        </p:nvSpPr>
+        <p:spPr/>
+      </p:sp>
+      <p:sp>
+        <p:nvSpPr>
+          <p:cNvPr id="3" name="Notes Placeholder 2"/>
+          <p:cNvSpPr>
+            <a:spLocks noGrp="1"/>
+          </p:cNvSpPr>
+          <p:nvPr>
+            <p:ph type="body" idx="1"/>
+          </p:nvPr>
+        </p:nvSpPr>
+        <p:spPr/>
+        <p:txBody>
+          <a:bodyPr/>
+          <a:lstStyle/>
+          <a:p>
+            <a:r>
+              <a:rPr lang="en-US" dirty="0"/>
+              <a:t>Let us play the bilingual game. I say a word in English, and you give me the French word. Then we do the reverse.</a:t>
+            </a:r>
+            <a:endParaRPr lang="en-US" dirty="0"/>
+          </a:p>
+        </p:txBody>
+      </p:sp>
+      <p:sp>
+        <p:nvSpPr>
+          <p:cNvPr id="4" name="Slide Number Placeholder 3"/>
+          <p:cNvSpPr>
+            <a:spLocks noGrp="1"/>
+          </p:cNvSpPr>
+          <p:nvPr>
+            <p:ph type="sldNum" sz="quarter" idx="10"/>
+          </p:nvPr>
+        </p:nvSpPr>
+        <p:spPr/>
+        <p:txBody>
+          <a:bodyPr/>
+          <a:lstStyle/>
+          <a:p>
+            <a:fld id="{F7021451-1387-4CA6-816F-3879F97B5CBC}" type="slidenum">
+              <a:rPr lang="en-US"/>
+              <a:t>59</a:t>
             </a:fld>
             <a:endParaRPr lang="en-US"/>
           </a:p>
@@ -4997,6 +5446,358 @@
 </p:notes>
 </file>
 
+<file path=ppt/notesSlides/notesSlide60.xml><?xml version="1.0" encoding="utf-8"?>
+<p:notes xmlns:a="http://schemas.openxmlformats.org/drawingml/2006/main" xmlns:r="http://schemas.openxmlformats.org/officeDocument/2006/relationships" xmlns:p="http://schemas.openxmlformats.org/presentationml/2006/main">
+  <p:cSld>
+    <p:spTree>
+      <p:nvGrpSpPr>
+        <p:cNvPr id="1" name=""/>
+        <p:cNvGrpSpPr/>
+        <p:nvPr/>
+      </p:nvGrpSpPr>
+      <p:grpSpPr>
+        <a:xfrm>
+          <a:off x="0" y="0"/>
+          <a:ext cx="0" cy="0"/>
+          <a:chOff x="0" y="0"/>
+          <a:chExt cx="0" cy="0"/>
+        </a:xfrm>
+      </p:grpSpPr>
+      <p:sp>
+        <p:nvSpPr>
+          <p:cNvPr id="2" name="Slide Image Placeholder 1"/>
+          <p:cNvSpPr>
+            <a:spLocks noGrp="1" noRot="1" noChangeAspect="1"/>
+          </p:cNvSpPr>
+          <p:nvPr>
+            <p:ph type="sldImg"/>
+          </p:nvPr>
+        </p:nvSpPr>
+        <p:spPr/>
+      </p:sp>
+      <p:sp>
+        <p:nvSpPr>
+          <p:cNvPr id="3" name="Notes Placeholder 2"/>
+          <p:cNvSpPr>
+            <a:spLocks noGrp="1"/>
+          </p:cNvSpPr>
+          <p:nvPr>
+            <p:ph type="body" idx="1"/>
+          </p:nvPr>
+        </p:nvSpPr>
+        <p:spPr/>
+        <p:txBody>
+          <a:bodyPr/>
+          <a:lstStyle/>
+          <a:p>
+            <a:r>
+              <a:rPr lang="en-US" dirty="0"/>
+              <a:t>I record this information in the official logbook of the class after the lesson.</a:t>
+            </a:r>
+            <a:endParaRPr lang="en-US" dirty="0"/>
+          </a:p>
+        </p:txBody>
+      </p:sp>
+      <p:sp>
+        <p:nvSpPr>
+          <p:cNvPr id="4" name="Slide Number Placeholder 3"/>
+          <p:cNvSpPr>
+            <a:spLocks noGrp="1"/>
+          </p:cNvSpPr>
+          <p:nvPr>
+            <p:ph type="sldNum" sz="quarter" idx="10"/>
+          </p:nvPr>
+        </p:nvSpPr>
+        <p:spPr/>
+        <p:txBody>
+          <a:bodyPr/>
+          <a:lstStyle/>
+          <a:p>
+            <a:fld id="{F7021451-1387-4CA6-816F-3879F97B5CBC}" type="slidenum">
+              <a:rPr lang="en-US"/>
+              <a:t>60</a:t>
+            </a:fld>
+            <a:endParaRPr lang="en-US"/>
+          </a:p>
+        </p:txBody>
+      </p:sp>
+    </p:spTree>
+    <p:extLst>
+      <p:ext uri="{BB962C8B-B14F-4D97-AF65-F5344CB8AC3E}">
+        <p14:creationId xmlns:p14="http://schemas.microsoft.com/office/powerpoint/2010/main" val="1024086991"/>
+      </p:ext>
+    </p:extLst>
+  </p:cSld>
+  <p:clrMapOvr>
+    <a:masterClrMapping/>
+  </p:clrMapOvr>
+</p:notes>
+</file>
+
+<file path=ppt/notesSlides/notesSlide61.xml><?xml version="1.0" encoding="utf-8"?>
+<p:notes xmlns:a="http://schemas.openxmlformats.org/drawingml/2006/main" xmlns:r="http://schemas.openxmlformats.org/officeDocument/2006/relationships" xmlns:p="http://schemas.openxmlformats.org/presentationml/2006/main">
+  <p:cSld>
+    <p:spTree>
+      <p:nvGrpSpPr>
+        <p:cNvPr id="1" name=""/>
+        <p:cNvGrpSpPr/>
+        <p:nvPr/>
+      </p:nvGrpSpPr>
+      <p:grpSpPr>
+        <a:xfrm>
+          <a:off x="0" y="0"/>
+          <a:ext cx="0" cy="0"/>
+          <a:chOff x="0" y="0"/>
+          <a:chExt cx="0" cy="0"/>
+        </a:xfrm>
+      </p:grpSpPr>
+      <p:sp>
+        <p:nvSpPr>
+          <p:cNvPr id="2" name="Slide Image Placeholder 1"/>
+          <p:cNvSpPr>
+            <a:spLocks noGrp="1" noRot="1" noChangeAspect="1"/>
+          </p:cNvSpPr>
+          <p:nvPr>
+            <p:ph type="sldImg"/>
+          </p:nvPr>
+        </p:nvSpPr>
+        <p:spPr/>
+      </p:sp>
+      <p:sp>
+        <p:nvSpPr>
+          <p:cNvPr id="3" name="Notes Placeholder 2"/>
+          <p:cNvSpPr>
+            <a:spLocks noGrp="1"/>
+          </p:cNvSpPr>
+          <p:nvPr>
+            <p:ph type="body" idx="1"/>
+          </p:nvPr>
+        </p:nvSpPr>
+        <p:spPr/>
+        <p:txBody>
+          <a:bodyPr/>
+          <a:lstStyle/>
+          <a:p>
+            <a:r>
+              <a:rPr lang="en-US" dirty="0"/>
+              <a:t>I complete the second page of the logbook: the matter taught, the evaluation, the homework and the attendance.</a:t>
+            </a:r>
+            <a:endParaRPr lang="en-US" dirty="0"/>
+          </a:p>
+        </p:txBody>
+      </p:sp>
+      <p:sp>
+        <p:nvSpPr>
+          <p:cNvPr id="4" name="Slide Number Placeholder 3"/>
+          <p:cNvSpPr>
+            <a:spLocks noGrp="1"/>
+          </p:cNvSpPr>
+          <p:nvPr>
+            <p:ph type="sldNum" sz="quarter" idx="10"/>
+          </p:nvPr>
+        </p:nvSpPr>
+        <p:spPr/>
+        <p:txBody>
+          <a:bodyPr/>
+          <a:lstStyle/>
+          <a:p>
+            <a:fld id="{F7021451-1387-4CA6-816F-3879F97B5CBC}" type="slidenum">
+              <a:rPr lang="en-US"/>
+              <a:t>61</a:t>
+            </a:fld>
+            <a:endParaRPr lang="en-US"/>
+          </a:p>
+        </p:txBody>
+      </p:sp>
+    </p:spTree>
+    <p:extLst>
+      <p:ext uri="{BB962C8B-B14F-4D97-AF65-F5344CB8AC3E}">
+        <p14:creationId xmlns:p14="http://schemas.microsoft.com/office/powerpoint/2010/main" val="1024086991"/>
+      </p:ext>
+    </p:extLst>
+  </p:cSld>
+  <p:clrMapOvr>
+    <a:masterClrMapping/>
+  </p:clrMapOvr>
+</p:notes>
+</file>
+
+<file path=ppt/notesSlides/notesSlide62.xml><?xml version="1.0" encoding="utf-8"?>
+<p:notes xmlns:a="http://schemas.openxmlformats.org/drawingml/2006/main" xmlns:r="http://schemas.openxmlformats.org/officeDocument/2006/relationships" xmlns:p="http://schemas.openxmlformats.org/presentationml/2006/main">
+  <p:cSld>
+    <p:spTree>
+      <p:nvGrpSpPr>
+        <p:cNvPr id="1" name=""/>
+        <p:cNvGrpSpPr/>
+        <p:nvPr/>
+      </p:nvGrpSpPr>
+      <p:grpSpPr>
+        <a:xfrm>
+          <a:off x="0" y="0"/>
+          <a:ext cx="0" cy="0"/>
+          <a:chOff x="0" y="0"/>
+          <a:chExt cx="0" cy="0"/>
+        </a:xfrm>
+      </p:grpSpPr>
+      <p:sp>
+        <p:nvSpPr>
+          <p:cNvPr id="2" name="Slide Image Placeholder 1"/>
+          <p:cNvSpPr>
+            <a:spLocks noGrp="1" noRot="1" noChangeAspect="1"/>
+          </p:cNvSpPr>
+          <p:nvPr>
+            <p:ph type="sldImg"/>
+          </p:nvPr>
+        </p:nvSpPr>
+        <p:spPr/>
+      </p:sp>
+      <p:sp>
+        <p:nvSpPr>
+          <p:cNvPr id="3" name="Notes Placeholder 2"/>
+          <p:cNvSpPr>
+            <a:spLocks noGrp="1"/>
+          </p:cNvSpPr>
+          <p:nvPr>
+            <p:ph type="body" idx="1"/>
+          </p:nvPr>
+        </p:nvSpPr>
+        <p:spPr/>
+        <p:txBody>
+          <a:bodyPr/>
+          <a:lstStyle/>
+          <a:p>
+            <a:r>
+              <a:rPr lang="en-US" dirty="0"/>
+              <a:t>This slide is for me, the teacher: it gives the timing of the lesson and what to do if the projector is not available.</a:t>
+            </a:r>
+            <a:endParaRPr lang="en-US" dirty="0"/>
+          </a:p>
+        </p:txBody>
+      </p:sp>
+      <p:sp>
+        <p:nvSpPr>
+          <p:cNvPr id="4" name="Slide Number Placeholder 3"/>
+          <p:cNvSpPr>
+            <a:spLocks noGrp="1"/>
+          </p:cNvSpPr>
+          <p:nvPr>
+            <p:ph type="sldNum" sz="quarter" idx="10"/>
+          </p:nvPr>
+        </p:nvSpPr>
+        <p:spPr/>
+        <p:txBody>
+          <a:bodyPr/>
+          <a:lstStyle/>
+          <a:p>
+            <a:fld id="{F7021451-1387-4CA6-816F-3879F97B5CBC}" type="slidenum">
+              <a:rPr lang="en-US"/>
+              <a:t>62</a:t>
+            </a:fld>
+            <a:endParaRPr lang="en-US"/>
+          </a:p>
+        </p:txBody>
+      </p:sp>
+    </p:spTree>
+    <p:extLst>
+      <p:ext uri="{BB962C8B-B14F-4D97-AF65-F5344CB8AC3E}">
+        <p14:creationId xmlns:p14="http://schemas.microsoft.com/office/powerpoint/2010/main" val="1024086991"/>
+      </p:ext>
+    </p:extLst>
+  </p:cSld>
+  <p:clrMapOvr>
+    <a:masterClrMapping/>
+  </p:clrMapOvr>
+</p:notes>
+</file>
+
+<file path=ppt/notesSlides/notesSlide63.xml><?xml version="1.0" encoding="utf-8"?>
+<p:notes xmlns:a="http://schemas.openxmlformats.org/drawingml/2006/main" xmlns:r="http://schemas.openxmlformats.org/officeDocument/2006/relationships" xmlns:p="http://schemas.openxmlformats.org/presentationml/2006/main">
+  <p:cSld>
+    <p:spTree>
+      <p:nvGrpSpPr>
+        <p:cNvPr id="1" name=""/>
+        <p:cNvGrpSpPr/>
+        <p:nvPr/>
+      </p:nvGrpSpPr>
+      <p:grpSpPr>
+        <a:xfrm>
+          <a:off x="0" y="0"/>
+          <a:ext cx="0" cy="0"/>
+          <a:chOff x="0" y="0"/>
+          <a:chExt cx="0" cy="0"/>
+        </a:xfrm>
+      </p:grpSpPr>
+      <p:sp>
+        <p:nvSpPr>
+          <p:cNvPr id="2" name="Slide Image Placeholder 1"/>
+          <p:cNvSpPr>
+            <a:spLocks noGrp="1" noRot="1" noChangeAspect="1"/>
+          </p:cNvSpPr>
+          <p:nvPr>
+            <p:ph type="sldImg"/>
+          </p:nvPr>
+        </p:nvSpPr>
+        <p:spPr/>
+      </p:sp>
+      <p:sp>
+        <p:nvSpPr>
+          <p:cNvPr id="3" name="Notes Placeholder 2"/>
+          <p:cNvSpPr>
+            <a:spLocks noGrp="1"/>
+          </p:cNvSpPr>
+          <p:nvPr>
+            <p:ph type="body" idx="1"/>
+          </p:nvPr>
+        </p:nvSpPr>
+        <p:spPr/>
+        <p:txBody>
+          <a:bodyPr/>
+          <a:lstStyle/>
+          <a:p>
+            <a:r>
+              <a:rPr lang="en-US" dirty="0"/>
+              <a:t>These are the references and picture credits used to prepare this lesson.</a:t>
+            </a:r>
+            <a:endParaRPr lang="en-US" dirty="0"/>
+          </a:p>
+        </p:txBody>
+      </p:sp>
+      <p:sp>
+        <p:nvSpPr>
+          <p:cNvPr id="4" name="Slide Number Placeholder 3"/>
+          <p:cNvSpPr>
+            <a:spLocks noGrp="1"/>
+          </p:cNvSpPr>
+          <p:nvPr>
+            <p:ph type="sldNum" sz="quarter" idx="10"/>
+          </p:nvPr>
+        </p:nvSpPr>
+        <p:spPr/>
+        <p:txBody>
+          <a:bodyPr/>
+          <a:lstStyle/>
+          <a:p>
+            <a:fld id="{F7021451-1387-4CA6-816F-3879F97B5CBC}" type="slidenum">
+              <a:rPr lang="en-US"/>
+              <a:t>63</a:t>
+            </a:fld>
+            <a:endParaRPr lang="en-US"/>
+          </a:p>
+        </p:txBody>
+      </p:sp>
+    </p:spTree>
+    <p:extLst>
+      <p:ext uri="{BB962C8B-B14F-4D97-AF65-F5344CB8AC3E}">
+        <p14:creationId xmlns:p14="http://schemas.microsoft.com/office/powerpoint/2010/main" val="1024086991"/>
+      </p:ext>
+    </p:extLst>
+  </p:cSld>
+  <p:clrMapOvr>
+    <a:masterClrMapping/>
+  </p:clrMapOvr>
+</p:notes>
+</file>
+
 <file path=ppt/notesSlides/notesSlide7.xml><?xml version="1.0" encoding="utf-8"?>
 <p:notes xmlns:a="http://schemas.openxmlformats.org/drawingml/2006/main" xmlns:r="http://schemas.openxmlformats.org/officeDocument/2006/relationships" xmlns:p="http://schemas.openxmlformats.org/presentationml/2006/main">
   <p:cSld>
@@ -5131,7 +5932,7 @@
           <a:p>
             <a:r>
               <a:rPr lang="en-US" dirty="0"/>
-              <a:t>By the end of this lesson, you should be able to do three things. Number 1: describe the characteristics of mountain climates. Number 2: explain the factors of mountain climates. Number 3: give the importance of mountain climates for people.</a:t>
+              <a:t>By the end of this lesson, you should be able to do four things. Number 1: define a mountain climate. Number 2: describe its main characteristics. Number 3: explain the vertical zonation of climate and vegetation. Number 4: explain the factors of mountain climates.</a:t>
             </a:r>
             <a:endParaRPr lang="en-US" dirty="0"/>
           </a:p>
@@ -5219,7 +6020,7 @@
           <a:p>
             <a:r>
               <a:rPr lang="en-US" dirty="0"/>
-              <a:t>Let us first remember what you already know. Temperature falls 6.5 °C every 1,000 m. The windward side of a mountain is wet. Keep this in mind, because we shall build on it today.</a:t>
+              <a:t>Let us first remember what you already know. Temperature falls about 6.5 °C per 1,000 m. Moist air rising over mountains gives relief rain. Aspect is the direction a slope faces. Keep this in mind, because we shall build on it today.</a:t>
             </a:r>
             <a:endParaRPr lang="en-US" dirty="0"/>
           </a:p>
@@ -6599,7 +7400,7 @@
         <p:spPr>
           <a:xfrm>
             <a:off x="0" y="658368"/>
-            <a:ext cx="5120640" cy="5833872"/>
+            <a:ext cx="3840480" cy="5833872"/>
           </a:xfrm>
           <a:prstGeom prst="rect">
             <a:avLst/>
@@ -6614,8 +7415,8 @@
         </p:nvSpPr>
         <p:spPr>
           <a:xfrm>
-            <a:off x="5349240" y="1005840"/>
-            <a:ext cx="6522415" cy="731520"/>
+            <a:off x="4069080" y="1005840"/>
+            <a:ext cx="7802575" cy="731520"/>
           </a:xfrm>
           <a:prstGeom prst="rect">
             <a:avLst/>
@@ -6655,8 +7456,8 @@
         </p:nvSpPr>
         <p:spPr>
           <a:xfrm>
-            <a:off x="5349240" y="1783080"/>
-            <a:ext cx="6522415" cy="4663440"/>
+            <a:off x="4069080" y="1783080"/>
+            <a:ext cx="7802575" cy="4663440"/>
           </a:xfrm>
           <a:prstGeom prst="rect">
             <a:avLst/>
@@ -6683,7 +7484,27 @@
                 <a:ea typeface="Times New Roman" pitchFamily="34" charset="-122"/>
                 <a:cs typeface="Times New Roman" pitchFamily="34" charset="-120"/>
               </a:rPr>
-              <a:t>Tea grows well at Ndu and Djuttitsa in the highlands, but not in Douala. Farmers say the highlands are "cool like Europe" although they are close to the Equator.</a:t>
+              <a:t>Your family travels from Garoua to Mokolo in the Mandara Mountains.</a:t>
+            </a:r>
+            <a:endParaRPr lang="en-US" sz="4000" dirty="0"/>
+          </a:p>
+          <a:p>
+            <a:pPr algn="l" indent="0" marL="0">
+              <a:spcAft>
+                <a:spcPts val="800"/>
+              </a:spcAft>
+              <a:buNone/>
+            </a:pPr>
+            <a:r>
+              <a:rPr lang="en-US" sz="4000" dirty="0">
+                <a:solidFill>
+                  <a:srgbClr val="111111"/>
+                </a:solidFill>
+                <a:latin typeface="Times New Roman" pitchFamily="34" charset="0"/>
+                <a:ea typeface="Times New Roman" pitchFamily="34" charset="-122"/>
+                <a:cs typeface="Times New Roman" pitchFamily="34" charset="-120"/>
+              </a:rPr>
+              <a:t>In Garoua the air is hot and dusty, but as the car climbs the winding road, the air through the window becomes cooler and fresher.</a:t>
             </a:r>
             <a:endParaRPr lang="en-US" sz="4000" dirty="0"/>
           </a:p>
@@ -6818,7 +7639,7 @@
         <p:spPr>
           <a:xfrm>
             <a:off x="0" y="658368"/>
-            <a:ext cx="5120640" cy="5833872"/>
+            <a:ext cx="3840480" cy="5833872"/>
           </a:xfrm>
           <a:prstGeom prst="rect">
             <a:avLst/>
@@ -6833,8 +7654,8 @@
         </p:nvSpPr>
         <p:spPr>
           <a:xfrm>
-            <a:off x="5349240" y="1005840"/>
-            <a:ext cx="6522415" cy="731520"/>
+            <a:off x="4069080" y="1005840"/>
+            <a:ext cx="7802575" cy="731520"/>
           </a:xfrm>
           <a:prstGeom prst="rect">
             <a:avLst/>
@@ -6860,7 +7681,7 @@
                 <a:ea typeface="Times New Roman" pitchFamily="34" charset="-122"/>
                 <a:cs typeface="Times New Roman" pitchFamily="34" charset="-120"/>
               </a:rPr>
-              <a:t>Situation: Question 1</a:t>
+              <a:t>Situation in Real Life (continued)</a:t>
             </a:r>
             <a:endParaRPr lang="en-US" sz="3600" dirty="0"/>
           </a:p>
@@ -6874,8 +7695,8 @@
         </p:nvSpPr>
         <p:spPr>
           <a:xfrm>
-            <a:off x="5349240" y="1783080"/>
-            <a:ext cx="6522415" cy="4663440"/>
+            <a:off x="4069080" y="1783080"/>
+            <a:ext cx="7802575" cy="4663440"/>
           </a:xfrm>
           <a:prstGeom prst="rect">
             <a:avLst/>
@@ -6902,7 +7723,27 @@
                 <a:ea typeface="Times New Roman" pitchFamily="34" charset="-122"/>
                 <a:cs typeface="Times New Roman" pitchFamily="34" charset="-120"/>
               </a:rPr>
-              <a:t>What is the problem in the situation?</a:t>
+              <a:t>Yet the sun on your arm feels sharper than in Garoua.</a:t>
+            </a:r>
+            <a:endParaRPr lang="en-US" sz="4000" dirty="0"/>
+          </a:p>
+          <a:p>
+            <a:pPr algn="l" indent="0" marL="0">
+              <a:spcAft>
+                <a:spcPts val="800"/>
+              </a:spcAft>
+              <a:buNone/>
+            </a:pPr>
+            <a:r>
+              <a:rPr lang="en-US" sz="4000" dirty="0">
+                <a:solidFill>
+                  <a:srgbClr val="111111"/>
+                </a:solidFill>
+                <a:latin typeface="Times New Roman" pitchFamily="34" charset="0"/>
+                <a:ea typeface="Times New Roman" pitchFamily="34" charset="-122"/>
+                <a:cs typeface="Times New Roman" pitchFamily="34" charset="-120"/>
+              </a:rPr>
+              <a:t>You ask: "Why is the air cooler in the mountains while the sun burns more, and how does the climate change so much over such a short distance?"</a:t>
             </a:r>
             <a:endParaRPr lang="en-US" sz="4000" dirty="0"/>
           </a:p>
@@ -7079,7 +7920,7 @@
                 <a:ea typeface="Times New Roman" pitchFamily="34" charset="-122"/>
                 <a:cs typeface="Times New Roman" pitchFamily="34" charset="-120"/>
               </a:rPr>
-              <a:t>Answer</a:t>
+              <a:t>Situation: Question 1</a:t>
             </a:r>
             <a:endParaRPr lang="en-US" sz="3600" dirty="0"/>
           </a:p>
@@ -7121,7 +7962,7 @@
                 <a:ea typeface="Times New Roman" pitchFamily="34" charset="-122"/>
                 <a:cs typeface="Times New Roman" pitchFamily="34" charset="-120"/>
               </a:rPr>
-              <a:t>Highlands near the Equator have a cool climate.</a:t>
+              <a:t>What is the problem in the situation?</a:t>
             </a:r>
             <a:endParaRPr lang="en-US" sz="4000" dirty="0"/>
           </a:p>
@@ -7298,7 +8139,7 @@
                 <a:ea typeface="Times New Roman" pitchFamily="34" charset="-122"/>
                 <a:cs typeface="Times New Roman" pitchFamily="34" charset="-120"/>
               </a:rPr>
-              <a:t>Situation: Question 2</a:t>
+              <a:t>Answer</a:t>
             </a:r>
             <a:endParaRPr lang="en-US" sz="3600" dirty="0"/>
           </a:p>
@@ -7340,7 +8181,7 @@
                 <a:ea typeface="Times New Roman" pitchFamily="34" charset="-122"/>
                 <a:cs typeface="Times New Roman" pitchFamily="34" charset="-120"/>
               </a:rPr>
-              <a:t>Why are the highlands cool?</a:t>
+              <a:t>The learner does not know the characteristics and factors of mountain climates.</a:t>
             </a:r>
             <a:endParaRPr lang="en-US" sz="4000" dirty="0"/>
           </a:p>
@@ -7517,7 +8358,7 @@
                 <a:ea typeface="Times New Roman" pitchFamily="34" charset="-122"/>
                 <a:cs typeface="Times New Roman" pitchFamily="34" charset="-120"/>
               </a:rPr>
-              <a:t>Answer</a:t>
+              <a:t>Situation: Question 2</a:t>
             </a:r>
             <a:endParaRPr lang="en-US" sz="3600" dirty="0"/>
           </a:p>
@@ -7559,7 +8400,7 @@
                 <a:ea typeface="Times New Roman" pitchFamily="34" charset="-122"/>
                 <a:cs typeface="Times New Roman" pitchFamily="34" charset="-120"/>
               </a:rPr>
-              <a:t>Because of their high altitude.</a:t>
+              <a:t>Why is the air cooler in the mountains?</a:t>
             </a:r>
             <a:endParaRPr lang="en-US" sz="4000" dirty="0"/>
           </a:p>
@@ -7736,7 +8577,7 @@
                 <a:ea typeface="Times New Roman" pitchFamily="34" charset="-122"/>
                 <a:cs typeface="Times New Roman" pitchFamily="34" charset="-120"/>
               </a:rPr>
-              <a:t>Situation: Question 3</a:t>
+              <a:t>Answer</a:t>
             </a:r>
             <a:endParaRPr lang="en-US" sz="3600" dirty="0"/>
           </a:p>
@@ -7778,7 +8619,7 @@
                 <a:ea typeface="Times New Roman" pitchFamily="34" charset="-122"/>
                 <a:cs typeface="Times New Roman" pitchFamily="34" charset="-120"/>
               </a:rPr>
-              <a:t>Why does tea grow well there?</a:t>
+              <a:t>Because of altitude: temperature falls as height increases.</a:t>
             </a:r>
             <a:endParaRPr lang="en-US" sz="4000" dirty="0"/>
           </a:p>
@@ -7955,7 +8796,7 @@
                 <a:ea typeface="Times New Roman" pitchFamily="34" charset="-122"/>
                 <a:cs typeface="Times New Roman" pitchFamily="34" charset="-120"/>
               </a:rPr>
-              <a:t>Possible Answer</a:t>
+              <a:t>Situation: Question 3</a:t>
             </a:r>
             <a:endParaRPr lang="en-US" sz="3600" dirty="0"/>
           </a:p>
@@ -7997,7 +8838,7 @@
                 <a:ea typeface="Times New Roman" pitchFamily="34" charset="-122"/>
                 <a:cs typeface="Times New Roman" pitchFamily="34" charset="-120"/>
               </a:rPr>
-              <a:t>It needs a cool, wet climate.</a:t>
+              <a:t>Why does the sun burn more?</a:t>
             </a:r>
             <a:endParaRPr lang="en-US" sz="4000" dirty="0"/>
           </a:p>
@@ -8109,7 +8950,7 @@
                 <a:ea typeface="Calibri" pitchFamily="34" charset="-122"/>
                 <a:cs typeface="Calibri" pitchFamily="34" charset="-120"/>
               </a:rPr>
-              <a:t>ACTION TO TAKE</a:t>
+              <a:t>REAL-LIFE SITUATION</a:t>
             </a:r>
             <a:endParaRPr lang="en-US" sz="1400" dirty="0"/>
           </a:p>
@@ -8174,7 +9015,7 @@
                 <a:ea typeface="Times New Roman" pitchFamily="34" charset="-122"/>
                 <a:cs typeface="Times New Roman" pitchFamily="34" charset="-120"/>
               </a:rPr>
-              <a:t>Action to Take</a:t>
+              <a:t>Possible Answer</a:t>
             </a:r>
             <a:endParaRPr lang="en-US" sz="3600" dirty="0"/>
           </a:p>
@@ -8216,7 +9057,7 @@
                 <a:ea typeface="Times New Roman" pitchFamily="34" charset="-122"/>
                 <a:cs typeface="Times New Roman" pitchFamily="34" charset="-120"/>
               </a:rPr>
-              <a:t>Use mountain climates for farming and tourism while protecting mountain environments.</a:t>
+              <a:t>The thin, clean air filters less of the Sun's ultraviolet rays.</a:t>
             </a:r>
             <a:endParaRPr lang="en-US" sz="4000" dirty="0"/>
           </a:p>
@@ -8328,7 +9169,7 @@
                 <a:ea typeface="Calibri" pitchFamily="34" charset="-122"/>
                 <a:cs typeface="Calibri" pitchFamily="34" charset="-120"/>
               </a:rPr>
-              <a:t>JUSTIFICATION</a:t>
+              <a:t>ACTION TO TAKE</a:t>
             </a:r>
             <a:endParaRPr lang="en-US" sz="1400" dirty="0"/>
           </a:p>
@@ -8393,7 +9234,7 @@
                 <a:ea typeface="Times New Roman" pitchFamily="34" charset="-122"/>
                 <a:cs typeface="Times New Roman" pitchFamily="34" charset="-120"/>
               </a:rPr>
-              <a:t>Justification of the Lesson</a:t>
+              <a:t>Action to Take</a:t>
             </a:r>
             <a:endParaRPr lang="en-US" sz="3600" dirty="0"/>
           </a:p>
@@ -8435,7 +9276,7 @@
                 <a:ea typeface="Times New Roman" pitchFamily="34" charset="-122"/>
                 <a:cs typeface="Times New Roman" pitchFamily="34" charset="-120"/>
               </a:rPr>
-              <a:t>This lesson helps us to understand the climate of the Cameroon highlands and its use for farming and tourism.</a:t>
+              <a:t>Protect your skin from strong sun in the mountains and carry warm clothes for cold nights.</a:t>
             </a:r>
             <a:endParaRPr lang="en-US" sz="4000" dirty="0"/>
           </a:p>
@@ -8547,54 +9388,15 @@
                 <a:ea typeface="Calibri" pitchFamily="34" charset="-122"/>
                 <a:cs typeface="Calibri" pitchFamily="34" charset="-120"/>
               </a:rPr>
-              <a:t>1. CHARACTERISTICS: TEMPERATURE</a:t>
+              <a:t>JUSTIFICATION</a:t>
             </a:r>
             <a:endParaRPr lang="en-US" sz="1400" dirty="0"/>
-          </a:p>
-        </p:txBody>
-      </p:sp>
-      <p:sp>
-        <p:nvSpPr>
-          <p:cNvPr id="3" name="Text 1"/>
-          <p:cNvSpPr/>
-          <p:nvPr/>
-        </p:nvSpPr>
-        <p:spPr>
-          <a:xfrm>
-            <a:off x="457200" y="1005840"/>
-            <a:ext cx="11277295" cy="731520"/>
-          </a:xfrm>
-          <a:prstGeom prst="rect">
-            <a:avLst/>
-          </a:prstGeom>
-          <a:noFill/>
-          <a:ln/>
-        </p:spPr>
-        <p:txBody>
-          <a:bodyPr wrap="square" lIns="0" tIns="0" rIns="0" bIns="0" rtlCol="0" anchor="ctr"/>
-          <a:lstStyle/>
-          <a:p>
-            <a:pPr algn="ctr" indent="0" marL="0">
-              <a:buNone/>
-            </a:pPr>
-            <a:r>
-              <a:rPr lang="en-US" sz="3600" b="1" dirty="0">
-                <a:solidFill>
-                  <a:srgbClr val="990011"/>
-                </a:solidFill>
-                <a:latin typeface="Times New Roman" pitchFamily="34" charset="0"/>
-                <a:ea typeface="Times New Roman" pitchFamily="34" charset="-122"/>
-                <a:cs typeface="Times New Roman" pitchFamily="34" charset="-120"/>
-              </a:rPr>
-              <a:t>Activity 1</a:t>
-            </a:r>
-            <a:endParaRPr lang="en-US" sz="3600" dirty="0"/>
           </a:p>
         </p:txBody>
       </p:sp>
       <p:pic>
         <p:nvPicPr>
-          <p:cNvPr id="4" name="Image 0" descr="/home/claude/f4/img/v2/lapse_rate_big.png">    </p:cNvPr>
+          <p:cNvPr id="3" name="Image 0" descr="/home/claude/f4/img/minesec_sheet.png">    </p:cNvPr>
           <p:cNvPicPr>
             <a:picLocks noChangeAspect="1"/>
           </p:cNvPicPr>
@@ -8608,8 +9410,8 @@
         </p:blipFill>
         <p:spPr>
           <a:xfrm>
-            <a:off x="629930" y="1783080"/>
-            <a:ext cx="10931835" cy="4270248"/>
+            <a:off x="0" y="658368"/>
+            <a:ext cx="5120640" cy="5833872"/>
           </a:xfrm>
           <a:prstGeom prst="rect">
             <a:avLst/>
@@ -8618,14 +9420,14 @@
       </p:pic>
       <p:sp>
         <p:nvSpPr>
-          <p:cNvPr id="5" name="Text 2"/>
+          <p:cNvPr id="4" name="Text 1"/>
           <p:cNvSpPr/>
           <p:nvPr/>
         </p:nvSpPr>
         <p:spPr>
           <a:xfrm>
-            <a:off x="457200" y="6089904"/>
-            <a:ext cx="11277295" cy="347472"/>
+            <a:off x="5349240" y="1005840"/>
+            <a:ext cx="6522415" cy="731520"/>
           </a:xfrm>
           <a:prstGeom prst="rect">
             <a:avLst/>
@@ -8634,24 +9436,68 @@
           <a:ln/>
         </p:spPr>
         <p:txBody>
-          <a:bodyPr wrap="square" lIns="0" tIns="0" rIns="0" bIns="0" rtlCol="0" anchor="ctr"/>
+          <a:bodyPr wrap="square" lIns="0" tIns="0" rIns="0" bIns="0" rtlCol="0" anchor="ctr">
+            <a:normAutofit/>
+          </a:bodyPr>
           <a:lstStyle/>
           <a:p>
             <a:pPr algn="ctr" indent="0" marL="0">
               <a:buNone/>
             </a:pPr>
             <a:r>
-              <a:rPr lang="en-US" sz="1800" i="1" dirty="0">
-                <a:solidFill>
-                  <a:srgbClr val="555555"/>
+              <a:rPr lang="en-US" sz="3600" b="1" dirty="0">
+                <a:solidFill>
+                  <a:srgbClr val="990011"/>
                 </a:solidFill>
                 <a:latin typeface="Times New Roman" pitchFamily="34" charset="0"/>
                 <a:ea typeface="Times New Roman" pitchFamily="34" charset="-122"/>
                 <a:cs typeface="Times New Roman" pitchFamily="34" charset="-120"/>
               </a:rPr>
-              <a:t>Temperature on Mount Cameroon.</a:t>
-            </a:r>
-            <a:endParaRPr lang="en-US" sz="1800" dirty="0"/>
+              <a:t>Justification of the Lesson</a:t>
+            </a:r>
+            <a:endParaRPr lang="en-US" sz="3600" dirty="0"/>
+          </a:p>
+        </p:txBody>
+      </p:sp>
+      <p:sp>
+        <p:nvSpPr>
+          <p:cNvPr id="5" name="Text 2"/>
+          <p:cNvSpPr/>
+          <p:nvPr/>
+        </p:nvSpPr>
+        <p:spPr>
+          <a:xfrm>
+            <a:off x="5349240" y="1783080"/>
+            <a:ext cx="6522415" cy="4663440"/>
+          </a:xfrm>
+          <a:prstGeom prst="rect">
+            <a:avLst/>
+          </a:prstGeom>
+          <a:noFill/>
+          <a:ln/>
+        </p:spPr>
+        <p:txBody>
+          <a:bodyPr wrap="square" lIns="0" tIns="0" rIns="0" bIns="0" rtlCol="0" anchor="t"/>
+          <a:lstStyle/>
+          <a:p>
+            <a:pPr algn="l" indent="0" marL="0">
+              <a:spcAft>
+                <a:spcPts val="800"/>
+              </a:spcAft>
+              <a:buNone/>
+            </a:pPr>
+            <a:r>
+              <a:rPr lang="en-US" sz="4000" dirty="0">
+                <a:solidFill>
+                  <a:srgbClr val="111111"/>
+                </a:solidFill>
+                <a:latin typeface="Times New Roman" pitchFamily="34" charset="0"/>
+                <a:ea typeface="Times New Roman" pitchFamily="34" charset="-122"/>
+                <a:cs typeface="Times New Roman" pitchFamily="34" charset="-120"/>
+              </a:rPr>
+              <a:t>This lesson explains the cool, wet highland climates of Cameroon that support dense populations, tea, coffee and tourism.</a:t>
+            </a:r>
+            <a:endParaRPr lang="en-US" sz="4000" dirty="0"/>
           </a:p>
         </p:txBody>
       </p:sp>
@@ -9356,15 +10202,54 @@
                 <a:ea typeface="Calibri" pitchFamily="34" charset="-122"/>
                 <a:cs typeface="Calibri" pitchFamily="34" charset="-120"/>
               </a:rPr>
-              <a:t>1. CHARACTERISTICS: TEMPERATURE</a:t>
+              <a:t>1. CHARACTERISTICS</a:t>
             </a:r>
             <a:endParaRPr lang="en-US" sz="1400" dirty="0"/>
+          </a:p>
+        </p:txBody>
+      </p:sp>
+      <p:sp>
+        <p:nvSpPr>
+          <p:cNvPr id="3" name="Text 1"/>
+          <p:cNvSpPr/>
+          <p:nvPr/>
+        </p:nvSpPr>
+        <p:spPr>
+          <a:xfrm>
+            <a:off x="457200" y="1005840"/>
+            <a:ext cx="11277295" cy="731520"/>
+          </a:xfrm>
+          <a:prstGeom prst="rect">
+            <a:avLst/>
+          </a:prstGeom>
+          <a:noFill/>
+          <a:ln/>
+        </p:spPr>
+        <p:txBody>
+          <a:bodyPr wrap="square" lIns="0" tIns="0" rIns="0" bIns="0" rtlCol="0" anchor="ctr"/>
+          <a:lstStyle/>
+          <a:p>
+            <a:pPr algn="ctr" indent="0" marL="0">
+              <a:buNone/>
+            </a:pPr>
+            <a:r>
+              <a:rPr lang="en-US" sz="3600" b="1" dirty="0">
+                <a:solidFill>
+                  <a:srgbClr val="990011"/>
+                </a:solidFill>
+                <a:latin typeface="Times New Roman" pitchFamily="34" charset="0"/>
+                <a:ea typeface="Times New Roman" pitchFamily="34" charset="-122"/>
+                <a:cs typeface="Times New Roman" pitchFamily="34" charset="-120"/>
+              </a:rPr>
+              <a:t>Activity 1</a:t>
+            </a:r>
+            <a:endParaRPr lang="en-US" sz="3600" dirty="0"/>
           </a:p>
         </p:txBody>
       </p:sp>
       <p:pic>
         <p:nvPicPr>
-          <p:cNvPr id="3" name="Image 0" descr="/home/claude/f4/img/minesec_sheet.png">    </p:cNvPr>
+          <p:cNvPr id="4" name="Image 0" descr="/home/claude/f4/img/v2/lapse_rate_big.png">    </p:cNvPr>
           <p:cNvPicPr>
             <a:picLocks noChangeAspect="1"/>
           </p:cNvPicPr>
@@ -9378,8 +10263,8 @@
         </p:blipFill>
         <p:spPr>
           <a:xfrm>
-            <a:off x="0" y="658368"/>
-            <a:ext cx="5120640" cy="5833872"/>
+            <a:off x="629930" y="1783080"/>
+            <a:ext cx="10931835" cy="4270248"/>
           </a:xfrm>
           <a:prstGeom prst="rect">
             <a:avLst/>
@@ -9388,14 +10273,14 @@
       </p:pic>
       <p:sp>
         <p:nvSpPr>
-          <p:cNvPr id="4" name="Text 1"/>
+          <p:cNvPr id="5" name="Text 2"/>
           <p:cNvSpPr/>
           <p:nvPr/>
         </p:nvSpPr>
         <p:spPr>
           <a:xfrm>
-            <a:off x="5349240" y="1005840"/>
-            <a:ext cx="6522415" cy="731520"/>
+            <a:off x="457200" y="6089904"/>
+            <a:ext cx="11277295" cy="347472"/>
           </a:xfrm>
           <a:prstGeom prst="rect">
             <a:avLst/>
@@ -9404,68 +10289,24 @@
           <a:ln/>
         </p:spPr>
         <p:txBody>
-          <a:bodyPr wrap="square" lIns="0" tIns="0" rIns="0" bIns="0" rtlCol="0" anchor="ctr">
-            <a:normAutofit/>
-          </a:bodyPr>
+          <a:bodyPr wrap="square" lIns="0" tIns="0" rIns="0" bIns="0" rtlCol="0" anchor="ctr"/>
           <a:lstStyle/>
           <a:p>
             <a:pPr algn="ctr" indent="0" marL="0">
               <a:buNone/>
             </a:pPr>
             <a:r>
-              <a:rPr lang="en-US" sz="3600" b="1" dirty="0">
-                <a:solidFill>
-                  <a:srgbClr val="990011"/>
+              <a:rPr lang="en-US" sz="1800" i="1" dirty="0">
+                <a:solidFill>
+                  <a:srgbClr val="555555"/>
                 </a:solidFill>
                 <a:latin typeface="Times New Roman" pitchFamily="34" charset="0"/>
                 <a:ea typeface="Times New Roman" pitchFamily="34" charset="-122"/>
                 <a:cs typeface="Times New Roman" pitchFamily="34" charset="-120"/>
               </a:rPr>
-              <a:t>Activity 1: Question</a:t>
-            </a:r>
-            <a:endParaRPr lang="en-US" sz="3600" dirty="0"/>
-          </a:p>
-        </p:txBody>
-      </p:sp>
-      <p:sp>
-        <p:nvSpPr>
-          <p:cNvPr id="5" name="Text 2"/>
-          <p:cNvSpPr/>
-          <p:nvPr/>
-        </p:nvSpPr>
-        <p:spPr>
-          <a:xfrm>
-            <a:off x="5349240" y="1783080"/>
-            <a:ext cx="6522415" cy="4663440"/>
-          </a:xfrm>
-          <a:prstGeom prst="rect">
-            <a:avLst/>
-          </a:prstGeom>
-          <a:noFill/>
-          <a:ln/>
-        </p:spPr>
-        <p:txBody>
-          <a:bodyPr wrap="square" lIns="0" tIns="0" rIns="0" bIns="0" rtlCol="0" anchor="t"/>
-          <a:lstStyle/>
-          <a:p>
-            <a:pPr algn="l" indent="0" marL="0">
-              <a:spcAft>
-                <a:spcPts val="800"/>
-              </a:spcAft>
-              <a:buNone/>
-            </a:pPr>
-            <a:r>
-              <a:rPr lang="en-US" sz="4000" dirty="0">
-                <a:solidFill>
-                  <a:srgbClr val="111111"/>
-                </a:solidFill>
-                <a:latin typeface="Times New Roman" pitchFamily="34" charset="0"/>
-                <a:ea typeface="Times New Roman" pitchFamily="34" charset="-122"/>
-                <a:cs typeface="Times New Roman" pitchFamily="34" charset="-120"/>
-              </a:rPr>
-              <a:t>Describe the temperature near the top of Mount Cameroon.</a:t>
-            </a:r>
-            <a:endParaRPr lang="en-US" sz="4000" dirty="0"/>
+              <a:t>Temperature and height.</a:t>
+            </a:r>
+            <a:endParaRPr lang="en-US" sz="1800" dirty="0"/>
           </a:p>
         </p:txBody>
       </p:sp>
@@ -9575,7 +10416,7 @@
                 <a:ea typeface="Calibri" pitchFamily="34" charset="-122"/>
                 <a:cs typeface="Calibri" pitchFamily="34" charset="-120"/>
               </a:rPr>
-              <a:t>1. CHARACTERISTICS: TEMPERATURE</a:t>
+              <a:t>1. CHARACTERISTICS</a:t>
             </a:r>
             <a:endParaRPr lang="en-US" sz="1400" dirty="0"/>
           </a:p>
@@ -9640,7 +10481,7 @@
                 <a:ea typeface="Times New Roman" pitchFamily="34" charset="-122"/>
                 <a:cs typeface="Times New Roman" pitchFamily="34" charset="-120"/>
               </a:rPr>
-              <a:t>Activity 1: Answer</a:t>
+              <a:t>Activity 1: Question</a:t>
             </a:r>
             <a:endParaRPr lang="en-US" sz="3600" dirty="0"/>
           </a:p>
@@ -9682,7 +10523,7 @@
                 <a:ea typeface="Times New Roman" pitchFamily="34" charset="-122"/>
                 <a:cs typeface="Times New Roman" pitchFamily="34" charset="-120"/>
               </a:rPr>
-              <a:t>Near 0 °C, much colder than the coast.</a:t>
+              <a:t>If Garoua (about 200 m) is at 34 °C, what is the temperature at Mokolo (about 800 m)?</a:t>
             </a:r>
             <a:endParaRPr lang="en-US" sz="4000" dirty="0"/>
           </a:p>
@@ -9794,54 +10635,15 @@
                 <a:ea typeface="Calibri" pitchFamily="34" charset="-122"/>
                 <a:cs typeface="Calibri" pitchFamily="34" charset="-120"/>
               </a:rPr>
-              <a:t>1. CHARACTERISTICS: SNOW</a:t>
+              <a:t>1. CHARACTERISTICS</a:t>
             </a:r>
             <a:endParaRPr lang="en-US" sz="1400" dirty="0"/>
-          </a:p>
-        </p:txBody>
-      </p:sp>
-      <p:sp>
-        <p:nvSpPr>
-          <p:cNvPr id="3" name="Text 1"/>
-          <p:cNvSpPr/>
-          <p:nvPr/>
-        </p:nvSpPr>
-        <p:spPr>
-          <a:xfrm>
-            <a:off x="457200" y="1005840"/>
-            <a:ext cx="11277295" cy="731520"/>
-          </a:xfrm>
-          <a:prstGeom prst="rect">
-            <a:avLst/>
-          </a:prstGeom>
-          <a:noFill/>
-          <a:ln/>
-        </p:spPr>
-        <p:txBody>
-          <a:bodyPr wrap="square" lIns="0" tIns="0" rIns="0" bIns="0" rtlCol="0" anchor="ctr"/>
-          <a:lstStyle/>
-          <a:p>
-            <a:pPr algn="ctr" indent="0" marL="0">
-              <a:buNone/>
-            </a:pPr>
-            <a:r>
-              <a:rPr lang="en-US" sz="3600" b="1" dirty="0">
-                <a:solidFill>
-                  <a:srgbClr val="990011"/>
-                </a:solidFill>
-                <a:latin typeface="Times New Roman" pitchFamily="34" charset="0"/>
-                <a:ea typeface="Times New Roman" pitchFamily="34" charset="-122"/>
-                <a:cs typeface="Times New Roman" pitchFamily="34" charset="-120"/>
-              </a:rPr>
-              <a:t>Activity 2</a:t>
-            </a:r>
-            <a:endParaRPr lang="en-US" sz="3600" dirty="0"/>
           </a:p>
         </p:txBody>
       </p:sp>
       <p:pic>
         <p:nvPicPr>
-          <p:cNvPr id="4" name="Image 0" descr="/home/claude/f4/img/v2/f2t_kilimanjaro.jpg">    </p:cNvPr>
+          <p:cNvPr id="3" name="Image 0" descr="/home/claude/f4/img/minesec_sheet.png">    </p:cNvPr>
           <p:cNvPicPr>
             <a:picLocks noChangeAspect="1"/>
           </p:cNvPicPr>
@@ -9855,8 +10657,8 @@
         </p:blipFill>
         <p:spPr>
           <a:xfrm>
-            <a:off x="2246610" y="1783080"/>
-            <a:ext cx="7698475" cy="4270248"/>
+            <a:off x="0" y="658368"/>
+            <a:ext cx="5120640" cy="5833872"/>
           </a:xfrm>
           <a:prstGeom prst="rect">
             <a:avLst/>
@@ -9865,14 +10667,14 @@
       </p:pic>
       <p:sp>
         <p:nvSpPr>
-          <p:cNvPr id="5" name="Text 2"/>
+          <p:cNvPr id="4" name="Text 1"/>
           <p:cNvSpPr/>
           <p:nvPr/>
         </p:nvSpPr>
         <p:spPr>
           <a:xfrm>
-            <a:off x="457200" y="6089904"/>
-            <a:ext cx="11277295" cy="347472"/>
+            <a:off x="5349240" y="1005840"/>
+            <a:ext cx="6522415" cy="731520"/>
           </a:xfrm>
           <a:prstGeom prst="rect">
             <a:avLst/>
@@ -9881,24 +10683,68 @@
           <a:ln/>
         </p:spPr>
         <p:txBody>
-          <a:bodyPr wrap="square" lIns="0" tIns="0" rIns="0" bIns="0" rtlCol="0" anchor="ctr"/>
+          <a:bodyPr wrap="square" lIns="0" tIns="0" rIns="0" bIns="0" rtlCol="0" anchor="ctr">
+            <a:normAutofit/>
+          </a:bodyPr>
           <a:lstStyle/>
           <a:p>
             <a:pPr algn="ctr" indent="0" marL="0">
               <a:buNone/>
             </a:pPr>
             <a:r>
-              <a:rPr lang="en-US" sz="1800" i="1" dirty="0">
-                <a:solidFill>
-                  <a:srgbClr val="555555"/>
+              <a:rPr lang="en-US" sz="3600" b="1" dirty="0">
+                <a:solidFill>
+                  <a:srgbClr val="990011"/>
                 </a:solidFill>
                 <a:latin typeface="Times New Roman" pitchFamily="34" charset="0"/>
                 <a:ea typeface="Times New Roman" pitchFamily="34" charset="-122"/>
                 <a:cs typeface="Times New Roman" pitchFamily="34" charset="-120"/>
               </a:rPr>
-              <a:t>Snow on Kilimanjaro, near the Equator.</a:t>
-            </a:r>
-            <a:endParaRPr lang="en-US" sz="1800" dirty="0"/>
+              <a:t>Activity 1: Answer</a:t>
+            </a:r>
+            <a:endParaRPr lang="en-US" sz="3600" dirty="0"/>
+          </a:p>
+        </p:txBody>
+      </p:sp>
+      <p:sp>
+        <p:nvSpPr>
+          <p:cNvPr id="5" name="Text 2"/>
+          <p:cNvSpPr/>
+          <p:nvPr/>
+        </p:nvSpPr>
+        <p:spPr>
+          <a:xfrm>
+            <a:off x="5349240" y="1783080"/>
+            <a:ext cx="6522415" cy="4663440"/>
+          </a:xfrm>
+          <a:prstGeom prst="rect">
+            <a:avLst/>
+          </a:prstGeom>
+          <a:noFill/>
+          <a:ln/>
+        </p:spPr>
+        <p:txBody>
+          <a:bodyPr wrap="square" lIns="0" tIns="0" rIns="0" bIns="0" rtlCol="0" anchor="t"/>
+          <a:lstStyle/>
+          <a:p>
+            <a:pPr algn="l" indent="0" marL="0">
+              <a:spcAft>
+                <a:spcPts val="800"/>
+              </a:spcAft>
+              <a:buNone/>
+            </a:pPr>
+            <a:r>
+              <a:rPr lang="en-US" sz="4000" dirty="0">
+                <a:solidFill>
+                  <a:srgbClr val="111111"/>
+                </a:solidFill>
+                <a:latin typeface="Times New Roman" pitchFamily="34" charset="0"/>
+                <a:ea typeface="Times New Roman" pitchFamily="34" charset="-122"/>
+                <a:cs typeface="Times New Roman" pitchFamily="34" charset="-120"/>
+              </a:rPr>
+              <a:t>34 − (0.6 × 6.5) ≈ 30 °C.</a:t>
+            </a:r>
+            <a:endParaRPr lang="en-US" sz="4000" dirty="0"/>
           </a:p>
         </p:txBody>
       </p:sp>
@@ -10008,15 +10854,54 @@
                 <a:ea typeface="Calibri" pitchFamily="34" charset="-122"/>
                 <a:cs typeface="Calibri" pitchFamily="34" charset="-120"/>
               </a:rPr>
-              <a:t>1. CHARACTERISTICS: SNOW</a:t>
+              <a:t>1. CHARACTERISTICS</a:t>
             </a:r>
             <a:endParaRPr lang="en-US" sz="1400" dirty="0"/>
+          </a:p>
+        </p:txBody>
+      </p:sp>
+      <p:sp>
+        <p:nvSpPr>
+          <p:cNvPr id="3" name="Text 1"/>
+          <p:cNvSpPr/>
+          <p:nvPr/>
+        </p:nvSpPr>
+        <p:spPr>
+          <a:xfrm>
+            <a:off x="457200" y="1005840"/>
+            <a:ext cx="11277295" cy="731520"/>
+          </a:xfrm>
+          <a:prstGeom prst="rect">
+            <a:avLst/>
+          </a:prstGeom>
+          <a:noFill/>
+          <a:ln/>
+        </p:spPr>
+        <p:txBody>
+          <a:bodyPr wrap="square" lIns="0" tIns="0" rIns="0" bIns="0" rtlCol="0" anchor="ctr"/>
+          <a:lstStyle/>
+          <a:p>
+            <a:pPr algn="ctr" indent="0" marL="0">
+              <a:buNone/>
+            </a:pPr>
+            <a:r>
+              <a:rPr lang="en-US" sz="3600" b="1" dirty="0">
+                <a:solidFill>
+                  <a:srgbClr val="990011"/>
+                </a:solidFill>
+                <a:latin typeface="Times New Roman" pitchFamily="34" charset="0"/>
+                <a:ea typeface="Times New Roman" pitchFamily="34" charset="-122"/>
+                <a:cs typeface="Times New Roman" pitchFamily="34" charset="-120"/>
+              </a:rPr>
+              <a:t>Activity 2</a:t>
+            </a:r>
+            <a:endParaRPr lang="en-US" sz="3600" dirty="0"/>
           </a:p>
         </p:txBody>
       </p:sp>
       <p:pic>
         <p:nvPicPr>
-          <p:cNvPr id="3" name="Image 0" descr="/home/claude/f4/img/minesec_sheet.png">    </p:cNvPr>
+          <p:cNvPr id="4" name="Image 0" descr="/home/claude/f4/img/v2/rainfall_types_big.png">    </p:cNvPr>
           <p:cNvPicPr>
             <a:picLocks noChangeAspect="1"/>
           </p:cNvPicPr>
@@ -10030,8 +10915,8 @@
         </p:blipFill>
         <p:spPr>
           <a:xfrm>
-            <a:off x="0" y="658368"/>
-            <a:ext cx="5120640" cy="5833872"/>
+            <a:off x="629930" y="1783080"/>
+            <a:ext cx="10931835" cy="4270248"/>
           </a:xfrm>
           <a:prstGeom prst="rect">
             <a:avLst/>
@@ -10040,14 +10925,14 @@
       </p:pic>
       <p:sp>
         <p:nvSpPr>
-          <p:cNvPr id="4" name="Text 1"/>
+          <p:cNvPr id="5" name="Text 2"/>
           <p:cNvSpPr/>
           <p:nvPr/>
         </p:nvSpPr>
         <p:spPr>
           <a:xfrm>
-            <a:off x="5349240" y="1005840"/>
-            <a:ext cx="6522415" cy="731520"/>
+            <a:off x="457200" y="6089904"/>
+            <a:ext cx="11277295" cy="347472"/>
           </a:xfrm>
           <a:prstGeom prst="rect">
             <a:avLst/>
@@ -10056,68 +10941,24 @@
           <a:ln/>
         </p:spPr>
         <p:txBody>
-          <a:bodyPr wrap="square" lIns="0" tIns="0" rIns="0" bIns="0" rtlCol="0" anchor="ctr">
-            <a:normAutofit/>
-          </a:bodyPr>
+          <a:bodyPr wrap="square" lIns="0" tIns="0" rIns="0" bIns="0" rtlCol="0" anchor="ctr"/>
           <a:lstStyle/>
           <a:p>
             <a:pPr algn="ctr" indent="0" marL="0">
               <a:buNone/>
             </a:pPr>
             <a:r>
-              <a:rPr lang="en-US" sz="3600" b="1" dirty="0">
-                <a:solidFill>
-                  <a:srgbClr val="990011"/>
+              <a:rPr lang="en-US" sz="1800" i="1" dirty="0">
+                <a:solidFill>
+                  <a:srgbClr val="555555"/>
                 </a:solidFill>
                 <a:latin typeface="Times New Roman" pitchFamily="34" charset="0"/>
                 <a:ea typeface="Times New Roman" pitchFamily="34" charset="-122"/>
                 <a:cs typeface="Times New Roman" pitchFamily="34" charset="-120"/>
               </a:rPr>
-              <a:t>Activity 2: Question</a:t>
-            </a:r>
-            <a:endParaRPr lang="en-US" sz="3600" dirty="0"/>
-          </a:p>
-        </p:txBody>
-      </p:sp>
-      <p:sp>
-        <p:nvSpPr>
-          <p:cNvPr id="5" name="Text 2"/>
-          <p:cNvSpPr/>
-          <p:nvPr/>
-        </p:nvSpPr>
-        <p:spPr>
-          <a:xfrm>
-            <a:off x="5349240" y="1783080"/>
-            <a:ext cx="6522415" cy="4663440"/>
-          </a:xfrm>
-          <a:prstGeom prst="rect">
-            <a:avLst/>
-          </a:prstGeom>
-          <a:noFill/>
-          <a:ln/>
-        </p:spPr>
-        <p:txBody>
-          <a:bodyPr wrap="square" lIns="0" tIns="0" rIns="0" bIns="0" rtlCol="0" anchor="t"/>
-          <a:lstStyle/>
-          <a:p>
-            <a:pPr algn="l" indent="0" marL="0">
-              <a:spcAft>
-                <a:spcPts val="800"/>
-              </a:spcAft>
-              <a:buNone/>
-            </a:pPr>
-            <a:r>
-              <a:rPr lang="en-US" sz="4000" dirty="0">
-                <a:solidFill>
-                  <a:srgbClr val="111111"/>
-                </a:solidFill>
-                <a:latin typeface="Times New Roman" pitchFamily="34" charset="0"/>
-                <a:ea typeface="Times New Roman" pitchFamily="34" charset="-122"/>
-                <a:cs typeface="Times New Roman" pitchFamily="34" charset="-120"/>
-              </a:rPr>
-              <a:t>Why is there snow on this equatorial mountain?</a:t>
-            </a:r>
-            <a:endParaRPr lang="en-US" sz="4000" dirty="0"/>
+              <a:t>Relief rain and rain shadow.</a:t>
+            </a:r>
+            <a:endParaRPr lang="en-US" sz="1800" dirty="0"/>
           </a:p>
         </p:txBody>
       </p:sp>
@@ -10227,7 +11068,7 @@
                 <a:ea typeface="Calibri" pitchFamily="34" charset="-122"/>
                 <a:cs typeface="Calibri" pitchFamily="34" charset="-120"/>
               </a:rPr>
-              <a:t>1. CHARACTERISTICS: SNOW</a:t>
+              <a:t>1. CHARACTERISTICS</a:t>
             </a:r>
             <a:endParaRPr lang="en-US" sz="1400" dirty="0"/>
           </a:p>
@@ -10292,7 +11133,7 @@
                 <a:ea typeface="Times New Roman" pitchFamily="34" charset="-122"/>
                 <a:cs typeface="Times New Roman" pitchFamily="34" charset="-120"/>
               </a:rPr>
-              <a:t>Activity 2: Answer</a:t>
+              <a:t>Activity 2: Question</a:t>
             </a:r>
             <a:endParaRPr lang="en-US" sz="3600" dirty="0"/>
           </a:p>
@@ -10334,7 +11175,7 @@
                 <a:ea typeface="Times New Roman" pitchFamily="34" charset="-122"/>
                 <a:cs typeface="Times New Roman" pitchFamily="34" charset="-120"/>
               </a:rPr>
-              <a:t>The top is very high (5,895 m), so it is below freezing.</a:t>
+              <a:t>Which side of a mountain receives more rain?</a:t>
             </a:r>
             <a:endParaRPr lang="en-US" sz="4000" dirty="0"/>
           </a:p>
@@ -10446,54 +11287,15 @@
                 <a:ea typeface="Calibri" pitchFamily="34" charset="-122"/>
                 <a:cs typeface="Calibri" pitchFamily="34" charset="-120"/>
               </a:rPr>
-              <a:t>2. FACTORS: RELIEF RAIN</a:t>
+              <a:t>1. CHARACTERISTICS</a:t>
             </a:r>
             <a:endParaRPr lang="en-US" sz="1400" dirty="0"/>
-          </a:p>
-        </p:txBody>
-      </p:sp>
-      <p:sp>
-        <p:nvSpPr>
-          <p:cNvPr id="3" name="Text 1"/>
-          <p:cNvSpPr/>
-          <p:nvPr/>
-        </p:nvSpPr>
-        <p:spPr>
-          <a:xfrm>
-            <a:off x="457200" y="1005840"/>
-            <a:ext cx="11277295" cy="731520"/>
-          </a:xfrm>
-          <a:prstGeom prst="rect">
-            <a:avLst/>
-          </a:prstGeom>
-          <a:noFill/>
-          <a:ln/>
-        </p:spPr>
-        <p:txBody>
-          <a:bodyPr wrap="square" lIns="0" tIns="0" rIns="0" bIns="0" rtlCol="0" anchor="ctr"/>
-          <a:lstStyle/>
-          <a:p>
-            <a:pPr algn="ctr" indent="0" marL="0">
-              <a:buNone/>
-            </a:pPr>
-            <a:r>
-              <a:rPr lang="en-US" sz="3600" b="1" dirty="0">
-                <a:solidFill>
-                  <a:srgbClr val="990011"/>
-                </a:solidFill>
-                <a:latin typeface="Times New Roman" pitchFamily="34" charset="0"/>
-                <a:ea typeface="Times New Roman" pitchFamily="34" charset="-122"/>
-                <a:cs typeface="Times New Roman" pitchFamily="34" charset="-120"/>
-              </a:rPr>
-              <a:t>Activity 3</a:t>
-            </a:r>
-            <a:endParaRPr lang="en-US" sz="3600" dirty="0"/>
           </a:p>
         </p:txBody>
       </p:sp>
       <p:pic>
         <p:nvPicPr>
-          <p:cNvPr id="4" name="Image 0" descr="/home/claude/f4/img/v2/rainfall_types_big.png">    </p:cNvPr>
+          <p:cNvPr id="3" name="Image 0" descr="/home/claude/f4/img/minesec_sheet.png">    </p:cNvPr>
           <p:cNvPicPr>
             <a:picLocks noChangeAspect="1"/>
           </p:cNvPicPr>
@@ -10507,8 +11309,8 @@
         </p:blipFill>
         <p:spPr>
           <a:xfrm>
-            <a:off x="629930" y="1783080"/>
-            <a:ext cx="10931835" cy="4270248"/>
+            <a:off x="0" y="658368"/>
+            <a:ext cx="5120640" cy="5833872"/>
           </a:xfrm>
           <a:prstGeom prst="rect">
             <a:avLst/>
@@ -10517,14 +11319,14 @@
       </p:pic>
       <p:sp>
         <p:nvSpPr>
-          <p:cNvPr id="5" name="Text 2"/>
+          <p:cNvPr id="4" name="Text 1"/>
           <p:cNvSpPr/>
           <p:nvPr/>
         </p:nvSpPr>
         <p:spPr>
           <a:xfrm>
-            <a:off x="457200" y="6089904"/>
-            <a:ext cx="11277295" cy="347472"/>
+            <a:off x="5349240" y="1005840"/>
+            <a:ext cx="6522415" cy="731520"/>
           </a:xfrm>
           <a:prstGeom prst="rect">
             <a:avLst/>
@@ -10533,24 +11335,68 @@
           <a:ln/>
         </p:spPr>
         <p:txBody>
-          <a:bodyPr wrap="square" lIns="0" tIns="0" rIns="0" bIns="0" rtlCol="0" anchor="ctr"/>
+          <a:bodyPr wrap="square" lIns="0" tIns="0" rIns="0" bIns="0" rtlCol="0" anchor="ctr">
+            <a:normAutofit/>
+          </a:bodyPr>
           <a:lstStyle/>
           <a:p>
             <a:pPr algn="ctr" indent="0" marL="0">
               <a:buNone/>
             </a:pPr>
             <a:r>
-              <a:rPr lang="en-US" sz="1800" i="1" dirty="0">
-                <a:solidFill>
-                  <a:srgbClr val="555555"/>
+              <a:rPr lang="en-US" sz="3600" b="1" dirty="0">
+                <a:solidFill>
+                  <a:srgbClr val="990011"/>
                 </a:solidFill>
                 <a:latin typeface="Times New Roman" pitchFamily="34" charset="0"/>
                 <a:ea typeface="Times New Roman" pitchFamily="34" charset="-122"/>
                 <a:cs typeface="Times New Roman" pitchFamily="34" charset="-120"/>
               </a:rPr>
-              <a:t>Relief rain on a mountain.</a:t>
-            </a:r>
-            <a:endParaRPr lang="en-US" sz="1800" dirty="0"/>
+              <a:t>Activity 2: Answer</a:t>
+            </a:r>
+            <a:endParaRPr lang="en-US" sz="3600" dirty="0"/>
+          </a:p>
+        </p:txBody>
+      </p:sp>
+      <p:sp>
+        <p:nvSpPr>
+          <p:cNvPr id="5" name="Text 2"/>
+          <p:cNvSpPr/>
+          <p:nvPr/>
+        </p:nvSpPr>
+        <p:spPr>
+          <a:xfrm>
+            <a:off x="5349240" y="1783080"/>
+            <a:ext cx="6522415" cy="4663440"/>
+          </a:xfrm>
+          <a:prstGeom prst="rect">
+            <a:avLst/>
+          </a:prstGeom>
+          <a:noFill/>
+          <a:ln/>
+        </p:spPr>
+        <p:txBody>
+          <a:bodyPr wrap="square" lIns="0" tIns="0" rIns="0" bIns="0" rtlCol="0" anchor="t"/>
+          <a:lstStyle/>
+          <a:p>
+            <a:pPr algn="l" indent="0" marL="0">
+              <a:spcAft>
+                <a:spcPts val="800"/>
+              </a:spcAft>
+              <a:buNone/>
+            </a:pPr>
+            <a:r>
+              <a:rPr lang="en-US" sz="4000" dirty="0">
+                <a:solidFill>
+                  <a:srgbClr val="111111"/>
+                </a:solidFill>
+                <a:latin typeface="Times New Roman" pitchFamily="34" charset="0"/>
+                <a:ea typeface="Times New Roman" pitchFamily="34" charset="-122"/>
+                <a:cs typeface="Times New Roman" pitchFamily="34" charset="-120"/>
+              </a:rPr>
+              <a:t>The windward side.</a:t>
+            </a:r>
+            <a:endParaRPr lang="en-US" sz="4000" dirty="0"/>
           </a:p>
         </p:txBody>
       </p:sp>
@@ -10660,15 +11506,54 @@
                 <a:ea typeface="Calibri" pitchFamily="34" charset="-122"/>
                 <a:cs typeface="Calibri" pitchFamily="34" charset="-120"/>
               </a:rPr>
-              <a:t>2. FACTORS: RELIEF RAIN</a:t>
+              <a:t>1. CHARACTERISTICS</a:t>
             </a:r>
             <a:endParaRPr lang="en-US" sz="1400" dirty="0"/>
+          </a:p>
+        </p:txBody>
+      </p:sp>
+      <p:sp>
+        <p:nvSpPr>
+          <p:cNvPr id="3" name="Text 1"/>
+          <p:cNvSpPr/>
+          <p:nvPr/>
+        </p:nvSpPr>
+        <p:spPr>
+          <a:xfrm>
+            <a:off x="457200" y="1005840"/>
+            <a:ext cx="11277295" cy="731520"/>
+          </a:xfrm>
+          <a:prstGeom prst="rect">
+            <a:avLst/>
+          </a:prstGeom>
+          <a:noFill/>
+          <a:ln/>
+        </p:spPr>
+        <p:txBody>
+          <a:bodyPr wrap="square" lIns="0" tIns="0" rIns="0" bIns="0" rtlCol="0" anchor="ctr"/>
+          <a:lstStyle/>
+          <a:p>
+            <a:pPr algn="ctr" indent="0" marL="0">
+              <a:buNone/>
+            </a:pPr>
+            <a:r>
+              <a:rPr lang="en-US" sz="3600" b="1" dirty="0">
+                <a:solidFill>
+                  <a:srgbClr val="990011"/>
+                </a:solidFill>
+                <a:latin typeface="Times New Roman" pitchFamily="34" charset="0"/>
+                <a:ea typeface="Times New Roman" pitchFamily="34" charset="-122"/>
+                <a:cs typeface="Times New Roman" pitchFamily="34" charset="-120"/>
+              </a:rPr>
+              <a:t>Activity 3</a:t>
+            </a:r>
+            <a:endParaRPr lang="en-US" sz="3600" dirty="0"/>
           </a:p>
         </p:txBody>
       </p:sp>
       <p:pic>
         <p:nvPicPr>
-          <p:cNvPr id="3" name="Image 0" descr="/home/claude/f4/img/minesec_sheet.png">    </p:cNvPr>
+          <p:cNvPr id="4" name="Image 0" descr="/home/claude/f4/img/v2/clim2_mountain.png">    </p:cNvPr>
           <p:cNvPicPr>
             <a:picLocks noChangeAspect="1"/>
           </p:cNvPicPr>
@@ -10682,8 +11567,8 @@
         </p:blipFill>
         <p:spPr>
           <a:xfrm>
-            <a:off x="0" y="658368"/>
-            <a:ext cx="5120640" cy="5833872"/>
+            <a:off x="629930" y="1783080"/>
+            <a:ext cx="10931835" cy="4270248"/>
           </a:xfrm>
           <a:prstGeom prst="rect">
             <a:avLst/>
@@ -10692,14 +11577,14 @@
       </p:pic>
       <p:sp>
         <p:nvSpPr>
-          <p:cNvPr id="4" name="Text 1"/>
+          <p:cNvPr id="5" name="Text 2"/>
           <p:cNvSpPr/>
           <p:nvPr/>
         </p:nvSpPr>
         <p:spPr>
           <a:xfrm>
-            <a:off x="5349240" y="1005840"/>
-            <a:ext cx="6522415" cy="731520"/>
+            <a:off x="457200" y="6089904"/>
+            <a:ext cx="11277295" cy="347472"/>
           </a:xfrm>
           <a:prstGeom prst="rect">
             <a:avLst/>
@@ -10708,68 +11593,24 @@
           <a:ln/>
         </p:spPr>
         <p:txBody>
-          <a:bodyPr wrap="square" lIns="0" tIns="0" rIns="0" bIns="0" rtlCol="0" anchor="ctr">
-            <a:normAutofit/>
-          </a:bodyPr>
+          <a:bodyPr wrap="square" lIns="0" tIns="0" rIns="0" bIns="0" rtlCol="0" anchor="ctr"/>
           <a:lstStyle/>
           <a:p>
             <a:pPr algn="ctr" indent="0" marL="0">
               <a:buNone/>
             </a:pPr>
             <a:r>
-              <a:rPr lang="en-US" sz="3600" b="1" dirty="0">
-                <a:solidFill>
-                  <a:srgbClr val="990011"/>
+              <a:rPr lang="en-US" sz="1800" i="1" dirty="0">
+                <a:solidFill>
+                  <a:srgbClr val="555555"/>
                 </a:solidFill>
                 <a:latin typeface="Times New Roman" pitchFamily="34" charset="0"/>
                 <a:ea typeface="Times New Roman" pitchFamily="34" charset="-122"/>
                 <a:cs typeface="Times New Roman" pitchFamily="34" charset="-120"/>
               </a:rPr>
-              <a:t>Activity 3: Question</a:t>
-            </a:r>
-            <a:endParaRPr lang="en-US" sz="3600" dirty="0"/>
-          </a:p>
-        </p:txBody>
-      </p:sp>
-      <p:sp>
-        <p:nvSpPr>
-          <p:cNvPr id="5" name="Text 2"/>
-          <p:cNvSpPr/>
-          <p:nvPr/>
-        </p:nvSpPr>
-        <p:spPr>
-          <a:xfrm>
-            <a:off x="5349240" y="1783080"/>
-            <a:ext cx="6522415" cy="4663440"/>
-          </a:xfrm>
-          <a:prstGeom prst="rect">
-            <a:avLst/>
-          </a:prstGeom>
-          <a:noFill/>
-          <a:ln/>
-        </p:spPr>
-        <p:txBody>
-          <a:bodyPr wrap="square" lIns="0" tIns="0" rIns="0" bIns="0" rtlCol="0" anchor="t"/>
-          <a:lstStyle/>
-          <a:p>
-            <a:pPr algn="l" indent="0" marL="0">
-              <a:spcAft>
-                <a:spcPts val="800"/>
-              </a:spcAft>
-              <a:buNone/>
-            </a:pPr>
-            <a:r>
-              <a:rPr lang="en-US" sz="4000" dirty="0">
-                <a:solidFill>
-                  <a:srgbClr val="111111"/>
-                </a:solidFill>
-                <a:latin typeface="Times New Roman" pitchFamily="34" charset="0"/>
-                <a:ea typeface="Times New Roman" pitchFamily="34" charset="-122"/>
-                <a:cs typeface="Times New Roman" pitchFamily="34" charset="-120"/>
-              </a:rPr>
-              <a:t>Why are the windward slopes of mountains wet?</a:t>
-            </a:r>
-            <a:endParaRPr lang="en-US" sz="4000" dirty="0"/>
+              <a:t>Characteristics of mountain climates.</a:t>
+            </a:r>
+            <a:endParaRPr lang="en-US" sz="1800" dirty="0"/>
           </a:p>
         </p:txBody>
       </p:sp>
@@ -10879,7 +11720,7 @@
                 <a:ea typeface="Calibri" pitchFamily="34" charset="-122"/>
                 <a:cs typeface="Calibri" pitchFamily="34" charset="-120"/>
               </a:rPr>
-              <a:t>2. FACTORS: RELIEF RAIN</a:t>
+              <a:t>1. CHARACTERISTICS</a:t>
             </a:r>
             <a:endParaRPr lang="en-US" sz="1400" dirty="0"/>
           </a:p>
@@ -10944,7 +11785,7 @@
                 <a:ea typeface="Times New Roman" pitchFamily="34" charset="-122"/>
                 <a:cs typeface="Times New Roman" pitchFamily="34" charset="-120"/>
               </a:rPr>
-              <a:t>Activity 3: Answer</a:t>
+              <a:t>Activity 3: Question</a:t>
             </a:r>
             <a:endParaRPr lang="en-US" sz="3600" dirty="0"/>
           </a:p>
@@ -10986,7 +11827,7 @@
                 <a:ea typeface="Times New Roman" pitchFamily="34" charset="-122"/>
                 <a:cs typeface="Times New Roman" pitchFamily="34" charset="-120"/>
               </a:rPr>
-              <a:t>Wet air is forced to rise, cools and forms rain.</a:t>
+              <a:t>Why are mountain nights very cold?</a:t>
             </a:r>
             <a:endParaRPr lang="en-US" sz="4000" dirty="0"/>
           </a:p>
@@ -11098,54 +11939,15 @@
                 <a:ea typeface="Calibri" pitchFamily="34" charset="-122"/>
                 <a:cs typeface="Calibri" pitchFamily="34" charset="-120"/>
               </a:rPr>
-              <a:t>2. FACTORS: ASPECT</a:t>
+              <a:t>1. CHARACTERISTICS</a:t>
             </a:r>
             <a:endParaRPr lang="en-US" sz="1400" dirty="0"/>
-          </a:p>
-        </p:txBody>
-      </p:sp>
-      <p:sp>
-        <p:nvSpPr>
-          <p:cNvPr id="3" name="Text 1"/>
-          <p:cNvSpPr/>
-          <p:nvPr/>
-        </p:nvSpPr>
-        <p:spPr>
-          <a:xfrm>
-            <a:off x="457200" y="1005840"/>
-            <a:ext cx="11277295" cy="731520"/>
-          </a:xfrm>
-          <a:prstGeom prst="rect">
-            <a:avLst/>
-          </a:prstGeom>
-          <a:noFill/>
-          <a:ln/>
-        </p:spPr>
-        <p:txBody>
-          <a:bodyPr wrap="square" lIns="0" tIns="0" rIns="0" bIns="0" rtlCol="0" anchor="ctr"/>
-          <a:lstStyle/>
-          <a:p>
-            <a:pPr algn="ctr" indent="0" marL="0">
-              <a:buNone/>
-            </a:pPr>
-            <a:r>
-              <a:rPr lang="en-US" sz="3600" b="1" dirty="0">
-                <a:solidFill>
-                  <a:srgbClr val="990011"/>
-                </a:solidFill>
-                <a:latin typeface="Times New Roman" pitchFamily="34" charset="0"/>
-                <a:ea typeface="Times New Roman" pitchFamily="34" charset="-122"/>
-                <a:cs typeface="Times New Roman" pitchFamily="34" charset="-120"/>
-              </a:rPr>
-              <a:t>Activity 4</a:t>
-            </a:r>
-            <a:endParaRPr lang="en-US" sz="3600" dirty="0"/>
           </a:p>
         </p:txBody>
       </p:sp>
       <p:pic>
         <p:nvPicPr>
-          <p:cNvPr id="4" name="Image 0" descr="/home/claude/f4/img/v2/aspect_big.png">    </p:cNvPr>
+          <p:cNvPr id="3" name="Image 0" descr="/home/claude/f4/img/minesec_sheet.png">    </p:cNvPr>
           <p:cNvPicPr>
             <a:picLocks noChangeAspect="1"/>
           </p:cNvPicPr>
@@ -11159,8 +11961,8 @@
         </p:blipFill>
         <p:spPr>
           <a:xfrm>
-            <a:off x="629930" y="1783080"/>
-            <a:ext cx="10931835" cy="4270248"/>
+            <a:off x="0" y="658368"/>
+            <a:ext cx="5120640" cy="5833872"/>
           </a:xfrm>
           <a:prstGeom prst="rect">
             <a:avLst/>
@@ -11169,14 +11971,14 @@
       </p:pic>
       <p:sp>
         <p:nvSpPr>
-          <p:cNvPr id="5" name="Text 2"/>
+          <p:cNvPr id="4" name="Text 1"/>
           <p:cNvSpPr/>
           <p:nvPr/>
         </p:nvSpPr>
         <p:spPr>
           <a:xfrm>
-            <a:off x="457200" y="6089904"/>
-            <a:ext cx="11277295" cy="347472"/>
+            <a:off x="5349240" y="1005840"/>
+            <a:ext cx="6522415" cy="731520"/>
           </a:xfrm>
           <a:prstGeom prst="rect">
             <a:avLst/>
@@ -11185,24 +11987,68 @@
           <a:ln/>
         </p:spPr>
         <p:txBody>
-          <a:bodyPr wrap="square" lIns="0" tIns="0" rIns="0" bIns="0" rtlCol="0" anchor="ctr"/>
+          <a:bodyPr wrap="square" lIns="0" tIns="0" rIns="0" bIns="0" rtlCol="0" anchor="ctr">
+            <a:normAutofit/>
+          </a:bodyPr>
           <a:lstStyle/>
           <a:p>
             <a:pPr algn="ctr" indent="0" marL="0">
               <a:buNone/>
             </a:pPr>
             <a:r>
-              <a:rPr lang="en-US" sz="1800" i="1" dirty="0">
-                <a:solidFill>
-                  <a:srgbClr val="555555"/>
+              <a:rPr lang="en-US" sz="3600" b="1" dirty="0">
+                <a:solidFill>
+                  <a:srgbClr val="990011"/>
                 </a:solidFill>
                 <a:latin typeface="Times New Roman" pitchFamily="34" charset="0"/>
                 <a:ea typeface="Times New Roman" pitchFamily="34" charset="-122"/>
                 <a:cs typeface="Times New Roman" pitchFamily="34" charset="-120"/>
               </a:rPr>
-              <a:t>A sunny slope and a shady slope.</a:t>
-            </a:r>
-            <a:endParaRPr lang="en-US" sz="1800" dirty="0"/>
+              <a:t>Activity 3: Answer</a:t>
+            </a:r>
+            <a:endParaRPr lang="en-US" sz="3600" dirty="0"/>
+          </a:p>
+        </p:txBody>
+      </p:sp>
+      <p:sp>
+        <p:nvSpPr>
+          <p:cNvPr id="5" name="Text 2"/>
+          <p:cNvSpPr/>
+          <p:nvPr/>
+        </p:nvSpPr>
+        <p:spPr>
+          <a:xfrm>
+            <a:off x="5349240" y="1783080"/>
+            <a:ext cx="6522415" cy="4663440"/>
+          </a:xfrm>
+          <a:prstGeom prst="rect">
+            <a:avLst/>
+          </a:prstGeom>
+          <a:noFill/>
+          <a:ln/>
+        </p:spPr>
+        <p:txBody>
+          <a:bodyPr wrap="square" lIns="0" tIns="0" rIns="0" bIns="0" rtlCol="0" anchor="t"/>
+          <a:lstStyle/>
+          <a:p>
+            <a:pPr algn="l" indent="0" marL="0">
+              <a:spcAft>
+                <a:spcPts val="800"/>
+              </a:spcAft>
+              <a:buNone/>
+            </a:pPr>
+            <a:r>
+              <a:rPr lang="en-US" sz="4000" dirty="0">
+                <a:solidFill>
+                  <a:srgbClr val="111111"/>
+                </a:solidFill>
+                <a:latin typeface="Times New Roman" pitchFamily="34" charset="0"/>
+                <a:ea typeface="Times New Roman" pitchFamily="34" charset="-122"/>
+                <a:cs typeface="Times New Roman" pitchFamily="34" charset="-120"/>
+              </a:rPr>
+              <a:t>The thin air cannot keep the heat, which escapes quickly.</a:t>
+            </a:r>
+            <a:endParaRPr lang="en-US" sz="4000" dirty="0"/>
           </a:p>
         </p:txBody>
       </p:sp>
@@ -11312,15 +12158,54 @@
                 <a:ea typeface="Calibri" pitchFamily="34" charset="-122"/>
                 <a:cs typeface="Calibri" pitchFamily="34" charset="-120"/>
               </a:rPr>
-              <a:t>2. FACTORS: ASPECT</a:t>
+              <a:t>2. VERTICAL ZONATION</a:t>
             </a:r>
             <a:endParaRPr lang="en-US" sz="1400" dirty="0"/>
+          </a:p>
+        </p:txBody>
+      </p:sp>
+      <p:sp>
+        <p:nvSpPr>
+          <p:cNvPr id="3" name="Text 1"/>
+          <p:cNvSpPr/>
+          <p:nvPr/>
+        </p:nvSpPr>
+        <p:spPr>
+          <a:xfrm>
+            <a:off x="457200" y="1005840"/>
+            <a:ext cx="11277295" cy="731520"/>
+          </a:xfrm>
+          <a:prstGeom prst="rect">
+            <a:avLst/>
+          </a:prstGeom>
+          <a:noFill/>
+          <a:ln/>
+        </p:spPr>
+        <p:txBody>
+          <a:bodyPr wrap="square" lIns="0" tIns="0" rIns="0" bIns="0" rtlCol="0" anchor="ctr"/>
+          <a:lstStyle/>
+          <a:p>
+            <a:pPr algn="ctr" indent="0" marL="0">
+              <a:buNone/>
+            </a:pPr>
+            <a:r>
+              <a:rPr lang="en-US" sz="3600" b="1" dirty="0">
+                <a:solidFill>
+                  <a:srgbClr val="990011"/>
+                </a:solidFill>
+                <a:latin typeface="Times New Roman" pitchFamily="34" charset="0"/>
+                <a:ea typeface="Times New Roman" pitchFamily="34" charset="-122"/>
+                <a:cs typeface="Times New Roman" pitchFamily="34" charset="-120"/>
+              </a:rPr>
+              <a:t>Activity 4</a:t>
+            </a:r>
+            <a:endParaRPr lang="en-US" sz="3600" dirty="0"/>
           </a:p>
         </p:txBody>
       </p:sp>
       <p:pic>
         <p:nvPicPr>
-          <p:cNvPr id="3" name="Image 0" descr="/home/claude/f4/img/minesec_sheet.png">    </p:cNvPr>
+          <p:cNvPr id="4" name="Image 0" descr="/home/claude/f4/img/v2/veg_altitude_big.png">    </p:cNvPr>
           <p:cNvPicPr>
             <a:picLocks noChangeAspect="1"/>
           </p:cNvPicPr>
@@ -11334,8 +12219,8 @@
         </p:blipFill>
         <p:spPr>
           <a:xfrm>
-            <a:off x="0" y="658368"/>
-            <a:ext cx="5120640" cy="5833872"/>
+            <a:off x="629930" y="1783080"/>
+            <a:ext cx="10931835" cy="4270248"/>
           </a:xfrm>
           <a:prstGeom prst="rect">
             <a:avLst/>
@@ -11344,14 +12229,14 @@
       </p:pic>
       <p:sp>
         <p:nvSpPr>
-          <p:cNvPr id="4" name="Text 1"/>
+          <p:cNvPr id="5" name="Text 2"/>
           <p:cNvSpPr/>
           <p:nvPr/>
         </p:nvSpPr>
         <p:spPr>
           <a:xfrm>
-            <a:off x="5349240" y="1005840"/>
-            <a:ext cx="6522415" cy="731520"/>
+            <a:off x="457200" y="6089904"/>
+            <a:ext cx="11277295" cy="347472"/>
           </a:xfrm>
           <a:prstGeom prst="rect">
             <a:avLst/>
@@ -11360,68 +12245,24 @@
           <a:ln/>
         </p:spPr>
         <p:txBody>
-          <a:bodyPr wrap="square" lIns="0" tIns="0" rIns="0" bIns="0" rtlCol="0" anchor="ctr">
-            <a:normAutofit/>
-          </a:bodyPr>
+          <a:bodyPr wrap="square" lIns="0" tIns="0" rIns="0" bIns="0" rtlCol="0" anchor="ctr"/>
           <a:lstStyle/>
           <a:p>
             <a:pPr algn="ctr" indent="0" marL="0">
               <a:buNone/>
             </a:pPr>
             <a:r>
-              <a:rPr lang="en-US" sz="3600" b="1" dirty="0">
-                <a:solidFill>
-                  <a:srgbClr val="990011"/>
+              <a:rPr lang="en-US" sz="1800" i="1" dirty="0">
+                <a:solidFill>
+                  <a:srgbClr val="555555"/>
                 </a:solidFill>
                 <a:latin typeface="Times New Roman" pitchFamily="34" charset="0"/>
                 <a:ea typeface="Times New Roman" pitchFamily="34" charset="-122"/>
                 <a:cs typeface="Times New Roman" pitchFamily="34" charset="-120"/>
               </a:rPr>
-              <a:t>Activity 4: Question</a:t>
-            </a:r>
-            <a:endParaRPr lang="en-US" sz="3600" dirty="0"/>
-          </a:p>
-        </p:txBody>
-      </p:sp>
-      <p:sp>
-        <p:nvSpPr>
-          <p:cNvPr id="5" name="Text 2"/>
-          <p:cNvSpPr/>
-          <p:nvPr/>
-        </p:nvSpPr>
-        <p:spPr>
-          <a:xfrm>
-            <a:off x="5349240" y="1783080"/>
-            <a:ext cx="6522415" cy="4663440"/>
-          </a:xfrm>
-          <a:prstGeom prst="rect">
-            <a:avLst/>
-          </a:prstGeom>
-          <a:noFill/>
-          <a:ln/>
-        </p:spPr>
-        <p:txBody>
-          <a:bodyPr wrap="square" lIns="0" tIns="0" rIns="0" bIns="0" rtlCol="0" anchor="t"/>
-          <a:lstStyle/>
-          <a:p>
-            <a:pPr algn="l" indent="0" marL="0">
-              <a:spcAft>
-                <a:spcPts val="800"/>
-              </a:spcAft>
-              <a:buNone/>
-            </a:pPr>
-            <a:r>
-              <a:rPr lang="en-US" sz="4000" dirty="0">
-                <a:solidFill>
-                  <a:srgbClr val="111111"/>
-                </a:solidFill>
-                <a:latin typeface="Times New Roman" pitchFamily="34" charset="0"/>
-                <a:ea typeface="Times New Roman" pitchFamily="34" charset="-122"/>
-                <a:cs typeface="Times New Roman" pitchFamily="34" charset="-120"/>
-              </a:rPr>
-              <a:t>How does aspect change the climate of a mountain?</a:t>
-            </a:r>
-            <a:endParaRPr lang="en-US" sz="4000" dirty="0"/>
+              <a:t>Vegetation zones on Mount Cameroon.</a:t>
+            </a:r>
+            <a:endParaRPr lang="en-US" sz="1800" dirty="0"/>
           </a:p>
         </p:txBody>
       </p:sp>
@@ -12102,7 +12943,7 @@
                           <a:ea typeface="Calibri" pitchFamily="34" charset="-122"/>
                           <a:cs typeface="Calibri" pitchFamily="34" charset="-120"/>
                         </a:rPr>
-                        <a:t>Mountain climate, altitude, aspect, relief rain, rain shadow, altitudinal zonation.</a:t>
+                        <a:t>Mountain (highland) climate, lapse rate, air pressure, orographic rain, rain shadow, ultraviolet radiation, daily range, vertical zonation, altitude, relief, aspect, latitude.</a:t>
                       </a:r>
                       <a:endParaRPr lang="en-US" sz="1700" dirty="0">
                         <a:latin typeface="Calibri" charset="0"/>
@@ -12240,7 +13081,7 @@
                           <a:ea typeface="Calibri" pitchFamily="34" charset="-122"/>
                           <a:cs typeface="Calibri" pitchFamily="34" charset="-120"/>
                         </a:rPr>
-                        <a:t>Characteristics of mountain climates and their factors.</a:t>
+                        <a:t>Characteristics of mountain climates; vertical zonation; factors of mountain climates (altitude, relief, aspect, latitude).</a:t>
                       </a:r>
                       <a:endParaRPr lang="en-US" sz="1700" dirty="0">
                         <a:latin typeface="Calibri" charset="0"/>
@@ -12378,7 +13219,7 @@
                           <a:ea typeface="Calibri" pitchFamily="34" charset="-122"/>
                           <a:cs typeface="Calibri" pitchFamily="34" charset="-120"/>
                         </a:rPr>
-                        <a:t>Learners are able to describe mountain climates and explain their factors, with examples from Cameroon.</a:t>
+                        <a:t>Learners are able to explain the climate of mountains such as the Mandara Mountains and Mount Cameroon and its effects on vegetation and people.</a:t>
                       </a:r>
                       <a:endParaRPr lang="en-US" sz="1700" dirty="0">
                         <a:latin typeface="Calibri" charset="0"/>
@@ -12540,7 +13381,7 @@
                 <a:ea typeface="Calibri" pitchFamily="34" charset="-122"/>
                 <a:cs typeface="Calibri" pitchFamily="34" charset="-120"/>
               </a:rPr>
-              <a:t>2. FACTORS: ASPECT</a:t>
+              <a:t>2. VERTICAL ZONATION</a:t>
             </a:r>
             <a:endParaRPr lang="en-US" sz="1400" dirty="0"/>
           </a:p>
@@ -12605,7 +13446,7 @@
                 <a:ea typeface="Times New Roman" pitchFamily="34" charset="-122"/>
                 <a:cs typeface="Times New Roman" pitchFamily="34" charset="-120"/>
               </a:rPr>
-              <a:t>Activity 4: Answer</a:t>
+              <a:t>Activity 4: Question</a:t>
             </a:r>
             <a:endParaRPr lang="en-US" sz="3600" dirty="0"/>
           </a:p>
@@ -12647,7 +13488,7 @@
                 <a:ea typeface="Times New Roman" pitchFamily="34" charset="-122"/>
                 <a:cs typeface="Times New Roman" pitchFamily="34" charset="-120"/>
               </a:rPr>
-              <a:t>Sunny slopes are warmer and drier than shady slopes.</a:t>
+              <a:t>What is found near the summit of Mount Cameroon?</a:t>
             </a:r>
             <a:endParaRPr lang="en-US" sz="4000" dirty="0"/>
           </a:p>
@@ -12759,54 +13600,15 @@
                 <a:ea typeface="Calibri" pitchFamily="34" charset="-122"/>
                 <a:cs typeface="Calibri" pitchFamily="34" charset="-120"/>
               </a:rPr>
-              <a:t>1. IMPORTANCE FOR MAN</a:t>
+              <a:t>2. VERTICAL ZONATION</a:t>
             </a:r>
             <a:endParaRPr lang="en-US" sz="1400" dirty="0"/>
-          </a:p>
-        </p:txBody>
-      </p:sp>
-      <p:sp>
-        <p:nvSpPr>
-          <p:cNvPr id="3" name="Text 1"/>
-          <p:cNvSpPr/>
-          <p:nvPr/>
-        </p:nvSpPr>
-        <p:spPr>
-          <a:xfrm>
-            <a:off x="457200" y="1005840"/>
-            <a:ext cx="11277295" cy="731520"/>
-          </a:xfrm>
-          <a:prstGeom prst="rect">
-            <a:avLst/>
-          </a:prstGeom>
-          <a:noFill/>
-          <a:ln/>
-        </p:spPr>
-        <p:txBody>
-          <a:bodyPr wrap="square" lIns="0" tIns="0" rIns="0" bIns="0" rtlCol="0" anchor="ctr"/>
-          <a:lstStyle/>
-          <a:p>
-            <a:pPr algn="ctr" indent="0" marL="0">
-              <a:buNone/>
-            </a:pPr>
-            <a:r>
-              <a:rPr lang="en-US" sz="3600" b="1" dirty="0">
-                <a:solidFill>
-                  <a:srgbClr val="990011"/>
-                </a:solidFill>
-                <a:latin typeface="Times New Roman" pitchFamily="34" charset="0"/>
-                <a:ea typeface="Times New Roman" pitchFamily="34" charset="-122"/>
-                <a:cs typeface="Times New Roman" pitchFamily="34" charset="-120"/>
-              </a:rPr>
-              <a:t>Activity 5</a:t>
-            </a:r>
-            <a:endParaRPr lang="en-US" sz="3600" dirty="0"/>
           </a:p>
         </p:txBody>
       </p:sp>
       <p:pic>
         <p:nvPicPr>
-          <p:cNvPr id="4" name="Image 0" descr="/home/claude/f4/img/v2/f2t_tea_highlands.jpg">    </p:cNvPr>
+          <p:cNvPr id="3" name="Image 0" descr="/home/claude/f4/img/minesec_sheet.png">    </p:cNvPr>
           <p:cNvPicPr>
             <a:picLocks noChangeAspect="1"/>
           </p:cNvPicPr>
@@ -12820,8 +13622,8 @@
         </p:blipFill>
         <p:spPr>
           <a:xfrm>
-            <a:off x="1248027" y="1783080"/>
-            <a:ext cx="9695641" cy="4270248"/>
+            <a:off x="0" y="658368"/>
+            <a:ext cx="5120640" cy="5833872"/>
           </a:xfrm>
           <a:prstGeom prst="rect">
             <a:avLst/>
@@ -12830,14 +13632,14 @@
       </p:pic>
       <p:sp>
         <p:nvSpPr>
-          <p:cNvPr id="5" name="Text 2"/>
+          <p:cNvPr id="4" name="Text 1"/>
           <p:cNvSpPr/>
           <p:nvPr/>
         </p:nvSpPr>
         <p:spPr>
           <a:xfrm>
-            <a:off x="457200" y="6089904"/>
-            <a:ext cx="11277295" cy="347472"/>
+            <a:off x="5349240" y="1005840"/>
+            <a:ext cx="6522415" cy="731520"/>
           </a:xfrm>
           <a:prstGeom prst="rect">
             <a:avLst/>
@@ -12846,24 +13648,68 @@
           <a:ln/>
         </p:spPr>
         <p:txBody>
-          <a:bodyPr wrap="square" lIns="0" tIns="0" rIns="0" bIns="0" rtlCol="0" anchor="ctr"/>
+          <a:bodyPr wrap="square" lIns="0" tIns="0" rIns="0" bIns="0" rtlCol="0" anchor="ctr">
+            <a:normAutofit/>
+          </a:bodyPr>
           <a:lstStyle/>
           <a:p>
             <a:pPr algn="ctr" indent="0" marL="0">
               <a:buNone/>
             </a:pPr>
             <a:r>
-              <a:rPr lang="en-US" sz="1800" i="1" dirty="0">
-                <a:solidFill>
-                  <a:srgbClr val="555555"/>
+              <a:rPr lang="en-US" sz="3600" b="1" dirty="0">
+                <a:solidFill>
+                  <a:srgbClr val="990011"/>
                 </a:solidFill>
                 <a:latin typeface="Times New Roman" pitchFamily="34" charset="0"/>
                 <a:ea typeface="Times New Roman" pitchFamily="34" charset="-122"/>
                 <a:cs typeface="Times New Roman" pitchFamily="34" charset="-120"/>
               </a:rPr>
-              <a:t>Tea on cool highlands.</a:t>
-            </a:r>
-            <a:endParaRPr lang="en-US" sz="1800" dirty="0"/>
+              <a:t>Activity 4: Answer</a:t>
+            </a:r>
+            <a:endParaRPr lang="en-US" sz="3600" dirty="0"/>
+          </a:p>
+        </p:txBody>
+      </p:sp>
+      <p:sp>
+        <p:nvSpPr>
+          <p:cNvPr id="5" name="Text 2"/>
+          <p:cNvSpPr/>
+          <p:nvPr/>
+        </p:nvSpPr>
+        <p:spPr>
+          <a:xfrm>
+            <a:off x="5349240" y="1783080"/>
+            <a:ext cx="6522415" cy="4663440"/>
+          </a:xfrm>
+          <a:prstGeom prst="rect">
+            <a:avLst/>
+          </a:prstGeom>
+          <a:noFill/>
+          <a:ln/>
+        </p:spPr>
+        <p:txBody>
+          <a:bodyPr wrap="square" lIns="0" tIns="0" rIns="0" bIns="0" rtlCol="0" anchor="t"/>
+          <a:lstStyle/>
+          <a:p>
+            <a:pPr algn="l" indent="0" marL="0">
+              <a:spcAft>
+                <a:spcPts val="800"/>
+              </a:spcAft>
+              <a:buNone/>
+            </a:pPr>
+            <a:r>
+              <a:rPr lang="en-US" sz="4000" dirty="0">
+                <a:solidFill>
+                  <a:srgbClr val="111111"/>
+                </a:solidFill>
+                <a:latin typeface="Times New Roman" pitchFamily="34" charset="0"/>
+                <a:ea typeface="Times New Roman" pitchFamily="34" charset="-122"/>
+                <a:cs typeface="Times New Roman" pitchFamily="34" charset="-120"/>
+              </a:rPr>
+              <a:t>Bare lava and rock (with montane grassland below).</a:t>
+            </a:r>
+            <a:endParaRPr lang="en-US" sz="4000" dirty="0"/>
           </a:p>
         </p:txBody>
       </p:sp>
@@ -12973,15 +13819,54 @@
                 <a:ea typeface="Calibri" pitchFamily="34" charset="-122"/>
                 <a:cs typeface="Calibri" pitchFamily="34" charset="-120"/>
               </a:rPr>
-              <a:t>1. IMPORTANCE FOR MAN</a:t>
+              <a:t>3. FACTORS</a:t>
             </a:r>
             <a:endParaRPr lang="en-US" sz="1400" dirty="0"/>
+          </a:p>
+        </p:txBody>
+      </p:sp>
+      <p:sp>
+        <p:nvSpPr>
+          <p:cNvPr id="3" name="Text 1"/>
+          <p:cNvSpPr/>
+          <p:nvPr/>
+        </p:nvSpPr>
+        <p:spPr>
+          <a:xfrm>
+            <a:off x="457200" y="1005840"/>
+            <a:ext cx="11277295" cy="731520"/>
+          </a:xfrm>
+          <a:prstGeom prst="rect">
+            <a:avLst/>
+          </a:prstGeom>
+          <a:noFill/>
+          <a:ln/>
+        </p:spPr>
+        <p:txBody>
+          <a:bodyPr wrap="square" lIns="0" tIns="0" rIns="0" bIns="0" rtlCol="0" anchor="ctr"/>
+          <a:lstStyle/>
+          <a:p>
+            <a:pPr algn="ctr" indent="0" marL="0">
+              <a:buNone/>
+            </a:pPr>
+            <a:r>
+              <a:rPr lang="en-US" sz="3600" b="1" dirty="0">
+                <a:solidFill>
+                  <a:srgbClr val="990011"/>
+                </a:solidFill>
+                <a:latin typeface="Times New Roman" pitchFamily="34" charset="0"/>
+                <a:ea typeface="Times New Roman" pitchFamily="34" charset="-122"/>
+                <a:cs typeface="Times New Roman" pitchFamily="34" charset="-120"/>
+              </a:rPr>
+              <a:t>Activity 5</a:t>
+            </a:r>
+            <a:endParaRPr lang="en-US" sz="3600" dirty="0"/>
           </a:p>
         </p:txBody>
       </p:sp>
       <p:pic>
         <p:nvPicPr>
-          <p:cNvPr id="3" name="Image 0" descr="/home/claude/f4/img/minesec_sheet.png">    </p:cNvPr>
+          <p:cNvPr id="4" name="Image 0" descr="/home/claude/f4/img/v2/aspect_big.png">    </p:cNvPr>
           <p:cNvPicPr>
             <a:picLocks noChangeAspect="1"/>
           </p:cNvPicPr>
@@ -12995,8 +13880,8 @@
         </p:blipFill>
         <p:spPr>
           <a:xfrm>
-            <a:off x="0" y="658368"/>
-            <a:ext cx="5120640" cy="5833872"/>
+            <a:off x="629930" y="1783080"/>
+            <a:ext cx="10931835" cy="4270248"/>
           </a:xfrm>
           <a:prstGeom prst="rect">
             <a:avLst/>
@@ -13005,14 +13890,14 @@
       </p:pic>
       <p:sp>
         <p:nvSpPr>
-          <p:cNvPr id="4" name="Text 1"/>
+          <p:cNvPr id="5" name="Text 2"/>
           <p:cNvSpPr/>
           <p:nvPr/>
         </p:nvSpPr>
         <p:spPr>
           <a:xfrm>
-            <a:off x="5349240" y="1005840"/>
-            <a:ext cx="6522415" cy="731520"/>
+            <a:off x="457200" y="6089904"/>
+            <a:ext cx="11277295" cy="347472"/>
           </a:xfrm>
           <a:prstGeom prst="rect">
             <a:avLst/>
@@ -13021,68 +13906,24 @@
           <a:ln/>
         </p:spPr>
         <p:txBody>
-          <a:bodyPr wrap="square" lIns="0" tIns="0" rIns="0" bIns="0" rtlCol="0" anchor="ctr">
-            <a:normAutofit/>
-          </a:bodyPr>
+          <a:bodyPr wrap="square" lIns="0" tIns="0" rIns="0" bIns="0" rtlCol="0" anchor="ctr"/>
           <a:lstStyle/>
           <a:p>
             <a:pPr algn="ctr" indent="0" marL="0">
               <a:buNone/>
             </a:pPr>
             <a:r>
-              <a:rPr lang="en-US" sz="3600" b="1" dirty="0">
-                <a:solidFill>
-                  <a:srgbClr val="990011"/>
+              <a:rPr lang="en-US" sz="1800" i="1" dirty="0">
+                <a:solidFill>
+                  <a:srgbClr val="555555"/>
                 </a:solidFill>
                 <a:latin typeface="Times New Roman" pitchFamily="34" charset="0"/>
                 <a:ea typeface="Times New Roman" pitchFamily="34" charset="-122"/>
                 <a:cs typeface="Times New Roman" pitchFamily="34" charset="-120"/>
               </a:rPr>
-              <a:t>Activity 5: Question</a:t>
-            </a:r>
-            <a:endParaRPr lang="en-US" sz="3600" dirty="0"/>
-          </a:p>
-        </p:txBody>
-      </p:sp>
-      <p:sp>
-        <p:nvSpPr>
-          <p:cNvPr id="5" name="Text 2"/>
-          <p:cNvSpPr/>
-          <p:nvPr/>
-        </p:nvSpPr>
-        <p:spPr>
-          <a:xfrm>
-            <a:off x="5349240" y="1783080"/>
-            <a:ext cx="6522415" cy="4663440"/>
-          </a:xfrm>
-          <a:prstGeom prst="rect">
-            <a:avLst/>
-          </a:prstGeom>
-          <a:noFill/>
-          <a:ln/>
-        </p:spPr>
-        <p:txBody>
-          <a:bodyPr wrap="square" lIns="0" tIns="0" rIns="0" bIns="0" rtlCol="0" anchor="t"/>
-          <a:lstStyle/>
-          <a:p>
-            <a:pPr algn="l" indent="0" marL="0">
-              <a:spcAft>
-                <a:spcPts val="800"/>
-              </a:spcAft>
-              <a:buNone/>
-            </a:pPr>
-            <a:r>
-              <a:rPr lang="en-US" sz="4000" dirty="0">
-                <a:solidFill>
-                  <a:srgbClr val="111111"/>
-                </a:solidFill>
-                <a:latin typeface="Times New Roman" pitchFamily="34" charset="0"/>
-                <a:ea typeface="Times New Roman" pitchFamily="34" charset="-122"/>
-                <a:cs typeface="Times New Roman" pitchFamily="34" charset="-120"/>
-              </a:rPr>
-              <a:t>Give two ways people use the cool mountain climate.</a:t>
-            </a:r>
-            <a:endParaRPr lang="en-US" sz="4000" dirty="0"/>
+              <a:t>The aspect of slopes.</a:t>
+            </a:r>
+            <a:endParaRPr lang="en-US" sz="1800" dirty="0"/>
           </a:p>
         </p:txBody>
       </p:sp>
@@ -13192,7 +14033,7 @@
                 <a:ea typeface="Calibri" pitchFamily="34" charset="-122"/>
                 <a:cs typeface="Calibri" pitchFamily="34" charset="-120"/>
               </a:rPr>
-              <a:t>1. IMPORTANCE FOR MAN</a:t>
+              <a:t>3. FACTORS</a:t>
             </a:r>
             <a:endParaRPr lang="en-US" sz="1400" dirty="0"/>
           </a:p>
@@ -13257,7 +14098,7 @@
                 <a:ea typeface="Times New Roman" pitchFamily="34" charset="-122"/>
                 <a:cs typeface="Times New Roman" pitchFamily="34" charset="-120"/>
               </a:rPr>
-              <a:t>Activity 5: Answer</a:t>
+              <a:t>Activity 5: Question</a:t>
             </a:r>
             <a:endParaRPr lang="en-US" sz="3600" dirty="0"/>
           </a:p>
@@ -13299,7 +14140,7 @@
                 <a:ea typeface="Times New Roman" pitchFamily="34" charset="-122"/>
                 <a:cs typeface="Times New Roman" pitchFamily="34" charset="-120"/>
               </a:rPr>
-              <a:t>Growing tea, coffee and vegetables; tourism and healthy living (few mosquitoes).</a:t>
+              <a:t>Which slope is warmer and drier: the one facing the sun or the one facing away?</a:t>
             </a:r>
             <a:endParaRPr lang="en-US" sz="4000" dirty="0"/>
           </a:p>
@@ -13411,7 +14252,7 @@
                 <a:ea typeface="Calibri" pitchFamily="34" charset="-122"/>
                 <a:cs typeface="Calibri" pitchFamily="34" charset="-120"/>
               </a:rPr>
-              <a:t>BOARD SUMMARY</a:t>
+              <a:t>3. FACTORS</a:t>
             </a:r>
             <a:endParaRPr lang="en-US" sz="1400" dirty="0"/>
           </a:p>
@@ -13476,7 +14317,7 @@
                 <a:ea typeface="Times New Roman" pitchFamily="34" charset="-122"/>
                 <a:cs typeface="Times New Roman" pitchFamily="34" charset="-120"/>
               </a:rPr>
-              <a:t>Board Summary</a:t>
+              <a:t>Activity 5: Answer</a:t>
             </a:r>
             <a:endParaRPr lang="en-US" sz="3600" dirty="0"/>
           </a:p>
@@ -13510,7 +14351,7 @@
               <a:buNone/>
             </a:pPr>
             <a:r>
-              <a:rPr lang="en-US" sz="4000" b="1" dirty="0">
+              <a:rPr lang="en-US" sz="4000" dirty="0">
                 <a:solidFill>
                   <a:srgbClr val="111111"/>
                 </a:solidFill>
@@ -13518,47 +14359,7 @@
                 <a:ea typeface="Times New Roman" pitchFamily="34" charset="-122"/>
                 <a:cs typeface="Times New Roman" pitchFamily="34" charset="-120"/>
               </a:rPr>
-              <a:t>Topic: Climates</a:t>
-            </a:r>
-            <a:endParaRPr lang="en-US" sz="4000" dirty="0"/>
-          </a:p>
-          <a:p>
-            <a:pPr algn="l" indent="0" marL="0">
-              <a:spcAft>
-                <a:spcPts val="800"/>
-              </a:spcAft>
-              <a:buNone/>
-            </a:pPr>
-            <a:r>
-              <a:rPr lang="en-US" sz="4000" b="1" dirty="0">
-                <a:solidFill>
-                  <a:srgbClr val="111111"/>
-                </a:solidFill>
-                <a:latin typeface="Times New Roman" pitchFamily="34" charset="0"/>
-                <a:ea typeface="Times New Roman" pitchFamily="34" charset="-122"/>
-                <a:cs typeface="Times New Roman" pitchFamily="34" charset="-120"/>
-              </a:rPr>
-              <a:t>Sub-topic: Concept of Micro-climate</a:t>
-            </a:r>
-            <a:endParaRPr lang="en-US" sz="4000" dirty="0"/>
-          </a:p>
-          <a:p>
-            <a:pPr algn="l" indent="0" marL="0">
-              <a:spcAft>
-                <a:spcPts val="800"/>
-              </a:spcAft>
-              <a:buNone/>
-            </a:pPr>
-            <a:r>
-              <a:rPr lang="en-US" sz="4000" b="1" dirty="0">
-                <a:solidFill>
-                  <a:srgbClr val="990011"/>
-                </a:solidFill>
-                <a:latin typeface="Times New Roman" pitchFamily="34" charset="0"/>
-                <a:ea typeface="Times New Roman" pitchFamily="34" charset="-122"/>
-                <a:cs typeface="Times New Roman" pitchFamily="34" charset="-120"/>
-              </a:rPr>
-              <a:t>Lesson 21: Mountain Climates</a:t>
+              <a:t>The one facing the sun.</a:t>
             </a:r>
             <a:endParaRPr lang="en-US" sz="4000" dirty="0"/>
           </a:p>
@@ -13693,7 +14494,7 @@
         <p:spPr>
           <a:xfrm>
             <a:off x="0" y="658368"/>
-            <a:ext cx="1463040" cy="5833872"/>
+            <a:ext cx="5120640" cy="5833872"/>
           </a:xfrm>
           <a:prstGeom prst="rect">
             <a:avLst/>
@@ -13708,8 +14509,8 @@
         </p:nvSpPr>
         <p:spPr>
           <a:xfrm>
-            <a:off x="1691640" y="1005840"/>
-            <a:ext cx="10180015" cy="731520"/>
+            <a:off x="5349240" y="1005840"/>
+            <a:ext cx="6522415" cy="731520"/>
           </a:xfrm>
           <a:prstGeom prst="rect">
             <a:avLst/>
@@ -13735,7 +14536,7 @@
                 <a:ea typeface="Times New Roman" pitchFamily="34" charset="-122"/>
                 <a:cs typeface="Times New Roman" pitchFamily="34" charset="-120"/>
               </a:rPr>
-              <a:t>DEFINITIONS</a:t>
+              <a:t>Board Summary</a:t>
             </a:r>
             <a:endParaRPr lang="en-US" sz="3600" dirty="0"/>
           </a:p>
@@ -13749,8 +14550,8 @@
         </p:nvSpPr>
         <p:spPr>
           <a:xfrm>
-            <a:off x="1691640" y="1783080"/>
-            <a:ext cx="10180015" cy="4663440"/>
+            <a:off x="5349240" y="1783080"/>
+            <a:ext cx="6522415" cy="4663440"/>
           </a:xfrm>
           <a:prstGeom prst="rect">
             <a:avLst/>
@@ -13769,7 +14570,7 @@
               <a:buNone/>
             </a:pPr>
             <a:r>
-              <a:rPr lang="en-US" sz="4000" i="1" dirty="0">
+              <a:rPr lang="en-US" sz="4000" b="1" dirty="0">
                 <a:solidFill>
                   <a:srgbClr val="111111"/>
                 </a:solidFill>
@@ -13777,7 +14578,7 @@
                 <a:ea typeface="Times New Roman" pitchFamily="34" charset="-122"/>
                 <a:cs typeface="Times New Roman" pitchFamily="34" charset="-120"/>
               </a:rPr>
-              <a:t>The key terms of this lesson are defined as follows:</a:t>
+              <a:t>Topic: Climates</a:t>
             </a:r>
             <a:endParaRPr lang="en-US" sz="4000" dirty="0"/>
           </a:p>
@@ -13797,8 +14598,11 @@
                 <a:ea typeface="Times New Roman" pitchFamily="34" charset="-122"/>
                 <a:cs typeface="Times New Roman" pitchFamily="34" charset="-120"/>
               </a:rPr>
-              <a:t>Mountain climate: </a:t>
-            </a:r>
+              <a:t>Sub-topic: Concept of Micro-climate</a:t>
+            </a:r>
+            <a:endParaRPr lang="en-US" sz="4000" dirty="0"/>
+          </a:p>
+          <a:p>
             <a:pPr algn="l" indent="0" marL="0">
               <a:spcAft>
                 <a:spcPts val="800"/>
@@ -13806,52 +14610,15 @@
               <a:buNone/>
             </a:pPr>
             <a:r>
-              <a:rPr lang="en-US" sz="4000" dirty="0">
-                <a:solidFill>
-                  <a:srgbClr val="111111"/>
+              <a:rPr lang="en-US" sz="4000" b="1" dirty="0">
+                <a:solidFill>
+                  <a:srgbClr val="990011"/>
                 </a:solidFill>
                 <a:latin typeface="Times New Roman" pitchFamily="34" charset="0"/>
                 <a:ea typeface="Times New Roman" pitchFamily="34" charset="-122"/>
                 <a:cs typeface="Times New Roman" pitchFamily="34" charset="-120"/>
               </a:rPr>
-              <a:t>It is the climate of high mountains, which changes with altitude, slope and aspect.</a:t>
-            </a:r>
-            <a:endParaRPr lang="en-US" sz="4000" dirty="0"/>
-          </a:p>
-          <a:p>
-            <a:pPr algn="l" indent="0" marL="0">
-              <a:spcAft>
-                <a:spcPts val="800"/>
-              </a:spcAft>
-              <a:buNone/>
-            </a:pPr>
-            <a:r>
-              <a:rPr lang="en-US" sz="4000" b="1" dirty="0">
-                <a:solidFill>
-                  <a:srgbClr val="111111"/>
-                </a:solidFill>
-                <a:latin typeface="Times New Roman" pitchFamily="34" charset="0"/>
-                <a:ea typeface="Times New Roman" pitchFamily="34" charset="-122"/>
-                <a:cs typeface="Times New Roman" pitchFamily="34" charset="-120"/>
-              </a:rPr>
-              <a:t>Mountain barrier: </a:t>
-            </a:r>
-            <a:pPr algn="l" indent="0" marL="0">
-              <a:spcAft>
-                <a:spcPts val="800"/>
-              </a:spcAft>
-              <a:buNone/>
-            </a:pPr>
-            <a:r>
-              <a:rPr lang="en-US" sz="4000" dirty="0">
-                <a:solidFill>
-                  <a:srgbClr val="111111"/>
-                </a:solidFill>
-                <a:latin typeface="Times New Roman" pitchFamily="34" charset="0"/>
-                <a:ea typeface="Times New Roman" pitchFamily="34" charset="-122"/>
-                <a:cs typeface="Times New Roman" pitchFamily="34" charset="-120"/>
-              </a:rPr>
-              <a:t>It is a mountain range that blocks winds and forces air to rise.</a:t>
+              <a:t>Lesson 21: Mountain Climates</a:t>
             </a:r>
             <a:endParaRPr lang="en-US" sz="4000" dirty="0"/>
           </a:p>
@@ -13986,7 +14753,7 @@
         <p:spPr>
           <a:xfrm>
             <a:off x="0" y="658368"/>
-            <a:ext cx="3840480" cy="5833872"/>
+            <a:ext cx="5120640" cy="5833872"/>
           </a:xfrm>
           <a:prstGeom prst="rect">
             <a:avLst/>
@@ -14001,8 +14768,8 @@
         </p:nvSpPr>
         <p:spPr>
           <a:xfrm>
-            <a:off x="4069080" y="1005840"/>
-            <a:ext cx="7802575" cy="731520"/>
+            <a:off x="5349240" y="1005840"/>
+            <a:ext cx="6522415" cy="731520"/>
           </a:xfrm>
           <a:prstGeom prst="rect">
             <a:avLst/>
@@ -14028,7 +14795,7 @@
                 <a:ea typeface="Times New Roman" pitchFamily="34" charset="-122"/>
                 <a:cs typeface="Times New Roman" pitchFamily="34" charset="-120"/>
               </a:rPr>
-              <a:t>1. Characteristics of Mountain Climates</a:t>
+              <a:t>DEFINITIONS</a:t>
             </a:r>
             <a:endParaRPr lang="en-US" sz="3600" dirty="0"/>
           </a:p>
@@ -14042,8 +14809,8 @@
         </p:nvSpPr>
         <p:spPr>
           <a:xfrm>
-            <a:off x="4069080" y="1783080"/>
-            <a:ext cx="7802575" cy="4663440"/>
+            <a:off x="5349240" y="1783080"/>
+            <a:ext cx="6522415" cy="4663440"/>
           </a:xfrm>
           <a:prstGeom prst="rect">
             <a:avLst/>
@@ -14070,7 +14837,7 @@
                 <a:ea typeface="Times New Roman" pitchFamily="34" charset="-122"/>
                 <a:cs typeface="Times New Roman" pitchFamily="34" charset="-120"/>
               </a:rPr>
-              <a:t>Mountain climates have the following characteristics:</a:t>
+              <a:t>The key terms of this lesson are defined as follows:</a:t>
             </a:r>
             <a:endParaRPr lang="en-US" sz="4000" dirty="0"/>
           </a:p>
@@ -14090,7 +14857,7 @@
                 <a:ea typeface="Times New Roman" pitchFamily="34" charset="-122"/>
                 <a:cs typeface="Times New Roman" pitchFamily="34" charset="-120"/>
               </a:rPr>
-              <a:t>Low temperatures: </a:t>
+              <a:t>Mountain climate: </a:t>
             </a:r>
             <a:pPr algn="l" indent="0" marL="0">
               <a:spcAft>
@@ -14107,7 +14874,7 @@
                 <a:ea typeface="Times New Roman" pitchFamily="34" charset="-122"/>
                 <a:cs typeface="Times New Roman" pitchFamily="34" charset="-120"/>
               </a:rPr>
-              <a:t>Temperature falls by about 6.5 °C per 1,000 m. The top of Mount Cameroon is often near 0 °C, and Kilimanjaro has snow on the Equator.</a:t>
+              <a:t>It is the climate of high-altitude areas, cooler and wetter than the surrounding lowlands.</a:t>
             </a:r>
             <a:endParaRPr lang="en-US" sz="4000" dirty="0"/>
           </a:p>
@@ -14242,7 +15009,7 @@
         <p:spPr>
           <a:xfrm>
             <a:off x="0" y="658368"/>
-            <a:ext cx="1463040" cy="5833872"/>
+            <a:ext cx="2468880" cy="5833872"/>
           </a:xfrm>
           <a:prstGeom prst="rect">
             <a:avLst/>
@@ -14257,8 +15024,8 @@
         </p:nvSpPr>
         <p:spPr>
           <a:xfrm>
-            <a:off x="1691640" y="1005840"/>
-            <a:ext cx="10180015" cy="731520"/>
+            <a:off x="2697480" y="1005840"/>
+            <a:ext cx="9174175" cy="731520"/>
           </a:xfrm>
           <a:prstGeom prst="rect">
             <a:avLst/>
@@ -14284,7 +15051,7 @@
                 <a:ea typeface="Times New Roman" pitchFamily="34" charset="-122"/>
                 <a:cs typeface="Times New Roman" pitchFamily="34" charset="-120"/>
               </a:rPr>
-              <a:t>1. Characteristics of Mountain Climates (continued)</a:t>
+              <a:t>DEFINITIONS (continued)</a:t>
             </a:r>
             <a:endParaRPr lang="en-US" sz="3600" dirty="0"/>
           </a:p>
@@ -14298,8 +15065,8 @@
         </p:nvSpPr>
         <p:spPr>
           <a:xfrm>
-            <a:off x="1691640" y="1783080"/>
-            <a:ext cx="10180015" cy="4663440"/>
+            <a:off x="2697480" y="1783080"/>
+            <a:ext cx="9174175" cy="4663440"/>
           </a:xfrm>
           <a:prstGeom prst="rect">
             <a:avLst/>
@@ -14326,7 +15093,7 @@
                 <a:ea typeface="Times New Roman" pitchFamily="34" charset="-122"/>
                 <a:cs typeface="Times New Roman" pitchFamily="34" charset="-120"/>
               </a:rPr>
-              <a:t>High rainfall on windward slopes: </a:t>
+              <a:t>Vertical zonation: </a:t>
             </a:r>
             <a:pPr algn="l" indent="0" marL="0">
               <a:spcAft>
@@ -14343,7 +15110,7 @@
                 <a:ea typeface="Times New Roman" pitchFamily="34" charset="-122"/>
                 <a:cs typeface="Times New Roman" pitchFamily="34" charset="-120"/>
               </a:rPr>
-              <a:t>Mountains receive heavy relief rain up to a certain height. Above that height the air is drier.</a:t>
+              <a:t>It is the succession of climate and vegetation zones from the foot to the top of a mountain.</a:t>
             </a:r>
             <a:endParaRPr lang="en-US" sz="4000" dirty="0"/>
           </a:p>
@@ -14363,7 +15130,7 @@
                 <a:ea typeface="Times New Roman" pitchFamily="34" charset="-122"/>
                 <a:cs typeface="Times New Roman" pitchFamily="34" charset="-120"/>
               </a:rPr>
-              <a:t>Strong sunshine and winds: </a:t>
+              <a:t>Windward side: </a:t>
             </a:r>
             <a:pPr algn="l" indent="0" marL="0">
               <a:spcAft>
@@ -14380,7 +15147,44 @@
                 <a:ea typeface="Times New Roman" pitchFamily="34" charset="-122"/>
                 <a:cs typeface="Times New Roman" pitchFamily="34" charset="-120"/>
               </a:rPr>
-              <a:t>The thin air lets through more ultraviolet rays, so the sun burns strongly. Winds are strong and nights are cold.</a:t>
+              <a:t>It is the side of a mountain facing the wind.</a:t>
+            </a:r>
+            <a:endParaRPr lang="en-US" sz="4000" dirty="0"/>
+          </a:p>
+          <a:p>
+            <a:pPr algn="l" indent="0" marL="0">
+              <a:spcAft>
+                <a:spcPts val="800"/>
+              </a:spcAft>
+              <a:buNone/>
+            </a:pPr>
+            <a:r>
+              <a:rPr lang="en-US" sz="4000" b="1" dirty="0">
+                <a:solidFill>
+                  <a:srgbClr val="111111"/>
+                </a:solidFill>
+                <a:latin typeface="Times New Roman" pitchFamily="34" charset="0"/>
+                <a:ea typeface="Times New Roman" pitchFamily="34" charset="-122"/>
+                <a:cs typeface="Times New Roman" pitchFamily="34" charset="-120"/>
+              </a:rPr>
+              <a:t>Leeward side: </a:t>
+            </a:r>
+            <a:pPr algn="l" indent="0" marL="0">
+              <a:spcAft>
+                <a:spcPts val="800"/>
+              </a:spcAft>
+              <a:buNone/>
+            </a:pPr>
+            <a:r>
+              <a:rPr lang="en-US" sz="4000" dirty="0">
+                <a:solidFill>
+                  <a:srgbClr val="111111"/>
+                </a:solidFill>
+                <a:latin typeface="Times New Roman" pitchFamily="34" charset="0"/>
+                <a:ea typeface="Times New Roman" pitchFamily="34" charset="-122"/>
+                <a:cs typeface="Times New Roman" pitchFamily="34" charset="-120"/>
+              </a:rPr>
+              <a:t>It is the side of a mountain sheltered from the wind.</a:t>
             </a:r>
             <a:endParaRPr lang="en-US" sz="4000" dirty="0"/>
           </a:p>
@@ -14498,9 +15302,129 @@
           </a:p>
         </p:txBody>
       </p:sp>
+      <p:sp>
+        <p:nvSpPr>
+          <p:cNvPr id="3" name="Text 1"/>
+          <p:cNvSpPr/>
+          <p:nvPr/>
+        </p:nvSpPr>
+        <p:spPr>
+          <a:xfrm>
+            <a:off x="365760" y="1005840"/>
+            <a:ext cx="11460175" cy="731520"/>
+          </a:xfrm>
+          <a:prstGeom prst="rect">
+            <a:avLst/>
+          </a:prstGeom>
+          <a:noFill/>
+          <a:ln/>
+        </p:spPr>
+        <p:txBody>
+          <a:bodyPr wrap="square" lIns="0" tIns="0" rIns="0" bIns="0" rtlCol="0" anchor="ctr">
+            <a:normAutofit/>
+          </a:bodyPr>
+          <a:lstStyle/>
+          <a:p>
+            <a:pPr algn="ctr" indent="0" marL="0">
+              <a:buNone/>
+            </a:pPr>
+            <a:r>
+              <a:rPr lang="en-US" sz="3600" b="1" dirty="0">
+                <a:solidFill>
+                  <a:srgbClr val="990011"/>
+                </a:solidFill>
+                <a:latin typeface="Times New Roman" pitchFamily="34" charset="0"/>
+                <a:ea typeface="Times New Roman" pitchFamily="34" charset="-122"/>
+                <a:cs typeface="Times New Roman" pitchFamily="34" charset="-120"/>
+              </a:rPr>
+              <a:t>1. Characteristics of Mountain Climates</a:t>
+            </a:r>
+            <a:endParaRPr lang="en-US" sz="3600" dirty="0"/>
+          </a:p>
+        </p:txBody>
+      </p:sp>
+      <p:sp>
+        <p:nvSpPr>
+          <p:cNvPr id="4" name="Text 2"/>
+          <p:cNvSpPr/>
+          <p:nvPr/>
+        </p:nvSpPr>
+        <p:spPr>
+          <a:xfrm>
+            <a:off x="365760" y="1783080"/>
+            <a:ext cx="4846320" cy="4617720"/>
+          </a:xfrm>
+          <a:prstGeom prst="rect">
+            <a:avLst/>
+          </a:prstGeom>
+          <a:noFill/>
+          <a:ln/>
+        </p:spPr>
+        <p:txBody>
+          <a:bodyPr wrap="square" lIns="0" tIns="0" rIns="0" bIns="0" rtlCol="0" anchor="t"/>
+          <a:lstStyle/>
+          <a:p>
+            <a:pPr algn="l" indent="0" marL="0">
+              <a:spcAft>
+                <a:spcPts val="800"/>
+              </a:spcAft>
+              <a:buNone/>
+            </a:pPr>
+            <a:r>
+              <a:rPr lang="en-US" sz="3200" i="1" dirty="0">
+                <a:solidFill>
+                  <a:srgbClr val="111111"/>
+                </a:solidFill>
+                <a:latin typeface="Times New Roman" pitchFamily="34" charset="0"/>
+                <a:ea typeface="Times New Roman" pitchFamily="34" charset="-122"/>
+                <a:cs typeface="Times New Roman" pitchFamily="34" charset="-120"/>
+              </a:rPr>
+              <a:t>Mountain climates have the following characteristics:</a:t>
+            </a:r>
+            <a:endParaRPr lang="en-US" sz="3200" dirty="0"/>
+          </a:p>
+          <a:p>
+            <a:pPr algn="l" indent="0" marL="0">
+              <a:spcAft>
+                <a:spcPts val="800"/>
+              </a:spcAft>
+              <a:buNone/>
+            </a:pPr>
+            <a:r>
+              <a:rPr lang="en-US" sz="3200" b="1" dirty="0">
+                <a:solidFill>
+                  <a:srgbClr val="111111"/>
+                </a:solidFill>
+                <a:latin typeface="Times New Roman" pitchFamily="34" charset="0"/>
+                <a:ea typeface="Times New Roman" pitchFamily="34" charset="-122"/>
+                <a:cs typeface="Times New Roman" pitchFamily="34" charset="-120"/>
+              </a:rPr>
+              <a:t>Lower temperatures: </a:t>
+            </a:r>
+            <a:pPr algn="l" indent="0" marL="0">
+              <a:spcAft>
+                <a:spcPts val="800"/>
+              </a:spcAft>
+              <a:buNone/>
+            </a:pPr>
+            <a:r>
+              <a:rPr lang="en-US" sz="3200" dirty="0">
+                <a:solidFill>
+                  <a:srgbClr val="111111"/>
+                </a:solidFill>
+                <a:latin typeface="Times New Roman" pitchFamily="34" charset="0"/>
+                <a:ea typeface="Times New Roman" pitchFamily="34" charset="-122"/>
+                <a:cs typeface="Times New Roman" pitchFamily="34" charset="-120"/>
+              </a:rPr>
+              <a:t>Temperature falls by about 6.5 °C per 1,000 m, so Bamenda and the Mandara Mountains are cooler than the plains.</a:t>
+            </a:r>
+            <a:endParaRPr lang="en-US" sz="3200" dirty="0"/>
+          </a:p>
+        </p:txBody>
+      </p:sp>
       <p:pic>
         <p:nvPicPr>
-          <p:cNvPr id="3" name="Image 0" descr="/home/claude/f4/img/minesec_sheet.png">    </p:cNvPr>
+          <p:cNvPr id="5" name="Image 0" descr="/home/claude/f4/img/v2/lapse_rate_big.png">    </p:cNvPr>
           <p:cNvPicPr>
             <a:picLocks noChangeAspect="1"/>
           </p:cNvPicPr>
@@ -14514,8 +15438,8 @@
         </p:blipFill>
         <p:spPr>
           <a:xfrm>
-            <a:off x="0" y="658368"/>
-            <a:ext cx="5120640" cy="5833872"/>
+            <a:off x="5349240" y="2617506"/>
+            <a:ext cx="6659575" cy="2601397"/>
           </a:xfrm>
           <a:prstGeom prst="rect">
             <a:avLst/>
@@ -14524,14 +15448,14 @@
       </p:pic>
       <p:sp>
         <p:nvSpPr>
-          <p:cNvPr id="4" name="Text 1"/>
+          <p:cNvPr id="6" name="Text 3"/>
           <p:cNvSpPr/>
           <p:nvPr/>
         </p:nvSpPr>
         <p:spPr>
           <a:xfrm>
-            <a:off x="5349240" y="1005840"/>
-            <a:ext cx="6522415" cy="731520"/>
+            <a:off x="5349240" y="6089904"/>
+            <a:ext cx="6659575" cy="347472"/>
           </a:xfrm>
           <a:prstGeom prst="rect">
             <a:avLst/>
@@ -14540,85 +15464,24 @@
           <a:ln/>
         </p:spPr>
         <p:txBody>
-          <a:bodyPr wrap="square" lIns="0" tIns="0" rIns="0" bIns="0" rtlCol="0" anchor="ctr">
-            <a:normAutofit/>
-          </a:bodyPr>
+          <a:bodyPr wrap="square" lIns="0" tIns="0" rIns="0" bIns="0" rtlCol="0" anchor="ctr"/>
           <a:lstStyle/>
           <a:p>
             <a:pPr algn="ctr" indent="0" marL="0">
               <a:buNone/>
             </a:pPr>
             <a:r>
-              <a:rPr lang="en-US" sz="3600" b="1" dirty="0">
-                <a:solidFill>
-                  <a:srgbClr val="990011"/>
+              <a:rPr lang="en-US" sz="1600" i="1" dirty="0">
+                <a:solidFill>
+                  <a:srgbClr val="555555"/>
                 </a:solidFill>
                 <a:latin typeface="Times New Roman" pitchFamily="34" charset="0"/>
                 <a:ea typeface="Times New Roman" pitchFamily="34" charset="-122"/>
                 <a:cs typeface="Times New Roman" pitchFamily="34" charset="-120"/>
               </a:rPr>
-              <a:t>1. Characteristics of Mountain Climates (continued)</a:t>
-            </a:r>
-            <a:endParaRPr lang="en-US" sz="3600" dirty="0"/>
-          </a:p>
-        </p:txBody>
-      </p:sp>
-      <p:sp>
-        <p:nvSpPr>
-          <p:cNvPr id="5" name="Text 2"/>
-          <p:cNvSpPr/>
-          <p:nvPr/>
-        </p:nvSpPr>
-        <p:spPr>
-          <a:xfrm>
-            <a:off x="5349240" y="1783080"/>
-            <a:ext cx="6522415" cy="4663440"/>
-          </a:xfrm>
-          <a:prstGeom prst="rect">
-            <a:avLst/>
-          </a:prstGeom>
-          <a:noFill/>
-          <a:ln/>
-        </p:spPr>
-        <p:txBody>
-          <a:bodyPr wrap="square" lIns="0" tIns="0" rIns="0" bIns="0" rtlCol="0" anchor="t"/>
-          <a:lstStyle/>
-          <a:p>
-            <a:pPr algn="l" indent="0" marL="0">
-              <a:spcAft>
-                <a:spcPts val="800"/>
-              </a:spcAft>
-              <a:buNone/>
-            </a:pPr>
-            <a:r>
-              <a:rPr lang="en-US" sz="4000" b="1" dirty="0">
-                <a:solidFill>
-                  <a:srgbClr val="111111"/>
-                </a:solidFill>
-                <a:latin typeface="Times New Roman" pitchFamily="34" charset="0"/>
-                <a:ea typeface="Times New Roman" pitchFamily="34" charset="-122"/>
-                <a:cs typeface="Times New Roman" pitchFamily="34" charset="-120"/>
-              </a:rPr>
-              <a:t>Vertical zonation: </a:t>
-            </a:r>
-            <a:pPr algn="l" indent="0" marL="0">
-              <a:spcAft>
-                <a:spcPts val="800"/>
-              </a:spcAft>
-              <a:buNone/>
-            </a:pPr>
-            <a:r>
-              <a:rPr lang="en-US" sz="4000" dirty="0">
-                <a:solidFill>
-                  <a:srgbClr val="111111"/>
-                </a:solidFill>
-                <a:latin typeface="Times New Roman" pitchFamily="34" charset="0"/>
-                <a:ea typeface="Times New Roman" pitchFamily="34" charset="-122"/>
-                <a:cs typeface="Times New Roman" pitchFamily="34" charset="-120"/>
-              </a:rPr>
-              <a:t>Climate and vegetation change in belts with height. Forest gives way to grassland, then to bare rock or snow.</a:t>
-            </a:r>
-            <a:endParaRPr lang="en-US" sz="4000" dirty="0"/>
+              <a:t>Illustration: temperature and height</a:t>
+            </a:r>
+            <a:endParaRPr lang="en-US" sz="1600" dirty="0"/>
           </a:p>
         </p:txBody>
       </p:sp>
@@ -14734,48 +15597,9 @@
           </a:p>
         </p:txBody>
       </p:sp>
-      <p:sp>
-        <p:nvSpPr>
-          <p:cNvPr id="3" name="Text 1"/>
-          <p:cNvSpPr/>
-          <p:nvPr/>
-        </p:nvSpPr>
-        <p:spPr>
-          <a:xfrm>
-            <a:off x="457200" y="1005840"/>
-            <a:ext cx="11277295" cy="731520"/>
-          </a:xfrm>
-          <a:prstGeom prst="rect">
-            <a:avLst/>
-          </a:prstGeom>
-          <a:noFill/>
-          <a:ln/>
-        </p:spPr>
-        <p:txBody>
-          <a:bodyPr wrap="square" lIns="0" tIns="0" rIns="0" bIns="0" rtlCol="0" anchor="ctr"/>
-          <a:lstStyle/>
-          <a:p>
-            <a:pPr algn="ctr" indent="0" marL="0">
-              <a:buNone/>
-            </a:pPr>
-            <a:r>
-              <a:rPr lang="en-US" sz="3600" b="1" dirty="0">
-                <a:solidFill>
-                  <a:srgbClr val="990011"/>
-                </a:solidFill>
-                <a:latin typeface="Times New Roman" pitchFamily="34" charset="0"/>
-                <a:ea typeface="Times New Roman" pitchFamily="34" charset="-122"/>
-                <a:cs typeface="Times New Roman" pitchFamily="34" charset="-120"/>
-              </a:rPr>
-              <a:t>1. Characteristics of Mountain Climates</a:t>
-            </a:r>
-            <a:endParaRPr lang="en-US" sz="3600" dirty="0"/>
-          </a:p>
-        </p:txBody>
-      </p:sp>
       <p:pic>
         <p:nvPicPr>
-          <p:cNvPr id="4" name="Image 0" descr="/home/claude/f4/img/v2/lapse_rate_big.png">    </p:cNvPr>
+          <p:cNvPr id="3" name="Image 0" descr="/home/claude/f4/img/minesec_sheet.png">    </p:cNvPr>
           <p:cNvPicPr>
             <a:picLocks noChangeAspect="1"/>
           </p:cNvPicPr>
@@ -14789,8 +15613,8 @@
         </p:blipFill>
         <p:spPr>
           <a:xfrm>
-            <a:off x="629930" y="1783080"/>
-            <a:ext cx="10931835" cy="4270248"/>
+            <a:off x="0" y="658368"/>
+            <a:ext cx="5120640" cy="5833872"/>
           </a:xfrm>
           <a:prstGeom prst="rect">
             <a:avLst/>
@@ -14799,14 +15623,14 @@
       </p:pic>
       <p:sp>
         <p:nvSpPr>
-          <p:cNvPr id="5" name="Text 2"/>
+          <p:cNvPr id="4" name="Text 1"/>
           <p:cNvSpPr/>
           <p:nvPr/>
         </p:nvSpPr>
         <p:spPr>
           <a:xfrm>
-            <a:off x="457200" y="6089904"/>
-            <a:ext cx="11277295" cy="347472"/>
+            <a:off x="5349240" y="1005840"/>
+            <a:ext cx="6522415" cy="731520"/>
           </a:xfrm>
           <a:prstGeom prst="rect">
             <a:avLst/>
@@ -14815,24 +15639,85 @@
           <a:ln/>
         </p:spPr>
         <p:txBody>
-          <a:bodyPr wrap="square" lIns="0" tIns="0" rIns="0" bIns="0" rtlCol="0" anchor="ctr"/>
+          <a:bodyPr wrap="square" lIns="0" tIns="0" rIns="0" bIns="0" rtlCol="0" anchor="ctr">
+            <a:normAutofit/>
+          </a:bodyPr>
           <a:lstStyle/>
           <a:p>
             <a:pPr algn="ctr" indent="0" marL="0">
               <a:buNone/>
             </a:pPr>
             <a:r>
-              <a:rPr lang="en-US" sz="1800" i="1" dirty="0">
-                <a:solidFill>
-                  <a:srgbClr val="555555"/>
+              <a:rPr lang="en-US" sz="3600" b="1" dirty="0">
+                <a:solidFill>
+                  <a:srgbClr val="990011"/>
                 </a:solidFill>
                 <a:latin typeface="Times New Roman" pitchFamily="34" charset="0"/>
                 <a:ea typeface="Times New Roman" pitchFamily="34" charset="-122"/>
                 <a:cs typeface="Times New Roman" pitchFamily="34" charset="-120"/>
               </a:rPr>
-              <a:t>Illustration: temperature falls with altitude</a:t>
-            </a:r>
-            <a:endParaRPr lang="en-US" sz="1800" dirty="0"/>
+              <a:t>1. Characteristics of Mountain Climates</a:t>
+            </a:r>
+            <a:endParaRPr lang="en-US" sz="3600" dirty="0"/>
+          </a:p>
+        </p:txBody>
+      </p:sp>
+      <p:sp>
+        <p:nvSpPr>
+          <p:cNvPr id="5" name="Text 2"/>
+          <p:cNvSpPr/>
+          <p:nvPr/>
+        </p:nvSpPr>
+        <p:spPr>
+          <a:xfrm>
+            <a:off x="5349240" y="1783080"/>
+            <a:ext cx="6522415" cy="4663440"/>
+          </a:xfrm>
+          <a:prstGeom prst="rect">
+            <a:avLst/>
+          </a:prstGeom>
+          <a:noFill/>
+          <a:ln/>
+        </p:spPr>
+        <p:txBody>
+          <a:bodyPr wrap="square" lIns="0" tIns="0" rIns="0" bIns="0" rtlCol="0" anchor="t"/>
+          <a:lstStyle/>
+          <a:p>
+            <a:pPr algn="l" indent="0" marL="0">
+              <a:spcAft>
+                <a:spcPts val="800"/>
+              </a:spcAft>
+              <a:buNone/>
+            </a:pPr>
+            <a:r>
+              <a:rPr lang="en-US" sz="4000" b="1" dirty="0">
+                <a:solidFill>
+                  <a:srgbClr val="111111"/>
+                </a:solidFill>
+                <a:latin typeface="Times New Roman" pitchFamily="34" charset="0"/>
+                <a:ea typeface="Times New Roman" pitchFamily="34" charset="-122"/>
+                <a:cs typeface="Times New Roman" pitchFamily="34" charset="-120"/>
+              </a:rPr>
+              <a:t>Lower air pressure: </a:t>
+            </a:r>
+            <a:pPr algn="l" indent="0" marL="0">
+              <a:spcAft>
+                <a:spcPts val="800"/>
+              </a:spcAft>
+              <a:buNone/>
+            </a:pPr>
+            <a:r>
+              <a:rPr lang="en-US" sz="4000" dirty="0">
+                <a:solidFill>
+                  <a:srgbClr val="111111"/>
+                </a:solidFill>
+                <a:latin typeface="Times New Roman" pitchFamily="34" charset="0"/>
+                <a:ea typeface="Times New Roman" pitchFamily="34" charset="-122"/>
+                <a:cs typeface="Times New Roman" pitchFamily="34" charset="-120"/>
+              </a:rPr>
+              <a:t>The air is thinner and contains less oxygen.</a:t>
+            </a:r>
+            <a:endParaRPr lang="en-US" sz="4000" dirty="0"/>
           </a:p>
         </p:txBody>
       </p:sp>
@@ -15069,7 +15954,7 @@
                 <a:ea typeface="Times New Roman" pitchFamily="34" charset="-122"/>
                 <a:cs typeface="Times New Roman" pitchFamily="34" charset="-120"/>
               </a:rPr>
-              <a:t>Measure the temperature at noon in a sunny yard and under a tree. Explain the difference.</a:t>
+              <a:t>State how temperature changes with altitude.</a:t>
             </a:r>
             <a:endParaRPr lang="en-US" sz="4000" dirty="0"/>
           </a:p>
@@ -15187,9 +16072,109 @@
           </a:p>
         </p:txBody>
       </p:sp>
+      <p:sp>
+        <p:nvSpPr>
+          <p:cNvPr id="3" name="Text 1"/>
+          <p:cNvSpPr/>
+          <p:nvPr/>
+        </p:nvSpPr>
+        <p:spPr>
+          <a:xfrm>
+            <a:off x="365760" y="1005840"/>
+            <a:ext cx="11460175" cy="731520"/>
+          </a:xfrm>
+          <a:prstGeom prst="rect">
+            <a:avLst/>
+          </a:prstGeom>
+          <a:noFill/>
+          <a:ln/>
+        </p:spPr>
+        <p:txBody>
+          <a:bodyPr wrap="square" lIns="0" tIns="0" rIns="0" bIns="0" rtlCol="0" anchor="ctr">
+            <a:normAutofit/>
+          </a:bodyPr>
+          <a:lstStyle/>
+          <a:p>
+            <a:pPr algn="ctr" indent="0" marL="0">
+              <a:buNone/>
+            </a:pPr>
+            <a:r>
+              <a:rPr lang="en-US" sz="3600" b="1" dirty="0">
+                <a:solidFill>
+                  <a:srgbClr val="990011"/>
+                </a:solidFill>
+                <a:latin typeface="Times New Roman" pitchFamily="34" charset="0"/>
+                <a:ea typeface="Times New Roman" pitchFamily="34" charset="-122"/>
+                <a:cs typeface="Times New Roman" pitchFamily="34" charset="-120"/>
+              </a:rPr>
+              <a:t>1. Characteristics of Mountain Climates</a:t>
+            </a:r>
+            <a:endParaRPr lang="en-US" sz="3600" dirty="0"/>
+          </a:p>
+        </p:txBody>
+      </p:sp>
+      <p:sp>
+        <p:nvSpPr>
+          <p:cNvPr id="4" name="Text 2"/>
+          <p:cNvSpPr/>
+          <p:nvPr/>
+        </p:nvSpPr>
+        <p:spPr>
+          <a:xfrm>
+            <a:off x="365760" y="1783080"/>
+            <a:ext cx="4846320" cy="4617720"/>
+          </a:xfrm>
+          <a:prstGeom prst="rect">
+            <a:avLst/>
+          </a:prstGeom>
+          <a:noFill/>
+          <a:ln/>
+        </p:spPr>
+        <p:txBody>
+          <a:bodyPr wrap="square" lIns="0" tIns="0" rIns="0" bIns="0" rtlCol="0" anchor="t"/>
+          <a:lstStyle/>
+          <a:p>
+            <a:pPr algn="l" indent="0" marL="0">
+              <a:spcAft>
+                <a:spcPts val="800"/>
+              </a:spcAft>
+              <a:buNone/>
+            </a:pPr>
+            <a:r>
+              <a:rPr lang="en-US" sz="3600" b="1" dirty="0">
+                <a:solidFill>
+                  <a:srgbClr val="111111"/>
+                </a:solidFill>
+                <a:latin typeface="Times New Roman" pitchFamily="34" charset="0"/>
+                <a:ea typeface="Times New Roman" pitchFamily="34" charset="-122"/>
+                <a:cs typeface="Times New Roman" pitchFamily="34" charset="-120"/>
+              </a:rPr>
+              <a:t>Heavy rain on windward slopes: </a:t>
+            </a:r>
+            <a:pPr algn="l" indent="0" marL="0">
+              <a:spcAft>
+                <a:spcPts val="800"/>
+              </a:spcAft>
+              <a:buNone/>
+            </a:pPr>
+            <a:r>
+              <a:rPr lang="en-US" sz="3600" dirty="0">
+                <a:solidFill>
+                  <a:srgbClr val="111111"/>
+                </a:solidFill>
+                <a:latin typeface="Times New Roman" pitchFamily="34" charset="0"/>
+                <a:ea typeface="Times New Roman" pitchFamily="34" charset="-122"/>
+                <a:cs typeface="Times New Roman" pitchFamily="34" charset="-120"/>
+              </a:rPr>
+              <a:t>Rising moist air cools and gives orographic rain, as on the seaward side of Mount Cameroon.</a:t>
+            </a:r>
+            <a:endParaRPr lang="en-US" sz="3600" dirty="0"/>
+          </a:p>
+        </p:txBody>
+      </p:sp>
       <p:pic>
         <p:nvPicPr>
-          <p:cNvPr id="3" name="Image 0" descr="/home/claude/f4/img/minesec_sheet.png">    </p:cNvPr>
+          <p:cNvPr id="5" name="Image 0" descr="/home/claude/f4/img/v2/rainfall_types_big.png">    </p:cNvPr>
           <p:cNvPicPr>
             <a:picLocks noChangeAspect="1"/>
           </p:cNvPicPr>
@@ -15203,8 +16188,8 @@
         </p:blipFill>
         <p:spPr>
           <a:xfrm>
-            <a:off x="0" y="658368"/>
-            <a:ext cx="1463040" cy="5833872"/>
+            <a:off x="5349240" y="2617506"/>
+            <a:ext cx="6659575" cy="2601397"/>
           </a:xfrm>
           <a:prstGeom prst="rect">
             <a:avLst/>
@@ -15213,14 +16198,14 @@
       </p:pic>
       <p:sp>
         <p:nvSpPr>
-          <p:cNvPr id="4" name="Text 1"/>
+          <p:cNvPr id="6" name="Text 3"/>
           <p:cNvSpPr/>
           <p:nvPr/>
         </p:nvSpPr>
         <p:spPr>
           <a:xfrm>
-            <a:off x="1691640" y="1005840"/>
-            <a:ext cx="10180015" cy="731520"/>
+            <a:off x="5349240" y="6089904"/>
+            <a:ext cx="6659575" cy="347472"/>
           </a:xfrm>
           <a:prstGeom prst="rect">
             <a:avLst/>
@@ -15229,142 +16214,24 @@
           <a:ln/>
         </p:spPr>
         <p:txBody>
-          <a:bodyPr wrap="square" lIns="0" tIns="0" rIns="0" bIns="0" rtlCol="0" anchor="ctr">
-            <a:normAutofit/>
-          </a:bodyPr>
+          <a:bodyPr wrap="square" lIns="0" tIns="0" rIns="0" bIns="0" rtlCol="0" anchor="ctr"/>
           <a:lstStyle/>
           <a:p>
             <a:pPr algn="ctr" indent="0" marL="0">
               <a:buNone/>
             </a:pPr>
             <a:r>
-              <a:rPr lang="en-US" sz="3600" b="1" dirty="0">
-                <a:solidFill>
-                  <a:srgbClr val="990011"/>
+              <a:rPr lang="en-US" sz="1600" i="1" dirty="0">
+                <a:solidFill>
+                  <a:srgbClr val="555555"/>
                 </a:solidFill>
                 <a:latin typeface="Times New Roman" pitchFamily="34" charset="0"/>
                 <a:ea typeface="Times New Roman" pitchFamily="34" charset="-122"/>
                 <a:cs typeface="Times New Roman" pitchFamily="34" charset="-120"/>
               </a:rPr>
-              <a:t>2. Factors of Mountain Climates</a:t>
-            </a:r>
-            <a:endParaRPr lang="en-US" sz="3600" dirty="0"/>
-          </a:p>
-        </p:txBody>
-      </p:sp>
-      <p:sp>
-        <p:nvSpPr>
-          <p:cNvPr id="5" name="Text 2"/>
-          <p:cNvSpPr/>
-          <p:nvPr/>
-        </p:nvSpPr>
-        <p:spPr>
-          <a:xfrm>
-            <a:off x="1691640" y="1783080"/>
-            <a:ext cx="10180015" cy="4663440"/>
-          </a:xfrm>
-          <a:prstGeom prst="rect">
-            <a:avLst/>
-          </a:prstGeom>
-          <a:noFill/>
-          <a:ln/>
-        </p:spPr>
-        <p:txBody>
-          <a:bodyPr wrap="square" lIns="0" tIns="0" rIns="0" bIns="0" rtlCol="0" anchor="t"/>
-          <a:lstStyle/>
-          <a:p>
-            <a:pPr algn="l" indent="0" marL="0">
-              <a:spcAft>
-                <a:spcPts val="800"/>
-              </a:spcAft>
-              <a:buNone/>
-            </a:pPr>
-            <a:r>
-              <a:rPr lang="en-US" sz="4000" i="1" dirty="0">
-                <a:solidFill>
-                  <a:srgbClr val="111111"/>
-                </a:solidFill>
-                <a:latin typeface="Times New Roman" pitchFamily="34" charset="0"/>
-                <a:ea typeface="Times New Roman" pitchFamily="34" charset="-122"/>
-                <a:cs typeface="Times New Roman" pitchFamily="34" charset="-120"/>
-              </a:rPr>
-              <a:t>The main factors of mountain climates are:</a:t>
-            </a:r>
-            <a:endParaRPr lang="en-US" sz="4000" dirty="0"/>
-          </a:p>
-          <a:p>
-            <a:pPr algn="l" indent="0" marL="0">
-              <a:spcAft>
-                <a:spcPts val="800"/>
-              </a:spcAft>
-              <a:buNone/>
-            </a:pPr>
-            <a:r>
-              <a:rPr lang="en-US" sz="4000" b="1" dirty="0">
-                <a:solidFill>
-                  <a:srgbClr val="111111"/>
-                </a:solidFill>
-                <a:latin typeface="Times New Roman" pitchFamily="34" charset="0"/>
-                <a:ea typeface="Times New Roman" pitchFamily="34" charset="-122"/>
-                <a:cs typeface="Times New Roman" pitchFamily="34" charset="-120"/>
-              </a:rPr>
-              <a:t>Altitude: </a:t>
-            </a:r>
-            <a:pPr algn="l" indent="0" marL="0">
-              <a:spcAft>
-                <a:spcPts val="800"/>
-              </a:spcAft>
-              <a:buNone/>
-            </a:pPr>
-            <a:r>
-              <a:rPr lang="en-US" sz="4000" dirty="0">
-                <a:solidFill>
-                  <a:srgbClr val="111111"/>
-                </a:solidFill>
-                <a:latin typeface="Times New Roman" pitchFamily="34" charset="0"/>
-                <a:ea typeface="Times New Roman" pitchFamily="34" charset="-122"/>
-                <a:cs typeface="Times New Roman" pitchFamily="34" charset="-120"/>
-              </a:rPr>
-              <a:t>Temperature and pressure fall with height. The air holds less heat and less oxygen.</a:t>
-            </a:r>
-            <a:endParaRPr lang="en-US" sz="4000" dirty="0"/>
-          </a:p>
-          <a:p>
-            <a:pPr algn="l" indent="0" marL="0">
-              <a:spcAft>
-                <a:spcPts val="800"/>
-              </a:spcAft>
-              <a:buNone/>
-            </a:pPr>
-            <a:r>
-              <a:rPr lang="en-US" sz="4000" b="1" dirty="0">
-                <a:solidFill>
-                  <a:srgbClr val="111111"/>
-                </a:solidFill>
-                <a:latin typeface="Times New Roman" pitchFamily="34" charset="0"/>
-                <a:ea typeface="Times New Roman" pitchFamily="34" charset="-122"/>
-                <a:cs typeface="Times New Roman" pitchFamily="34" charset="-120"/>
-              </a:rPr>
-              <a:t>Relief barrier: </a:t>
-            </a:r>
-            <a:pPr algn="l" indent="0" marL="0">
-              <a:spcAft>
-                <a:spcPts val="800"/>
-              </a:spcAft>
-              <a:buNone/>
-            </a:pPr>
-            <a:r>
-              <a:rPr lang="en-US" sz="4000" dirty="0">
-                <a:solidFill>
-                  <a:srgbClr val="111111"/>
-                </a:solidFill>
-                <a:latin typeface="Times New Roman" pitchFamily="34" charset="0"/>
-                <a:ea typeface="Times New Roman" pitchFamily="34" charset="-122"/>
-                <a:cs typeface="Times New Roman" pitchFamily="34" charset="-120"/>
-              </a:rPr>
-              <a:t>Mountains force moist winds to rise, cool and give rain on the windward side. The leeward side is a dry rain shadow.</a:t>
-            </a:r>
-            <a:endParaRPr lang="en-US" sz="4000" dirty="0"/>
+              <a:t>Illustration: relief rain</a:t>
+            </a:r>
+            <a:endParaRPr lang="en-US" sz="1600" dirty="0"/>
           </a:p>
         </p:txBody>
       </p:sp>
@@ -15539,7 +16406,7 @@
                 <a:ea typeface="Times New Roman" pitchFamily="34" charset="-122"/>
                 <a:cs typeface="Times New Roman" pitchFamily="34" charset="-120"/>
               </a:rPr>
-              <a:t>2. Factors of Mountain Climates (continued)</a:t>
+              <a:t>1. Characteristics of Mountain Climates</a:t>
             </a:r>
             <a:endParaRPr lang="en-US" sz="3600" dirty="0"/>
           </a:p>
@@ -15581,7 +16448,7 @@
                 <a:ea typeface="Times New Roman" pitchFamily="34" charset="-122"/>
                 <a:cs typeface="Times New Roman" pitchFamily="34" charset="-120"/>
               </a:rPr>
-              <a:t>Aspect and slope: </a:t>
+              <a:t>Strong solar radiation: </a:t>
             </a:r>
             <a:pPr algn="l" indent="0" marL="0">
               <a:spcAft>
@@ -15598,7 +16465,7 @@
                 <a:ea typeface="Times New Roman" pitchFamily="34" charset="-122"/>
                 <a:cs typeface="Times New Roman" pitchFamily="34" charset="-120"/>
               </a:rPr>
-              <a:t>Slopes facing the sun are warmer and drier than shaded slopes. Steep slopes lose cold air at night.</a:t>
+              <a:t>The thin, clean air lets more sunshine and ultraviolet rays through.</a:t>
             </a:r>
             <a:endParaRPr lang="en-US" sz="4000" dirty="0"/>
           </a:p>
@@ -15724,8 +16591,8 @@
         </p:nvSpPr>
         <p:spPr>
           <a:xfrm>
-            <a:off x="457200" y="1005840"/>
-            <a:ext cx="11277295" cy="731520"/>
+            <a:off x="365760" y="1005840"/>
+            <a:ext cx="11460175" cy="731520"/>
           </a:xfrm>
           <a:prstGeom prst="rect">
             <a:avLst/>
@@ -15734,7 +16601,9 @@
           <a:ln/>
         </p:spPr>
         <p:txBody>
-          <a:bodyPr wrap="square" lIns="0" tIns="0" rIns="0" bIns="0" rtlCol="0" anchor="ctr"/>
+          <a:bodyPr wrap="square" lIns="0" tIns="0" rIns="0" bIns="0" rtlCol="0" anchor="ctr">
+            <a:normAutofit/>
+          </a:bodyPr>
           <a:lstStyle/>
           <a:p>
             <a:pPr algn="ctr" indent="0" marL="0">
@@ -15749,7 +16618,66 @@
                 <a:ea typeface="Times New Roman" pitchFamily="34" charset="-122"/>
                 <a:cs typeface="Times New Roman" pitchFamily="34" charset="-120"/>
               </a:rPr>
-              <a:t>2. Factors of Mountain Climates</a:t>
+              <a:t>1. Characteristics of Mountain Climates</a:t>
+            </a:r>
+            <a:endParaRPr lang="en-US" sz="3600" dirty="0"/>
+          </a:p>
+        </p:txBody>
+      </p:sp>
+      <p:sp>
+        <p:nvSpPr>
+          <p:cNvPr id="4" name="Text 2"/>
+          <p:cNvSpPr/>
+          <p:nvPr/>
+        </p:nvSpPr>
+        <p:spPr>
+          <a:xfrm>
+            <a:off x="365760" y="1783080"/>
+            <a:ext cx="4846320" cy="4617720"/>
+          </a:xfrm>
+          <a:prstGeom prst="rect">
+            <a:avLst/>
+          </a:prstGeom>
+          <a:noFill/>
+          <a:ln/>
+        </p:spPr>
+        <p:txBody>
+          <a:bodyPr wrap="square" lIns="0" tIns="0" rIns="0" bIns="0" rtlCol="0" anchor="t"/>
+          <a:lstStyle/>
+          <a:p>
+            <a:pPr algn="l" indent="0" marL="0">
+              <a:spcAft>
+                <a:spcPts val="800"/>
+              </a:spcAft>
+              <a:buNone/>
+            </a:pPr>
+            <a:r>
+              <a:rPr lang="en-US" sz="3600" b="1" dirty="0">
+                <a:solidFill>
+                  <a:srgbClr val="111111"/>
+                </a:solidFill>
+                <a:latin typeface="Times New Roman" pitchFamily="34" charset="0"/>
+                <a:ea typeface="Times New Roman" pitchFamily="34" charset="-122"/>
+                <a:cs typeface="Times New Roman" pitchFamily="34" charset="-120"/>
+              </a:rPr>
+              <a:t>Large daily range: </a:t>
+            </a:r>
+            <a:pPr algn="l" indent="0" marL="0">
+              <a:spcAft>
+                <a:spcPts val="800"/>
+              </a:spcAft>
+              <a:buNone/>
+            </a:pPr>
+            <a:r>
+              <a:rPr lang="en-US" sz="3600" dirty="0">
+                <a:solidFill>
+                  <a:srgbClr val="111111"/>
+                </a:solidFill>
+                <a:latin typeface="Times New Roman" pitchFamily="34" charset="0"/>
+                <a:ea typeface="Times New Roman" pitchFamily="34" charset="-122"/>
+                <a:cs typeface="Times New Roman" pitchFamily="34" charset="-120"/>
+              </a:rPr>
+              <a:t>Days are warm in the sun, but nights are very cold, with frost on high summits.</a:t>
             </a:r>
             <a:endParaRPr lang="en-US" sz="3600" dirty="0"/>
           </a:p>
@@ -15757,7 +16685,7 @@
       </p:sp>
       <p:pic>
         <p:nvPicPr>
-          <p:cNvPr id="4" name="Image 0" descr="/home/claude/f4/img/v2/rainfall_types_big.png">    </p:cNvPr>
+          <p:cNvPr id="5" name="Image 0" descr="/home/claude/f4/img/v2/clim2_mountain.png">    </p:cNvPr>
           <p:cNvPicPr>
             <a:picLocks noChangeAspect="1"/>
           </p:cNvPicPr>
@@ -15771,8 +16699,8 @@
         </p:blipFill>
         <p:spPr>
           <a:xfrm>
-            <a:off x="629930" y="1783080"/>
-            <a:ext cx="10931835" cy="4270248"/>
+            <a:off x="5349240" y="2617506"/>
+            <a:ext cx="6659575" cy="2601397"/>
           </a:xfrm>
           <a:prstGeom prst="rect">
             <a:avLst/>
@@ -15781,14 +16709,14 @@
       </p:pic>
       <p:sp>
         <p:nvSpPr>
-          <p:cNvPr id="5" name="Text 2"/>
+          <p:cNvPr id="6" name="Text 3"/>
           <p:cNvSpPr/>
           <p:nvPr/>
         </p:nvSpPr>
         <p:spPr>
           <a:xfrm>
-            <a:off x="457200" y="6089904"/>
-            <a:ext cx="11277295" cy="347472"/>
+            <a:off x="5349240" y="6089904"/>
+            <a:ext cx="6659575" cy="347472"/>
           </a:xfrm>
           <a:prstGeom prst="rect">
             <a:avLst/>
@@ -15804,7 +16732,7 @@
               <a:buNone/>
             </a:pPr>
             <a:r>
-              <a:rPr lang="en-US" sz="1800" i="1" dirty="0">
+              <a:rPr lang="en-US" sz="1600" i="1" dirty="0">
                 <a:solidFill>
                   <a:srgbClr val="555555"/>
                 </a:solidFill>
@@ -15812,9 +16740,9 @@
                 <a:ea typeface="Times New Roman" pitchFamily="34" charset="-122"/>
                 <a:cs typeface="Times New Roman" pitchFamily="34" charset="-120"/>
               </a:rPr>
-              <a:t>Illustration: relief rain and rain shadow</a:t>
-            </a:r>
-            <a:endParaRPr lang="en-US" sz="1800" dirty="0"/>
+              <a:t>Illustration: characteristics of mountain climates</a:t>
+            </a:r>
+            <a:endParaRPr lang="en-US" sz="1600" dirty="0"/>
           </a:p>
         </p:txBody>
       </p:sp>
@@ -15924,7 +16852,7 @@
                 <a:ea typeface="Calibri" pitchFamily="34" charset="-122"/>
                 <a:cs typeface="Calibri" pitchFamily="34" charset="-120"/>
               </a:rPr>
-              <a:t>FORMATIVE EVALUATION</a:t>
+              <a:t>BOARD SUMMARY</a:t>
             </a:r>
             <a:endParaRPr lang="en-US" sz="1400" dirty="0"/>
           </a:p>
@@ -15989,7 +16917,7 @@
                 <a:ea typeface="Times New Roman" pitchFamily="34" charset="-122"/>
                 <a:cs typeface="Times New Roman" pitchFamily="34" charset="-120"/>
               </a:rPr>
-              <a:t>Evaluation 1</a:t>
+              <a:t>1. Characteristics of Mountain Climates</a:t>
             </a:r>
             <a:endParaRPr lang="en-US" sz="3600" dirty="0"/>
           </a:p>
@@ -16023,7 +16951,7 @@
               <a:buNone/>
             </a:pPr>
             <a:r>
-              <a:rPr lang="en-US" sz="4000" dirty="0">
+              <a:rPr lang="en-US" sz="4000" b="1" dirty="0">
                 <a:solidFill>
                   <a:srgbClr val="111111"/>
                 </a:solidFill>
@@ -16031,7 +16959,24 @@
                 <a:ea typeface="Times New Roman" pitchFamily="34" charset="-122"/>
                 <a:cs typeface="Times New Roman" pitchFamily="34" charset="-120"/>
               </a:rPr>
-              <a:t>Give three characteristics of mountain climates.</a:t>
+              <a:t>Vertical zonation: </a:t>
+            </a:r>
+            <a:pPr algn="l" indent="0" marL="0">
+              <a:spcAft>
+                <a:spcPts val="800"/>
+              </a:spcAft>
+              <a:buNone/>
+            </a:pPr>
+            <a:r>
+              <a:rPr lang="en-US" sz="4000" dirty="0">
+                <a:solidFill>
+                  <a:srgbClr val="111111"/>
+                </a:solidFill>
+                <a:latin typeface="Times New Roman" pitchFamily="34" charset="0"/>
+                <a:ea typeface="Times New Roman" pitchFamily="34" charset="-122"/>
+                <a:cs typeface="Times New Roman" pitchFamily="34" charset="-120"/>
+              </a:rPr>
+              <a:t>Climbing a mountain is like travelling from the Equator towards the poles.</a:t>
             </a:r>
             <a:endParaRPr lang="en-US" sz="4000" dirty="0"/>
           </a:p>
@@ -16143,15 +17088,135 @@
                 <a:ea typeface="Calibri" pitchFamily="34" charset="-122"/>
                 <a:cs typeface="Calibri" pitchFamily="34" charset="-120"/>
               </a:rPr>
-              <a:t>FORMATIVE EVALUATION</a:t>
+              <a:t>BOARD SUMMARY</a:t>
             </a:r>
             <a:endParaRPr lang="en-US" sz="1400" dirty="0"/>
+          </a:p>
+        </p:txBody>
+      </p:sp>
+      <p:sp>
+        <p:nvSpPr>
+          <p:cNvPr id="3" name="Text 1"/>
+          <p:cNvSpPr/>
+          <p:nvPr/>
+        </p:nvSpPr>
+        <p:spPr>
+          <a:xfrm>
+            <a:off x="365760" y="1005840"/>
+            <a:ext cx="11460175" cy="731520"/>
+          </a:xfrm>
+          <a:prstGeom prst="rect">
+            <a:avLst/>
+          </a:prstGeom>
+          <a:noFill/>
+          <a:ln/>
+        </p:spPr>
+        <p:txBody>
+          <a:bodyPr wrap="square" lIns="0" tIns="0" rIns="0" bIns="0" rtlCol="0" anchor="ctr">
+            <a:normAutofit/>
+          </a:bodyPr>
+          <a:lstStyle/>
+          <a:p>
+            <a:pPr algn="ctr" indent="0" marL="0">
+              <a:buNone/>
+            </a:pPr>
+            <a:r>
+              <a:rPr lang="en-US" sz="3600" b="1" dirty="0">
+                <a:solidFill>
+                  <a:srgbClr val="990011"/>
+                </a:solidFill>
+                <a:latin typeface="Times New Roman" pitchFamily="34" charset="0"/>
+                <a:ea typeface="Times New Roman" pitchFamily="34" charset="-122"/>
+                <a:cs typeface="Times New Roman" pitchFamily="34" charset="-120"/>
+              </a:rPr>
+              <a:t>2. Vertical Zonation: Mount Cameroon</a:t>
+            </a:r>
+            <a:endParaRPr lang="en-US" sz="3600" dirty="0"/>
+          </a:p>
+        </p:txBody>
+      </p:sp>
+      <p:sp>
+        <p:nvSpPr>
+          <p:cNvPr id="4" name="Text 2"/>
+          <p:cNvSpPr/>
+          <p:nvPr/>
+        </p:nvSpPr>
+        <p:spPr>
+          <a:xfrm>
+            <a:off x="365760" y="1783080"/>
+            <a:ext cx="4846320" cy="4617720"/>
+          </a:xfrm>
+          <a:prstGeom prst="rect">
+            <a:avLst/>
+          </a:prstGeom>
+          <a:noFill/>
+          <a:ln/>
+        </p:spPr>
+        <p:txBody>
+          <a:bodyPr wrap="square" lIns="0" tIns="0" rIns="0" bIns="0" rtlCol="0" anchor="t"/>
+          <a:lstStyle/>
+          <a:p>
+            <a:pPr algn="l" indent="0" marL="0">
+              <a:spcAft>
+                <a:spcPts val="800"/>
+              </a:spcAft>
+              <a:buNone/>
+            </a:pPr>
+            <a:r>
+              <a:rPr lang="en-US" sz="3600" i="1" dirty="0">
+                <a:solidFill>
+                  <a:srgbClr val="111111"/>
+                </a:solidFill>
+                <a:latin typeface="Times New Roman" pitchFamily="34" charset="0"/>
+                <a:ea typeface="Times New Roman" pitchFamily="34" charset="-122"/>
+                <a:cs typeface="Times New Roman" pitchFamily="34" charset="-120"/>
+              </a:rPr>
+              <a:t>On Mount Cameroon, climate and vegetation change with height as follows:</a:t>
+            </a:r>
+            <a:endParaRPr lang="en-US" sz="3600" dirty="0"/>
+          </a:p>
+          <a:p>
+            <a:pPr algn="l" indent="0" marL="0">
+              <a:spcAft>
+                <a:spcPts val="800"/>
+              </a:spcAft>
+              <a:buNone/>
+            </a:pPr>
+            <a:r>
+              <a:rPr lang="en-US" sz="3600" b="1" dirty="0">
+                <a:solidFill>
+                  <a:srgbClr val="111111"/>
+                </a:solidFill>
+                <a:latin typeface="Times New Roman" pitchFamily="34" charset="0"/>
+                <a:ea typeface="Times New Roman" pitchFamily="34" charset="-122"/>
+                <a:cs typeface="Times New Roman" pitchFamily="34" charset="-120"/>
+              </a:rPr>
+              <a:t>Lower slopes (0–800 m): </a:t>
+            </a:r>
+            <a:pPr algn="l" indent="0" marL="0">
+              <a:spcAft>
+                <a:spcPts val="800"/>
+              </a:spcAft>
+              <a:buNone/>
+            </a:pPr>
+            <a:r>
+              <a:rPr lang="en-US" sz="3600" dirty="0">
+                <a:solidFill>
+                  <a:srgbClr val="111111"/>
+                </a:solidFill>
+                <a:latin typeface="Times New Roman" pitchFamily="34" charset="0"/>
+                <a:ea typeface="Times New Roman" pitchFamily="34" charset="-122"/>
+                <a:cs typeface="Times New Roman" pitchFamily="34" charset="-120"/>
+              </a:rPr>
+              <a:t>Hot and very wet, with lowland rainforest and plantations of the CDC.</a:t>
+            </a:r>
+            <a:endParaRPr lang="en-US" sz="3600" dirty="0"/>
           </a:p>
         </p:txBody>
       </p:sp>
       <p:pic>
         <p:nvPicPr>
-          <p:cNvPr id="3" name="Image 0" descr="/home/claude/f4/img/minesec_sheet.png">    </p:cNvPr>
+          <p:cNvPr id="5" name="Image 0" descr="/home/claude/f4/img/v2/veg_altitude_big.png">    </p:cNvPr>
           <p:cNvPicPr>
             <a:picLocks noChangeAspect="1"/>
           </p:cNvPicPr>
@@ -16165,8 +17230,8 @@
         </p:blipFill>
         <p:spPr>
           <a:xfrm>
-            <a:off x="0" y="658368"/>
-            <a:ext cx="5120640" cy="5833872"/>
+            <a:off x="5349240" y="2617506"/>
+            <a:ext cx="6659575" cy="2601397"/>
           </a:xfrm>
           <a:prstGeom prst="rect">
             <a:avLst/>
@@ -16175,14 +17240,14 @@
       </p:pic>
       <p:sp>
         <p:nvSpPr>
-          <p:cNvPr id="4" name="Text 1"/>
+          <p:cNvPr id="6" name="Text 3"/>
           <p:cNvSpPr/>
           <p:nvPr/>
         </p:nvSpPr>
         <p:spPr>
           <a:xfrm>
-            <a:off x="5349240" y="1005840"/>
-            <a:ext cx="6522415" cy="731520"/>
+            <a:off x="5349240" y="6089904"/>
+            <a:ext cx="6659575" cy="347472"/>
           </a:xfrm>
           <a:prstGeom prst="rect">
             <a:avLst/>
@@ -16191,68 +17256,24 @@
           <a:ln/>
         </p:spPr>
         <p:txBody>
-          <a:bodyPr wrap="square" lIns="0" tIns="0" rIns="0" bIns="0" rtlCol="0" anchor="ctr">
-            <a:normAutofit/>
-          </a:bodyPr>
+          <a:bodyPr wrap="square" lIns="0" tIns="0" rIns="0" bIns="0" rtlCol="0" anchor="ctr"/>
           <a:lstStyle/>
           <a:p>
             <a:pPr algn="ctr" indent="0" marL="0">
               <a:buNone/>
             </a:pPr>
             <a:r>
-              <a:rPr lang="en-US" sz="3600" b="1" dirty="0">
-                <a:solidFill>
-                  <a:srgbClr val="990011"/>
+              <a:rPr lang="en-US" sz="1600" i="1" dirty="0">
+                <a:solidFill>
+                  <a:srgbClr val="555555"/>
                 </a:solidFill>
                 <a:latin typeface="Times New Roman" pitchFamily="34" charset="0"/>
                 <a:ea typeface="Times New Roman" pitchFamily="34" charset="-122"/>
                 <a:cs typeface="Times New Roman" pitchFamily="34" charset="-120"/>
               </a:rPr>
-              <a:t>Expected Answer</a:t>
-            </a:r>
-            <a:endParaRPr lang="en-US" sz="3600" dirty="0"/>
-          </a:p>
-        </p:txBody>
-      </p:sp>
-      <p:sp>
-        <p:nvSpPr>
-          <p:cNvPr id="5" name="Text 2"/>
-          <p:cNvSpPr/>
-          <p:nvPr/>
-        </p:nvSpPr>
-        <p:spPr>
-          <a:xfrm>
-            <a:off x="5349240" y="1783080"/>
-            <a:ext cx="6522415" cy="4663440"/>
-          </a:xfrm>
-          <a:prstGeom prst="rect">
-            <a:avLst/>
-          </a:prstGeom>
-          <a:noFill/>
-          <a:ln/>
-        </p:spPr>
-        <p:txBody>
-          <a:bodyPr wrap="square" lIns="0" tIns="0" rIns="0" bIns="0" rtlCol="0" anchor="t"/>
-          <a:lstStyle/>
-          <a:p>
-            <a:pPr algn="l" indent="0" marL="0">
-              <a:spcAft>
-                <a:spcPts val="800"/>
-              </a:spcAft>
-              <a:buNone/>
-            </a:pPr>
-            <a:r>
-              <a:rPr lang="en-US" sz="4000" dirty="0">
-                <a:solidFill>
-                  <a:srgbClr val="111111"/>
-                </a:solidFill>
-                <a:latin typeface="Times New Roman" pitchFamily="34" charset="0"/>
-                <a:ea typeface="Times New Roman" pitchFamily="34" charset="-122"/>
-                <a:cs typeface="Times New Roman" pitchFamily="34" charset="-120"/>
-              </a:rPr>
-              <a:t>Cooler temperatures, more rain on windward slopes, strong winds (and mist).</a:t>
-            </a:r>
-            <a:endParaRPr lang="en-US" sz="4000" dirty="0"/>
+              <a:t>Illustration: vegetation zones on Mount Cameroon</a:t>
+            </a:r>
+            <a:endParaRPr lang="en-US" sz="1600" dirty="0"/>
           </a:p>
         </p:txBody>
       </p:sp>
@@ -16362,7 +17383,7 @@
                 <a:ea typeface="Calibri" pitchFamily="34" charset="-122"/>
                 <a:cs typeface="Calibri" pitchFamily="34" charset="-120"/>
               </a:rPr>
-              <a:t>FORMATIVE EVALUATION</a:t>
+              <a:t>BOARD SUMMARY</a:t>
             </a:r>
             <a:endParaRPr lang="en-US" sz="1400" dirty="0"/>
           </a:p>
@@ -16385,7 +17406,7 @@
         <p:spPr>
           <a:xfrm>
             <a:off x="0" y="658368"/>
-            <a:ext cx="5120640" cy="5833872"/>
+            <a:ext cx="1463040" cy="5833872"/>
           </a:xfrm>
           <a:prstGeom prst="rect">
             <a:avLst/>
@@ -16400,8 +17421,8 @@
         </p:nvSpPr>
         <p:spPr>
           <a:xfrm>
-            <a:off x="5349240" y="1005840"/>
-            <a:ext cx="6522415" cy="731520"/>
+            <a:off x="1691640" y="1005840"/>
+            <a:ext cx="10180015" cy="731520"/>
           </a:xfrm>
           <a:prstGeom prst="rect">
             <a:avLst/>
@@ -16427,7 +17448,7 @@
                 <a:ea typeface="Times New Roman" pitchFamily="34" charset="-122"/>
                 <a:cs typeface="Times New Roman" pitchFamily="34" charset="-120"/>
               </a:rPr>
-              <a:t>Evaluation 2</a:t>
+              <a:t>2. Vertical Zonation: Mount Cameroon</a:t>
             </a:r>
             <a:endParaRPr lang="en-US" sz="3600" dirty="0"/>
           </a:p>
@@ -16441,8 +17462,8 @@
         </p:nvSpPr>
         <p:spPr>
           <a:xfrm>
-            <a:off x="5349240" y="1783080"/>
-            <a:ext cx="6522415" cy="4663440"/>
+            <a:off x="1691640" y="1783080"/>
+            <a:ext cx="10180015" cy="4663440"/>
           </a:xfrm>
           <a:prstGeom prst="rect">
             <a:avLst/>
@@ -16461,7 +17482,7 @@
               <a:buNone/>
             </a:pPr>
             <a:r>
-              <a:rPr lang="en-US" sz="4000" dirty="0">
+              <a:rPr lang="en-US" sz="4000" b="1" dirty="0">
                 <a:solidFill>
                   <a:srgbClr val="111111"/>
                 </a:solidFill>
@@ -16469,7 +17490,98 @@
                 <a:ea typeface="Times New Roman" pitchFamily="34" charset="-122"/>
                 <a:cs typeface="Times New Roman" pitchFamily="34" charset="-120"/>
               </a:rPr>
-              <a:t>Why is the leeward side of a mountain drier?</a:t>
+              <a:t>Middle slopes (800–2,400 m): </a:t>
+            </a:r>
+            <a:pPr algn="l" indent="0" marL="0">
+              <a:spcAft>
+                <a:spcPts val="800"/>
+              </a:spcAft>
+              <a:buNone/>
+            </a:pPr>
+            <a:r>
+              <a:rPr lang="en-US" sz="4000" dirty="0">
+                <a:solidFill>
+                  <a:srgbClr val="111111"/>
+                </a:solidFill>
+                <a:latin typeface="Times New Roman" pitchFamily="34" charset="0"/>
+                <a:ea typeface="Times New Roman" pitchFamily="34" charset="-122"/>
+                <a:cs typeface="Times New Roman" pitchFamily="34" charset="-120"/>
+              </a:rPr>
+              <a:t>Cooler and misty, with submontane and montane forest.</a:t>
+            </a:r>
+            <a:endParaRPr lang="en-US" sz="4000" dirty="0"/>
+          </a:p>
+          <a:p>
+            <a:pPr algn="l" indent="0" marL="0">
+              <a:spcAft>
+                <a:spcPts val="800"/>
+              </a:spcAft>
+              <a:buNone/>
+            </a:pPr>
+            <a:r>
+              <a:rPr lang="en-US" sz="4000" b="1" dirty="0">
+                <a:solidFill>
+                  <a:srgbClr val="111111"/>
+                </a:solidFill>
+                <a:latin typeface="Times New Roman" pitchFamily="34" charset="0"/>
+                <a:ea typeface="Times New Roman" pitchFamily="34" charset="-122"/>
+                <a:cs typeface="Times New Roman" pitchFamily="34" charset="-120"/>
+              </a:rPr>
+              <a:t>Upper slopes (2,400–3,800 m): </a:t>
+            </a:r>
+            <a:pPr algn="l" indent="0" marL="0">
+              <a:spcAft>
+                <a:spcPts val="800"/>
+              </a:spcAft>
+              <a:buNone/>
+            </a:pPr>
+            <a:r>
+              <a:rPr lang="en-US" sz="4000" dirty="0">
+                <a:solidFill>
+                  <a:srgbClr val="111111"/>
+                </a:solidFill>
+                <a:latin typeface="Times New Roman" pitchFamily="34" charset="0"/>
+                <a:ea typeface="Times New Roman" pitchFamily="34" charset="-122"/>
+                <a:cs typeface="Times New Roman" pitchFamily="34" charset="-120"/>
+              </a:rPr>
+              <a:t>Cool to cold, with montane grassland.</a:t>
+            </a:r>
+            <a:endParaRPr lang="en-US" sz="4000" dirty="0"/>
+          </a:p>
+          <a:p>
+            <a:pPr algn="l" indent="0" marL="0">
+              <a:spcAft>
+                <a:spcPts val="800"/>
+              </a:spcAft>
+              <a:buNone/>
+            </a:pPr>
+            <a:r>
+              <a:rPr lang="en-US" sz="4000" b="1" dirty="0">
+                <a:solidFill>
+                  <a:srgbClr val="111111"/>
+                </a:solidFill>
+                <a:latin typeface="Times New Roman" pitchFamily="34" charset="0"/>
+                <a:ea typeface="Times New Roman" pitchFamily="34" charset="-122"/>
+                <a:cs typeface="Times New Roman" pitchFamily="34" charset="-120"/>
+              </a:rPr>
+              <a:t>Summit (above 3,800 m): </a:t>
+            </a:r>
+            <a:pPr algn="l" indent="0" marL="0">
+              <a:spcAft>
+                <a:spcPts val="800"/>
+              </a:spcAft>
+              <a:buNone/>
+            </a:pPr>
+            <a:r>
+              <a:rPr lang="en-US" sz="4000" dirty="0">
+                <a:solidFill>
+                  <a:srgbClr val="111111"/>
+                </a:solidFill>
+                <a:latin typeface="Times New Roman" pitchFamily="34" charset="0"/>
+                <a:ea typeface="Times New Roman" pitchFamily="34" charset="-122"/>
+                <a:cs typeface="Times New Roman" pitchFamily="34" charset="-120"/>
+              </a:rPr>
+              <a:t>Cold, windy and dry, with bare lava and rock and frost at night.</a:t>
             </a:r>
             <a:endParaRPr lang="en-US" sz="4000" dirty="0"/>
           </a:p>
@@ -16581,7 +17693,7 @@
                 <a:ea typeface="Calibri" pitchFamily="34" charset="-122"/>
                 <a:cs typeface="Calibri" pitchFamily="34" charset="-120"/>
               </a:rPr>
-              <a:t>FORMATIVE EVALUATION</a:t>
+              <a:t>BOARD SUMMARY</a:t>
             </a:r>
             <a:endParaRPr lang="en-US" sz="1400" dirty="0"/>
           </a:p>
@@ -16646,7 +17758,7 @@
                 <a:ea typeface="Times New Roman" pitchFamily="34" charset="-122"/>
                 <a:cs typeface="Times New Roman" pitchFamily="34" charset="-120"/>
               </a:rPr>
-              <a:t>Expected Answer</a:t>
+              <a:t>3. Factors of Mountain Climates</a:t>
             </a:r>
             <a:endParaRPr lang="en-US" sz="3600" dirty="0"/>
           </a:p>
@@ -16680,7 +17792,7 @@
               <a:buNone/>
             </a:pPr>
             <a:r>
-              <a:rPr lang="en-US" sz="4000" dirty="0">
+              <a:rPr lang="en-US" sz="4000" i="1" dirty="0">
                 <a:solidFill>
                   <a:srgbClr val="111111"/>
                 </a:solidFill>
@@ -16688,7 +17800,44 @@
                 <a:ea typeface="Times New Roman" pitchFamily="34" charset="-122"/>
                 <a:cs typeface="Times New Roman" pitchFamily="34" charset="-120"/>
               </a:rPr>
-              <a:t>Air has lost its rain on the windward side and warms as it sinks.</a:t>
+              <a:t>Mountain climates are controlled by the following factors:</a:t>
+            </a:r>
+            <a:endParaRPr lang="en-US" sz="4000" dirty="0"/>
+          </a:p>
+          <a:p>
+            <a:pPr algn="l" indent="0" marL="0">
+              <a:spcAft>
+                <a:spcPts val="800"/>
+              </a:spcAft>
+              <a:buNone/>
+            </a:pPr>
+            <a:r>
+              <a:rPr lang="en-US" sz="4000" b="1" dirty="0">
+                <a:solidFill>
+                  <a:srgbClr val="111111"/>
+                </a:solidFill>
+                <a:latin typeface="Times New Roman" pitchFamily="34" charset="0"/>
+                <a:ea typeface="Times New Roman" pitchFamily="34" charset="-122"/>
+                <a:cs typeface="Times New Roman" pitchFamily="34" charset="-120"/>
+              </a:rPr>
+              <a:t>Altitude: </a:t>
+            </a:r>
+            <a:pPr algn="l" indent="0" marL="0">
+              <a:spcAft>
+                <a:spcPts val="800"/>
+              </a:spcAft>
+              <a:buNone/>
+            </a:pPr>
+            <a:r>
+              <a:rPr lang="en-US" sz="4000" dirty="0">
+                <a:solidFill>
+                  <a:srgbClr val="111111"/>
+                </a:solidFill>
+                <a:latin typeface="Times New Roman" pitchFamily="34" charset="0"/>
+                <a:ea typeface="Times New Roman" pitchFamily="34" charset="-122"/>
+                <a:cs typeface="Times New Roman" pitchFamily="34" charset="-120"/>
+              </a:rPr>
+              <a:t>It is the most important factor: height lowers temperature and pressure.</a:t>
             </a:r>
             <a:endParaRPr lang="en-US" sz="4000" dirty="0"/>
           </a:p>
@@ -16800,7 +17949,7 @@
                 <a:ea typeface="Calibri" pitchFamily="34" charset="-122"/>
                 <a:cs typeface="Calibri" pitchFamily="34" charset="-120"/>
               </a:rPr>
-              <a:t>REMEDIATION</a:t>
+              <a:t>BOARD SUMMARY</a:t>
             </a:r>
             <a:endParaRPr lang="en-US" sz="1400" dirty="0"/>
           </a:p>
@@ -16823,7 +17972,7 @@
         <p:spPr>
           <a:xfrm>
             <a:off x="0" y="658368"/>
-            <a:ext cx="3840480" cy="5833872"/>
+            <a:ext cx="5120640" cy="5833872"/>
           </a:xfrm>
           <a:prstGeom prst="rect">
             <a:avLst/>
@@ -16838,8 +17987,8 @@
         </p:nvSpPr>
         <p:spPr>
           <a:xfrm>
-            <a:off x="4069080" y="1005840"/>
-            <a:ext cx="7802575" cy="731520"/>
+            <a:off x="5349240" y="1005840"/>
+            <a:ext cx="6522415" cy="731520"/>
           </a:xfrm>
           <a:prstGeom prst="rect">
             <a:avLst/>
@@ -16865,7 +18014,7 @@
                 <a:ea typeface="Times New Roman" pitchFamily="34" charset="-122"/>
                 <a:cs typeface="Times New Roman" pitchFamily="34" charset="-120"/>
               </a:rPr>
-              <a:t>Remediation</a:t>
+              <a:t>3. Factors of Mountain Climates (continued)</a:t>
             </a:r>
             <a:endParaRPr lang="en-US" sz="3600" dirty="0"/>
           </a:p>
@@ -16879,8 +18028,8 @@
         </p:nvSpPr>
         <p:spPr>
           <a:xfrm>
-            <a:off x="4069080" y="1783080"/>
-            <a:ext cx="7802575" cy="4663440"/>
+            <a:off x="5349240" y="1783080"/>
+            <a:ext cx="6522415" cy="4663440"/>
           </a:xfrm>
           <a:prstGeom prst="rect">
             <a:avLst/>
@@ -16907,18 +18056,13 @@
                 <a:ea typeface="Times New Roman" pitchFamily="34" charset="-122"/>
                 <a:cs typeface="Times New Roman" pitchFamily="34" charset="-120"/>
               </a:rPr>
-              <a:t>Fill in the blanks:</a:t>
-            </a:r>
-            <a:endParaRPr lang="en-US" sz="4000" dirty="0"/>
-          </a:p>
-          <a:p>
-            <a:pPr algn="l" marL="342900" indent="-342900">
+              <a:t>Relief: </a:t>
+            </a:r>
+            <a:pPr algn="l" indent="0" marL="0">
               <a:spcAft>
                 <a:spcPts val="800"/>
               </a:spcAft>
-              <a:buSzPct val="100000"/>
-              <a:buFont typeface="+mj-lt"/>
-              <a:buAutoNum type="arabicPeriod" startAt="1"/>
+              <a:buNone/>
             </a:pPr>
             <a:r>
               <a:rPr lang="en-US" sz="4000" dirty="0">
@@ -16929,51 +18073,7 @@
                 <a:ea typeface="Times New Roman" pitchFamily="34" charset="-122"/>
                 <a:cs typeface="Times New Roman" pitchFamily="34" charset="-120"/>
               </a:rPr>
-              <a:t>Mountains are cool because of their ______.</a:t>
-            </a:r>
-            <a:endParaRPr lang="en-US" sz="4000" dirty="0"/>
-          </a:p>
-          <a:p>
-            <a:pPr algn="l" marL="342900" indent="-342900">
-              <a:spcAft>
-                <a:spcPts val="800"/>
-              </a:spcAft>
-              <a:buSzPct val="100000"/>
-              <a:buFont typeface="+mj-lt"/>
-              <a:buAutoNum type="arabicPeriod" startAt="1"/>
-            </a:pPr>
-            <a:r>
-              <a:rPr lang="en-US" sz="4000" dirty="0">
-                <a:solidFill>
-                  <a:srgbClr val="111111"/>
-                </a:solidFill>
-                <a:latin typeface="Times New Roman" pitchFamily="34" charset="0"/>
-                <a:ea typeface="Times New Roman" pitchFamily="34" charset="-122"/>
-                <a:cs typeface="Times New Roman" pitchFamily="34" charset="-120"/>
-              </a:rPr>
-              <a:t>The wet side of a mountain is the ______ side.</a:t>
-            </a:r>
-            <a:endParaRPr lang="en-US" sz="4000" dirty="0"/>
-          </a:p>
-          <a:p>
-            <a:pPr algn="l" marL="342900" indent="-342900">
-              <a:spcAft>
-                <a:spcPts val="800"/>
-              </a:spcAft>
-              <a:buSzPct val="100000"/>
-              <a:buFont typeface="+mj-lt"/>
-              <a:buAutoNum type="arabicPeriod" startAt="1"/>
-            </a:pPr>
-            <a:r>
-              <a:rPr lang="en-US" sz="4000" dirty="0">
-                <a:solidFill>
-                  <a:srgbClr val="111111"/>
-                </a:solidFill>
-                <a:latin typeface="Times New Roman" pitchFamily="34" charset="0"/>
-                <a:ea typeface="Times New Roman" pitchFamily="34" charset="-122"/>
-                <a:cs typeface="Times New Roman" pitchFamily="34" charset="-120"/>
-              </a:rPr>
-              <a:t>Tea grows well in cool ______.</a:t>
+              <a:t>The shape and orientation of mountains force air to rise, giving rain on the windward side and a dry rain shadow on the leeward side.</a:t>
             </a:r>
             <a:endParaRPr lang="en-US" sz="4000" dirty="0"/>
           </a:p>
@@ -17085,15 +18185,115 @@
                 <a:ea typeface="Calibri" pitchFamily="34" charset="-122"/>
                 <a:cs typeface="Calibri" pitchFamily="34" charset="-120"/>
               </a:rPr>
-              <a:t>HOMEWORK</a:t>
+              <a:t>BOARD SUMMARY</a:t>
             </a:r>
             <a:endParaRPr lang="en-US" sz="1400" dirty="0"/>
+          </a:p>
+        </p:txBody>
+      </p:sp>
+      <p:sp>
+        <p:nvSpPr>
+          <p:cNvPr id="3" name="Text 1"/>
+          <p:cNvSpPr/>
+          <p:nvPr/>
+        </p:nvSpPr>
+        <p:spPr>
+          <a:xfrm>
+            <a:off x="365760" y="1005840"/>
+            <a:ext cx="11460175" cy="731520"/>
+          </a:xfrm>
+          <a:prstGeom prst="rect">
+            <a:avLst/>
+          </a:prstGeom>
+          <a:noFill/>
+          <a:ln/>
+        </p:spPr>
+        <p:txBody>
+          <a:bodyPr wrap="square" lIns="0" tIns="0" rIns="0" bIns="0" rtlCol="0" anchor="ctr">
+            <a:normAutofit/>
+          </a:bodyPr>
+          <a:lstStyle/>
+          <a:p>
+            <a:pPr algn="ctr" indent="0" marL="0">
+              <a:buNone/>
+            </a:pPr>
+            <a:r>
+              <a:rPr lang="en-US" sz="3600" b="1" dirty="0">
+                <a:solidFill>
+                  <a:srgbClr val="990011"/>
+                </a:solidFill>
+                <a:latin typeface="Times New Roman" pitchFamily="34" charset="0"/>
+                <a:ea typeface="Times New Roman" pitchFamily="34" charset="-122"/>
+                <a:cs typeface="Times New Roman" pitchFamily="34" charset="-120"/>
+              </a:rPr>
+              <a:t>3. Factors of Mountain Climates</a:t>
+            </a:r>
+            <a:endParaRPr lang="en-US" sz="3600" dirty="0"/>
+          </a:p>
+        </p:txBody>
+      </p:sp>
+      <p:sp>
+        <p:nvSpPr>
+          <p:cNvPr id="4" name="Text 2"/>
+          <p:cNvSpPr/>
+          <p:nvPr/>
+        </p:nvSpPr>
+        <p:spPr>
+          <a:xfrm>
+            <a:off x="365760" y="1783080"/>
+            <a:ext cx="4846320" cy="4617720"/>
+          </a:xfrm>
+          <a:prstGeom prst="rect">
+            <a:avLst/>
+          </a:prstGeom>
+          <a:noFill/>
+          <a:ln/>
+        </p:spPr>
+        <p:txBody>
+          <a:bodyPr wrap="square" lIns="0" tIns="0" rIns="0" bIns="0" rtlCol="0" anchor="t"/>
+          <a:lstStyle/>
+          <a:p>
+            <a:pPr algn="l" indent="0" marL="0">
+              <a:spcAft>
+                <a:spcPts val="800"/>
+              </a:spcAft>
+              <a:buNone/>
+            </a:pPr>
+            <a:r>
+              <a:rPr lang="en-US" sz="3600" b="1" dirty="0">
+                <a:solidFill>
+                  <a:srgbClr val="111111"/>
+                </a:solidFill>
+                <a:latin typeface="Times New Roman" pitchFamily="34" charset="0"/>
+                <a:ea typeface="Times New Roman" pitchFamily="34" charset="-122"/>
+                <a:cs typeface="Times New Roman" pitchFamily="34" charset="-120"/>
+              </a:rPr>
+              <a:t>Aspect: </a:t>
+            </a:r>
+            <a:pPr algn="l" indent="0" marL="0">
+              <a:spcAft>
+                <a:spcPts val="800"/>
+              </a:spcAft>
+              <a:buNone/>
+            </a:pPr>
+            <a:r>
+              <a:rPr lang="en-US" sz="3600" dirty="0">
+                <a:solidFill>
+                  <a:srgbClr val="111111"/>
+                </a:solidFill>
+                <a:latin typeface="Times New Roman" pitchFamily="34" charset="0"/>
+                <a:ea typeface="Times New Roman" pitchFamily="34" charset="-122"/>
+                <a:cs typeface="Times New Roman" pitchFamily="34" charset="-120"/>
+              </a:rPr>
+              <a:t>Slopes facing the sun are warmer and drier, while slopes facing away are cooler, shadier and moister.</a:t>
+            </a:r>
+            <a:endParaRPr lang="en-US" sz="3600" dirty="0"/>
           </a:p>
         </p:txBody>
       </p:sp>
       <p:pic>
         <p:nvPicPr>
-          <p:cNvPr id="3" name="Image 0" descr="/home/claude/f4/img/minesec_sheet.png">    </p:cNvPr>
+          <p:cNvPr id="5" name="Image 0" descr="/home/claude/f4/img/v2/aspect_big.png">    </p:cNvPr>
           <p:cNvPicPr>
             <a:picLocks noChangeAspect="1"/>
           </p:cNvPicPr>
@@ -17107,8 +18307,8 @@
         </p:blipFill>
         <p:spPr>
           <a:xfrm>
-            <a:off x="0" y="658368"/>
-            <a:ext cx="5120640" cy="5833872"/>
+            <a:off x="5349240" y="2617506"/>
+            <a:ext cx="6659575" cy="2601397"/>
           </a:xfrm>
           <a:prstGeom prst="rect">
             <a:avLst/>
@@ -17117,14 +18317,14 @@
       </p:pic>
       <p:sp>
         <p:nvSpPr>
-          <p:cNvPr id="4" name="Text 1"/>
+          <p:cNvPr id="6" name="Text 3"/>
           <p:cNvSpPr/>
           <p:nvPr/>
         </p:nvSpPr>
         <p:spPr>
           <a:xfrm>
-            <a:off x="5349240" y="1005840"/>
-            <a:ext cx="6522415" cy="731520"/>
+            <a:off x="5349240" y="6089904"/>
+            <a:ext cx="6659575" cy="347472"/>
           </a:xfrm>
           <a:prstGeom prst="rect">
             <a:avLst/>
@@ -17133,68 +18333,24 @@
           <a:ln/>
         </p:spPr>
         <p:txBody>
-          <a:bodyPr wrap="square" lIns="0" tIns="0" rIns="0" bIns="0" rtlCol="0" anchor="ctr">
-            <a:normAutofit/>
-          </a:bodyPr>
+          <a:bodyPr wrap="square" lIns="0" tIns="0" rIns="0" bIns="0" rtlCol="0" anchor="ctr"/>
           <a:lstStyle/>
           <a:p>
             <a:pPr algn="ctr" indent="0" marL="0">
               <a:buNone/>
             </a:pPr>
             <a:r>
-              <a:rPr lang="en-US" sz="3600" b="1" dirty="0">
-                <a:solidFill>
-                  <a:srgbClr val="990011"/>
+              <a:rPr lang="en-US" sz="1600" i="1" dirty="0">
+                <a:solidFill>
+                  <a:srgbClr val="555555"/>
                 </a:solidFill>
                 <a:latin typeface="Times New Roman" pitchFamily="34" charset="0"/>
                 <a:ea typeface="Times New Roman" pitchFamily="34" charset="-122"/>
                 <a:cs typeface="Times New Roman" pitchFamily="34" charset="-120"/>
               </a:rPr>
-              <a:t>Homework</a:t>
-            </a:r>
-            <a:endParaRPr lang="en-US" sz="3600" dirty="0"/>
-          </a:p>
-        </p:txBody>
-      </p:sp>
-      <p:sp>
-        <p:nvSpPr>
-          <p:cNvPr id="5" name="Text 2"/>
-          <p:cNvSpPr/>
-          <p:nvPr/>
-        </p:nvSpPr>
-        <p:spPr>
-          <a:xfrm>
-            <a:off x="5349240" y="1783080"/>
-            <a:ext cx="6522415" cy="4663440"/>
-          </a:xfrm>
-          <a:prstGeom prst="rect">
-            <a:avLst/>
-          </a:prstGeom>
-          <a:noFill/>
-          <a:ln/>
-        </p:spPr>
-        <p:txBody>
-          <a:bodyPr wrap="square" lIns="0" tIns="0" rIns="0" bIns="0" rtlCol="0" anchor="t"/>
-          <a:lstStyle/>
-          <a:p>
-            <a:pPr algn="l" indent="0" marL="0">
-              <a:spcAft>
-                <a:spcPts val="800"/>
-              </a:spcAft>
-              <a:buNone/>
-            </a:pPr>
-            <a:r>
-              <a:rPr lang="en-US" sz="4000" dirty="0">
-                <a:solidFill>
-                  <a:srgbClr val="111111"/>
-                </a:solidFill>
-                <a:latin typeface="Times New Roman" pitchFamily="34" charset="0"/>
-                <a:ea typeface="Times New Roman" pitchFamily="34" charset="-122"/>
-                <a:cs typeface="Times New Roman" pitchFamily="34" charset="-120"/>
-              </a:rPr>
-              <a:t>Compare the climate of Buea and Douala and explain two differences.</a:t>
-            </a:r>
-            <a:endParaRPr lang="en-US" sz="4000" dirty="0"/>
+              <a:t>Illustration: the aspect of slopes</a:t>
+            </a:r>
+            <a:endParaRPr lang="en-US" sz="1600" dirty="0"/>
           </a:p>
         </p:txBody>
       </p:sp>
@@ -17304,7 +18460,7 @@
                 <a:ea typeface="Calibri" pitchFamily="34" charset="-122"/>
                 <a:cs typeface="Calibri" pitchFamily="34" charset="-120"/>
               </a:rPr>
-              <a:t>NEXT LESSON</a:t>
+              <a:t>BOARD SUMMARY</a:t>
             </a:r>
             <a:endParaRPr lang="en-US" sz="1400" dirty="0"/>
           </a:p>
@@ -17369,7 +18525,7 @@
                 <a:ea typeface="Times New Roman" pitchFamily="34" charset="-122"/>
                 <a:cs typeface="Times New Roman" pitchFamily="34" charset="-120"/>
               </a:rPr>
-              <a:t>Next Lesson</a:t>
+              <a:t>3. Factors of Mountain Climates</a:t>
             </a:r>
             <a:endParaRPr lang="en-US" sz="3600" dirty="0"/>
           </a:p>
@@ -17393,10 +18549,10 @@
           <a:ln/>
         </p:spPr>
         <p:txBody>
-          <a:bodyPr wrap="square" lIns="0" tIns="0" rIns="0" bIns="0" rtlCol="0" anchor="ctr"/>
-          <a:lstStyle/>
-          <a:p>
-            <a:pPr algn="ctr" indent="0" marL="0">
+          <a:bodyPr wrap="square" lIns="0" tIns="0" rIns="0" bIns="0" rtlCol="0" anchor="t"/>
+          <a:lstStyle/>
+          <a:p>
+            <a:pPr algn="l" indent="0" marL="0">
               <a:spcAft>
                 <a:spcPts val="800"/>
               </a:spcAft>
@@ -17411,27 +18567,24 @@
                 <a:ea typeface="Times New Roman" pitchFamily="34" charset="-122"/>
                 <a:cs typeface="Times New Roman" pitchFamily="34" charset="-120"/>
               </a:rPr>
-              <a:t>Our next lesson will be on:</a:t>
-            </a:r>
-            <a:endParaRPr lang="en-US" sz="4000" dirty="0"/>
-          </a:p>
-          <a:p>
-            <a:pPr algn="ctr" indent="0" marL="0">
+              <a:t>Latitude: </a:t>
+            </a:r>
+            <a:pPr algn="l" indent="0" marL="0">
               <a:spcAft>
                 <a:spcPts val="800"/>
               </a:spcAft>
               <a:buNone/>
             </a:pPr>
             <a:r>
-              <a:rPr lang="en-US" sz="4000" b="1" dirty="0">
-                <a:solidFill>
-                  <a:srgbClr val="990011"/>
+              <a:rPr lang="en-US" sz="4000" dirty="0">
+                <a:solidFill>
+                  <a:srgbClr val="111111"/>
                 </a:solidFill>
                 <a:latin typeface="Times New Roman" pitchFamily="34" charset="0"/>
                 <a:ea typeface="Times New Roman" pitchFamily="34" charset="-122"/>
                 <a:cs typeface="Times New Roman" pitchFamily="34" charset="-120"/>
               </a:rPr>
-              <a:t>Further Study 2: Weather Observation, Prediction, Modification and Mapping</a:t>
+              <a:t>It sets the base temperature: a mountain near Garoua has a much warmer base than a mountain of the same height in Europe.</a:t>
             </a:r>
             <a:endParaRPr lang="en-US" sz="4000" dirty="0"/>
           </a:p>
@@ -17650,7 +18803,7 @@
                 <a:ea typeface="Times New Roman" pitchFamily="34" charset="-122"/>
                 <a:cs typeface="Times New Roman" pitchFamily="34" charset="-120"/>
               </a:rPr>
-              <a:t>The temperature is higher in the sunny yard than under the tree. The tree shades the ground from the sun and cools the air by transpiration.</a:t>
+              <a:t>Temperature decreases as altitude increases, by about 6.5 °C per 1,000 m.</a:t>
             </a:r>
             <a:endParaRPr lang="en-US" sz="4000" dirty="0"/>
           </a:p>
@@ -17762,6 +18915,2099 @@
                 <a:ea typeface="Calibri" pitchFamily="34" charset="-122"/>
                 <a:cs typeface="Calibri" pitchFamily="34" charset="-120"/>
               </a:rPr>
+              <a:t>BOARD SUMMARY</a:t>
+            </a:r>
+            <a:endParaRPr lang="en-US" sz="1400" dirty="0"/>
+          </a:p>
+        </p:txBody>
+      </p:sp>
+      <p:sp>
+        <p:nvSpPr>
+          <p:cNvPr id="3" name="Text 1"/>
+          <p:cNvSpPr/>
+          <p:nvPr/>
+        </p:nvSpPr>
+        <p:spPr>
+          <a:xfrm>
+            <a:off x="365760" y="1005840"/>
+            <a:ext cx="11460175" cy="731520"/>
+          </a:xfrm>
+          <a:prstGeom prst="rect">
+            <a:avLst/>
+          </a:prstGeom>
+          <a:noFill/>
+          <a:ln/>
+        </p:spPr>
+        <p:txBody>
+          <a:bodyPr wrap="square" lIns="0" tIns="0" rIns="0" bIns="0" rtlCol="0" anchor="ctr">
+            <a:normAutofit/>
+          </a:bodyPr>
+          <a:lstStyle/>
+          <a:p>
+            <a:pPr algn="ctr" indent="0" marL="0">
+              <a:buNone/>
+            </a:pPr>
+            <a:r>
+              <a:rPr lang="en-US" sz="3600" b="1" dirty="0">
+                <a:solidFill>
+                  <a:srgbClr val="990011"/>
+                </a:solidFill>
+                <a:latin typeface="Times New Roman" pitchFamily="34" charset="0"/>
+                <a:ea typeface="Times New Roman" pitchFamily="34" charset="-122"/>
+                <a:cs typeface="Times New Roman" pitchFamily="34" charset="-120"/>
+              </a:rPr>
+              <a:t>3. Factors of Mountain Climates</a:t>
+            </a:r>
+            <a:endParaRPr lang="en-US" sz="3600" dirty="0"/>
+          </a:p>
+        </p:txBody>
+      </p:sp>
+      <p:sp>
+        <p:nvSpPr>
+          <p:cNvPr id="4" name="Text 2"/>
+          <p:cNvSpPr/>
+          <p:nvPr/>
+        </p:nvSpPr>
+        <p:spPr>
+          <a:xfrm>
+            <a:off x="365760" y="1783080"/>
+            <a:ext cx="4846320" cy="4617720"/>
+          </a:xfrm>
+          <a:prstGeom prst="rect">
+            <a:avLst/>
+          </a:prstGeom>
+          <a:noFill/>
+          <a:ln/>
+        </p:spPr>
+        <p:txBody>
+          <a:bodyPr wrap="square" lIns="0" tIns="0" rIns="0" bIns="0" rtlCol="0" anchor="t"/>
+          <a:lstStyle/>
+          <a:p>
+            <a:pPr algn="l" indent="0" marL="0">
+              <a:spcAft>
+                <a:spcPts val="800"/>
+              </a:spcAft>
+              <a:buNone/>
+            </a:pPr>
+            <a:r>
+              <a:rPr lang="en-US" sz="3600" b="1" dirty="0">
+                <a:solidFill>
+                  <a:srgbClr val="111111"/>
+                </a:solidFill>
+                <a:latin typeface="Times New Roman" pitchFamily="34" charset="0"/>
+                <a:ea typeface="Times New Roman" pitchFamily="34" charset="-122"/>
+                <a:cs typeface="Times New Roman" pitchFamily="34" charset="-120"/>
+              </a:rPr>
+              <a:t>Human use: </a:t>
+            </a:r>
+            <a:pPr algn="l" indent="0" marL="0">
+              <a:spcAft>
+                <a:spcPts val="800"/>
+              </a:spcAft>
+              <a:buNone/>
+            </a:pPr>
+            <a:r>
+              <a:rPr lang="en-US" sz="3600" dirty="0">
+                <a:solidFill>
+                  <a:srgbClr val="111111"/>
+                </a:solidFill>
+                <a:latin typeface="Times New Roman" pitchFamily="34" charset="0"/>
+                <a:ea typeface="Times New Roman" pitchFamily="34" charset="-122"/>
+                <a:cs typeface="Times New Roman" pitchFamily="34" charset="-120"/>
+              </a:rPr>
+              <a:t>The cool, healthy highlands of the West support dense populations, tea, coffee and tourism.</a:t>
+            </a:r>
+            <a:endParaRPr lang="en-US" sz="3600" dirty="0"/>
+          </a:p>
+        </p:txBody>
+      </p:sp>
+      <p:pic>
+        <p:nvPicPr>
+          <p:cNvPr id="5" name="Image 0" descr="/home/claude/f4/img/v2/f2t_tea_highlands.jpg">    </p:cNvPr>
+          <p:cNvPicPr>
+            <a:picLocks noChangeAspect="1"/>
+          </p:cNvPicPr>
+          <p:nvPr/>
+        </p:nvPicPr>
+        <p:blipFill>
+          <a:blip r:embed="rId1"/>
+          <a:stretch>
+            <a:fillRect/>
+          </a:stretch>
+        </p:blipFill>
+        <p:spPr>
+          <a:xfrm>
+            <a:off x="5349240" y="2451667"/>
+            <a:ext cx="6659575" cy="2933075"/>
+          </a:xfrm>
+          <a:prstGeom prst="rect">
+            <a:avLst/>
+          </a:prstGeom>
+        </p:spPr>
+      </p:pic>
+      <p:sp>
+        <p:nvSpPr>
+          <p:cNvPr id="6" name="Text 3"/>
+          <p:cNvSpPr/>
+          <p:nvPr/>
+        </p:nvSpPr>
+        <p:spPr>
+          <a:xfrm>
+            <a:off x="5349240" y="6089904"/>
+            <a:ext cx="6659575" cy="347472"/>
+          </a:xfrm>
+          <a:prstGeom prst="rect">
+            <a:avLst/>
+          </a:prstGeom>
+          <a:noFill/>
+          <a:ln/>
+        </p:spPr>
+        <p:txBody>
+          <a:bodyPr wrap="square" lIns="0" tIns="0" rIns="0" bIns="0" rtlCol="0" anchor="ctr"/>
+          <a:lstStyle/>
+          <a:p>
+            <a:pPr algn="ctr" indent="0" marL="0">
+              <a:buNone/>
+            </a:pPr>
+            <a:r>
+              <a:rPr lang="en-US" sz="1600" i="1" dirty="0">
+                <a:solidFill>
+                  <a:srgbClr val="555555"/>
+                </a:solidFill>
+                <a:latin typeface="Times New Roman" pitchFamily="34" charset="0"/>
+                <a:ea typeface="Times New Roman" pitchFamily="34" charset="-122"/>
+                <a:cs typeface="Times New Roman" pitchFamily="34" charset="-120"/>
+              </a:rPr>
+              <a:t>Illustration: tea on highlands</a:t>
+            </a:r>
+            <a:endParaRPr lang="en-US" sz="1600" dirty="0"/>
+          </a:p>
+        </p:txBody>
+      </p:sp>
+      <p:sp>
+        <p:nvSpPr>
+          <p:cNvPr id="25" name="Slide Number Placeholder 0"/>
+          <p:cNvSpPr>
+            <a:spLocks noGrp="1"/>
+          </p:cNvSpPr>
+          <p:nvPr>
+            <p:ph type="sldNum" sz="quarter" idx="4294967295"/>
+          </p:nvPr>
+        </p:nvSpPr>
+        <p:spPr>
+          <a:xfrm>
+            <a:off x="27432" y="91440"/>
+            <a:ext cx="585216" cy="475488"/>
+          </a:xfrm>
+          <a:prstGeom prst="rect">
+            <a:avLst/>
+          </a:prstGeom>
+          <a:extLst>
+            <a:ext uri="{C572A759-6A51-4108-AA02-DFA0A04FC94B}">
+              <ma14:wrappingTextBoxFlag xmlns:ma14="http://schemas.microsoft.com/office/mac/drawingml/2011/main" val="0"/>
+            </a:ext>
+          </a:extLst>
+        </p:spPr>
+        <p:txBody>
+          <a:bodyPr/>
+          <a:lstStyle>
+            <a:lvl1pPr>
+              <a:defRPr sz="2000">
+                <a:solidFill>
+                  <a:srgbClr val="FFFFFF"/>
+                </a:solidFill>
+                <a:latin typeface="Calibri"/>
+                <a:ea typeface="Calibri"/>
+                <a:cs typeface="Calibri"/>
+              </a:defRPr>
+            </a:lvl1pPr>
+          </a:lstStyle>
+          <a:p>
+            <a:pPr algn="ctr"/>
+            <a:fld id="{F7021451-1387-4CA6-816F-3879F97B5CBC}" type="slidenum">
+              <a:rPr b="1" lang="en-US"/>
+              <a:t>50</a:t>
+            </a:fld>
+            <a:endParaRPr lang="en-US"/>
+          </a:p>
+        </p:txBody>
+      </p:sp>
+    </p:spTree>
+  </p:cSld>
+  <p:clrMapOvr>
+    <a:masterClrMapping/>
+  </p:clrMapOvr>
+</p:sld>
+</file>
+
+<file path=ppt/slides/slide51.xml><?xml version="1.0" encoding="utf-8"?>
+<p:sld xmlns:a="http://schemas.openxmlformats.org/drawingml/2006/main" xmlns:r="http://schemas.openxmlformats.org/officeDocument/2006/relationships" xmlns:p="http://schemas.openxmlformats.org/presentationml/2006/main">
+  <p:cSld name="Slide 51">
+    <p:spTree>
+      <p:nvGrpSpPr>
+        <p:cNvPr id="1" name=""/>
+        <p:cNvGrpSpPr/>
+        <p:nvPr/>
+      </p:nvGrpSpPr>
+      <p:grpSpPr>
+        <a:xfrm>
+          <a:off x="0" y="0"/>
+          <a:ext cx="0" cy="0"/>
+          <a:chOff x="0" y="0"/>
+          <a:chExt cx="0" cy="0"/>
+        </a:xfrm>
+      </p:grpSpPr>
+      <p:sp>
+        <p:nvSpPr>
+          <p:cNvPr id="2" name="Text 0"/>
+          <p:cNvSpPr/>
+          <p:nvPr/>
+        </p:nvSpPr>
+        <p:spPr>
+          <a:xfrm>
+            <a:off x="457200" y="713232"/>
+            <a:ext cx="11368735" cy="274320"/>
+          </a:xfrm>
+          <a:prstGeom prst="rect">
+            <a:avLst/>
+          </a:prstGeom>
+          <a:noFill/>
+          <a:ln/>
+        </p:spPr>
+        <p:txBody>
+          <a:bodyPr wrap="square" lIns="0" tIns="0" rIns="0" bIns="0" rtlCol="0" anchor="ctr"/>
+          <a:lstStyle/>
+          <a:p>
+            <a:pPr algn="r" indent="0" marL="0">
+              <a:buNone/>
+            </a:pPr>
+            <a:r>
+              <a:rPr lang="en-US" sz="1400" b="1" dirty="0">
+                <a:solidFill>
+                  <a:srgbClr val="1C3F6E"/>
+                </a:solidFill>
+                <a:latin typeface="Calibri" pitchFamily="34" charset="0"/>
+                <a:ea typeface="Calibri" pitchFamily="34" charset="-122"/>
+                <a:cs typeface="Calibri" pitchFamily="34" charset="-120"/>
+              </a:rPr>
+              <a:t>FORMATIVE EVALUATION</a:t>
+            </a:r>
+            <a:endParaRPr lang="en-US" sz="1400" dirty="0"/>
+          </a:p>
+        </p:txBody>
+      </p:sp>
+      <p:pic>
+        <p:nvPicPr>
+          <p:cNvPr id="3" name="Image 0" descr="/home/claude/f4/img/minesec_sheet.png">    </p:cNvPr>
+          <p:cNvPicPr>
+            <a:picLocks noChangeAspect="1"/>
+          </p:cNvPicPr>
+          <p:nvPr/>
+        </p:nvPicPr>
+        <p:blipFill>
+          <a:blip r:embed="rId1"/>
+          <a:stretch>
+            <a:fillRect/>
+          </a:stretch>
+        </p:blipFill>
+        <p:spPr>
+          <a:xfrm>
+            <a:off x="0" y="658368"/>
+            <a:ext cx="5120640" cy="5833872"/>
+          </a:xfrm>
+          <a:prstGeom prst="rect">
+            <a:avLst/>
+          </a:prstGeom>
+        </p:spPr>
+      </p:pic>
+      <p:sp>
+        <p:nvSpPr>
+          <p:cNvPr id="4" name="Text 1"/>
+          <p:cNvSpPr/>
+          <p:nvPr/>
+        </p:nvSpPr>
+        <p:spPr>
+          <a:xfrm>
+            <a:off x="5349240" y="1005840"/>
+            <a:ext cx="6522415" cy="731520"/>
+          </a:xfrm>
+          <a:prstGeom prst="rect">
+            <a:avLst/>
+          </a:prstGeom>
+          <a:noFill/>
+          <a:ln/>
+        </p:spPr>
+        <p:txBody>
+          <a:bodyPr wrap="square" lIns="0" tIns="0" rIns="0" bIns="0" rtlCol="0" anchor="ctr">
+            <a:normAutofit/>
+          </a:bodyPr>
+          <a:lstStyle/>
+          <a:p>
+            <a:pPr algn="ctr" indent="0" marL="0">
+              <a:buNone/>
+            </a:pPr>
+            <a:r>
+              <a:rPr lang="en-US" sz="3600" b="1" dirty="0">
+                <a:solidFill>
+                  <a:srgbClr val="990011"/>
+                </a:solidFill>
+                <a:latin typeface="Times New Roman" pitchFamily="34" charset="0"/>
+                <a:ea typeface="Times New Roman" pitchFamily="34" charset="-122"/>
+                <a:cs typeface="Times New Roman" pitchFamily="34" charset="-120"/>
+              </a:rPr>
+              <a:t>Evaluation 1</a:t>
+            </a:r>
+            <a:endParaRPr lang="en-US" sz="3600" dirty="0"/>
+          </a:p>
+        </p:txBody>
+      </p:sp>
+      <p:sp>
+        <p:nvSpPr>
+          <p:cNvPr id="5" name="Text 2"/>
+          <p:cNvSpPr/>
+          <p:nvPr/>
+        </p:nvSpPr>
+        <p:spPr>
+          <a:xfrm>
+            <a:off x="5349240" y="1783080"/>
+            <a:ext cx="6522415" cy="4663440"/>
+          </a:xfrm>
+          <a:prstGeom prst="rect">
+            <a:avLst/>
+          </a:prstGeom>
+          <a:noFill/>
+          <a:ln/>
+        </p:spPr>
+        <p:txBody>
+          <a:bodyPr wrap="square" lIns="0" tIns="0" rIns="0" bIns="0" rtlCol="0" anchor="t"/>
+          <a:lstStyle/>
+          <a:p>
+            <a:pPr algn="l" indent="0" marL="0">
+              <a:spcAft>
+                <a:spcPts val="800"/>
+              </a:spcAft>
+              <a:buNone/>
+            </a:pPr>
+            <a:r>
+              <a:rPr lang="en-US" sz="4000" dirty="0">
+                <a:solidFill>
+                  <a:srgbClr val="111111"/>
+                </a:solidFill>
+                <a:latin typeface="Times New Roman" pitchFamily="34" charset="0"/>
+                <a:ea typeface="Times New Roman" pitchFamily="34" charset="-122"/>
+                <a:cs typeface="Times New Roman" pitchFamily="34" charset="-120"/>
+              </a:rPr>
+              <a:t>Give three characteristics of mountain climates.</a:t>
+            </a:r>
+            <a:endParaRPr lang="en-US" sz="4000" dirty="0"/>
+          </a:p>
+        </p:txBody>
+      </p:sp>
+      <p:sp>
+        <p:nvSpPr>
+          <p:cNvPr id="25" name="Slide Number Placeholder 0"/>
+          <p:cNvSpPr>
+            <a:spLocks noGrp="1"/>
+          </p:cNvSpPr>
+          <p:nvPr>
+            <p:ph type="sldNum" sz="quarter" idx="4294967295"/>
+          </p:nvPr>
+        </p:nvSpPr>
+        <p:spPr>
+          <a:xfrm>
+            <a:off x="27432" y="91440"/>
+            <a:ext cx="585216" cy="475488"/>
+          </a:xfrm>
+          <a:prstGeom prst="rect">
+            <a:avLst/>
+          </a:prstGeom>
+          <a:extLst>
+            <a:ext uri="{C572A759-6A51-4108-AA02-DFA0A04FC94B}">
+              <ma14:wrappingTextBoxFlag xmlns:ma14="http://schemas.microsoft.com/office/mac/drawingml/2011/main" val="0"/>
+            </a:ext>
+          </a:extLst>
+        </p:spPr>
+        <p:txBody>
+          <a:bodyPr/>
+          <a:lstStyle>
+            <a:lvl1pPr>
+              <a:defRPr sz="2000">
+                <a:solidFill>
+                  <a:srgbClr val="FFFFFF"/>
+                </a:solidFill>
+                <a:latin typeface="Calibri"/>
+                <a:ea typeface="Calibri"/>
+                <a:cs typeface="Calibri"/>
+              </a:defRPr>
+            </a:lvl1pPr>
+          </a:lstStyle>
+          <a:p>
+            <a:pPr algn="ctr"/>
+            <a:fld id="{F7021451-1387-4CA6-816F-3879F97B5CBC}" type="slidenum">
+              <a:rPr b="1" lang="en-US"/>
+              <a:t>51</a:t>
+            </a:fld>
+            <a:endParaRPr lang="en-US"/>
+          </a:p>
+        </p:txBody>
+      </p:sp>
+    </p:spTree>
+  </p:cSld>
+  <p:clrMapOvr>
+    <a:masterClrMapping/>
+  </p:clrMapOvr>
+</p:sld>
+</file>
+
+<file path=ppt/slides/slide52.xml><?xml version="1.0" encoding="utf-8"?>
+<p:sld xmlns:a="http://schemas.openxmlformats.org/drawingml/2006/main" xmlns:r="http://schemas.openxmlformats.org/officeDocument/2006/relationships" xmlns:p="http://schemas.openxmlformats.org/presentationml/2006/main">
+  <p:cSld name="Slide 52">
+    <p:spTree>
+      <p:nvGrpSpPr>
+        <p:cNvPr id="1" name=""/>
+        <p:cNvGrpSpPr/>
+        <p:nvPr/>
+      </p:nvGrpSpPr>
+      <p:grpSpPr>
+        <a:xfrm>
+          <a:off x="0" y="0"/>
+          <a:ext cx="0" cy="0"/>
+          <a:chOff x="0" y="0"/>
+          <a:chExt cx="0" cy="0"/>
+        </a:xfrm>
+      </p:grpSpPr>
+      <p:sp>
+        <p:nvSpPr>
+          <p:cNvPr id="2" name="Text 0"/>
+          <p:cNvSpPr/>
+          <p:nvPr/>
+        </p:nvSpPr>
+        <p:spPr>
+          <a:xfrm>
+            <a:off x="457200" y="713232"/>
+            <a:ext cx="11368735" cy="274320"/>
+          </a:xfrm>
+          <a:prstGeom prst="rect">
+            <a:avLst/>
+          </a:prstGeom>
+          <a:noFill/>
+          <a:ln/>
+        </p:spPr>
+        <p:txBody>
+          <a:bodyPr wrap="square" lIns="0" tIns="0" rIns="0" bIns="0" rtlCol="0" anchor="ctr"/>
+          <a:lstStyle/>
+          <a:p>
+            <a:pPr algn="r" indent="0" marL="0">
+              <a:buNone/>
+            </a:pPr>
+            <a:r>
+              <a:rPr lang="en-US" sz="1400" b="1" dirty="0">
+                <a:solidFill>
+                  <a:srgbClr val="1C3F6E"/>
+                </a:solidFill>
+                <a:latin typeface="Calibri" pitchFamily="34" charset="0"/>
+                <a:ea typeface="Calibri" pitchFamily="34" charset="-122"/>
+                <a:cs typeface="Calibri" pitchFamily="34" charset="-120"/>
+              </a:rPr>
+              <a:t>FORMATIVE EVALUATION</a:t>
+            </a:r>
+            <a:endParaRPr lang="en-US" sz="1400" dirty="0"/>
+          </a:p>
+        </p:txBody>
+      </p:sp>
+      <p:pic>
+        <p:nvPicPr>
+          <p:cNvPr id="3" name="Image 0" descr="/home/claude/f4/img/minesec_sheet.png">    </p:cNvPr>
+          <p:cNvPicPr>
+            <a:picLocks noChangeAspect="1"/>
+          </p:cNvPicPr>
+          <p:nvPr/>
+        </p:nvPicPr>
+        <p:blipFill>
+          <a:blip r:embed="rId1"/>
+          <a:stretch>
+            <a:fillRect/>
+          </a:stretch>
+        </p:blipFill>
+        <p:spPr>
+          <a:xfrm>
+            <a:off x="0" y="658368"/>
+            <a:ext cx="5120640" cy="5833872"/>
+          </a:xfrm>
+          <a:prstGeom prst="rect">
+            <a:avLst/>
+          </a:prstGeom>
+        </p:spPr>
+      </p:pic>
+      <p:sp>
+        <p:nvSpPr>
+          <p:cNvPr id="4" name="Text 1"/>
+          <p:cNvSpPr/>
+          <p:nvPr/>
+        </p:nvSpPr>
+        <p:spPr>
+          <a:xfrm>
+            <a:off x="5349240" y="1005840"/>
+            <a:ext cx="6522415" cy="731520"/>
+          </a:xfrm>
+          <a:prstGeom prst="rect">
+            <a:avLst/>
+          </a:prstGeom>
+          <a:noFill/>
+          <a:ln/>
+        </p:spPr>
+        <p:txBody>
+          <a:bodyPr wrap="square" lIns="0" tIns="0" rIns="0" bIns="0" rtlCol="0" anchor="ctr">
+            <a:normAutofit/>
+          </a:bodyPr>
+          <a:lstStyle/>
+          <a:p>
+            <a:pPr algn="ctr" indent="0" marL="0">
+              <a:buNone/>
+            </a:pPr>
+            <a:r>
+              <a:rPr lang="en-US" sz="3600" b="1" dirty="0">
+                <a:solidFill>
+                  <a:srgbClr val="990011"/>
+                </a:solidFill>
+                <a:latin typeface="Times New Roman" pitchFamily="34" charset="0"/>
+                <a:ea typeface="Times New Roman" pitchFamily="34" charset="-122"/>
+                <a:cs typeface="Times New Roman" pitchFamily="34" charset="-120"/>
+              </a:rPr>
+              <a:t>Expected Answer</a:t>
+            </a:r>
+            <a:endParaRPr lang="en-US" sz="3600" dirty="0"/>
+          </a:p>
+        </p:txBody>
+      </p:sp>
+      <p:sp>
+        <p:nvSpPr>
+          <p:cNvPr id="5" name="Text 2"/>
+          <p:cNvSpPr/>
+          <p:nvPr/>
+        </p:nvSpPr>
+        <p:spPr>
+          <a:xfrm>
+            <a:off x="5349240" y="1783080"/>
+            <a:ext cx="6522415" cy="4663440"/>
+          </a:xfrm>
+          <a:prstGeom prst="rect">
+            <a:avLst/>
+          </a:prstGeom>
+          <a:noFill/>
+          <a:ln/>
+        </p:spPr>
+        <p:txBody>
+          <a:bodyPr wrap="square" lIns="0" tIns="0" rIns="0" bIns="0" rtlCol="0" anchor="t"/>
+          <a:lstStyle/>
+          <a:p>
+            <a:pPr algn="l" indent="0" marL="0">
+              <a:spcAft>
+                <a:spcPts val="800"/>
+              </a:spcAft>
+              <a:buNone/>
+            </a:pPr>
+            <a:r>
+              <a:rPr lang="en-US" sz="4000" dirty="0">
+                <a:solidFill>
+                  <a:srgbClr val="111111"/>
+                </a:solidFill>
+                <a:latin typeface="Times New Roman" pitchFamily="34" charset="0"/>
+                <a:ea typeface="Times New Roman" pitchFamily="34" charset="-122"/>
+                <a:cs typeface="Times New Roman" pitchFamily="34" charset="-120"/>
+              </a:rPr>
+              <a:t>Lower temperatures, lower pressure, heavy windward rain, strong sunshine, large daily range (any three).</a:t>
+            </a:r>
+            <a:endParaRPr lang="en-US" sz="4000" dirty="0"/>
+          </a:p>
+        </p:txBody>
+      </p:sp>
+      <p:sp>
+        <p:nvSpPr>
+          <p:cNvPr id="25" name="Slide Number Placeholder 0"/>
+          <p:cNvSpPr>
+            <a:spLocks noGrp="1"/>
+          </p:cNvSpPr>
+          <p:nvPr>
+            <p:ph type="sldNum" sz="quarter" idx="4294967295"/>
+          </p:nvPr>
+        </p:nvSpPr>
+        <p:spPr>
+          <a:xfrm>
+            <a:off x="27432" y="91440"/>
+            <a:ext cx="585216" cy="475488"/>
+          </a:xfrm>
+          <a:prstGeom prst="rect">
+            <a:avLst/>
+          </a:prstGeom>
+          <a:extLst>
+            <a:ext uri="{C572A759-6A51-4108-AA02-DFA0A04FC94B}">
+              <ma14:wrappingTextBoxFlag xmlns:ma14="http://schemas.microsoft.com/office/mac/drawingml/2011/main" val="0"/>
+            </a:ext>
+          </a:extLst>
+        </p:spPr>
+        <p:txBody>
+          <a:bodyPr/>
+          <a:lstStyle>
+            <a:lvl1pPr>
+              <a:defRPr sz="2000">
+                <a:solidFill>
+                  <a:srgbClr val="FFFFFF"/>
+                </a:solidFill>
+                <a:latin typeface="Calibri"/>
+                <a:ea typeface="Calibri"/>
+                <a:cs typeface="Calibri"/>
+              </a:defRPr>
+            </a:lvl1pPr>
+          </a:lstStyle>
+          <a:p>
+            <a:pPr algn="ctr"/>
+            <a:fld id="{F7021451-1387-4CA6-816F-3879F97B5CBC}" type="slidenum">
+              <a:rPr b="1" lang="en-US"/>
+              <a:t>52</a:t>
+            </a:fld>
+            <a:endParaRPr lang="en-US"/>
+          </a:p>
+        </p:txBody>
+      </p:sp>
+    </p:spTree>
+  </p:cSld>
+  <p:clrMapOvr>
+    <a:masterClrMapping/>
+  </p:clrMapOvr>
+</p:sld>
+</file>
+
+<file path=ppt/slides/slide53.xml><?xml version="1.0" encoding="utf-8"?>
+<p:sld xmlns:a="http://schemas.openxmlformats.org/drawingml/2006/main" xmlns:r="http://schemas.openxmlformats.org/officeDocument/2006/relationships" xmlns:p="http://schemas.openxmlformats.org/presentationml/2006/main">
+  <p:cSld name="Slide 53">
+    <p:spTree>
+      <p:nvGrpSpPr>
+        <p:cNvPr id="1" name=""/>
+        <p:cNvGrpSpPr/>
+        <p:nvPr/>
+      </p:nvGrpSpPr>
+      <p:grpSpPr>
+        <a:xfrm>
+          <a:off x="0" y="0"/>
+          <a:ext cx="0" cy="0"/>
+          <a:chOff x="0" y="0"/>
+          <a:chExt cx="0" cy="0"/>
+        </a:xfrm>
+      </p:grpSpPr>
+      <p:sp>
+        <p:nvSpPr>
+          <p:cNvPr id="2" name="Text 0"/>
+          <p:cNvSpPr/>
+          <p:nvPr/>
+        </p:nvSpPr>
+        <p:spPr>
+          <a:xfrm>
+            <a:off x="457200" y="713232"/>
+            <a:ext cx="11368735" cy="274320"/>
+          </a:xfrm>
+          <a:prstGeom prst="rect">
+            <a:avLst/>
+          </a:prstGeom>
+          <a:noFill/>
+          <a:ln/>
+        </p:spPr>
+        <p:txBody>
+          <a:bodyPr wrap="square" lIns="0" tIns="0" rIns="0" bIns="0" rtlCol="0" anchor="ctr"/>
+          <a:lstStyle/>
+          <a:p>
+            <a:pPr algn="r" indent="0" marL="0">
+              <a:buNone/>
+            </a:pPr>
+            <a:r>
+              <a:rPr lang="en-US" sz="1400" b="1" dirty="0">
+                <a:solidFill>
+                  <a:srgbClr val="1C3F6E"/>
+                </a:solidFill>
+                <a:latin typeface="Calibri" pitchFamily="34" charset="0"/>
+                <a:ea typeface="Calibri" pitchFamily="34" charset="-122"/>
+                <a:cs typeface="Calibri" pitchFamily="34" charset="-120"/>
+              </a:rPr>
+              <a:t>FORMATIVE EVALUATION</a:t>
+            </a:r>
+            <a:endParaRPr lang="en-US" sz="1400" dirty="0"/>
+          </a:p>
+        </p:txBody>
+      </p:sp>
+      <p:pic>
+        <p:nvPicPr>
+          <p:cNvPr id="3" name="Image 0" descr="/home/claude/f4/img/minesec_sheet.png">    </p:cNvPr>
+          <p:cNvPicPr>
+            <a:picLocks noChangeAspect="1"/>
+          </p:cNvPicPr>
+          <p:nvPr/>
+        </p:nvPicPr>
+        <p:blipFill>
+          <a:blip r:embed="rId1"/>
+          <a:stretch>
+            <a:fillRect/>
+          </a:stretch>
+        </p:blipFill>
+        <p:spPr>
+          <a:xfrm>
+            <a:off x="0" y="658368"/>
+            <a:ext cx="5120640" cy="5833872"/>
+          </a:xfrm>
+          <a:prstGeom prst="rect">
+            <a:avLst/>
+          </a:prstGeom>
+        </p:spPr>
+      </p:pic>
+      <p:sp>
+        <p:nvSpPr>
+          <p:cNvPr id="4" name="Text 1"/>
+          <p:cNvSpPr/>
+          <p:nvPr/>
+        </p:nvSpPr>
+        <p:spPr>
+          <a:xfrm>
+            <a:off x="5349240" y="1005840"/>
+            <a:ext cx="6522415" cy="731520"/>
+          </a:xfrm>
+          <a:prstGeom prst="rect">
+            <a:avLst/>
+          </a:prstGeom>
+          <a:noFill/>
+          <a:ln/>
+        </p:spPr>
+        <p:txBody>
+          <a:bodyPr wrap="square" lIns="0" tIns="0" rIns="0" bIns="0" rtlCol="0" anchor="ctr">
+            <a:normAutofit/>
+          </a:bodyPr>
+          <a:lstStyle/>
+          <a:p>
+            <a:pPr algn="ctr" indent="0" marL="0">
+              <a:buNone/>
+            </a:pPr>
+            <a:r>
+              <a:rPr lang="en-US" sz="3600" b="1" dirty="0">
+                <a:solidFill>
+                  <a:srgbClr val="990011"/>
+                </a:solidFill>
+                <a:latin typeface="Times New Roman" pitchFamily="34" charset="0"/>
+                <a:ea typeface="Times New Roman" pitchFamily="34" charset="-122"/>
+                <a:cs typeface="Times New Roman" pitchFamily="34" charset="-120"/>
+              </a:rPr>
+              <a:t>Evaluation 2</a:t>
+            </a:r>
+            <a:endParaRPr lang="en-US" sz="3600" dirty="0"/>
+          </a:p>
+        </p:txBody>
+      </p:sp>
+      <p:sp>
+        <p:nvSpPr>
+          <p:cNvPr id="5" name="Text 2"/>
+          <p:cNvSpPr/>
+          <p:nvPr/>
+        </p:nvSpPr>
+        <p:spPr>
+          <a:xfrm>
+            <a:off x="5349240" y="1783080"/>
+            <a:ext cx="6522415" cy="4663440"/>
+          </a:xfrm>
+          <a:prstGeom prst="rect">
+            <a:avLst/>
+          </a:prstGeom>
+          <a:noFill/>
+          <a:ln/>
+        </p:spPr>
+        <p:txBody>
+          <a:bodyPr wrap="square" lIns="0" tIns="0" rIns="0" bIns="0" rtlCol="0" anchor="t"/>
+          <a:lstStyle/>
+          <a:p>
+            <a:pPr algn="l" indent="0" marL="0">
+              <a:spcAft>
+                <a:spcPts val="800"/>
+              </a:spcAft>
+              <a:buNone/>
+            </a:pPr>
+            <a:r>
+              <a:rPr lang="en-US" sz="4000" dirty="0">
+                <a:solidFill>
+                  <a:srgbClr val="111111"/>
+                </a:solidFill>
+                <a:latin typeface="Times New Roman" pitchFamily="34" charset="0"/>
+                <a:ea typeface="Times New Roman" pitchFamily="34" charset="-122"/>
+                <a:cs typeface="Times New Roman" pitchFamily="34" charset="-120"/>
+              </a:rPr>
+              <a:t>Explain why the sun feels stronger in the mountains although the air is cooler.</a:t>
+            </a:r>
+            <a:endParaRPr lang="en-US" sz="4000" dirty="0"/>
+          </a:p>
+        </p:txBody>
+      </p:sp>
+      <p:sp>
+        <p:nvSpPr>
+          <p:cNvPr id="25" name="Slide Number Placeholder 0"/>
+          <p:cNvSpPr>
+            <a:spLocks noGrp="1"/>
+          </p:cNvSpPr>
+          <p:nvPr>
+            <p:ph type="sldNum" sz="quarter" idx="4294967295"/>
+          </p:nvPr>
+        </p:nvSpPr>
+        <p:spPr>
+          <a:xfrm>
+            <a:off x="27432" y="91440"/>
+            <a:ext cx="585216" cy="475488"/>
+          </a:xfrm>
+          <a:prstGeom prst="rect">
+            <a:avLst/>
+          </a:prstGeom>
+          <a:extLst>
+            <a:ext uri="{C572A759-6A51-4108-AA02-DFA0A04FC94B}">
+              <ma14:wrappingTextBoxFlag xmlns:ma14="http://schemas.microsoft.com/office/mac/drawingml/2011/main" val="0"/>
+            </a:ext>
+          </a:extLst>
+        </p:spPr>
+        <p:txBody>
+          <a:bodyPr/>
+          <a:lstStyle>
+            <a:lvl1pPr>
+              <a:defRPr sz="2000">
+                <a:solidFill>
+                  <a:srgbClr val="FFFFFF"/>
+                </a:solidFill>
+                <a:latin typeface="Calibri"/>
+                <a:ea typeface="Calibri"/>
+                <a:cs typeface="Calibri"/>
+              </a:defRPr>
+            </a:lvl1pPr>
+          </a:lstStyle>
+          <a:p>
+            <a:pPr algn="ctr"/>
+            <a:fld id="{F7021451-1387-4CA6-816F-3879F97B5CBC}" type="slidenum">
+              <a:rPr b="1" lang="en-US"/>
+              <a:t>53</a:t>
+            </a:fld>
+            <a:endParaRPr lang="en-US"/>
+          </a:p>
+        </p:txBody>
+      </p:sp>
+    </p:spTree>
+  </p:cSld>
+  <p:clrMapOvr>
+    <a:masterClrMapping/>
+  </p:clrMapOvr>
+</p:sld>
+</file>
+
+<file path=ppt/slides/slide54.xml><?xml version="1.0" encoding="utf-8"?>
+<p:sld xmlns:a="http://schemas.openxmlformats.org/drawingml/2006/main" xmlns:r="http://schemas.openxmlformats.org/officeDocument/2006/relationships" xmlns:p="http://schemas.openxmlformats.org/presentationml/2006/main">
+  <p:cSld name="Slide 54">
+    <p:spTree>
+      <p:nvGrpSpPr>
+        <p:cNvPr id="1" name=""/>
+        <p:cNvGrpSpPr/>
+        <p:nvPr/>
+      </p:nvGrpSpPr>
+      <p:grpSpPr>
+        <a:xfrm>
+          <a:off x="0" y="0"/>
+          <a:ext cx="0" cy="0"/>
+          <a:chOff x="0" y="0"/>
+          <a:chExt cx="0" cy="0"/>
+        </a:xfrm>
+      </p:grpSpPr>
+      <p:sp>
+        <p:nvSpPr>
+          <p:cNvPr id="2" name="Text 0"/>
+          <p:cNvSpPr/>
+          <p:nvPr/>
+        </p:nvSpPr>
+        <p:spPr>
+          <a:xfrm>
+            <a:off x="457200" y="713232"/>
+            <a:ext cx="11368735" cy="274320"/>
+          </a:xfrm>
+          <a:prstGeom prst="rect">
+            <a:avLst/>
+          </a:prstGeom>
+          <a:noFill/>
+          <a:ln/>
+        </p:spPr>
+        <p:txBody>
+          <a:bodyPr wrap="square" lIns="0" tIns="0" rIns="0" bIns="0" rtlCol="0" anchor="ctr"/>
+          <a:lstStyle/>
+          <a:p>
+            <a:pPr algn="r" indent="0" marL="0">
+              <a:buNone/>
+            </a:pPr>
+            <a:r>
+              <a:rPr lang="en-US" sz="1400" b="1" dirty="0">
+                <a:solidFill>
+                  <a:srgbClr val="1C3F6E"/>
+                </a:solidFill>
+                <a:latin typeface="Calibri" pitchFamily="34" charset="0"/>
+                <a:ea typeface="Calibri" pitchFamily="34" charset="-122"/>
+                <a:cs typeface="Calibri" pitchFamily="34" charset="-120"/>
+              </a:rPr>
+              <a:t>FORMATIVE EVALUATION</a:t>
+            </a:r>
+            <a:endParaRPr lang="en-US" sz="1400" dirty="0"/>
+          </a:p>
+        </p:txBody>
+      </p:sp>
+      <p:pic>
+        <p:nvPicPr>
+          <p:cNvPr id="3" name="Image 0" descr="/home/claude/f4/img/minesec_sheet.png">    </p:cNvPr>
+          <p:cNvPicPr>
+            <a:picLocks noChangeAspect="1"/>
+          </p:cNvPicPr>
+          <p:nvPr/>
+        </p:nvPicPr>
+        <p:blipFill>
+          <a:blip r:embed="rId1"/>
+          <a:stretch>
+            <a:fillRect/>
+          </a:stretch>
+        </p:blipFill>
+        <p:spPr>
+          <a:xfrm>
+            <a:off x="0" y="658368"/>
+            <a:ext cx="5120640" cy="5833872"/>
+          </a:xfrm>
+          <a:prstGeom prst="rect">
+            <a:avLst/>
+          </a:prstGeom>
+        </p:spPr>
+      </p:pic>
+      <p:sp>
+        <p:nvSpPr>
+          <p:cNvPr id="4" name="Text 1"/>
+          <p:cNvSpPr/>
+          <p:nvPr/>
+        </p:nvSpPr>
+        <p:spPr>
+          <a:xfrm>
+            <a:off x="5349240" y="1005840"/>
+            <a:ext cx="6522415" cy="731520"/>
+          </a:xfrm>
+          <a:prstGeom prst="rect">
+            <a:avLst/>
+          </a:prstGeom>
+          <a:noFill/>
+          <a:ln/>
+        </p:spPr>
+        <p:txBody>
+          <a:bodyPr wrap="square" lIns="0" tIns="0" rIns="0" bIns="0" rtlCol="0" anchor="ctr">
+            <a:normAutofit/>
+          </a:bodyPr>
+          <a:lstStyle/>
+          <a:p>
+            <a:pPr algn="ctr" indent="0" marL="0">
+              <a:buNone/>
+            </a:pPr>
+            <a:r>
+              <a:rPr lang="en-US" sz="3600" b="1" dirty="0">
+                <a:solidFill>
+                  <a:srgbClr val="990011"/>
+                </a:solidFill>
+                <a:latin typeface="Times New Roman" pitchFamily="34" charset="0"/>
+                <a:ea typeface="Times New Roman" pitchFamily="34" charset="-122"/>
+                <a:cs typeface="Times New Roman" pitchFamily="34" charset="-120"/>
+              </a:rPr>
+              <a:t>Expected Answer</a:t>
+            </a:r>
+            <a:endParaRPr lang="en-US" sz="3600" dirty="0"/>
+          </a:p>
+        </p:txBody>
+      </p:sp>
+      <p:sp>
+        <p:nvSpPr>
+          <p:cNvPr id="5" name="Text 2"/>
+          <p:cNvSpPr/>
+          <p:nvPr/>
+        </p:nvSpPr>
+        <p:spPr>
+          <a:xfrm>
+            <a:off x="5349240" y="1783080"/>
+            <a:ext cx="6522415" cy="4663440"/>
+          </a:xfrm>
+          <a:prstGeom prst="rect">
+            <a:avLst/>
+          </a:prstGeom>
+          <a:noFill/>
+          <a:ln/>
+        </p:spPr>
+        <p:txBody>
+          <a:bodyPr wrap="square" lIns="0" tIns="0" rIns="0" bIns="0" rtlCol="0" anchor="t"/>
+          <a:lstStyle/>
+          <a:p>
+            <a:pPr algn="l" indent="0" marL="0">
+              <a:spcAft>
+                <a:spcPts val="800"/>
+              </a:spcAft>
+              <a:buNone/>
+            </a:pPr>
+            <a:r>
+              <a:rPr lang="en-US" sz="4000" dirty="0">
+                <a:solidFill>
+                  <a:srgbClr val="111111"/>
+                </a:solidFill>
+                <a:latin typeface="Times New Roman" pitchFamily="34" charset="0"/>
+                <a:ea typeface="Times New Roman" pitchFamily="34" charset="-122"/>
+                <a:cs typeface="Times New Roman" pitchFamily="34" charset="-120"/>
+              </a:rPr>
+              <a:t>The thin, clean air filters less solar and ultraviolet radiation.</a:t>
+            </a:r>
+            <a:endParaRPr lang="en-US" sz="4000" dirty="0"/>
+          </a:p>
+        </p:txBody>
+      </p:sp>
+      <p:sp>
+        <p:nvSpPr>
+          <p:cNvPr id="25" name="Slide Number Placeholder 0"/>
+          <p:cNvSpPr>
+            <a:spLocks noGrp="1"/>
+          </p:cNvSpPr>
+          <p:nvPr>
+            <p:ph type="sldNum" sz="quarter" idx="4294967295"/>
+          </p:nvPr>
+        </p:nvSpPr>
+        <p:spPr>
+          <a:xfrm>
+            <a:off x="27432" y="91440"/>
+            <a:ext cx="585216" cy="475488"/>
+          </a:xfrm>
+          <a:prstGeom prst="rect">
+            <a:avLst/>
+          </a:prstGeom>
+          <a:extLst>
+            <a:ext uri="{C572A759-6A51-4108-AA02-DFA0A04FC94B}">
+              <ma14:wrappingTextBoxFlag xmlns:ma14="http://schemas.microsoft.com/office/mac/drawingml/2011/main" val="0"/>
+            </a:ext>
+          </a:extLst>
+        </p:spPr>
+        <p:txBody>
+          <a:bodyPr/>
+          <a:lstStyle>
+            <a:lvl1pPr>
+              <a:defRPr sz="2000">
+                <a:solidFill>
+                  <a:srgbClr val="FFFFFF"/>
+                </a:solidFill>
+                <a:latin typeface="Calibri"/>
+                <a:ea typeface="Calibri"/>
+                <a:cs typeface="Calibri"/>
+              </a:defRPr>
+            </a:lvl1pPr>
+          </a:lstStyle>
+          <a:p>
+            <a:pPr algn="ctr"/>
+            <a:fld id="{F7021451-1387-4CA6-816F-3879F97B5CBC}" type="slidenum">
+              <a:rPr b="1" lang="en-US"/>
+              <a:t>54</a:t>
+            </a:fld>
+            <a:endParaRPr lang="en-US"/>
+          </a:p>
+        </p:txBody>
+      </p:sp>
+    </p:spTree>
+  </p:cSld>
+  <p:clrMapOvr>
+    <a:masterClrMapping/>
+  </p:clrMapOvr>
+</p:sld>
+</file>
+
+<file path=ppt/slides/slide55.xml><?xml version="1.0" encoding="utf-8"?>
+<p:sld xmlns:a="http://schemas.openxmlformats.org/drawingml/2006/main" xmlns:r="http://schemas.openxmlformats.org/officeDocument/2006/relationships" xmlns:p="http://schemas.openxmlformats.org/presentationml/2006/main">
+  <p:cSld name="Slide 55">
+    <p:spTree>
+      <p:nvGrpSpPr>
+        <p:cNvPr id="1" name=""/>
+        <p:cNvGrpSpPr/>
+        <p:nvPr/>
+      </p:nvGrpSpPr>
+      <p:grpSpPr>
+        <a:xfrm>
+          <a:off x="0" y="0"/>
+          <a:ext cx="0" cy="0"/>
+          <a:chOff x="0" y="0"/>
+          <a:chExt cx="0" cy="0"/>
+        </a:xfrm>
+      </p:grpSpPr>
+      <p:sp>
+        <p:nvSpPr>
+          <p:cNvPr id="2" name="Text 0"/>
+          <p:cNvSpPr/>
+          <p:nvPr/>
+        </p:nvSpPr>
+        <p:spPr>
+          <a:xfrm>
+            <a:off x="457200" y="713232"/>
+            <a:ext cx="11368735" cy="274320"/>
+          </a:xfrm>
+          <a:prstGeom prst="rect">
+            <a:avLst/>
+          </a:prstGeom>
+          <a:noFill/>
+          <a:ln/>
+        </p:spPr>
+        <p:txBody>
+          <a:bodyPr wrap="square" lIns="0" tIns="0" rIns="0" bIns="0" rtlCol="0" anchor="ctr"/>
+          <a:lstStyle/>
+          <a:p>
+            <a:pPr algn="r" indent="0" marL="0">
+              <a:buNone/>
+            </a:pPr>
+            <a:r>
+              <a:rPr lang="en-US" sz="1400" b="1" dirty="0">
+                <a:solidFill>
+                  <a:srgbClr val="1C3F6E"/>
+                </a:solidFill>
+                <a:latin typeface="Calibri" pitchFamily="34" charset="0"/>
+                <a:ea typeface="Calibri" pitchFamily="34" charset="-122"/>
+                <a:cs typeface="Calibri" pitchFamily="34" charset="-120"/>
+              </a:rPr>
+              <a:t>REMEDIATION</a:t>
+            </a:r>
+            <a:endParaRPr lang="en-US" sz="1400" dirty="0"/>
+          </a:p>
+        </p:txBody>
+      </p:sp>
+      <p:pic>
+        <p:nvPicPr>
+          <p:cNvPr id="3" name="Image 0" descr="/home/claude/f4/img/minesec_sheet.png">    </p:cNvPr>
+          <p:cNvPicPr>
+            <a:picLocks noChangeAspect="1"/>
+          </p:cNvPicPr>
+          <p:nvPr/>
+        </p:nvPicPr>
+        <p:blipFill>
+          <a:blip r:embed="rId1"/>
+          <a:stretch>
+            <a:fillRect/>
+          </a:stretch>
+        </p:blipFill>
+        <p:spPr>
+          <a:xfrm>
+            <a:off x="0" y="658368"/>
+            <a:ext cx="5120640" cy="5833872"/>
+          </a:xfrm>
+          <a:prstGeom prst="rect">
+            <a:avLst/>
+          </a:prstGeom>
+        </p:spPr>
+      </p:pic>
+      <p:sp>
+        <p:nvSpPr>
+          <p:cNvPr id="4" name="Text 1"/>
+          <p:cNvSpPr/>
+          <p:nvPr/>
+        </p:nvSpPr>
+        <p:spPr>
+          <a:xfrm>
+            <a:off x="5349240" y="1005840"/>
+            <a:ext cx="6522415" cy="731520"/>
+          </a:xfrm>
+          <a:prstGeom prst="rect">
+            <a:avLst/>
+          </a:prstGeom>
+          <a:noFill/>
+          <a:ln/>
+        </p:spPr>
+        <p:txBody>
+          <a:bodyPr wrap="square" lIns="0" tIns="0" rIns="0" bIns="0" rtlCol="0" anchor="ctr">
+            <a:normAutofit/>
+          </a:bodyPr>
+          <a:lstStyle/>
+          <a:p>
+            <a:pPr algn="ctr" indent="0" marL="0">
+              <a:buNone/>
+            </a:pPr>
+            <a:r>
+              <a:rPr lang="en-US" sz="3600" b="1" dirty="0">
+                <a:solidFill>
+                  <a:srgbClr val="990011"/>
+                </a:solidFill>
+                <a:latin typeface="Times New Roman" pitchFamily="34" charset="0"/>
+                <a:ea typeface="Times New Roman" pitchFamily="34" charset="-122"/>
+                <a:cs typeface="Times New Roman" pitchFamily="34" charset="-120"/>
+              </a:rPr>
+              <a:t>Remediation</a:t>
+            </a:r>
+            <a:endParaRPr lang="en-US" sz="3600" dirty="0"/>
+          </a:p>
+        </p:txBody>
+      </p:sp>
+      <p:sp>
+        <p:nvSpPr>
+          <p:cNvPr id="5" name="Text 2"/>
+          <p:cNvSpPr/>
+          <p:nvPr/>
+        </p:nvSpPr>
+        <p:spPr>
+          <a:xfrm>
+            <a:off x="5349240" y="1783080"/>
+            <a:ext cx="6522415" cy="4663440"/>
+          </a:xfrm>
+          <a:prstGeom prst="rect">
+            <a:avLst/>
+          </a:prstGeom>
+          <a:noFill/>
+          <a:ln/>
+        </p:spPr>
+        <p:txBody>
+          <a:bodyPr wrap="square" lIns="0" tIns="0" rIns="0" bIns="0" rtlCol="0" anchor="t"/>
+          <a:lstStyle/>
+          <a:p>
+            <a:pPr algn="l" indent="0" marL="0">
+              <a:spcAft>
+                <a:spcPts val="800"/>
+              </a:spcAft>
+              <a:buNone/>
+            </a:pPr>
+            <a:r>
+              <a:rPr lang="en-US" sz="4000" b="1" dirty="0">
+                <a:solidFill>
+                  <a:srgbClr val="111111"/>
+                </a:solidFill>
+                <a:latin typeface="Times New Roman" pitchFamily="34" charset="0"/>
+                <a:ea typeface="Times New Roman" pitchFamily="34" charset="-122"/>
+                <a:cs typeface="Times New Roman" pitchFamily="34" charset="-120"/>
+              </a:rPr>
+              <a:t>Fill in the blanks:</a:t>
+            </a:r>
+            <a:endParaRPr lang="en-US" sz="4000" dirty="0"/>
+          </a:p>
+          <a:p>
+            <a:pPr algn="l" marL="342900" indent="-342900">
+              <a:spcAft>
+                <a:spcPts val="800"/>
+              </a:spcAft>
+              <a:buSzPct val="100000"/>
+              <a:buFont typeface="+mj-lt"/>
+              <a:buAutoNum type="arabicPeriod" startAt="1"/>
+            </a:pPr>
+            <a:r>
+              <a:rPr lang="en-US" sz="4000" dirty="0">
+                <a:solidFill>
+                  <a:srgbClr val="111111"/>
+                </a:solidFill>
+                <a:latin typeface="Times New Roman" pitchFamily="34" charset="0"/>
+                <a:ea typeface="Times New Roman" pitchFamily="34" charset="-122"/>
+                <a:cs typeface="Times New Roman" pitchFamily="34" charset="-120"/>
+              </a:rPr>
+              <a:t>The most important factor of mountain climates is ______.</a:t>
+            </a:r>
+            <a:endParaRPr lang="en-US" sz="4000" dirty="0"/>
+          </a:p>
+          <a:p>
+            <a:pPr algn="l" marL="342900" indent="-342900">
+              <a:spcAft>
+                <a:spcPts val="800"/>
+              </a:spcAft>
+              <a:buSzPct val="100000"/>
+              <a:buFont typeface="+mj-lt"/>
+              <a:buAutoNum type="arabicPeriod" startAt="1"/>
+            </a:pPr>
+            <a:r>
+              <a:rPr lang="en-US" sz="4000" dirty="0">
+                <a:solidFill>
+                  <a:srgbClr val="111111"/>
+                </a:solidFill>
+                <a:latin typeface="Times New Roman" pitchFamily="34" charset="0"/>
+                <a:ea typeface="Times New Roman" pitchFamily="34" charset="-122"/>
+                <a:cs typeface="Times New Roman" pitchFamily="34" charset="-120"/>
+              </a:rPr>
+              <a:t>The sheltered side of a mountain is the ______ side.</a:t>
+            </a:r>
+            <a:endParaRPr lang="en-US" sz="4000" dirty="0"/>
+          </a:p>
+        </p:txBody>
+      </p:sp>
+      <p:sp>
+        <p:nvSpPr>
+          <p:cNvPr id="25" name="Slide Number Placeholder 0"/>
+          <p:cNvSpPr>
+            <a:spLocks noGrp="1"/>
+          </p:cNvSpPr>
+          <p:nvPr>
+            <p:ph type="sldNum" sz="quarter" idx="4294967295"/>
+          </p:nvPr>
+        </p:nvSpPr>
+        <p:spPr>
+          <a:xfrm>
+            <a:off x="27432" y="91440"/>
+            <a:ext cx="585216" cy="475488"/>
+          </a:xfrm>
+          <a:prstGeom prst="rect">
+            <a:avLst/>
+          </a:prstGeom>
+          <a:extLst>
+            <a:ext uri="{C572A759-6A51-4108-AA02-DFA0A04FC94B}">
+              <ma14:wrappingTextBoxFlag xmlns:ma14="http://schemas.microsoft.com/office/mac/drawingml/2011/main" val="0"/>
+            </a:ext>
+          </a:extLst>
+        </p:spPr>
+        <p:txBody>
+          <a:bodyPr/>
+          <a:lstStyle>
+            <a:lvl1pPr>
+              <a:defRPr sz="2000">
+                <a:solidFill>
+                  <a:srgbClr val="FFFFFF"/>
+                </a:solidFill>
+                <a:latin typeface="Calibri"/>
+                <a:ea typeface="Calibri"/>
+                <a:cs typeface="Calibri"/>
+              </a:defRPr>
+            </a:lvl1pPr>
+          </a:lstStyle>
+          <a:p>
+            <a:pPr algn="ctr"/>
+            <a:fld id="{F7021451-1387-4CA6-816F-3879F97B5CBC}" type="slidenum">
+              <a:rPr b="1" lang="en-US"/>
+              <a:t>55</a:t>
+            </a:fld>
+            <a:endParaRPr lang="en-US"/>
+          </a:p>
+        </p:txBody>
+      </p:sp>
+    </p:spTree>
+  </p:cSld>
+  <p:clrMapOvr>
+    <a:masterClrMapping/>
+  </p:clrMapOvr>
+</p:sld>
+</file>
+
+<file path=ppt/slides/slide56.xml><?xml version="1.0" encoding="utf-8"?>
+<p:sld xmlns:a="http://schemas.openxmlformats.org/drawingml/2006/main" xmlns:r="http://schemas.openxmlformats.org/officeDocument/2006/relationships" xmlns:p="http://schemas.openxmlformats.org/presentationml/2006/main">
+  <p:cSld name="Slide 56">
+    <p:spTree>
+      <p:nvGrpSpPr>
+        <p:cNvPr id="1" name=""/>
+        <p:cNvGrpSpPr/>
+        <p:nvPr/>
+      </p:nvGrpSpPr>
+      <p:grpSpPr>
+        <a:xfrm>
+          <a:off x="0" y="0"/>
+          <a:ext cx="0" cy="0"/>
+          <a:chOff x="0" y="0"/>
+          <a:chExt cx="0" cy="0"/>
+        </a:xfrm>
+      </p:grpSpPr>
+      <p:sp>
+        <p:nvSpPr>
+          <p:cNvPr id="2" name="Text 0"/>
+          <p:cNvSpPr/>
+          <p:nvPr/>
+        </p:nvSpPr>
+        <p:spPr>
+          <a:xfrm>
+            <a:off x="457200" y="713232"/>
+            <a:ext cx="11368735" cy="274320"/>
+          </a:xfrm>
+          <a:prstGeom prst="rect">
+            <a:avLst/>
+          </a:prstGeom>
+          <a:noFill/>
+          <a:ln/>
+        </p:spPr>
+        <p:txBody>
+          <a:bodyPr wrap="square" lIns="0" tIns="0" rIns="0" bIns="0" rtlCol="0" anchor="ctr"/>
+          <a:lstStyle/>
+          <a:p>
+            <a:pPr algn="r" indent="0" marL="0">
+              <a:buNone/>
+            </a:pPr>
+            <a:r>
+              <a:rPr lang="en-US" sz="1400" b="1" dirty="0">
+                <a:solidFill>
+                  <a:srgbClr val="1C3F6E"/>
+                </a:solidFill>
+                <a:latin typeface="Calibri" pitchFamily="34" charset="0"/>
+                <a:ea typeface="Calibri" pitchFamily="34" charset="-122"/>
+                <a:cs typeface="Calibri" pitchFamily="34" charset="-120"/>
+              </a:rPr>
+              <a:t>REMEDIATION</a:t>
+            </a:r>
+            <a:endParaRPr lang="en-US" sz="1400" dirty="0"/>
+          </a:p>
+        </p:txBody>
+      </p:sp>
+      <p:pic>
+        <p:nvPicPr>
+          <p:cNvPr id="3" name="Image 0" descr="/home/claude/f4/img/minesec_sheet.png">    </p:cNvPr>
+          <p:cNvPicPr>
+            <a:picLocks noChangeAspect="1"/>
+          </p:cNvPicPr>
+          <p:nvPr/>
+        </p:nvPicPr>
+        <p:blipFill>
+          <a:blip r:embed="rId1"/>
+          <a:stretch>
+            <a:fillRect/>
+          </a:stretch>
+        </p:blipFill>
+        <p:spPr>
+          <a:xfrm>
+            <a:off x="0" y="658368"/>
+            <a:ext cx="5120640" cy="5833872"/>
+          </a:xfrm>
+          <a:prstGeom prst="rect">
+            <a:avLst/>
+          </a:prstGeom>
+        </p:spPr>
+      </p:pic>
+      <p:sp>
+        <p:nvSpPr>
+          <p:cNvPr id="4" name="Text 1"/>
+          <p:cNvSpPr/>
+          <p:nvPr/>
+        </p:nvSpPr>
+        <p:spPr>
+          <a:xfrm>
+            <a:off x="5349240" y="1005840"/>
+            <a:ext cx="6522415" cy="731520"/>
+          </a:xfrm>
+          <a:prstGeom prst="rect">
+            <a:avLst/>
+          </a:prstGeom>
+          <a:noFill/>
+          <a:ln/>
+        </p:spPr>
+        <p:txBody>
+          <a:bodyPr wrap="square" lIns="0" tIns="0" rIns="0" bIns="0" rtlCol="0" anchor="ctr">
+            <a:normAutofit/>
+          </a:bodyPr>
+          <a:lstStyle/>
+          <a:p>
+            <a:pPr algn="ctr" indent="0" marL="0">
+              <a:buNone/>
+            </a:pPr>
+            <a:r>
+              <a:rPr lang="en-US" sz="3600" b="1" dirty="0">
+                <a:solidFill>
+                  <a:srgbClr val="990011"/>
+                </a:solidFill>
+                <a:latin typeface="Times New Roman" pitchFamily="34" charset="0"/>
+                <a:ea typeface="Times New Roman" pitchFamily="34" charset="-122"/>
+                <a:cs typeface="Times New Roman" pitchFamily="34" charset="-120"/>
+              </a:rPr>
+              <a:t>Remediation (continued)</a:t>
+            </a:r>
+            <a:endParaRPr lang="en-US" sz="3600" dirty="0"/>
+          </a:p>
+        </p:txBody>
+      </p:sp>
+      <p:sp>
+        <p:nvSpPr>
+          <p:cNvPr id="5" name="Text 2"/>
+          <p:cNvSpPr/>
+          <p:nvPr/>
+        </p:nvSpPr>
+        <p:spPr>
+          <a:xfrm>
+            <a:off x="5349240" y="1783080"/>
+            <a:ext cx="6522415" cy="4663440"/>
+          </a:xfrm>
+          <a:prstGeom prst="rect">
+            <a:avLst/>
+          </a:prstGeom>
+          <a:noFill/>
+          <a:ln/>
+        </p:spPr>
+        <p:txBody>
+          <a:bodyPr wrap="square" lIns="0" tIns="0" rIns="0" bIns="0" rtlCol="0" anchor="t"/>
+          <a:lstStyle/>
+          <a:p>
+            <a:pPr algn="l" marL="342900" indent="-342900">
+              <a:spcAft>
+                <a:spcPts val="800"/>
+              </a:spcAft>
+              <a:buSzPct val="100000"/>
+              <a:buFont typeface="+mj-lt"/>
+              <a:buAutoNum type="arabicPeriod" startAt="1"/>
+            </a:pPr>
+            <a:r>
+              <a:rPr lang="en-US" sz="4000" dirty="0">
+                <a:solidFill>
+                  <a:srgbClr val="111111"/>
+                </a:solidFill>
+                <a:latin typeface="Times New Roman" pitchFamily="34" charset="0"/>
+                <a:ea typeface="Times New Roman" pitchFamily="34" charset="-122"/>
+                <a:cs typeface="Times New Roman" pitchFamily="34" charset="-120"/>
+              </a:rPr>
+              <a:t>The change of vegetation with height is vertical ______.</a:t>
+            </a:r>
+            <a:endParaRPr lang="en-US" sz="4000" dirty="0"/>
+          </a:p>
+        </p:txBody>
+      </p:sp>
+      <p:sp>
+        <p:nvSpPr>
+          <p:cNvPr id="25" name="Slide Number Placeholder 0"/>
+          <p:cNvSpPr>
+            <a:spLocks noGrp="1"/>
+          </p:cNvSpPr>
+          <p:nvPr>
+            <p:ph type="sldNum" sz="quarter" idx="4294967295"/>
+          </p:nvPr>
+        </p:nvSpPr>
+        <p:spPr>
+          <a:xfrm>
+            <a:off x="27432" y="91440"/>
+            <a:ext cx="585216" cy="475488"/>
+          </a:xfrm>
+          <a:prstGeom prst="rect">
+            <a:avLst/>
+          </a:prstGeom>
+          <a:extLst>
+            <a:ext uri="{C572A759-6A51-4108-AA02-DFA0A04FC94B}">
+              <ma14:wrappingTextBoxFlag xmlns:ma14="http://schemas.microsoft.com/office/mac/drawingml/2011/main" val="0"/>
+            </a:ext>
+          </a:extLst>
+        </p:spPr>
+        <p:txBody>
+          <a:bodyPr/>
+          <a:lstStyle>
+            <a:lvl1pPr>
+              <a:defRPr sz="2000">
+                <a:solidFill>
+                  <a:srgbClr val="FFFFFF"/>
+                </a:solidFill>
+                <a:latin typeface="Calibri"/>
+                <a:ea typeface="Calibri"/>
+                <a:cs typeface="Calibri"/>
+              </a:defRPr>
+            </a:lvl1pPr>
+          </a:lstStyle>
+          <a:p>
+            <a:pPr algn="ctr"/>
+            <a:fld id="{F7021451-1387-4CA6-816F-3879F97B5CBC}" type="slidenum">
+              <a:rPr b="1" lang="en-US"/>
+              <a:t>56</a:t>
+            </a:fld>
+            <a:endParaRPr lang="en-US"/>
+          </a:p>
+        </p:txBody>
+      </p:sp>
+    </p:spTree>
+  </p:cSld>
+  <p:clrMapOvr>
+    <a:masterClrMapping/>
+  </p:clrMapOvr>
+</p:sld>
+</file>
+
+<file path=ppt/slides/slide57.xml><?xml version="1.0" encoding="utf-8"?>
+<p:sld xmlns:a="http://schemas.openxmlformats.org/drawingml/2006/main" xmlns:r="http://schemas.openxmlformats.org/officeDocument/2006/relationships" xmlns:p="http://schemas.openxmlformats.org/presentationml/2006/main">
+  <p:cSld name="Slide 57">
+    <p:spTree>
+      <p:nvGrpSpPr>
+        <p:cNvPr id="1" name=""/>
+        <p:cNvGrpSpPr/>
+        <p:nvPr/>
+      </p:nvGrpSpPr>
+      <p:grpSpPr>
+        <a:xfrm>
+          <a:off x="0" y="0"/>
+          <a:ext cx="0" cy="0"/>
+          <a:chOff x="0" y="0"/>
+          <a:chExt cx="0" cy="0"/>
+        </a:xfrm>
+      </p:grpSpPr>
+      <p:sp>
+        <p:nvSpPr>
+          <p:cNvPr id="2" name="Text 0"/>
+          <p:cNvSpPr/>
+          <p:nvPr/>
+        </p:nvSpPr>
+        <p:spPr>
+          <a:xfrm>
+            <a:off x="457200" y="713232"/>
+            <a:ext cx="11368735" cy="274320"/>
+          </a:xfrm>
+          <a:prstGeom prst="rect">
+            <a:avLst/>
+          </a:prstGeom>
+          <a:noFill/>
+          <a:ln/>
+        </p:spPr>
+        <p:txBody>
+          <a:bodyPr wrap="square" lIns="0" tIns="0" rIns="0" bIns="0" rtlCol="0" anchor="ctr"/>
+          <a:lstStyle/>
+          <a:p>
+            <a:pPr algn="r" indent="0" marL="0">
+              <a:buNone/>
+            </a:pPr>
+            <a:r>
+              <a:rPr lang="en-US" sz="1400" b="1" dirty="0">
+                <a:solidFill>
+                  <a:srgbClr val="1C3F6E"/>
+                </a:solidFill>
+                <a:latin typeface="Calibri" pitchFamily="34" charset="0"/>
+                <a:ea typeface="Calibri" pitchFamily="34" charset="-122"/>
+                <a:cs typeface="Calibri" pitchFamily="34" charset="-120"/>
+              </a:rPr>
+              <a:t>HOMEWORK</a:t>
+            </a:r>
+            <a:endParaRPr lang="en-US" sz="1400" dirty="0"/>
+          </a:p>
+        </p:txBody>
+      </p:sp>
+      <p:pic>
+        <p:nvPicPr>
+          <p:cNvPr id="3" name="Image 0" descr="/home/claude/f4/img/minesec_sheet.png">    </p:cNvPr>
+          <p:cNvPicPr>
+            <a:picLocks noChangeAspect="1"/>
+          </p:cNvPicPr>
+          <p:nvPr/>
+        </p:nvPicPr>
+        <p:blipFill>
+          <a:blip r:embed="rId1"/>
+          <a:stretch>
+            <a:fillRect/>
+          </a:stretch>
+        </p:blipFill>
+        <p:spPr>
+          <a:xfrm>
+            <a:off x="0" y="658368"/>
+            <a:ext cx="5120640" cy="5833872"/>
+          </a:xfrm>
+          <a:prstGeom prst="rect">
+            <a:avLst/>
+          </a:prstGeom>
+        </p:spPr>
+      </p:pic>
+      <p:sp>
+        <p:nvSpPr>
+          <p:cNvPr id="4" name="Text 1"/>
+          <p:cNvSpPr/>
+          <p:nvPr/>
+        </p:nvSpPr>
+        <p:spPr>
+          <a:xfrm>
+            <a:off x="5349240" y="1005840"/>
+            <a:ext cx="6522415" cy="731520"/>
+          </a:xfrm>
+          <a:prstGeom prst="rect">
+            <a:avLst/>
+          </a:prstGeom>
+          <a:noFill/>
+          <a:ln/>
+        </p:spPr>
+        <p:txBody>
+          <a:bodyPr wrap="square" lIns="0" tIns="0" rIns="0" bIns="0" rtlCol="0" anchor="ctr">
+            <a:normAutofit/>
+          </a:bodyPr>
+          <a:lstStyle/>
+          <a:p>
+            <a:pPr algn="ctr" indent="0" marL="0">
+              <a:buNone/>
+            </a:pPr>
+            <a:r>
+              <a:rPr lang="en-US" sz="3600" b="1" dirty="0">
+                <a:solidFill>
+                  <a:srgbClr val="990011"/>
+                </a:solidFill>
+                <a:latin typeface="Times New Roman" pitchFamily="34" charset="0"/>
+                <a:ea typeface="Times New Roman" pitchFamily="34" charset="-122"/>
+                <a:cs typeface="Times New Roman" pitchFamily="34" charset="-120"/>
+              </a:rPr>
+              <a:t>Homework</a:t>
+            </a:r>
+            <a:endParaRPr lang="en-US" sz="3600" dirty="0"/>
+          </a:p>
+        </p:txBody>
+      </p:sp>
+      <p:sp>
+        <p:nvSpPr>
+          <p:cNvPr id="5" name="Text 2"/>
+          <p:cNvSpPr/>
+          <p:nvPr/>
+        </p:nvSpPr>
+        <p:spPr>
+          <a:xfrm>
+            <a:off x="5349240" y="1783080"/>
+            <a:ext cx="6522415" cy="4663440"/>
+          </a:xfrm>
+          <a:prstGeom prst="rect">
+            <a:avLst/>
+          </a:prstGeom>
+          <a:noFill/>
+          <a:ln/>
+        </p:spPr>
+        <p:txBody>
+          <a:bodyPr wrap="square" lIns="0" tIns="0" rIns="0" bIns="0" rtlCol="0" anchor="t"/>
+          <a:lstStyle/>
+          <a:p>
+            <a:pPr algn="l" indent="0" marL="0">
+              <a:spcAft>
+                <a:spcPts val="800"/>
+              </a:spcAft>
+              <a:buNone/>
+            </a:pPr>
+            <a:r>
+              <a:rPr lang="en-US" sz="4000" dirty="0">
+                <a:solidFill>
+                  <a:srgbClr val="111111"/>
+                </a:solidFill>
+                <a:latin typeface="Times New Roman" pitchFamily="34" charset="0"/>
+                <a:ea typeface="Times New Roman" pitchFamily="34" charset="-122"/>
+                <a:cs typeface="Times New Roman" pitchFamily="34" charset="-120"/>
+              </a:rPr>
+              <a:t>Name one instrument of a weather station.</a:t>
+            </a:r>
+            <a:endParaRPr lang="en-US" sz="4000" dirty="0"/>
+          </a:p>
+        </p:txBody>
+      </p:sp>
+      <p:sp>
+        <p:nvSpPr>
+          <p:cNvPr id="25" name="Slide Number Placeholder 0"/>
+          <p:cNvSpPr>
+            <a:spLocks noGrp="1"/>
+          </p:cNvSpPr>
+          <p:nvPr>
+            <p:ph type="sldNum" sz="quarter" idx="4294967295"/>
+          </p:nvPr>
+        </p:nvSpPr>
+        <p:spPr>
+          <a:xfrm>
+            <a:off x="27432" y="91440"/>
+            <a:ext cx="585216" cy="475488"/>
+          </a:xfrm>
+          <a:prstGeom prst="rect">
+            <a:avLst/>
+          </a:prstGeom>
+          <a:extLst>
+            <a:ext uri="{C572A759-6A51-4108-AA02-DFA0A04FC94B}">
+              <ma14:wrappingTextBoxFlag xmlns:ma14="http://schemas.microsoft.com/office/mac/drawingml/2011/main" val="0"/>
+            </a:ext>
+          </a:extLst>
+        </p:spPr>
+        <p:txBody>
+          <a:bodyPr/>
+          <a:lstStyle>
+            <a:lvl1pPr>
+              <a:defRPr sz="2000">
+                <a:solidFill>
+                  <a:srgbClr val="FFFFFF"/>
+                </a:solidFill>
+                <a:latin typeface="Calibri"/>
+                <a:ea typeface="Calibri"/>
+                <a:cs typeface="Calibri"/>
+              </a:defRPr>
+            </a:lvl1pPr>
+          </a:lstStyle>
+          <a:p>
+            <a:pPr algn="ctr"/>
+            <a:fld id="{F7021451-1387-4CA6-816F-3879F97B5CBC}" type="slidenum">
+              <a:rPr b="1" lang="en-US"/>
+              <a:t>57</a:t>
+            </a:fld>
+            <a:endParaRPr lang="en-US"/>
+          </a:p>
+        </p:txBody>
+      </p:sp>
+    </p:spTree>
+  </p:cSld>
+  <p:clrMapOvr>
+    <a:masterClrMapping/>
+  </p:clrMapOvr>
+</p:sld>
+</file>
+
+<file path=ppt/slides/slide58.xml><?xml version="1.0" encoding="utf-8"?>
+<p:sld xmlns:a="http://schemas.openxmlformats.org/drawingml/2006/main" xmlns:r="http://schemas.openxmlformats.org/officeDocument/2006/relationships" xmlns:p="http://schemas.openxmlformats.org/presentationml/2006/main">
+  <p:cSld name="Slide 58">
+    <p:spTree>
+      <p:nvGrpSpPr>
+        <p:cNvPr id="1" name=""/>
+        <p:cNvGrpSpPr/>
+        <p:nvPr/>
+      </p:nvGrpSpPr>
+      <p:grpSpPr>
+        <a:xfrm>
+          <a:off x="0" y="0"/>
+          <a:ext cx="0" cy="0"/>
+          <a:chOff x="0" y="0"/>
+          <a:chExt cx="0" cy="0"/>
+        </a:xfrm>
+      </p:grpSpPr>
+      <p:sp>
+        <p:nvSpPr>
+          <p:cNvPr id="2" name="Text 0"/>
+          <p:cNvSpPr/>
+          <p:nvPr/>
+        </p:nvSpPr>
+        <p:spPr>
+          <a:xfrm>
+            <a:off x="457200" y="713232"/>
+            <a:ext cx="11368735" cy="274320"/>
+          </a:xfrm>
+          <a:prstGeom prst="rect">
+            <a:avLst/>
+          </a:prstGeom>
+          <a:noFill/>
+          <a:ln/>
+        </p:spPr>
+        <p:txBody>
+          <a:bodyPr wrap="square" lIns="0" tIns="0" rIns="0" bIns="0" rtlCol="0" anchor="ctr"/>
+          <a:lstStyle/>
+          <a:p>
+            <a:pPr algn="r" indent="0" marL="0">
+              <a:buNone/>
+            </a:pPr>
+            <a:r>
+              <a:rPr lang="en-US" sz="1400" b="1" dirty="0">
+                <a:solidFill>
+                  <a:srgbClr val="1C3F6E"/>
+                </a:solidFill>
+                <a:latin typeface="Calibri" pitchFamily="34" charset="0"/>
+                <a:ea typeface="Calibri" pitchFamily="34" charset="-122"/>
+                <a:cs typeface="Calibri" pitchFamily="34" charset="-120"/>
+              </a:rPr>
+              <a:t>NEXT LESSON</a:t>
+            </a:r>
+            <a:endParaRPr lang="en-US" sz="1400" dirty="0"/>
+          </a:p>
+        </p:txBody>
+      </p:sp>
+      <p:pic>
+        <p:nvPicPr>
+          <p:cNvPr id="3" name="Image 0" descr="/home/claude/f4/img/minesec_sheet.png">    </p:cNvPr>
+          <p:cNvPicPr>
+            <a:picLocks noChangeAspect="1"/>
+          </p:cNvPicPr>
+          <p:nvPr/>
+        </p:nvPicPr>
+        <p:blipFill>
+          <a:blip r:embed="rId1"/>
+          <a:stretch>
+            <a:fillRect/>
+          </a:stretch>
+        </p:blipFill>
+        <p:spPr>
+          <a:xfrm>
+            <a:off x="0" y="658368"/>
+            <a:ext cx="5120640" cy="5833872"/>
+          </a:xfrm>
+          <a:prstGeom prst="rect">
+            <a:avLst/>
+          </a:prstGeom>
+        </p:spPr>
+      </p:pic>
+      <p:sp>
+        <p:nvSpPr>
+          <p:cNvPr id="4" name="Text 1"/>
+          <p:cNvSpPr/>
+          <p:nvPr/>
+        </p:nvSpPr>
+        <p:spPr>
+          <a:xfrm>
+            <a:off x="5349240" y="1005840"/>
+            <a:ext cx="6522415" cy="731520"/>
+          </a:xfrm>
+          <a:prstGeom prst="rect">
+            <a:avLst/>
+          </a:prstGeom>
+          <a:noFill/>
+          <a:ln/>
+        </p:spPr>
+        <p:txBody>
+          <a:bodyPr wrap="square" lIns="0" tIns="0" rIns="0" bIns="0" rtlCol="0" anchor="ctr">
+            <a:normAutofit/>
+          </a:bodyPr>
+          <a:lstStyle/>
+          <a:p>
+            <a:pPr algn="ctr" indent="0" marL="0">
+              <a:buNone/>
+            </a:pPr>
+            <a:r>
+              <a:rPr lang="en-US" sz="3600" b="1" dirty="0">
+                <a:solidFill>
+                  <a:srgbClr val="990011"/>
+                </a:solidFill>
+                <a:latin typeface="Times New Roman" pitchFamily="34" charset="0"/>
+                <a:ea typeface="Times New Roman" pitchFamily="34" charset="-122"/>
+                <a:cs typeface="Times New Roman" pitchFamily="34" charset="-120"/>
+              </a:rPr>
+              <a:t>Next Lesson</a:t>
+            </a:r>
+            <a:endParaRPr lang="en-US" sz="3600" dirty="0"/>
+          </a:p>
+        </p:txBody>
+      </p:sp>
+      <p:sp>
+        <p:nvSpPr>
+          <p:cNvPr id="5" name="Text 2"/>
+          <p:cNvSpPr/>
+          <p:nvPr/>
+        </p:nvSpPr>
+        <p:spPr>
+          <a:xfrm>
+            <a:off x="5349240" y="1783080"/>
+            <a:ext cx="6522415" cy="4663440"/>
+          </a:xfrm>
+          <a:prstGeom prst="rect">
+            <a:avLst/>
+          </a:prstGeom>
+          <a:noFill/>
+          <a:ln/>
+        </p:spPr>
+        <p:txBody>
+          <a:bodyPr wrap="square" lIns="0" tIns="0" rIns="0" bIns="0" rtlCol="0" anchor="ctr"/>
+          <a:lstStyle/>
+          <a:p>
+            <a:pPr algn="ctr" indent="0" marL="0">
+              <a:spcAft>
+                <a:spcPts val="800"/>
+              </a:spcAft>
+              <a:buNone/>
+            </a:pPr>
+            <a:r>
+              <a:rPr lang="en-US" sz="4000" b="1" dirty="0">
+                <a:solidFill>
+                  <a:srgbClr val="111111"/>
+                </a:solidFill>
+                <a:latin typeface="Times New Roman" pitchFamily="34" charset="0"/>
+                <a:ea typeface="Times New Roman" pitchFamily="34" charset="-122"/>
+                <a:cs typeface="Times New Roman" pitchFamily="34" charset="-120"/>
+              </a:rPr>
+              <a:t>Our next lesson will be on:</a:t>
+            </a:r>
+            <a:endParaRPr lang="en-US" sz="4000" dirty="0"/>
+          </a:p>
+          <a:p>
+            <a:pPr algn="ctr" indent="0" marL="0">
+              <a:spcAft>
+                <a:spcPts val="800"/>
+              </a:spcAft>
+              <a:buNone/>
+            </a:pPr>
+            <a:r>
+              <a:rPr lang="en-US" sz="4000" b="1" dirty="0">
+                <a:solidFill>
+                  <a:srgbClr val="990011"/>
+                </a:solidFill>
+                <a:latin typeface="Times New Roman" pitchFamily="34" charset="0"/>
+                <a:ea typeface="Times New Roman" pitchFamily="34" charset="-122"/>
+                <a:cs typeface="Times New Roman" pitchFamily="34" charset="-120"/>
+              </a:rPr>
+              <a:t>Further Study 2: Weather Observation, Prediction, Modification and Mapping</a:t>
+            </a:r>
+            <a:endParaRPr lang="en-US" sz="4000" dirty="0"/>
+          </a:p>
+        </p:txBody>
+      </p:sp>
+      <p:sp>
+        <p:nvSpPr>
+          <p:cNvPr id="25" name="Slide Number Placeholder 0"/>
+          <p:cNvSpPr>
+            <a:spLocks noGrp="1"/>
+          </p:cNvSpPr>
+          <p:nvPr>
+            <p:ph type="sldNum" sz="quarter" idx="4294967295"/>
+          </p:nvPr>
+        </p:nvSpPr>
+        <p:spPr>
+          <a:xfrm>
+            <a:off x="27432" y="91440"/>
+            <a:ext cx="585216" cy="475488"/>
+          </a:xfrm>
+          <a:prstGeom prst="rect">
+            <a:avLst/>
+          </a:prstGeom>
+          <a:extLst>
+            <a:ext uri="{C572A759-6A51-4108-AA02-DFA0A04FC94B}">
+              <ma14:wrappingTextBoxFlag xmlns:ma14="http://schemas.microsoft.com/office/mac/drawingml/2011/main" val="0"/>
+            </a:ext>
+          </a:extLst>
+        </p:spPr>
+        <p:txBody>
+          <a:bodyPr/>
+          <a:lstStyle>
+            <a:lvl1pPr>
+              <a:defRPr sz="2000">
+                <a:solidFill>
+                  <a:srgbClr val="FFFFFF"/>
+                </a:solidFill>
+                <a:latin typeface="Calibri"/>
+                <a:ea typeface="Calibri"/>
+                <a:cs typeface="Calibri"/>
+              </a:defRPr>
+            </a:lvl1pPr>
+          </a:lstStyle>
+          <a:p>
+            <a:pPr algn="ctr"/>
+            <a:fld id="{F7021451-1387-4CA6-816F-3879F97B5CBC}" type="slidenum">
+              <a:rPr b="1" lang="en-US"/>
+              <a:t>58</a:t>
+            </a:fld>
+            <a:endParaRPr lang="en-US"/>
+          </a:p>
+        </p:txBody>
+      </p:sp>
+    </p:spTree>
+  </p:cSld>
+  <p:clrMapOvr>
+    <a:masterClrMapping/>
+  </p:clrMapOvr>
+</p:sld>
+</file>
+
+<file path=ppt/slides/slide59.xml><?xml version="1.0" encoding="utf-8"?>
+<p:sld xmlns:a="http://schemas.openxmlformats.org/drawingml/2006/main" xmlns:r="http://schemas.openxmlformats.org/officeDocument/2006/relationships" xmlns:p="http://schemas.openxmlformats.org/presentationml/2006/main">
+  <p:cSld name="Slide 59">
+    <p:spTree>
+      <p:nvGrpSpPr>
+        <p:cNvPr id="1" name=""/>
+        <p:cNvGrpSpPr/>
+        <p:nvPr/>
+      </p:nvGrpSpPr>
+      <p:grpSpPr>
+        <a:xfrm>
+          <a:off x="0" y="0"/>
+          <a:ext cx="0" cy="0"/>
+          <a:chOff x="0" y="0"/>
+          <a:chExt cx="0" cy="0"/>
+        </a:xfrm>
+      </p:grpSpPr>
+      <p:sp>
+        <p:nvSpPr>
+          <p:cNvPr id="2" name="Text 0"/>
+          <p:cNvSpPr/>
+          <p:nvPr/>
+        </p:nvSpPr>
+        <p:spPr>
+          <a:xfrm>
+            <a:off x="457200" y="713232"/>
+            <a:ext cx="11368735" cy="274320"/>
+          </a:xfrm>
+          <a:prstGeom prst="rect">
+            <a:avLst/>
+          </a:prstGeom>
+          <a:noFill/>
+          <a:ln/>
+        </p:spPr>
+        <p:txBody>
+          <a:bodyPr wrap="square" lIns="0" tIns="0" rIns="0" bIns="0" rtlCol="0" anchor="ctr"/>
+          <a:lstStyle/>
+          <a:p>
+            <a:pPr algn="r" indent="0" marL="0">
+              <a:buNone/>
+            </a:pPr>
+            <a:r>
+              <a:rPr lang="en-US" sz="1400" b="1" dirty="0">
+                <a:solidFill>
+                  <a:srgbClr val="1C3F6E"/>
+                </a:solidFill>
+                <a:latin typeface="Calibri" pitchFamily="34" charset="0"/>
+                <a:ea typeface="Calibri" pitchFamily="34" charset="-122"/>
+                <a:cs typeface="Calibri" pitchFamily="34" charset="-120"/>
+              </a:rPr>
               <a:t>BILINGUAL GAME</a:t>
             </a:r>
             <a:endParaRPr lang="en-US" sz="1400" dirty="0"/>
@@ -17809,7 +21055,7 @@
       </p:sp>
       <p:graphicFrame>
         <p:nvGraphicFramePr>
-          <p:cNvPr id="51" name="Table 0"/>
+          <p:cNvPr id="60" name="Table 0"/>
           <p:cNvGraphicFramePr>
             <a:graphicFrameLocks noGrp="1"/>
           </p:cNvGraphicFramePr>
@@ -18127,7 +21373,7 @@
                           <a:ea typeface="Calibri" pitchFamily="34" charset="-122"/>
                           <a:cs typeface="Calibri" pitchFamily="34" charset="-120"/>
                         </a:rPr>
-                        <a:t>Highland</a:t>
+                        <a:t>Altitude</a:t>
                       </a:r>
                       <a:endParaRPr lang="en-US" sz="2200" dirty="0">
                         <a:latin typeface="Calibri" charset="0"/>
@@ -18195,7 +21441,7 @@
                           <a:ea typeface="Calibri" pitchFamily="34" charset="-122"/>
                           <a:cs typeface="Calibri" pitchFamily="34" charset="-120"/>
                         </a:rPr>
-                        <a:t>Les hautes terres</a:t>
+                        <a:t>L'altitude</a:t>
                       </a:r>
                       <a:endParaRPr lang="en-US" sz="2200" dirty="0">
                         <a:latin typeface="Calibri" charset="0"/>
@@ -18265,7 +21511,7 @@
                           <a:ea typeface="Calibri" pitchFamily="34" charset="-122"/>
                           <a:cs typeface="Calibri" pitchFamily="34" charset="-120"/>
                         </a:rPr>
-                        <a:t>Windward</a:t>
+                        <a:t>Aspect</a:t>
                       </a:r>
                       <a:endParaRPr lang="en-US" sz="2200" dirty="0">
                         <a:latin typeface="Calibri" charset="0"/>
@@ -18333,7 +21579,7 @@
                           <a:ea typeface="Calibri" pitchFamily="34" charset="-122"/>
                           <a:cs typeface="Calibri" pitchFamily="34" charset="-120"/>
                         </a:rPr>
-                        <a:t>Au vent</a:t>
+                        <a:t>L'exposition</a:t>
                       </a:r>
                       <a:endParaRPr lang="en-US" sz="2200" dirty="0">
                         <a:latin typeface="Calibri" charset="0"/>
@@ -18403,7 +21649,7 @@
                           <a:ea typeface="Calibri" pitchFamily="34" charset="-122"/>
                           <a:cs typeface="Calibri" pitchFamily="34" charset="-120"/>
                         </a:rPr>
-                        <a:t>Frost</a:t>
+                        <a:t>Relief</a:t>
                       </a:r>
                       <a:endParaRPr lang="en-US" sz="2200" dirty="0">
                         <a:latin typeface="Calibri" charset="0"/>
@@ -18471,7 +21717,7 @@
                           <a:ea typeface="Calibri" pitchFamily="34" charset="-122"/>
                           <a:cs typeface="Calibri" pitchFamily="34" charset="-120"/>
                         </a:rPr>
-                        <a:t>Le gel</a:t>
+                        <a:t>Le relief</a:t>
                       </a:r>
                       <a:endParaRPr lang="en-US" sz="2200" dirty="0">
                         <a:latin typeface="Calibri" charset="0"/>
@@ -18541,7 +21787,7 @@
                           <a:ea typeface="Calibri" pitchFamily="34" charset="-122"/>
                           <a:cs typeface="Calibri" pitchFamily="34" charset="-120"/>
                         </a:rPr>
-                        <a:t>Tea</a:t>
+                        <a:t>Precipitation</a:t>
                       </a:r>
                       <a:endParaRPr lang="en-US" sz="2200" dirty="0">
                         <a:latin typeface="Calibri" charset="0"/>
@@ -18609,7 +21855,7 @@
                           <a:ea typeface="Calibri" pitchFamily="34" charset="-122"/>
                           <a:cs typeface="Calibri" pitchFamily="34" charset="-120"/>
                         </a:rPr>
-                        <a:t>Le thé</a:t>
+                        <a:t>Les précipitations</a:t>
                       </a:r>
                       <a:endParaRPr lang="en-US" sz="2200" dirty="0">
                         <a:latin typeface="Calibri" charset="0"/>
@@ -18679,7 +21925,7 @@
                           <a:ea typeface="Calibri" pitchFamily="34" charset="-122"/>
                           <a:cs typeface="Calibri" pitchFamily="34" charset="-120"/>
                         </a:rPr>
-                        <a:t>Slope</a:t>
+                        <a:t>Rain shadow</a:t>
                       </a:r>
                       <a:endParaRPr lang="en-US" sz="2200" dirty="0">
                         <a:latin typeface="Calibri" charset="0"/>
@@ -18747,7 +21993,7 @@
                           <a:ea typeface="Calibri" pitchFamily="34" charset="-122"/>
                           <a:cs typeface="Calibri" pitchFamily="34" charset="-120"/>
                         </a:rPr>
-                        <a:t>Le versant</a:t>
+                        <a:t>L'ombre pluviométrique</a:t>
                       </a:r>
                       <a:endParaRPr lang="en-US" sz="2200" dirty="0">
                         <a:latin typeface="Calibri" charset="0"/>
@@ -18845,7 +22091,7 @@
             <a:pPr algn="ctr"/>
             <a:fld id="{F7021451-1387-4CA6-816F-3879F97B5CBC}" type="slidenum">
               <a:rPr b="1" lang="en-US"/>
-              <a:t>50</a:t>
+              <a:t>59</a:t>
             </a:fld>
             <a:endParaRPr lang="en-US"/>
           </a:p>
@@ -18859,9 +22105,9 @@
 </p:sld>
 </file>
 
-<file path=ppt/slides/slide51.xml><?xml version="1.0" encoding="utf-8"?>
+<file path=ppt/slides/slide6.xml><?xml version="1.0" encoding="utf-8"?>
 <p:sld xmlns:a="http://schemas.openxmlformats.org/drawingml/2006/main" xmlns:r="http://schemas.openxmlformats.org/officeDocument/2006/relationships" xmlns:p="http://schemas.openxmlformats.org/presentationml/2006/main">
-  <p:cSld name="Slide 51">
+  <p:cSld name="Slide 6">
     <p:spTree>
       <p:nvGrpSpPr>
         <p:cNvPr id="1" name=""/>
@@ -18909,6 +22155,337 @@
                 <a:ea typeface="Calibri" pitchFamily="34" charset="-122"/>
                 <a:cs typeface="Calibri" pitchFamily="34" charset="-120"/>
               </a:rPr>
+              <a:t>LESSON PLAN</a:t>
+            </a:r>
+            <a:endParaRPr lang="en-US" sz="1400" dirty="0"/>
+          </a:p>
+        </p:txBody>
+      </p:sp>
+      <p:pic>
+        <p:nvPicPr>
+          <p:cNvPr id="3" name="Image 0" descr="/home/claude/f4/img/minesec_sheet.png">    </p:cNvPr>
+          <p:cNvPicPr>
+            <a:picLocks noChangeAspect="1"/>
+          </p:cNvPicPr>
+          <p:nvPr/>
+        </p:nvPicPr>
+        <p:blipFill>
+          <a:blip r:embed="rId1"/>
+          <a:stretch>
+            <a:fillRect/>
+          </a:stretch>
+        </p:blipFill>
+        <p:spPr>
+          <a:xfrm>
+            <a:off x="0" y="658368"/>
+            <a:ext cx="2468880" cy="5833872"/>
+          </a:xfrm>
+          <a:prstGeom prst="rect">
+            <a:avLst/>
+          </a:prstGeom>
+        </p:spPr>
+      </p:pic>
+      <p:sp>
+        <p:nvSpPr>
+          <p:cNvPr id="4" name="Text 1"/>
+          <p:cNvSpPr/>
+          <p:nvPr/>
+        </p:nvSpPr>
+        <p:spPr>
+          <a:xfrm>
+            <a:off x="2697480" y="1005840"/>
+            <a:ext cx="9174175" cy="731520"/>
+          </a:xfrm>
+          <a:prstGeom prst="rect">
+            <a:avLst/>
+          </a:prstGeom>
+          <a:noFill/>
+          <a:ln/>
+        </p:spPr>
+        <p:txBody>
+          <a:bodyPr wrap="square" lIns="0" tIns="0" rIns="0" bIns="0" rtlCol="0" anchor="ctr">
+            <a:normAutofit/>
+          </a:bodyPr>
+          <a:lstStyle/>
+          <a:p>
+            <a:pPr algn="ctr" indent="0" marL="0">
+              <a:buNone/>
+            </a:pPr>
+            <a:r>
+              <a:rPr lang="en-US" sz="3600" b="1" dirty="0">
+                <a:solidFill>
+                  <a:srgbClr val="990011"/>
+                </a:solidFill>
+                <a:latin typeface="Times New Roman" pitchFamily="34" charset="0"/>
+                <a:ea typeface="Times New Roman" pitchFamily="34" charset="-122"/>
+                <a:cs typeface="Times New Roman" pitchFamily="34" charset="-120"/>
+              </a:rPr>
+              <a:t>Lesson Plan</a:t>
+            </a:r>
+            <a:endParaRPr lang="en-US" sz="3600" dirty="0"/>
+          </a:p>
+        </p:txBody>
+      </p:sp>
+      <p:sp>
+        <p:nvSpPr>
+          <p:cNvPr id="5" name="Text 2"/>
+          <p:cNvSpPr/>
+          <p:nvPr/>
+        </p:nvSpPr>
+        <p:spPr>
+          <a:xfrm>
+            <a:off x="2697480" y="1783080"/>
+            <a:ext cx="9174175" cy="4663440"/>
+          </a:xfrm>
+          <a:prstGeom prst="rect">
+            <a:avLst/>
+          </a:prstGeom>
+          <a:noFill/>
+          <a:ln/>
+        </p:spPr>
+        <p:txBody>
+          <a:bodyPr wrap="square" lIns="0" tIns="0" rIns="0" bIns="0" rtlCol="0" anchor="t"/>
+          <a:lstStyle/>
+          <a:p>
+            <a:pPr algn="l" marL="342900" indent="-342900">
+              <a:spcAft>
+                <a:spcPts val="800"/>
+              </a:spcAft>
+              <a:buSzPct val="100000"/>
+              <a:buFont typeface="+mj-lt"/>
+              <a:buAutoNum type="arabicPeriod" startAt="1"/>
+            </a:pPr>
+            <a:r>
+              <a:rPr lang="en-US" sz="4000" dirty="0">
+                <a:solidFill>
+                  <a:srgbClr val="111111"/>
+                </a:solidFill>
+                <a:latin typeface="Times New Roman" pitchFamily="34" charset="0"/>
+                <a:ea typeface="Times New Roman" pitchFamily="34" charset="-122"/>
+                <a:cs typeface="Times New Roman" pitchFamily="34" charset="-120"/>
+              </a:rPr>
+              <a:t>Correction of the homework</a:t>
+            </a:r>
+            <a:endParaRPr lang="en-US" sz="4000" dirty="0"/>
+          </a:p>
+          <a:p>
+            <a:pPr algn="l" marL="342900" indent="-342900">
+              <a:spcAft>
+                <a:spcPts val="800"/>
+              </a:spcAft>
+              <a:buSzPct val="100000"/>
+              <a:buFont typeface="+mj-lt"/>
+              <a:buAutoNum type="arabicPeriod" startAt="1"/>
+            </a:pPr>
+            <a:r>
+              <a:rPr lang="en-US" sz="4000" dirty="0">
+                <a:solidFill>
+                  <a:srgbClr val="111111"/>
+                </a:solidFill>
+                <a:latin typeface="Times New Roman" pitchFamily="34" charset="0"/>
+                <a:ea typeface="Times New Roman" pitchFamily="34" charset="-122"/>
+                <a:cs typeface="Times New Roman" pitchFamily="34" charset="-120"/>
+              </a:rPr>
+              <a:t>Objectives and recall</a:t>
+            </a:r>
+            <a:endParaRPr lang="en-US" sz="4000" dirty="0"/>
+          </a:p>
+          <a:p>
+            <a:pPr algn="l" marL="342900" indent="-342900">
+              <a:spcAft>
+                <a:spcPts val="800"/>
+              </a:spcAft>
+              <a:buSzPct val="100000"/>
+              <a:buFont typeface="+mj-lt"/>
+              <a:buAutoNum type="arabicPeriod" startAt="1"/>
+            </a:pPr>
+            <a:r>
+              <a:rPr lang="en-US" sz="4000" dirty="0">
+                <a:solidFill>
+                  <a:srgbClr val="111111"/>
+                </a:solidFill>
+                <a:latin typeface="Times New Roman" pitchFamily="34" charset="0"/>
+                <a:ea typeface="Times New Roman" pitchFamily="34" charset="-122"/>
+                <a:cs typeface="Times New Roman" pitchFamily="34" charset="-120"/>
+              </a:rPr>
+              <a:t>Real-life situation and action to take</a:t>
+            </a:r>
+            <a:endParaRPr lang="en-US" sz="4000" dirty="0"/>
+          </a:p>
+          <a:p>
+            <a:pPr algn="l" marL="342900" indent="-342900">
+              <a:spcAft>
+                <a:spcPts val="800"/>
+              </a:spcAft>
+              <a:buSzPct val="100000"/>
+              <a:buFont typeface="+mj-lt"/>
+              <a:buAutoNum type="arabicPeriod" startAt="1"/>
+            </a:pPr>
+            <a:r>
+              <a:rPr lang="en-US" sz="4000" dirty="0">
+                <a:solidFill>
+                  <a:srgbClr val="111111"/>
+                </a:solidFill>
+                <a:latin typeface="Times New Roman" pitchFamily="34" charset="0"/>
+                <a:ea typeface="Times New Roman" pitchFamily="34" charset="-122"/>
+                <a:cs typeface="Times New Roman" pitchFamily="34" charset="-120"/>
+              </a:rPr>
+              <a:t>Learning activities</a:t>
+            </a:r>
+            <a:endParaRPr lang="en-US" sz="4000" dirty="0"/>
+          </a:p>
+          <a:p>
+            <a:pPr algn="l" marL="342900" indent="-342900">
+              <a:spcAft>
+                <a:spcPts val="800"/>
+              </a:spcAft>
+              <a:buSzPct val="100000"/>
+              <a:buFont typeface="+mj-lt"/>
+              <a:buAutoNum type="arabicPeriod" startAt="1"/>
+            </a:pPr>
+            <a:r>
+              <a:rPr lang="en-US" sz="4000" dirty="0">
+                <a:solidFill>
+                  <a:srgbClr val="111111"/>
+                </a:solidFill>
+                <a:latin typeface="Times New Roman" pitchFamily="34" charset="0"/>
+                <a:ea typeface="Times New Roman" pitchFamily="34" charset="-122"/>
+                <a:cs typeface="Times New Roman" pitchFamily="34" charset="-120"/>
+              </a:rPr>
+              <a:t>Board summary</a:t>
+            </a:r>
+            <a:endParaRPr lang="en-US" sz="4000" dirty="0"/>
+          </a:p>
+          <a:p>
+            <a:pPr algn="l" marL="342900" indent="-342900">
+              <a:spcAft>
+                <a:spcPts val="800"/>
+              </a:spcAft>
+              <a:buSzPct val="100000"/>
+              <a:buFont typeface="+mj-lt"/>
+              <a:buAutoNum type="arabicPeriod" startAt="1"/>
+            </a:pPr>
+            <a:r>
+              <a:rPr lang="en-US" sz="4000" dirty="0">
+                <a:solidFill>
+                  <a:srgbClr val="111111"/>
+                </a:solidFill>
+                <a:latin typeface="Times New Roman" pitchFamily="34" charset="0"/>
+                <a:ea typeface="Times New Roman" pitchFamily="34" charset="-122"/>
+                <a:cs typeface="Times New Roman" pitchFamily="34" charset="-120"/>
+              </a:rPr>
+              <a:t>Evaluation, remediation and homework</a:t>
+            </a:r>
+            <a:endParaRPr lang="en-US" sz="4000" dirty="0"/>
+          </a:p>
+        </p:txBody>
+      </p:sp>
+      <p:sp>
+        <p:nvSpPr>
+          <p:cNvPr id="25" name="Slide Number Placeholder 0"/>
+          <p:cNvSpPr>
+            <a:spLocks noGrp="1"/>
+          </p:cNvSpPr>
+          <p:nvPr>
+            <p:ph type="sldNum" sz="quarter" idx="4294967295"/>
+          </p:nvPr>
+        </p:nvSpPr>
+        <p:spPr>
+          <a:xfrm>
+            <a:off x="27432" y="91440"/>
+            <a:ext cx="585216" cy="475488"/>
+          </a:xfrm>
+          <a:prstGeom prst="rect">
+            <a:avLst/>
+          </a:prstGeom>
+          <a:extLst>
+            <a:ext uri="{C572A759-6A51-4108-AA02-DFA0A04FC94B}">
+              <ma14:wrappingTextBoxFlag xmlns:ma14="http://schemas.microsoft.com/office/mac/drawingml/2011/main" val="0"/>
+            </a:ext>
+          </a:extLst>
+        </p:spPr>
+        <p:txBody>
+          <a:bodyPr/>
+          <a:lstStyle>
+            <a:lvl1pPr>
+              <a:defRPr sz="2000">
+                <a:solidFill>
+                  <a:srgbClr val="FFFFFF"/>
+                </a:solidFill>
+                <a:latin typeface="Calibri"/>
+                <a:ea typeface="Calibri"/>
+                <a:cs typeface="Calibri"/>
+              </a:defRPr>
+            </a:lvl1pPr>
+          </a:lstStyle>
+          <a:p>
+            <a:pPr algn="ctr"/>
+            <a:fld id="{F7021451-1387-4CA6-816F-3879F97B5CBC}" type="slidenum">
+              <a:rPr b="1" lang="en-US"/>
+              <a:t>6</a:t>
+            </a:fld>
+            <a:endParaRPr lang="en-US"/>
+          </a:p>
+        </p:txBody>
+      </p:sp>
+    </p:spTree>
+  </p:cSld>
+  <p:clrMapOvr>
+    <a:masterClrMapping/>
+  </p:clrMapOvr>
+</p:sld>
+</file>
+
+<file path=ppt/slides/slide60.xml><?xml version="1.0" encoding="utf-8"?>
+<p:sld xmlns:a="http://schemas.openxmlformats.org/drawingml/2006/main" xmlns:r="http://schemas.openxmlformats.org/officeDocument/2006/relationships" xmlns:p="http://schemas.openxmlformats.org/presentationml/2006/main">
+  <p:cSld name="Slide 60">
+    <p:spTree>
+      <p:nvGrpSpPr>
+        <p:cNvPr id="1" name=""/>
+        <p:cNvGrpSpPr/>
+        <p:nvPr/>
+      </p:nvGrpSpPr>
+      <p:grpSpPr>
+        <a:xfrm>
+          <a:off x="0" y="0"/>
+          <a:ext cx="0" cy="0"/>
+          <a:chOff x="0" y="0"/>
+          <a:chExt cx="0" cy="0"/>
+        </a:xfrm>
+      </p:grpSpPr>
+      <p:sp>
+        <p:nvSpPr>
+          <p:cNvPr id="2" name="Text 0"/>
+          <p:cNvSpPr/>
+          <p:nvPr/>
+        </p:nvSpPr>
+        <p:spPr>
+          <a:xfrm>
+            <a:off x="457200" y="713232"/>
+            <a:ext cx="11368735" cy="274320"/>
+          </a:xfrm>
+          <a:prstGeom prst="rect">
+            <a:avLst/>
+          </a:prstGeom>
+          <a:noFill/>
+          <a:ln/>
+        </p:spPr>
+        <p:txBody>
+          <a:bodyPr wrap="square" lIns="0" tIns="0" rIns="0" bIns="0" rtlCol="0" anchor="ctr"/>
+          <a:lstStyle/>
+          <a:p>
+            <a:pPr algn="r" indent="0" marL="0">
+              <a:buNone/>
+            </a:pPr>
+            <a:r>
+              <a:rPr lang="en-US" sz="1400" b="1" dirty="0">
+                <a:solidFill>
+                  <a:srgbClr val="1C3F6E"/>
+                </a:solidFill>
+                <a:latin typeface="Calibri" pitchFamily="34" charset="0"/>
+                <a:ea typeface="Calibri" pitchFamily="34" charset="-122"/>
+                <a:cs typeface="Calibri" pitchFamily="34" charset="-120"/>
+              </a:rPr>
               <a:t>LOGBOOK</a:t>
             </a:r>
             <a:endParaRPr lang="en-US" sz="1400" dirty="0"/>
@@ -18956,7 +22533,7 @@
       </p:sp>
       <p:graphicFrame>
         <p:nvGraphicFramePr>
-          <p:cNvPr id="52" name="Table 0"/>
+          <p:cNvPr id="61" name="Table 0"/>
           <p:cNvGraphicFramePr>
             <a:graphicFrameLocks noGrp="1"/>
           </p:cNvGraphicFramePr>
@@ -19342,7 +22919,7 @@
                           <a:ea typeface="Calibri" pitchFamily="34" charset="-122"/>
                           <a:cs typeface="Calibri" pitchFamily="34" charset="-120"/>
                         </a:rPr>
-                        <a:t>Describe the characteristics of mountain climates. Explain the factors of mountain climates. Give the importance of mountain climates for people.</a:t>
+                        <a:t>Define a mountain climate. Describe its main characteristics. Explain the vertical zonation of climate and vegetation. Explain the factors of mountain climates.</a:t>
                       </a:r>
                       <a:endParaRPr lang="en-US" sz="1600" dirty="0">
                         <a:latin typeface="Calibri" charset="0"/>
@@ -19480,7 +23057,7 @@
                           <a:ea typeface="Calibri" pitchFamily="34" charset="-122"/>
                           <a:cs typeface="Calibri" pitchFamily="34" charset="-120"/>
                         </a:rPr>
-                        <a:t>Learners are able to describe mountain climates and explain their factors, with examples from Cameroon.</a:t>
+                        <a:t>Learners are able to explain the climate of mountains such as the Mandara Mountains and Mount Cameroon and its effects on vegetation and people.</a:t>
                       </a:r>
                       <a:endParaRPr lang="en-US" sz="1600" dirty="0">
                         <a:latin typeface="Calibri" charset="0"/>
@@ -19578,7 +23155,7 @@
             <a:pPr algn="ctr"/>
             <a:fld id="{F7021451-1387-4CA6-816F-3879F97B5CBC}" type="slidenum">
               <a:rPr b="1" lang="en-US"/>
-              <a:t>51</a:t>
+              <a:t>60</a:t>
             </a:fld>
             <a:endParaRPr lang="en-US"/>
           </a:p>
@@ -19592,9 +23169,9 @@
 </p:sld>
 </file>
 
-<file path=ppt/slides/slide52.xml><?xml version="1.0" encoding="utf-8"?>
+<file path=ppt/slides/slide61.xml><?xml version="1.0" encoding="utf-8"?>
 <p:sld xmlns:a="http://schemas.openxmlformats.org/drawingml/2006/main" xmlns:r="http://schemas.openxmlformats.org/officeDocument/2006/relationships" xmlns:p="http://schemas.openxmlformats.org/presentationml/2006/main">
-  <p:cSld name="Slide 52">
+  <p:cSld name="Slide 61">
     <p:spTree>
       <p:nvGrpSpPr>
         <p:cNvPr id="1" name=""/>
@@ -19689,7 +23266,7 @@
       </p:sp>
       <p:graphicFrame>
         <p:nvGraphicFramePr>
-          <p:cNvPr id="53" name="Table 0"/>
+          <p:cNvPr id="62" name="Table 0"/>
           <p:cNvGraphicFramePr>
             <a:graphicFrameLocks noGrp="1"/>
           </p:cNvGraphicFramePr>
@@ -19799,7 +23376,7 @@
                           <a:ea typeface="Calibri" pitchFamily="34" charset="-122"/>
                           <a:cs typeface="Calibri" pitchFamily="34" charset="-120"/>
                         </a:rPr>
-                        <a:t>DEFINITIONS; Characteristics of Mountain Climates; Factors of Mountain Climates.</a:t>
+                        <a:t>DEFINITIONS; Characteristics of Mountain Climates; Vertical Zonation: Mount Cameroon; Factors of Mountain Climates.</a:t>
                       </a:r>
                       <a:endParaRPr lang="en-US" sz="1600" dirty="0">
                         <a:latin typeface="Calibri" charset="0"/>
@@ -20075,7 +23652,7 @@
                           <a:ea typeface="Calibri" pitchFamily="34" charset="-122"/>
                           <a:cs typeface="Calibri" pitchFamily="34" charset="-120"/>
                         </a:rPr>
-                        <a:t>Compare the climate of Buea and Douala and explain two differences.</a:t>
+                        <a:t>Name one instrument of a weather station.</a:t>
                       </a:r>
                       <a:endParaRPr lang="en-US" sz="1600" dirty="0">
                         <a:latin typeface="Calibri" charset="0"/>
@@ -20449,7 +24026,7 @@
             <a:pPr algn="ctr"/>
             <a:fld id="{F7021451-1387-4CA6-816F-3879F97B5CBC}" type="slidenum">
               <a:rPr b="1" lang="en-US"/>
-              <a:t>52</a:t>
+              <a:t>61</a:t>
             </a:fld>
             <a:endParaRPr lang="en-US"/>
           </a:p>
@@ -20463,9 +24040,9 @@
 </p:sld>
 </file>
 
-<file path=ppt/slides/slide53.xml><?xml version="1.0" encoding="utf-8"?>
+<file path=ppt/slides/slide62.xml><?xml version="1.0" encoding="utf-8"?>
 <p:sld xmlns:a="http://schemas.openxmlformats.org/drawingml/2006/main" xmlns:r="http://schemas.openxmlformats.org/officeDocument/2006/relationships" xmlns:p="http://schemas.openxmlformats.org/presentationml/2006/main">
-  <p:cSld name="Slide 53">
+  <p:cSld name="Slide 62">
     <p:spTree>
       <p:nvGrpSpPr>
         <p:cNvPr id="1" name=""/>
@@ -20642,7 +24219,7 @@
                 <a:ea typeface="Calibri" pitchFamily="34" charset="-122"/>
                 <a:cs typeface="Calibri" pitchFamily="34" charset="-120"/>
               </a:rPr>
-              <a:t>Without the projector (Activity 1): do the lapse-rate calculation.</a:t>
+              <a:t>Without the projector (Activity 1): calculate on the board.</a:t>
             </a:r>
             <a:endParaRPr lang="en-US" sz="2000" dirty="0"/>
           </a:p>
@@ -20663,7 +24240,7 @@
                 <a:ea typeface="Calibri" pitchFamily="34" charset="-122"/>
                 <a:cs typeface="Calibri" pitchFamily="34" charset="-120"/>
               </a:rPr>
-              <a:t>Without the projector (Activity 2): find Kilimanjaro on the map.</a:t>
+              <a:t>Without the projector (Activity 2): draw a mountain with wind and rain.</a:t>
             </a:r>
             <a:endParaRPr lang="en-US" sz="2000" dirty="0"/>
           </a:p>
@@ -20684,7 +24261,7 @@
                 <a:ea typeface="Calibri" pitchFamily="34" charset="-122"/>
                 <a:cs typeface="Calibri" pitchFamily="34" charset="-120"/>
               </a:rPr>
-              <a:t>Without the projector (Activity 3): compare Debundscha and the leeward side.</a:t>
+              <a:t>Without the projector (Activity 3): list the five characteristics.</a:t>
             </a:r>
             <a:endParaRPr lang="en-US" sz="2000" dirty="0"/>
           </a:p>
@@ -20705,7 +24282,7 @@
                 <a:ea typeface="Calibri" pitchFamily="34" charset="-122"/>
                 <a:cs typeface="Calibri" pitchFamily="34" charset="-120"/>
               </a:rPr>
-              <a:t>Without the projector (Activity 4): describe two sides of a hill.</a:t>
+              <a:t>Without the projector (Activity 4): draw the zones on a mountain.</a:t>
             </a:r>
             <a:endParaRPr lang="en-US" sz="2000" dirty="0"/>
           </a:p>
@@ -20726,7 +24303,7 @@
                 <a:ea typeface="Calibri" pitchFamily="34" charset="-122"/>
                 <a:cs typeface="Calibri" pitchFamily="34" charset="-120"/>
               </a:rPr>
-              <a:t>Without the projector (Activity 5): mention Ndu and Djuttitsa tea estates.</a:t>
+              <a:t>Without the projector (Activity 5): compare two sides of a hill.</a:t>
             </a:r>
             <a:endParaRPr lang="en-US" sz="2000" dirty="0"/>
           </a:p>
@@ -20774,7 +24351,7 @@
             <a:pPr algn="ctr"/>
             <a:fld id="{F7021451-1387-4CA6-816F-3879F97B5CBC}" type="slidenum">
               <a:rPr b="1" lang="en-US"/>
-              <a:t>53</a:t>
+              <a:t>62</a:t>
             </a:fld>
             <a:endParaRPr lang="en-US"/>
           </a:p>
@@ -20788,9 +24365,9 @@
 </p:sld>
 </file>
 
-<file path=ppt/slides/slide54.xml><?xml version="1.0" encoding="utf-8"?>
+<file path=ppt/slides/slide63.xml><?xml version="1.0" encoding="utf-8"?>
 <p:sld xmlns:a="http://schemas.openxmlformats.org/drawingml/2006/main" xmlns:r="http://schemas.openxmlformats.org/officeDocument/2006/relationships" xmlns:p="http://schemas.openxmlformats.org/presentationml/2006/main">
-  <p:cSld name="Slide 54">
+  <p:cSld name="Slide 63">
     <p:spTree>
       <p:nvGrpSpPr>
         <p:cNvPr id="1" name=""/>
@@ -20946,7 +24523,7 @@
                 <a:ea typeface="Calibri" pitchFamily="34" charset="-122"/>
                 <a:cs typeface="Calibri" pitchFamily="34" charset="-120"/>
               </a:rPr>
-              <a:t>National Geography Syllabus, MINESEC/IGE/IP-SS, 2019 — Module 1 (Meteorology, Climatology &amp; Hydrology).</a:t>
+              <a:t>Geography Syllabus for Sixth Forms (Lower and Upper Sixth), MINESEC, 2019 — Module 1 (Meteorology, Climatology &amp; Hydrology).</a:t>
             </a:r>
             <a:endParaRPr lang="en-US" sz="1800" dirty="0"/>
           </a:p>
@@ -20967,7 +24544,7 @@
                 <a:ea typeface="Calibri" pitchFamily="34" charset="-122"/>
                 <a:cs typeface="Calibri" pitchFamily="34" charset="-120"/>
               </a:rPr>
-              <a:t>Photo, Activity 2: “Kilimanjaro” by ian 1602, CC BY-NC 2.0, via Flickr (https://www.flickr.com/photos/98181641@N00/2179855841)</a:t>
+              <a:t>Teacher's course notes: Mr KAMDEM E., Meteorology and Climatology (LSA), GBHS Garoua, 2026.</a:t>
             </a:r>
             <a:endParaRPr lang="en-US" sz="1800" dirty="0"/>
           </a:p>
@@ -20988,7 +24565,7 @@
                 <a:ea typeface="Calibri" pitchFamily="34" charset="-122"/>
                 <a:cs typeface="Calibri" pitchFamily="34" charset="-120"/>
               </a:rPr>
-              <a:t>Photo, Activity 5: “Carlo in the tea” by luigig, CC BY 2.0, via Flickr (https://www.flickr.com/photos/51035803402@N01/3175986747)</a:t>
+              <a:t>Photo, board summary (Human use): “Carlo in the tea” by luigig, CC BY 2.0, via Flickr (https://www.flickr.com/photos/51035803402@N01/3175986747)</a:t>
             </a:r>
             <a:endParaRPr lang="en-US" sz="1800" dirty="0"/>
           </a:p>
@@ -21057,338 +24634,7 @@
             <a:pPr algn="ctr"/>
             <a:fld id="{F7021451-1387-4CA6-816F-3879F97B5CBC}" type="slidenum">
               <a:rPr b="1" lang="en-US"/>
-              <a:t>54</a:t>
-            </a:fld>
-            <a:endParaRPr lang="en-US"/>
-          </a:p>
-        </p:txBody>
-      </p:sp>
-    </p:spTree>
-  </p:cSld>
-  <p:clrMapOvr>
-    <a:masterClrMapping/>
-  </p:clrMapOvr>
-</p:sld>
-</file>
-
-<file path=ppt/slides/slide6.xml><?xml version="1.0" encoding="utf-8"?>
-<p:sld xmlns:a="http://schemas.openxmlformats.org/drawingml/2006/main" xmlns:r="http://schemas.openxmlformats.org/officeDocument/2006/relationships" xmlns:p="http://schemas.openxmlformats.org/presentationml/2006/main">
-  <p:cSld name="Slide 6">
-    <p:spTree>
-      <p:nvGrpSpPr>
-        <p:cNvPr id="1" name=""/>
-        <p:cNvGrpSpPr/>
-        <p:nvPr/>
-      </p:nvGrpSpPr>
-      <p:grpSpPr>
-        <a:xfrm>
-          <a:off x="0" y="0"/>
-          <a:ext cx="0" cy="0"/>
-          <a:chOff x="0" y="0"/>
-          <a:chExt cx="0" cy="0"/>
-        </a:xfrm>
-      </p:grpSpPr>
-      <p:sp>
-        <p:nvSpPr>
-          <p:cNvPr id="2" name="Text 0"/>
-          <p:cNvSpPr/>
-          <p:nvPr/>
-        </p:nvSpPr>
-        <p:spPr>
-          <a:xfrm>
-            <a:off x="457200" y="713232"/>
-            <a:ext cx="11368735" cy="274320"/>
-          </a:xfrm>
-          <a:prstGeom prst="rect">
-            <a:avLst/>
-          </a:prstGeom>
-          <a:noFill/>
-          <a:ln/>
-        </p:spPr>
-        <p:txBody>
-          <a:bodyPr wrap="square" lIns="0" tIns="0" rIns="0" bIns="0" rtlCol="0" anchor="ctr"/>
-          <a:lstStyle/>
-          <a:p>
-            <a:pPr algn="r" indent="0" marL="0">
-              <a:buNone/>
-            </a:pPr>
-            <a:r>
-              <a:rPr lang="en-US" sz="1400" b="1" dirty="0">
-                <a:solidFill>
-                  <a:srgbClr val="1C3F6E"/>
-                </a:solidFill>
-                <a:latin typeface="Calibri" pitchFamily="34" charset="0"/>
-                <a:ea typeface="Calibri" pitchFamily="34" charset="-122"/>
-                <a:cs typeface="Calibri" pitchFamily="34" charset="-120"/>
-              </a:rPr>
-              <a:t>LESSON PLAN</a:t>
-            </a:r>
-            <a:endParaRPr lang="en-US" sz="1400" dirty="0"/>
-          </a:p>
-        </p:txBody>
-      </p:sp>
-      <p:pic>
-        <p:nvPicPr>
-          <p:cNvPr id="3" name="Image 0" descr="/home/claude/f4/img/minesec_sheet.png">    </p:cNvPr>
-          <p:cNvPicPr>
-            <a:picLocks noChangeAspect="1"/>
-          </p:cNvPicPr>
-          <p:nvPr/>
-        </p:nvPicPr>
-        <p:blipFill>
-          <a:blip r:embed="rId1"/>
-          <a:stretch>
-            <a:fillRect/>
-          </a:stretch>
-        </p:blipFill>
-        <p:spPr>
-          <a:xfrm>
-            <a:off x="0" y="658368"/>
-            <a:ext cx="2468880" cy="5833872"/>
-          </a:xfrm>
-          <a:prstGeom prst="rect">
-            <a:avLst/>
-          </a:prstGeom>
-        </p:spPr>
-      </p:pic>
-      <p:sp>
-        <p:nvSpPr>
-          <p:cNvPr id="4" name="Text 1"/>
-          <p:cNvSpPr/>
-          <p:nvPr/>
-        </p:nvSpPr>
-        <p:spPr>
-          <a:xfrm>
-            <a:off x="2697480" y="1005840"/>
-            <a:ext cx="9174175" cy="731520"/>
-          </a:xfrm>
-          <a:prstGeom prst="rect">
-            <a:avLst/>
-          </a:prstGeom>
-          <a:noFill/>
-          <a:ln/>
-        </p:spPr>
-        <p:txBody>
-          <a:bodyPr wrap="square" lIns="0" tIns="0" rIns="0" bIns="0" rtlCol="0" anchor="ctr">
-            <a:normAutofit/>
-          </a:bodyPr>
-          <a:lstStyle/>
-          <a:p>
-            <a:pPr algn="ctr" indent="0" marL="0">
-              <a:buNone/>
-            </a:pPr>
-            <a:r>
-              <a:rPr lang="en-US" sz="3600" b="1" dirty="0">
-                <a:solidFill>
-                  <a:srgbClr val="990011"/>
-                </a:solidFill>
-                <a:latin typeface="Times New Roman" pitchFamily="34" charset="0"/>
-                <a:ea typeface="Times New Roman" pitchFamily="34" charset="-122"/>
-                <a:cs typeface="Times New Roman" pitchFamily="34" charset="-120"/>
-              </a:rPr>
-              <a:t>Lesson Plan</a:t>
-            </a:r>
-            <a:endParaRPr lang="en-US" sz="3600" dirty="0"/>
-          </a:p>
-        </p:txBody>
-      </p:sp>
-      <p:sp>
-        <p:nvSpPr>
-          <p:cNvPr id="5" name="Text 2"/>
-          <p:cNvSpPr/>
-          <p:nvPr/>
-        </p:nvSpPr>
-        <p:spPr>
-          <a:xfrm>
-            <a:off x="2697480" y="1783080"/>
-            <a:ext cx="9174175" cy="4663440"/>
-          </a:xfrm>
-          <a:prstGeom prst="rect">
-            <a:avLst/>
-          </a:prstGeom>
-          <a:noFill/>
-          <a:ln/>
-        </p:spPr>
-        <p:txBody>
-          <a:bodyPr wrap="square" lIns="0" tIns="0" rIns="0" bIns="0" rtlCol="0" anchor="t"/>
-          <a:lstStyle/>
-          <a:p>
-            <a:pPr algn="l" marL="342900" indent="-342900">
-              <a:spcAft>
-                <a:spcPts val="800"/>
-              </a:spcAft>
-              <a:buSzPct val="100000"/>
-              <a:buFont typeface="+mj-lt"/>
-              <a:buAutoNum type="arabicPeriod" startAt="1"/>
-            </a:pPr>
-            <a:r>
-              <a:rPr lang="en-US" sz="4000" dirty="0">
-                <a:solidFill>
-                  <a:srgbClr val="111111"/>
-                </a:solidFill>
-                <a:latin typeface="Times New Roman" pitchFamily="34" charset="0"/>
-                <a:ea typeface="Times New Roman" pitchFamily="34" charset="-122"/>
-                <a:cs typeface="Times New Roman" pitchFamily="34" charset="-120"/>
-              </a:rPr>
-              <a:t>Correction of the homework</a:t>
-            </a:r>
-            <a:endParaRPr lang="en-US" sz="4000" dirty="0"/>
-          </a:p>
-          <a:p>
-            <a:pPr algn="l" marL="342900" indent="-342900">
-              <a:spcAft>
-                <a:spcPts val="800"/>
-              </a:spcAft>
-              <a:buSzPct val="100000"/>
-              <a:buFont typeface="+mj-lt"/>
-              <a:buAutoNum type="arabicPeriod" startAt="1"/>
-            </a:pPr>
-            <a:r>
-              <a:rPr lang="en-US" sz="4000" dirty="0">
-                <a:solidFill>
-                  <a:srgbClr val="111111"/>
-                </a:solidFill>
-                <a:latin typeface="Times New Roman" pitchFamily="34" charset="0"/>
-                <a:ea typeface="Times New Roman" pitchFamily="34" charset="-122"/>
-                <a:cs typeface="Times New Roman" pitchFamily="34" charset="-120"/>
-              </a:rPr>
-              <a:t>Objectives and recall</a:t>
-            </a:r>
-            <a:endParaRPr lang="en-US" sz="4000" dirty="0"/>
-          </a:p>
-          <a:p>
-            <a:pPr algn="l" marL="342900" indent="-342900">
-              <a:spcAft>
-                <a:spcPts val="800"/>
-              </a:spcAft>
-              <a:buSzPct val="100000"/>
-              <a:buFont typeface="+mj-lt"/>
-              <a:buAutoNum type="arabicPeriod" startAt="1"/>
-            </a:pPr>
-            <a:r>
-              <a:rPr lang="en-US" sz="4000" dirty="0">
-                <a:solidFill>
-                  <a:srgbClr val="111111"/>
-                </a:solidFill>
-                <a:latin typeface="Times New Roman" pitchFamily="34" charset="0"/>
-                <a:ea typeface="Times New Roman" pitchFamily="34" charset="-122"/>
-                <a:cs typeface="Times New Roman" pitchFamily="34" charset="-120"/>
-              </a:rPr>
-              <a:t>Real-life situation and action to take</a:t>
-            </a:r>
-            <a:endParaRPr lang="en-US" sz="4000" dirty="0"/>
-          </a:p>
-          <a:p>
-            <a:pPr algn="l" marL="342900" indent="-342900">
-              <a:spcAft>
-                <a:spcPts val="800"/>
-              </a:spcAft>
-              <a:buSzPct val="100000"/>
-              <a:buFont typeface="+mj-lt"/>
-              <a:buAutoNum type="arabicPeriod" startAt="1"/>
-            </a:pPr>
-            <a:r>
-              <a:rPr lang="en-US" sz="4000" dirty="0">
-                <a:solidFill>
-                  <a:srgbClr val="111111"/>
-                </a:solidFill>
-                <a:latin typeface="Times New Roman" pitchFamily="34" charset="0"/>
-                <a:ea typeface="Times New Roman" pitchFamily="34" charset="-122"/>
-                <a:cs typeface="Times New Roman" pitchFamily="34" charset="-120"/>
-              </a:rPr>
-              <a:t>Learning activities</a:t>
-            </a:r>
-            <a:endParaRPr lang="en-US" sz="4000" dirty="0"/>
-          </a:p>
-          <a:p>
-            <a:pPr algn="l" marL="342900" indent="-342900">
-              <a:spcAft>
-                <a:spcPts val="800"/>
-              </a:spcAft>
-              <a:buSzPct val="100000"/>
-              <a:buFont typeface="+mj-lt"/>
-              <a:buAutoNum type="arabicPeriod" startAt="1"/>
-            </a:pPr>
-            <a:r>
-              <a:rPr lang="en-US" sz="4000" dirty="0">
-                <a:solidFill>
-                  <a:srgbClr val="111111"/>
-                </a:solidFill>
-                <a:latin typeface="Times New Roman" pitchFamily="34" charset="0"/>
-                <a:ea typeface="Times New Roman" pitchFamily="34" charset="-122"/>
-                <a:cs typeface="Times New Roman" pitchFamily="34" charset="-120"/>
-              </a:rPr>
-              <a:t>Board summary</a:t>
-            </a:r>
-            <a:endParaRPr lang="en-US" sz="4000" dirty="0"/>
-          </a:p>
-          <a:p>
-            <a:pPr algn="l" marL="342900" indent="-342900">
-              <a:spcAft>
-                <a:spcPts val="800"/>
-              </a:spcAft>
-              <a:buSzPct val="100000"/>
-              <a:buFont typeface="+mj-lt"/>
-              <a:buAutoNum type="arabicPeriod" startAt="1"/>
-            </a:pPr>
-            <a:r>
-              <a:rPr lang="en-US" sz="4000" dirty="0">
-                <a:solidFill>
-                  <a:srgbClr val="111111"/>
-                </a:solidFill>
-                <a:latin typeface="Times New Roman" pitchFamily="34" charset="0"/>
-                <a:ea typeface="Times New Roman" pitchFamily="34" charset="-122"/>
-                <a:cs typeface="Times New Roman" pitchFamily="34" charset="-120"/>
-              </a:rPr>
-              <a:t>Evaluation, remediation and homework</a:t>
-            </a:r>
-            <a:endParaRPr lang="en-US" sz="4000" dirty="0"/>
-          </a:p>
-        </p:txBody>
-      </p:sp>
-      <p:sp>
-        <p:nvSpPr>
-          <p:cNvPr id="25" name="Slide Number Placeholder 0"/>
-          <p:cNvSpPr>
-            <a:spLocks noGrp="1"/>
-          </p:cNvSpPr>
-          <p:nvPr>
-            <p:ph type="sldNum" sz="quarter" idx="4294967295"/>
-          </p:nvPr>
-        </p:nvSpPr>
-        <p:spPr>
-          <a:xfrm>
-            <a:off x="27432" y="91440"/>
-            <a:ext cx="585216" cy="475488"/>
-          </a:xfrm>
-          <a:prstGeom prst="rect">
-            <a:avLst/>
-          </a:prstGeom>
-          <a:extLst>
-            <a:ext uri="{C572A759-6A51-4108-AA02-DFA0A04FC94B}">
-              <ma14:wrappingTextBoxFlag xmlns:ma14="http://schemas.microsoft.com/office/mac/drawingml/2011/main" val="0"/>
-            </a:ext>
-          </a:extLst>
-        </p:spPr>
-        <p:txBody>
-          <a:bodyPr/>
-          <a:lstStyle>
-            <a:lvl1pPr>
-              <a:defRPr sz="2000">
-                <a:solidFill>
-                  <a:srgbClr val="FFFFFF"/>
-                </a:solidFill>
-                <a:latin typeface="Calibri"/>
-                <a:ea typeface="Calibri"/>
-                <a:cs typeface="Calibri"/>
-              </a:defRPr>
-            </a:lvl1pPr>
-          </a:lstStyle>
-          <a:p>
-            <a:pPr algn="ctr"/>
-            <a:fld id="{F7021451-1387-4CA6-816F-3879F97B5CBC}" type="slidenum">
-              <a:rPr b="1" lang="en-US"/>
-              <a:t>6</a:t>
+              <a:t>63</a:t>
             </a:fld>
             <a:endParaRPr lang="en-US"/>
           </a:p>
@@ -21475,7 +24721,7 @@
         <p:spPr>
           <a:xfrm>
             <a:off x="0" y="658368"/>
-            <a:ext cx="5120640" cy="5833872"/>
+            <a:ext cx="2468880" cy="5833872"/>
           </a:xfrm>
           <a:prstGeom prst="rect">
             <a:avLst/>
@@ -21490,8 +24736,8 @@
         </p:nvSpPr>
         <p:spPr>
           <a:xfrm>
-            <a:off x="5349240" y="1005840"/>
-            <a:ext cx="6522415" cy="731520"/>
+            <a:off x="2697480" y="1005840"/>
+            <a:ext cx="9174175" cy="731520"/>
           </a:xfrm>
           <a:prstGeom prst="rect">
             <a:avLst/>
@@ -21531,8 +24777,8 @@
         </p:nvSpPr>
         <p:spPr>
           <a:xfrm>
-            <a:off x="5349240" y="1783080"/>
-            <a:ext cx="6522415" cy="4663440"/>
+            <a:off x="2697480" y="1783080"/>
+            <a:ext cx="9174175" cy="4663440"/>
           </a:xfrm>
           <a:prstGeom prst="rect">
             <a:avLst/>
@@ -21581,7 +24827,7 @@
                 <a:ea typeface="Times New Roman" pitchFamily="34" charset="-122"/>
                 <a:cs typeface="Times New Roman" pitchFamily="34" charset="-120"/>
               </a:rPr>
-              <a:t>Describe the characteristics of mountain climates.</a:t>
+              <a:t>Define a mountain climate.</a:t>
             </a:r>
             <a:endParaRPr lang="en-US" sz="4000" dirty="0"/>
           </a:p>
@@ -21603,7 +24849,29 @@
                 <a:ea typeface="Times New Roman" pitchFamily="34" charset="-122"/>
                 <a:cs typeface="Times New Roman" pitchFamily="34" charset="-120"/>
               </a:rPr>
-              <a:t>Explain the factors of mountain climates.</a:t>
+              <a:t>Describe its main characteristics.</a:t>
+            </a:r>
+            <a:endParaRPr lang="en-US" sz="4000" dirty="0"/>
+          </a:p>
+          <a:p>
+            <a:pPr algn="l" marL="342900" indent="-342900">
+              <a:spcAft>
+                <a:spcPts val="800"/>
+              </a:spcAft>
+              <a:buSzPct val="100000"/>
+              <a:buFont typeface="+mj-lt"/>
+              <a:buAutoNum type="arabicPeriod" startAt="1"/>
+            </a:pPr>
+            <a:r>
+              <a:rPr lang="en-US" sz="4000" dirty="0">
+                <a:solidFill>
+                  <a:srgbClr val="111111"/>
+                </a:solidFill>
+                <a:latin typeface="Times New Roman" pitchFamily="34" charset="0"/>
+                <a:ea typeface="Times New Roman" pitchFamily="34" charset="-122"/>
+                <a:cs typeface="Times New Roman" pitchFamily="34" charset="-120"/>
+              </a:rPr>
+              <a:t>Explain the vertical zonation of climate and vegetation.</a:t>
             </a:r>
             <a:endParaRPr lang="en-US" sz="4000" dirty="0"/>
           </a:p>
@@ -21824,7 +25092,7 @@
                 <a:ea typeface="Times New Roman" pitchFamily="34" charset="-122"/>
                 <a:cs typeface="Times New Roman" pitchFamily="34" charset="-120"/>
               </a:rPr>
-              <a:t>Give the importance of mountain climates for people.</a:t>
+              <a:t>Explain the factors of mountain climates.</a:t>
             </a:r>
             <a:endParaRPr lang="en-US" sz="4000" dirty="0"/>
           </a:p>
@@ -22044,7 +25312,7 @@
                 <a:ea typeface="Times New Roman" pitchFamily="34" charset="-122"/>
                 <a:cs typeface="Times New Roman" pitchFamily="34" charset="-120"/>
               </a:rPr>
-              <a:t>Temperature falls 6.5 °C every 1,000 m.</a:t>
+              <a:t>Temperature falls about 6.5 °C per 1,000 m.</a:t>
             </a:r>
             <a:endParaRPr lang="en-US" sz="4000" dirty="0"/>
           </a:p>
@@ -22065,7 +25333,28 @@
                 <a:ea typeface="Times New Roman" pitchFamily="34" charset="-122"/>
                 <a:cs typeface="Times New Roman" pitchFamily="34" charset="-120"/>
               </a:rPr>
-              <a:t>The windward side of a mountain is wet.</a:t>
+              <a:t>Moist air rising over mountains gives relief rain.</a:t>
+            </a:r>
+            <a:endParaRPr lang="en-US" sz="4000" dirty="0"/>
+          </a:p>
+          <a:p>
+            <a:pPr algn="l" marL="342900" indent="-342900">
+              <a:spcAft>
+                <a:spcPts val="800"/>
+              </a:spcAft>
+              <a:buSzPct val="100000"/>
+              <a:buChar char="•"/>
+            </a:pPr>
+            <a:r>
+              <a:rPr lang="en-US" sz="4000" dirty="0">
+                <a:solidFill>
+                  <a:srgbClr val="111111"/>
+                </a:solidFill>
+                <a:latin typeface="Times New Roman" pitchFamily="34" charset="0"/>
+                <a:ea typeface="Times New Roman" pitchFamily="34" charset="-122"/>
+                <a:cs typeface="Times New Roman" pitchFamily="34" charset="-120"/>
+              </a:rPr>
+              <a:t>Aspect is the direction a slope faces.</a:t>
             </a:r>
             <a:endParaRPr lang="en-US" sz="4000" dirty="0"/>
           </a:p>

--- a/lecons/LSA/Climatology/04_LSA_CLIM_L21_Mountain_Climates.pptx
+++ b/lecons/LSA/Climatology/04_LSA_CLIM_L21_Mountain_Climates.pptx
@@ -68,9 +68,10 @@
     <p:sldId id="316" r:id="rId62"/>
     <p:sldId id="317" r:id="rId63"/>
     <p:sldId id="318" r:id="rId64"/>
+    <p:sldId id="319" r:id="rId65"/>
   </p:sldIdLst>
   <p:notesMasterIdLst>
-    <p:notesMasterId r:id="rId65"/>
+    <p:notesMasterId r:id="rId66"/>
   </p:notesMasterIdLst>
   <p:sldSz cx="12192000" cy="6858000"/>
   <p:notesSz cx="6858000" cy="12192000"/>
@@ -3204,7 +3205,7 @@
           <a:p>
             <a:r>
               <a:rPr lang="en-US" dirty="0"/>
-              <a:t>We continue with the definitions. On this slide we have Vertical zonation, Windward side and Leeward side. Write each point on a new line, with the key term first, and explain it in your own words when we revise.</a:t>
+              <a:t>We continue with the definitions. On this slide we have Vertical zonation and Mountain barrier. Write each point on a new line, with the key term first, and explain it in your own words when we revise.</a:t>
             </a:r>
             <a:endParaRPr lang="en-US" dirty="0"/>
           </a:p>
@@ -3292,7 +3293,7 @@
           <a:p>
             <a:r>
               <a:rPr lang="en-US" dirty="0"/>
-              <a:t>Let us copy Characteristics of Mountain Climates. Mountain climates have the following characteristics. Copy the point on Lower temperatures on the left, then draw the diagram on the right: temperature and height. Give it a title and label it clearly.</a:t>
+              <a:t>Let us copy Temperature and Pressure. Mountain climates have the following characteristics of temperature and pressure. Copy the point on Lower temperatures on the left, then draw the diagram on the right: the fall of temperature with height. Give it a title and label it clearly.</a:t>
             </a:r>
             <a:endParaRPr lang="en-US" dirty="0"/>
           </a:p>
@@ -3380,7 +3381,7 @@
           <a:p>
             <a:r>
               <a:rPr lang="en-US" dirty="0"/>
-              <a:t>We continue with Characteristics of Mountain Climates. On this slide we have Lower air pressure. Write each point on a new line, with the key term first, and explain it in your own words when we revise.</a:t>
+              <a:t>We continue with Temperature and Pressure. Copy the point on Lower air pressure: write the key term first, then its explanation.</a:t>
             </a:r>
             <a:endParaRPr lang="en-US" dirty="0"/>
           </a:p>
@@ -3556,7 +3557,7 @@
           <a:p>
             <a:r>
               <a:rPr lang="en-US" dirty="0"/>
-              <a:t>Copy the point on Heavy rain on windward slopes on the left, then draw the diagram on the right: relief rain. Give it a title and label it clearly.</a:t>
+              <a:t>Copy the point on Large daily range of temperature on the left, then draw the diagram on the right: the mountain climate. Give it a title and label it clearly.</a:t>
             </a:r>
             <a:endParaRPr lang="en-US" dirty="0"/>
           </a:p>
@@ -3644,7 +3645,7 @@
           <a:p>
             <a:r>
               <a:rPr lang="en-US" dirty="0"/>
-              <a:t>We continue with Characteristics of Mountain Climates. On this slide we have Strong solar radiation. Write each point on a new line, with the key term first, and explain it in your own words when we revise.</a:t>
+              <a:t>Let us copy Rainfall and Radiation. Mountain climates have the following characteristics of rainfall and radiation. Copy the point on Heavy rain on windward slopes on the left, then draw the diagram on the right: relief rainfall. Give it a title and label it clearly.</a:t>
             </a:r>
             <a:endParaRPr lang="en-US" dirty="0"/>
           </a:p>
@@ -3732,7 +3733,7 @@
           <a:p>
             <a:r>
               <a:rPr lang="en-US" dirty="0"/>
-              <a:t>Copy the point on Large daily range on the left, then draw the diagram on the right: characteristics of mountain climates. Give it a title and label it clearly.</a:t>
+              <a:t>We continue with Rainfall and Radiation. Copy the point on Mist and cloud: write the key term first, then its explanation.</a:t>
             </a:r>
             <a:endParaRPr lang="en-US" dirty="0"/>
           </a:p>
@@ -3820,7 +3821,7 @@
           <a:p>
             <a:r>
               <a:rPr lang="en-US" dirty="0"/>
-              <a:t>We continue with Characteristics of Mountain Climates. On this slide we have Vertical zonation. Write each point on a new line, with the key term first, and explain it in your own words when we revise.</a:t>
+              <a:t>We continue with Rainfall and Radiation. Copy the point on Strong solar radiation: write the key term first, then its explanation.</a:t>
             </a:r>
             <a:endParaRPr lang="en-US" dirty="0"/>
           </a:p>
@@ -3908,7 +3909,7 @@
           <a:p>
             <a:r>
               <a:rPr lang="en-US" dirty="0"/>
-              <a:t>Let us copy Vertical Zonation: Mount Cameroon. On Mount Cameroon, climate and vegetation change with height as follows. Copy the point on Lower slopes (0–800 m) on the left, then draw the diagram on the right: vegetation zones on Mount Cameroon. Give it a title and label it clearly.</a:t>
+              <a:t>Let us copy Vertical Zonation: Mount Cameroon. On Mount Cameroon, climate and vegetation change with height as follows. Copy the point on Lower slopes (0 to 800 m) on the left, then draw the diagram on the right: vertical zonation. Give it a title and label it clearly.</a:t>
             </a:r>
             <a:endParaRPr lang="en-US" dirty="0"/>
           </a:p>
@@ -3996,7 +3997,7 @@
           <a:p>
             <a:r>
               <a:rPr lang="en-US" dirty="0"/>
-              <a:t>We continue with Vertical Zonation: Mount Cameroon. On this slide we have Middle slopes (800–2,400 m), Upper slopes (2,400–3,800 m) and Summit (above 3,800 m). Write each point on a new line, with the key term first, and explain it in your own words when we revise.</a:t>
+              <a:t>We continue with Vertical Zonation: Mount Cameroon. Copy the point on Middle slopes (800 to 2,400 m): write the key term first, then its explanation.</a:t>
             </a:r>
             <a:endParaRPr lang="en-US" dirty="0"/>
           </a:p>
@@ -4084,7 +4085,7 @@
           <a:p>
             <a:r>
               <a:rPr lang="en-US" dirty="0"/>
-              <a:t>Let us copy Factors of Mountain Climates. Mountain climates are controlled by the following factors. On this slide we have Altitude. Write each point on a new line, with the key term first, and explain it in your own words when we revise. When you finish, we go to the next slide.</a:t>
+              <a:t>We continue with Vertical Zonation: Mount Cameroon. Copy the point on Upper slopes (2,400 to 3,800 m): write the key term first, then its explanation.</a:t>
             </a:r>
             <a:endParaRPr lang="en-US" dirty="0"/>
           </a:p>
@@ -4172,7 +4173,7 @@
           <a:p>
             <a:r>
               <a:rPr lang="en-US" dirty="0"/>
-              <a:t>We continue with Factors of Mountain Climates. On this slide we have Relief. Write each point on a new line, with the key term first, and explain it in your own words when we revise.</a:t>
+              <a:t>We continue with Vertical Zonation: Mount Cameroon. Copy the point on Summit (above 3,800 m): write the key term first, then its explanation.</a:t>
             </a:r>
             <a:endParaRPr lang="en-US" dirty="0"/>
           </a:p>
@@ -4260,7 +4261,7 @@
           <a:p>
             <a:r>
               <a:rPr lang="en-US" dirty="0"/>
-              <a:t>Copy the point on Aspect on the left, then draw the diagram on the right: the aspect of slopes. Give it a title and label it clearly.</a:t>
+              <a:t>Let us copy Factors of Mountain Climates. Mountain climates are controlled by the following factors. Copy the point on Altitude: write the key term first, then its explanation.</a:t>
             </a:r>
             <a:endParaRPr lang="en-US" dirty="0"/>
           </a:p>
@@ -4348,7 +4349,7 @@
           <a:p>
             <a:r>
               <a:rPr lang="en-US" dirty="0"/>
-              <a:t>We continue with Factors of Mountain Climates. On this slide we have Latitude. Write each point on a new line, with the key term first, and explain it in your own words when we revise.</a:t>
+              <a:t>We continue with Factors of Mountain Climates. Copy the point on Relief (mountain barrier): write the key term first, then its explanation.</a:t>
             </a:r>
             <a:endParaRPr lang="en-US" dirty="0"/>
           </a:p>
@@ -4524,7 +4525,7 @@
           <a:p>
             <a:r>
               <a:rPr lang="en-US" dirty="0"/>
-              <a:t>Copy the point on Human use on the left, then draw the diagram on the right: tea on highlands. Give it a title and label it clearly.</a:t>
+              <a:t>Copy the point on Aspect on the left, then draw the diagram on the right: adret and ubac. Give it a title and label it clearly.</a:t>
             </a:r>
             <a:endParaRPr lang="en-US" dirty="0"/>
           </a:p>
@@ -4612,7 +4613,7 @@
           <a:p>
             <a:r>
               <a:rPr lang="en-US" dirty="0"/>
-              <a:t>Now let us check what you have understood. Question 1: Give three characteristics of mountain climates. Answer in your exercise book.</a:t>
+              <a:t>We continue with Factors of Mountain Climates. Copy the point on Latitude: write the key term first, then its explanation.</a:t>
             </a:r>
             <a:endParaRPr lang="en-US" dirty="0"/>
           </a:p>
@@ -4700,7 +4701,7 @@
           <a:p>
             <a:r>
               <a:rPr lang="en-US" dirty="0"/>
-              <a:t>The expected answer is: lower temperatures, lower pressure, heavy windward rain, strong sunshine, large daily range (any three). If you got it right, well done.</a:t>
+              <a:t>Now let us check what you have understood. Question 1: Give three characteristics of mountain climates. Answer in your exercise book.</a:t>
             </a:r>
             <a:endParaRPr lang="en-US" dirty="0"/>
           </a:p>
@@ -4788,7 +4789,7 @@
           <a:p>
             <a:r>
               <a:rPr lang="en-US" dirty="0"/>
-              <a:t>Now let us check what you have understood. Question 2: Explain why the sun feels stronger in the mountains although the air is cooler. Answer in your exercise book.</a:t>
+              <a:t>The expected answer is: lower temperatures, lower pressure, heavy windward rain, strong sunshine, large daily range (any three). If you got it right, well done.</a:t>
             </a:r>
             <a:endParaRPr lang="en-US" dirty="0"/>
           </a:p>
@@ -4876,7 +4877,7 @@
           <a:p>
             <a:r>
               <a:rPr lang="en-US" dirty="0"/>
-              <a:t>The expected answer is: the thin, clean air filters less solar and ultraviolet radiation. If you got it right, well done.</a:t>
+              <a:t>Now let us check what you have understood. Question 2: Explain why the sun feels stronger in the mountains although the air is cooler. Answer in your exercise book.</a:t>
             </a:r>
             <a:endParaRPr lang="en-US" dirty="0"/>
           </a:p>
@@ -4964,7 +4965,7 @@
           <a:p>
             <a:r>
               <a:rPr lang="en-US" dirty="0"/>
-              <a:t>Take your time to copy this part; we will continue together.</a:t>
+              <a:t>The expected answer is: the thin, clean air filters less solar and ultraviolet radiation. If you got it right, well done.</a:t>
             </a:r>
             <a:endParaRPr lang="en-US" dirty="0"/>
           </a:p>
@@ -5052,7 +5053,7 @@
           <a:p>
             <a:r>
               <a:rPr lang="en-US" dirty="0"/>
-              <a:t>For those who need more practice, fill in the blanks in your exercise book. The answers are: number 1, altitude; number 2, leeward; number 3, zonation.</a:t>
+              <a:t>Take your time to copy this part; we will continue together.</a:t>
             </a:r>
             <a:endParaRPr lang="en-US" dirty="0"/>
           </a:p>
@@ -5140,7 +5141,7 @@
           <a:p>
             <a:r>
               <a:rPr lang="en-US" dirty="0"/>
-              <a:t>For your homework: Name one instrument of a weather station. We shall correct it at the beginning of our next lesson.</a:t>
+              <a:t>For those who need more practice, fill in the blanks in your exercise book. The answers are: number 1, altitude; number 2, leeward; number 3, zonation.</a:t>
             </a:r>
             <a:endParaRPr lang="en-US" dirty="0"/>
           </a:p>
@@ -5228,7 +5229,7 @@
           <a:p>
             <a:r>
               <a:rPr lang="en-US" dirty="0"/>
-              <a:t>Our next lesson will be on Further Study 2: Weather Observation, Prediction, Modification and Mapping. Thank you for your attention, and see you next time.</a:t>
+              <a:t>For your homework: Name one instrument of a weather station. We shall correct it at the beginning of our next lesson.</a:t>
             </a:r>
             <a:endParaRPr lang="en-US" dirty="0"/>
           </a:p>
@@ -5316,7 +5317,7 @@
           <a:p>
             <a:r>
               <a:rPr lang="en-US" dirty="0"/>
-              <a:t>Let us play the bilingual game. I say a word in English, and you give me the French word. Then we do the reverse.</a:t>
+              <a:t>Our next lesson will be on Further Study 2: Weather Observation, Prediction, Modification and Mapping. Thank you for your attention, and see you next time.</a:t>
             </a:r>
             <a:endParaRPr lang="en-US" dirty="0"/>
           </a:p>
@@ -5492,7 +5493,7 @@
           <a:p>
             <a:r>
               <a:rPr lang="en-US" dirty="0"/>
-              <a:t>I record this information in the official logbook of the class after the lesson.</a:t>
+              <a:t>Let us play the bilingual game. I say a word in English, and you give me the French word. Then we do the reverse.</a:t>
             </a:r>
             <a:endParaRPr lang="en-US" dirty="0"/>
           </a:p>
@@ -5580,7 +5581,7 @@
           <a:p>
             <a:r>
               <a:rPr lang="en-US" dirty="0"/>
-              <a:t>I complete the second page of the logbook: the matter taught, the evaluation, the homework and the attendance.</a:t>
+              <a:t>I record this information in the official logbook of the class after the lesson.</a:t>
             </a:r>
             <a:endParaRPr lang="en-US" dirty="0"/>
           </a:p>
@@ -5668,7 +5669,7 @@
           <a:p>
             <a:r>
               <a:rPr lang="en-US" dirty="0"/>
-              <a:t>This slide is for me, the teacher: it gives the timing of the lesson and what to do if the projector is not available.</a:t>
+              <a:t>I complete the second page of the logbook: the matter taught, the evaluation, the homework and the attendance.</a:t>
             </a:r>
             <a:endParaRPr lang="en-US" dirty="0"/>
           </a:p>
@@ -5756,7 +5757,7 @@
           <a:p>
             <a:r>
               <a:rPr lang="en-US" dirty="0"/>
-              <a:t>These are the references and picture credits used to prepare this lesson.</a:t>
+              <a:t>This slide is for me, the teacher: it gives the timing of the lesson and what to do if the projector is not available.</a:t>
             </a:r>
             <a:endParaRPr lang="en-US" dirty="0"/>
           </a:p>
@@ -5780,6 +5781,94 @@
             <a:fld id="{F7021451-1387-4CA6-816F-3879F97B5CBC}" type="slidenum">
               <a:rPr lang="en-US"/>
               <a:t>63</a:t>
+            </a:fld>
+            <a:endParaRPr lang="en-US"/>
+          </a:p>
+        </p:txBody>
+      </p:sp>
+    </p:spTree>
+    <p:extLst>
+      <p:ext uri="{BB962C8B-B14F-4D97-AF65-F5344CB8AC3E}">
+        <p14:creationId xmlns:p14="http://schemas.microsoft.com/office/powerpoint/2010/main" val="1024086991"/>
+      </p:ext>
+    </p:extLst>
+  </p:cSld>
+  <p:clrMapOvr>
+    <a:masterClrMapping/>
+  </p:clrMapOvr>
+</p:notes>
+</file>
+
+<file path=ppt/notesSlides/notesSlide64.xml><?xml version="1.0" encoding="utf-8"?>
+<p:notes xmlns:a="http://schemas.openxmlformats.org/drawingml/2006/main" xmlns:r="http://schemas.openxmlformats.org/officeDocument/2006/relationships" xmlns:p="http://schemas.openxmlformats.org/presentationml/2006/main">
+  <p:cSld>
+    <p:spTree>
+      <p:nvGrpSpPr>
+        <p:cNvPr id="1" name=""/>
+        <p:cNvGrpSpPr/>
+        <p:nvPr/>
+      </p:nvGrpSpPr>
+      <p:grpSpPr>
+        <a:xfrm>
+          <a:off x="0" y="0"/>
+          <a:ext cx="0" cy="0"/>
+          <a:chOff x="0" y="0"/>
+          <a:chExt cx="0" cy="0"/>
+        </a:xfrm>
+      </p:grpSpPr>
+      <p:sp>
+        <p:nvSpPr>
+          <p:cNvPr id="2" name="Slide Image Placeholder 1"/>
+          <p:cNvSpPr>
+            <a:spLocks noGrp="1" noRot="1" noChangeAspect="1"/>
+          </p:cNvSpPr>
+          <p:nvPr>
+            <p:ph type="sldImg"/>
+          </p:nvPr>
+        </p:nvSpPr>
+        <p:spPr/>
+      </p:sp>
+      <p:sp>
+        <p:nvSpPr>
+          <p:cNvPr id="3" name="Notes Placeholder 2"/>
+          <p:cNvSpPr>
+            <a:spLocks noGrp="1"/>
+          </p:cNvSpPr>
+          <p:nvPr>
+            <p:ph type="body" idx="1"/>
+          </p:nvPr>
+        </p:nvSpPr>
+        <p:spPr/>
+        <p:txBody>
+          <a:bodyPr/>
+          <a:lstStyle/>
+          <a:p>
+            <a:r>
+              <a:rPr lang="en-US" dirty="0"/>
+              <a:t>These are the references and picture credits used to prepare this lesson.</a:t>
+            </a:r>
+            <a:endParaRPr lang="en-US" dirty="0"/>
+          </a:p>
+        </p:txBody>
+      </p:sp>
+      <p:sp>
+        <p:nvSpPr>
+          <p:cNvPr id="4" name="Slide Number Placeholder 3"/>
+          <p:cNvSpPr>
+            <a:spLocks noGrp="1"/>
+          </p:cNvSpPr>
+          <p:nvPr>
+            <p:ph type="sldNum" sz="quarter" idx="10"/>
+          </p:nvPr>
+        </p:nvSpPr>
+        <p:spPr/>
+        <p:txBody>
+          <a:bodyPr/>
+          <a:lstStyle/>
+          <a:p>
+            <a:fld id="{F7021451-1387-4CA6-816F-3879F97B5CBC}" type="slidenum">
+              <a:rPr lang="en-US"/>
+              <a:t>64</a:t>
             </a:fld>
             <a:endParaRPr lang="en-US"/>
           </a:p>
@@ -15130,7 +15219,7 @@
                 <a:ea typeface="Times New Roman" pitchFamily="34" charset="-122"/>
                 <a:cs typeface="Times New Roman" pitchFamily="34" charset="-120"/>
               </a:rPr>
-              <a:t>Windward side: </a:t>
+              <a:t>Mountain barrier: </a:t>
             </a:r>
             <a:pPr algn="l" indent="0" marL="0">
               <a:spcAft>
@@ -15147,44 +15236,7 @@
                 <a:ea typeface="Times New Roman" pitchFamily="34" charset="-122"/>
                 <a:cs typeface="Times New Roman" pitchFamily="34" charset="-120"/>
               </a:rPr>
-              <a:t>It is the side of a mountain facing the wind.</a:t>
-            </a:r>
-            <a:endParaRPr lang="en-US" sz="4000" dirty="0"/>
-          </a:p>
-          <a:p>
-            <a:pPr algn="l" indent="0" marL="0">
-              <a:spcAft>
-                <a:spcPts val="800"/>
-              </a:spcAft>
-              <a:buNone/>
-            </a:pPr>
-            <a:r>
-              <a:rPr lang="en-US" sz="4000" b="1" dirty="0">
-                <a:solidFill>
-                  <a:srgbClr val="111111"/>
-                </a:solidFill>
-                <a:latin typeface="Times New Roman" pitchFamily="34" charset="0"/>
-                <a:ea typeface="Times New Roman" pitchFamily="34" charset="-122"/>
-                <a:cs typeface="Times New Roman" pitchFamily="34" charset="-120"/>
-              </a:rPr>
-              <a:t>Leeward side: </a:t>
-            </a:r>
-            <a:pPr algn="l" indent="0" marL="0">
-              <a:spcAft>
-                <a:spcPts val="800"/>
-              </a:spcAft>
-              <a:buNone/>
-            </a:pPr>
-            <a:r>
-              <a:rPr lang="en-US" sz="4000" dirty="0">
-                <a:solidFill>
-                  <a:srgbClr val="111111"/>
-                </a:solidFill>
-                <a:latin typeface="Times New Roman" pitchFamily="34" charset="0"/>
-                <a:ea typeface="Times New Roman" pitchFamily="34" charset="-122"/>
-                <a:cs typeface="Times New Roman" pitchFamily="34" charset="-120"/>
-              </a:rPr>
-              <a:t>It is the side of a mountain sheltered from the wind.</a:t>
+              <a:t>It is a mountain range that blocks moving air, forcing it to rise on one side and descend on the other.</a:t>
             </a:r>
             <a:endParaRPr lang="en-US" sz="4000" dirty="0"/>
           </a:p>
@@ -15351,8 +15403,49 @@
         </p:nvSpPr>
         <p:spPr>
           <a:xfrm>
-            <a:off x="365760" y="1783080"/>
-            <a:ext cx="4846320" cy="4617720"/>
+            <a:off x="365760" y="1737360"/>
+            <a:ext cx="6035040" cy="457200"/>
+          </a:xfrm>
+          <a:prstGeom prst="rect">
+            <a:avLst/>
+          </a:prstGeom>
+          <a:noFill/>
+          <a:ln/>
+        </p:spPr>
+        <p:txBody>
+          <a:bodyPr wrap="square" lIns="0" tIns="0" rIns="0" bIns="0" rtlCol="0" anchor="ctr">
+            <a:normAutofit/>
+          </a:bodyPr>
+          <a:lstStyle/>
+          <a:p>
+            <a:pPr algn="l" indent="0" marL="0">
+              <a:buNone/>
+            </a:pPr>
+            <a:r>
+              <a:rPr lang="en-US" sz="3000" b="1" dirty="0">
+                <a:solidFill>
+                  <a:srgbClr val="990011"/>
+                </a:solidFill>
+                <a:latin typeface="Times New Roman" pitchFamily="34" charset="0"/>
+                <a:ea typeface="Times New Roman" pitchFamily="34" charset="-122"/>
+                <a:cs typeface="Times New Roman" pitchFamily="34" charset="-120"/>
+              </a:rPr>
+              <a:t>A) Temperature and Pressure</a:t>
+            </a:r>
+            <a:endParaRPr lang="en-US" sz="3000" dirty="0"/>
+          </a:p>
+        </p:txBody>
+      </p:sp>
+      <p:sp>
+        <p:nvSpPr>
+          <p:cNvPr id="5" name="Text 3"/>
+          <p:cNvSpPr/>
+          <p:nvPr/>
+        </p:nvSpPr>
+        <p:spPr>
+          <a:xfrm>
+            <a:off x="365760" y="2240280"/>
+            <a:ext cx="6035040" cy="4160520"/>
           </a:xfrm>
           <a:prstGeom prst="rect">
             <a:avLst/>
@@ -15371,7 +15464,7 @@
               <a:buNone/>
             </a:pPr>
             <a:r>
-              <a:rPr lang="en-US" sz="3200" i="1" dirty="0">
+              <a:rPr lang="en-US" sz="2800" i="1" dirty="0">
                 <a:solidFill>
                   <a:srgbClr val="111111"/>
                 </a:solidFill>
@@ -15379,9 +15472,9 @@
                 <a:ea typeface="Times New Roman" pitchFamily="34" charset="-122"/>
                 <a:cs typeface="Times New Roman" pitchFamily="34" charset="-120"/>
               </a:rPr>
-              <a:t>Mountain climates have the following characteristics:</a:t>
-            </a:r>
-            <a:endParaRPr lang="en-US" sz="3200" dirty="0"/>
+              <a:t>Mountain climates have the following characteristics of temperature and pressure:</a:t>
+            </a:r>
+            <a:endParaRPr lang="en-US" sz="2800" dirty="0"/>
           </a:p>
           <a:p>
             <a:pPr algn="l" indent="0" marL="0">
@@ -15391,7 +15484,7 @@
               <a:buNone/>
             </a:pPr>
             <a:r>
-              <a:rPr lang="en-US" sz="3200" b="1" dirty="0">
+              <a:rPr lang="en-US" sz="2800" b="1" dirty="0">
                 <a:solidFill>
                   <a:srgbClr val="111111"/>
                 </a:solidFill>
@@ -15408,7 +15501,7 @@
               <a:buNone/>
             </a:pPr>
             <a:r>
-              <a:rPr lang="en-US" sz="3200" dirty="0">
+              <a:rPr lang="en-US" sz="2800" dirty="0">
                 <a:solidFill>
                   <a:srgbClr val="111111"/>
                 </a:solidFill>
@@ -15416,15 +15509,15 @@
                 <a:ea typeface="Times New Roman" pitchFamily="34" charset="-122"/>
                 <a:cs typeface="Times New Roman" pitchFamily="34" charset="-120"/>
               </a:rPr>
-              <a:t>Temperature falls by about 6.5 °C per 1,000 m, so Bamenda and the Mandara Mountains are cooler than the plains.</a:t>
-            </a:r>
-            <a:endParaRPr lang="en-US" sz="3200" dirty="0"/>
+              <a:t>Temperature falls by about 6.5 °C for every 1,000 m of altitude. This is why Bamenda (about 1,200 m) and the Mandara Mountains are cooler than the plains around them.</a:t>
+            </a:r>
+            <a:endParaRPr lang="en-US" sz="2800" dirty="0"/>
           </a:p>
         </p:txBody>
       </p:sp>
       <p:pic>
         <p:nvPicPr>
-          <p:cNvPr id="5" name="Image 0" descr="/home/claude/f4/img/v2/lapse_rate_big.png">    </p:cNvPr>
+          <p:cNvPr id="6" name="Image 0" descr="/home/claude/f4/img/v2/lapse_rate_big.png">    </p:cNvPr>
           <p:cNvPicPr>
             <a:picLocks noChangeAspect="1"/>
           </p:cNvPicPr>
@@ -15438,8 +15531,8 @@
         </p:blipFill>
         <p:spPr>
           <a:xfrm>
-            <a:off x="5349240" y="2617506"/>
-            <a:ext cx="6659575" cy="2601397"/>
+            <a:off x="6537960" y="2849678"/>
+            <a:ext cx="5470855" cy="2137053"/>
           </a:xfrm>
           <a:prstGeom prst="rect">
             <a:avLst/>
@@ -15448,14 +15541,14 @@
       </p:pic>
       <p:sp>
         <p:nvSpPr>
-          <p:cNvPr id="6" name="Text 3"/>
+          <p:cNvPr id="7" name="Text 4"/>
           <p:cNvSpPr/>
           <p:nvPr/>
         </p:nvSpPr>
         <p:spPr>
           <a:xfrm>
-            <a:off x="5349240" y="6089904"/>
-            <a:ext cx="6659575" cy="347472"/>
+            <a:off x="6537960" y="6089904"/>
+            <a:ext cx="5470855" cy="347472"/>
           </a:xfrm>
           <a:prstGeom prst="rect">
             <a:avLst/>
@@ -15479,7 +15572,7 @@
                 <a:ea typeface="Times New Roman" pitchFamily="34" charset="-122"/>
                 <a:cs typeface="Times New Roman" pitchFamily="34" charset="-120"/>
               </a:rPr>
-              <a:t>Illustration: temperature and height</a:t>
+              <a:t>Illustration: the fall of temperature with height</a:t>
             </a:r>
             <a:endParaRPr lang="en-US" sz="1600" dirty="0"/>
           </a:p>
@@ -15614,7 +15707,7 @@
         <p:spPr>
           <a:xfrm>
             <a:off x="0" y="658368"/>
-            <a:ext cx="5120640" cy="5833872"/>
+            <a:ext cx="3840480" cy="5833872"/>
           </a:xfrm>
           <a:prstGeom prst="rect">
             <a:avLst/>
@@ -15629,8 +15722,8 @@
         </p:nvSpPr>
         <p:spPr>
           <a:xfrm>
-            <a:off x="5349240" y="1005840"/>
-            <a:ext cx="6522415" cy="731520"/>
+            <a:off x="4069080" y="1005840"/>
+            <a:ext cx="7802575" cy="731520"/>
           </a:xfrm>
           <a:prstGeom prst="rect">
             <a:avLst/>
@@ -15670,8 +15763,47 @@
         </p:nvSpPr>
         <p:spPr>
           <a:xfrm>
-            <a:off x="5349240" y="1783080"/>
-            <a:ext cx="6522415" cy="4663440"/>
+            <a:off x="4069080" y="1737360"/>
+            <a:ext cx="7802575" cy="457200"/>
+          </a:xfrm>
+          <a:prstGeom prst="rect">
+            <a:avLst/>
+          </a:prstGeom>
+          <a:noFill/>
+          <a:ln/>
+        </p:spPr>
+        <p:txBody>
+          <a:bodyPr wrap="square" lIns="0" tIns="0" rIns="0" bIns="0" rtlCol="0" anchor="ctr"/>
+          <a:lstStyle/>
+          <a:p>
+            <a:pPr algn="l" indent="0" marL="0">
+              <a:buNone/>
+            </a:pPr>
+            <a:r>
+              <a:rPr lang="en-US" sz="3200" b="1" dirty="0">
+                <a:solidFill>
+                  <a:srgbClr val="990011"/>
+                </a:solidFill>
+                <a:latin typeface="Times New Roman" pitchFamily="34" charset="0"/>
+                <a:ea typeface="Times New Roman" pitchFamily="34" charset="-122"/>
+                <a:cs typeface="Times New Roman" pitchFamily="34" charset="-120"/>
+              </a:rPr>
+              <a:t>A) Temperature and Pressure</a:t>
+            </a:r>
+            <a:endParaRPr lang="en-US" sz="3200" dirty="0"/>
+          </a:p>
+        </p:txBody>
+      </p:sp>
+      <p:sp>
+        <p:nvSpPr>
+          <p:cNvPr id="6" name="Text 3"/>
+          <p:cNvSpPr/>
+          <p:nvPr/>
+        </p:nvSpPr>
+        <p:spPr>
+          <a:xfrm>
+            <a:off x="4069080" y="2240280"/>
+            <a:ext cx="7802575" cy="4206240"/>
           </a:xfrm>
           <a:prstGeom prst="rect">
             <a:avLst/>
@@ -15715,7 +15847,7 @@
                 <a:ea typeface="Times New Roman" pitchFamily="34" charset="-122"/>
                 <a:cs typeface="Times New Roman" pitchFamily="34" charset="-120"/>
               </a:rPr>
-              <a:t>The air is thinner and contains less oxygen.</a:t>
+              <a:t>The higher we climb, the less air there is above us, so the pressure and the amount of oxygen fall. At high altitude, people breathe with difficulty and water boils below 100 °C.</a:t>
             </a:r>
             <a:endParaRPr lang="en-US" sz="4000" dirty="0"/>
           </a:p>
@@ -16121,8 +16253,49 @@
         </p:nvSpPr>
         <p:spPr>
           <a:xfrm>
-            <a:off x="365760" y="1783080"/>
-            <a:ext cx="4846320" cy="4617720"/>
+            <a:off x="365760" y="1737360"/>
+            <a:ext cx="6035040" cy="457200"/>
+          </a:xfrm>
+          <a:prstGeom prst="rect">
+            <a:avLst/>
+          </a:prstGeom>
+          <a:noFill/>
+          <a:ln/>
+        </p:spPr>
+        <p:txBody>
+          <a:bodyPr wrap="square" lIns="0" tIns="0" rIns="0" bIns="0" rtlCol="0" anchor="ctr">
+            <a:normAutofit/>
+          </a:bodyPr>
+          <a:lstStyle/>
+          <a:p>
+            <a:pPr algn="l" indent="0" marL="0">
+              <a:buNone/>
+            </a:pPr>
+            <a:r>
+              <a:rPr lang="en-US" sz="3000" b="1" dirty="0">
+                <a:solidFill>
+                  <a:srgbClr val="990011"/>
+                </a:solidFill>
+                <a:latin typeface="Times New Roman" pitchFamily="34" charset="0"/>
+                <a:ea typeface="Times New Roman" pitchFamily="34" charset="-122"/>
+                <a:cs typeface="Times New Roman" pitchFamily="34" charset="-120"/>
+              </a:rPr>
+              <a:t>A) Temperature and Pressure</a:t>
+            </a:r>
+            <a:endParaRPr lang="en-US" sz="3000" dirty="0"/>
+          </a:p>
+        </p:txBody>
+      </p:sp>
+      <p:sp>
+        <p:nvSpPr>
+          <p:cNvPr id="5" name="Text 3"/>
+          <p:cNvSpPr/>
+          <p:nvPr/>
+        </p:nvSpPr>
+        <p:spPr>
+          <a:xfrm>
+            <a:off x="365760" y="2240280"/>
+            <a:ext cx="6035040" cy="4160520"/>
           </a:xfrm>
           <a:prstGeom prst="rect">
             <a:avLst/>
@@ -16141,7 +16314,7 @@
               <a:buNone/>
             </a:pPr>
             <a:r>
-              <a:rPr lang="en-US" sz="3600" b="1" dirty="0">
+              <a:rPr lang="en-US" sz="3200" b="1" dirty="0">
                 <a:solidFill>
                   <a:srgbClr val="111111"/>
                 </a:solidFill>
@@ -16149,7 +16322,7 @@
                 <a:ea typeface="Times New Roman" pitchFamily="34" charset="-122"/>
                 <a:cs typeface="Times New Roman" pitchFamily="34" charset="-120"/>
               </a:rPr>
-              <a:t>Heavy rain on windward slopes: </a:t>
+              <a:t>Large daily range of temperature: </a:t>
             </a:r>
             <a:pPr algn="l" indent="0" marL="0">
               <a:spcAft>
@@ -16158,7 +16331,7 @@
               <a:buNone/>
             </a:pPr>
             <a:r>
-              <a:rPr lang="en-US" sz="3600" dirty="0">
+              <a:rPr lang="en-US" sz="3200" dirty="0">
                 <a:solidFill>
                   <a:srgbClr val="111111"/>
                 </a:solidFill>
@@ -16166,15 +16339,15 @@
                 <a:ea typeface="Times New Roman" pitchFamily="34" charset="-122"/>
                 <a:cs typeface="Times New Roman" pitchFamily="34" charset="-120"/>
               </a:rPr>
-              <a:t>Rising moist air cools and gives orographic rain, as on the seaward side of Mount Cameroon.</a:t>
-            </a:r>
-            <a:endParaRPr lang="en-US" sz="3600" dirty="0"/>
+              <a:t>The thin air lets the sun heat the ground strongly by day but lets heat escape quickly at night. Days are therefore warm in the sun, while nights are very cold, with frost on high summits.</a:t>
+            </a:r>
+            <a:endParaRPr lang="en-US" sz="3200" dirty="0"/>
           </a:p>
         </p:txBody>
       </p:sp>
       <p:pic>
         <p:nvPicPr>
-          <p:cNvPr id="5" name="Image 0" descr="/home/claude/f4/img/v2/rainfall_types_big.png">    </p:cNvPr>
+          <p:cNvPr id="6" name="Image 0" descr="/home/claude/f4/img/v2/clim2_mountain.png">    </p:cNvPr>
           <p:cNvPicPr>
             <a:picLocks noChangeAspect="1"/>
           </p:cNvPicPr>
@@ -16188,8 +16361,8 @@
         </p:blipFill>
         <p:spPr>
           <a:xfrm>
-            <a:off x="5349240" y="2617506"/>
-            <a:ext cx="6659575" cy="2601397"/>
+            <a:off x="6537960" y="2849678"/>
+            <a:ext cx="5470855" cy="2137053"/>
           </a:xfrm>
           <a:prstGeom prst="rect">
             <a:avLst/>
@@ -16198,14 +16371,14 @@
       </p:pic>
       <p:sp>
         <p:nvSpPr>
-          <p:cNvPr id="6" name="Text 3"/>
+          <p:cNvPr id="7" name="Text 4"/>
           <p:cNvSpPr/>
           <p:nvPr/>
         </p:nvSpPr>
         <p:spPr>
           <a:xfrm>
-            <a:off x="5349240" y="6089904"/>
-            <a:ext cx="6659575" cy="347472"/>
+            <a:off x="6537960" y="6089904"/>
+            <a:ext cx="5470855" cy="347472"/>
           </a:xfrm>
           <a:prstGeom prst="rect">
             <a:avLst/>
@@ -16229,7 +16402,7 @@
                 <a:ea typeface="Times New Roman" pitchFamily="34" charset="-122"/>
                 <a:cs typeface="Times New Roman" pitchFamily="34" charset="-120"/>
               </a:rPr>
-              <a:t>Illustration: relief rain</a:t>
+              <a:t>Illustration: the mountain climate</a:t>
             </a:r>
             <a:endParaRPr lang="en-US" sz="1600" dirty="0"/>
           </a:p>
@@ -16347,9 +16520,170 @@
           </a:p>
         </p:txBody>
       </p:sp>
+      <p:sp>
+        <p:nvSpPr>
+          <p:cNvPr id="3" name="Text 1"/>
+          <p:cNvSpPr/>
+          <p:nvPr/>
+        </p:nvSpPr>
+        <p:spPr>
+          <a:xfrm>
+            <a:off x="365760" y="1005840"/>
+            <a:ext cx="11460175" cy="731520"/>
+          </a:xfrm>
+          <a:prstGeom prst="rect">
+            <a:avLst/>
+          </a:prstGeom>
+          <a:noFill/>
+          <a:ln/>
+        </p:spPr>
+        <p:txBody>
+          <a:bodyPr wrap="square" lIns="0" tIns="0" rIns="0" bIns="0" rtlCol="0" anchor="ctr">
+            <a:normAutofit/>
+          </a:bodyPr>
+          <a:lstStyle/>
+          <a:p>
+            <a:pPr algn="ctr" indent="0" marL="0">
+              <a:buNone/>
+            </a:pPr>
+            <a:r>
+              <a:rPr lang="en-US" sz="3600" b="1" dirty="0">
+                <a:solidFill>
+                  <a:srgbClr val="990011"/>
+                </a:solidFill>
+                <a:latin typeface="Times New Roman" pitchFamily="34" charset="0"/>
+                <a:ea typeface="Times New Roman" pitchFamily="34" charset="-122"/>
+                <a:cs typeface="Times New Roman" pitchFamily="34" charset="-120"/>
+              </a:rPr>
+              <a:t>1. Characteristics of Mountain Climates</a:t>
+            </a:r>
+            <a:endParaRPr lang="en-US" sz="3600" dirty="0"/>
+          </a:p>
+        </p:txBody>
+      </p:sp>
+      <p:sp>
+        <p:nvSpPr>
+          <p:cNvPr id="4" name="Text 2"/>
+          <p:cNvSpPr/>
+          <p:nvPr/>
+        </p:nvSpPr>
+        <p:spPr>
+          <a:xfrm>
+            <a:off x="365760" y="1737360"/>
+            <a:ext cx="6035040" cy="457200"/>
+          </a:xfrm>
+          <a:prstGeom prst="rect">
+            <a:avLst/>
+          </a:prstGeom>
+          <a:noFill/>
+          <a:ln/>
+        </p:spPr>
+        <p:txBody>
+          <a:bodyPr wrap="square" lIns="0" tIns="0" rIns="0" bIns="0" rtlCol="0" anchor="ctr">
+            <a:normAutofit/>
+          </a:bodyPr>
+          <a:lstStyle/>
+          <a:p>
+            <a:pPr algn="l" indent="0" marL="0">
+              <a:buNone/>
+            </a:pPr>
+            <a:r>
+              <a:rPr lang="en-US" sz="3000" b="1" dirty="0">
+                <a:solidFill>
+                  <a:srgbClr val="990011"/>
+                </a:solidFill>
+                <a:latin typeface="Times New Roman" pitchFamily="34" charset="0"/>
+                <a:ea typeface="Times New Roman" pitchFamily="34" charset="-122"/>
+                <a:cs typeface="Times New Roman" pitchFamily="34" charset="-120"/>
+              </a:rPr>
+              <a:t>B) Rainfall and Radiation</a:t>
+            </a:r>
+            <a:endParaRPr lang="en-US" sz="3000" dirty="0"/>
+          </a:p>
+        </p:txBody>
+      </p:sp>
+      <p:sp>
+        <p:nvSpPr>
+          <p:cNvPr id="5" name="Text 3"/>
+          <p:cNvSpPr/>
+          <p:nvPr/>
+        </p:nvSpPr>
+        <p:spPr>
+          <a:xfrm>
+            <a:off x="365760" y="2240280"/>
+            <a:ext cx="6035040" cy="4160520"/>
+          </a:xfrm>
+          <a:prstGeom prst="rect">
+            <a:avLst/>
+          </a:prstGeom>
+          <a:noFill/>
+          <a:ln/>
+        </p:spPr>
+        <p:txBody>
+          <a:bodyPr wrap="square" lIns="0" tIns="0" rIns="0" bIns="0" rtlCol="0" anchor="t"/>
+          <a:lstStyle/>
+          <a:p>
+            <a:pPr algn="l" indent="0" marL="0">
+              <a:spcAft>
+                <a:spcPts val="800"/>
+              </a:spcAft>
+              <a:buNone/>
+            </a:pPr>
+            <a:r>
+              <a:rPr lang="en-US" sz="2600" i="1" dirty="0">
+                <a:solidFill>
+                  <a:srgbClr val="111111"/>
+                </a:solidFill>
+                <a:latin typeface="Times New Roman" pitchFamily="34" charset="0"/>
+                <a:ea typeface="Times New Roman" pitchFamily="34" charset="-122"/>
+                <a:cs typeface="Times New Roman" pitchFamily="34" charset="-120"/>
+              </a:rPr>
+              <a:t>Mountain climates have the following characteristics of rainfall and radiation:</a:t>
+            </a:r>
+            <a:endParaRPr lang="en-US" sz="2600" dirty="0"/>
+          </a:p>
+          <a:p>
+            <a:pPr algn="l" indent="0" marL="0">
+              <a:spcAft>
+                <a:spcPts val="800"/>
+              </a:spcAft>
+              <a:buNone/>
+            </a:pPr>
+            <a:r>
+              <a:rPr lang="en-US" sz="2600" b="1" dirty="0">
+                <a:solidFill>
+                  <a:srgbClr val="111111"/>
+                </a:solidFill>
+                <a:latin typeface="Times New Roman" pitchFamily="34" charset="0"/>
+                <a:ea typeface="Times New Roman" pitchFamily="34" charset="-122"/>
+                <a:cs typeface="Times New Roman" pitchFamily="34" charset="-120"/>
+              </a:rPr>
+              <a:t>Heavy rain on windward slopes: </a:t>
+            </a:r>
+            <a:pPr algn="l" indent="0" marL="0">
+              <a:spcAft>
+                <a:spcPts val="800"/>
+              </a:spcAft>
+              <a:buNone/>
+            </a:pPr>
+            <a:r>
+              <a:rPr lang="en-US" sz="2600" dirty="0">
+                <a:solidFill>
+                  <a:srgbClr val="111111"/>
+                </a:solidFill>
+                <a:latin typeface="Times New Roman" pitchFamily="34" charset="0"/>
+                <a:ea typeface="Times New Roman" pitchFamily="34" charset="-122"/>
+                <a:cs typeface="Times New Roman" pitchFamily="34" charset="-120"/>
+              </a:rPr>
+              <a:t>Moist air forced to rise over mountains cools and gives orographic rain, as on the seaward side of Mount Cameroon. The leeward side receives much less rain and forms a rain shadow.</a:t>
+            </a:r>
+            <a:endParaRPr lang="en-US" sz="2600" dirty="0"/>
+          </a:p>
+        </p:txBody>
+      </p:sp>
       <p:pic>
         <p:nvPicPr>
-          <p:cNvPr id="3" name="Image 0" descr="/home/claude/f4/img/minesec_sheet.png">    </p:cNvPr>
+          <p:cNvPr id="6" name="Image 0" descr="/home/claude/f4/img/v2/rainfall_types_big.png">    </p:cNvPr>
           <p:cNvPicPr>
             <a:picLocks noChangeAspect="1"/>
           </p:cNvPicPr>
@@ -16363,8 +16697,8 @@
         </p:blipFill>
         <p:spPr>
           <a:xfrm>
-            <a:off x="0" y="658368"/>
-            <a:ext cx="5120640" cy="5833872"/>
+            <a:off x="6537960" y="2849678"/>
+            <a:ext cx="5470855" cy="2137053"/>
           </a:xfrm>
           <a:prstGeom prst="rect">
             <a:avLst/>
@@ -16373,14 +16707,14 @@
       </p:pic>
       <p:sp>
         <p:nvSpPr>
-          <p:cNvPr id="4" name="Text 1"/>
+          <p:cNvPr id="7" name="Text 4"/>
           <p:cNvSpPr/>
           <p:nvPr/>
         </p:nvSpPr>
         <p:spPr>
           <a:xfrm>
-            <a:off x="5349240" y="1005840"/>
-            <a:ext cx="6522415" cy="731520"/>
+            <a:off x="6537960" y="6089904"/>
+            <a:ext cx="5470855" cy="347472"/>
           </a:xfrm>
           <a:prstGeom prst="rect">
             <a:avLst/>
@@ -16389,85 +16723,24 @@
           <a:ln/>
         </p:spPr>
         <p:txBody>
-          <a:bodyPr wrap="square" lIns="0" tIns="0" rIns="0" bIns="0" rtlCol="0" anchor="ctr">
-            <a:normAutofit/>
-          </a:bodyPr>
+          <a:bodyPr wrap="square" lIns="0" tIns="0" rIns="0" bIns="0" rtlCol="0" anchor="ctr"/>
           <a:lstStyle/>
           <a:p>
             <a:pPr algn="ctr" indent="0" marL="0">
               <a:buNone/>
             </a:pPr>
             <a:r>
-              <a:rPr lang="en-US" sz="3600" b="1" dirty="0">
-                <a:solidFill>
-                  <a:srgbClr val="990011"/>
+              <a:rPr lang="en-US" sz="1600" i="1" dirty="0">
+                <a:solidFill>
+                  <a:srgbClr val="555555"/>
                 </a:solidFill>
                 <a:latin typeface="Times New Roman" pitchFamily="34" charset="0"/>
                 <a:ea typeface="Times New Roman" pitchFamily="34" charset="-122"/>
                 <a:cs typeface="Times New Roman" pitchFamily="34" charset="-120"/>
               </a:rPr>
-              <a:t>1. Characteristics of Mountain Climates</a:t>
-            </a:r>
-            <a:endParaRPr lang="en-US" sz="3600" dirty="0"/>
-          </a:p>
-        </p:txBody>
-      </p:sp>
-      <p:sp>
-        <p:nvSpPr>
-          <p:cNvPr id="5" name="Text 2"/>
-          <p:cNvSpPr/>
-          <p:nvPr/>
-        </p:nvSpPr>
-        <p:spPr>
-          <a:xfrm>
-            <a:off x="5349240" y="1783080"/>
-            <a:ext cx="6522415" cy="4663440"/>
-          </a:xfrm>
-          <a:prstGeom prst="rect">
-            <a:avLst/>
-          </a:prstGeom>
-          <a:noFill/>
-          <a:ln/>
-        </p:spPr>
-        <p:txBody>
-          <a:bodyPr wrap="square" lIns="0" tIns="0" rIns="0" bIns="0" rtlCol="0" anchor="t"/>
-          <a:lstStyle/>
-          <a:p>
-            <a:pPr algn="l" indent="0" marL="0">
-              <a:spcAft>
-                <a:spcPts val="800"/>
-              </a:spcAft>
-              <a:buNone/>
-            </a:pPr>
-            <a:r>
-              <a:rPr lang="en-US" sz="4000" b="1" dirty="0">
-                <a:solidFill>
-                  <a:srgbClr val="111111"/>
-                </a:solidFill>
-                <a:latin typeface="Times New Roman" pitchFamily="34" charset="0"/>
-                <a:ea typeface="Times New Roman" pitchFamily="34" charset="-122"/>
-                <a:cs typeface="Times New Roman" pitchFamily="34" charset="-120"/>
-              </a:rPr>
-              <a:t>Strong solar radiation: </a:t>
-            </a:r>
-            <a:pPr algn="l" indent="0" marL="0">
-              <a:spcAft>
-                <a:spcPts val="800"/>
-              </a:spcAft>
-              <a:buNone/>
-            </a:pPr>
-            <a:r>
-              <a:rPr lang="en-US" sz="4000" dirty="0">
-                <a:solidFill>
-                  <a:srgbClr val="111111"/>
-                </a:solidFill>
-                <a:latin typeface="Times New Roman" pitchFamily="34" charset="0"/>
-                <a:ea typeface="Times New Roman" pitchFamily="34" charset="-122"/>
-                <a:cs typeface="Times New Roman" pitchFamily="34" charset="-120"/>
-              </a:rPr>
-              <a:t>The thin, clean air lets more sunshine and ultraviolet rays through.</a:t>
-            </a:r>
-            <a:endParaRPr lang="en-US" sz="4000" dirty="0"/>
+              <a:t>Illustration: relief rainfall</a:t>
+            </a:r>
+            <a:endParaRPr lang="en-US" sz="1600" dirty="0"/>
           </a:p>
         </p:txBody>
       </p:sp>
@@ -16583,109 +16856,9 @@
           </a:p>
         </p:txBody>
       </p:sp>
-      <p:sp>
-        <p:nvSpPr>
-          <p:cNvPr id="3" name="Text 1"/>
-          <p:cNvSpPr/>
-          <p:nvPr/>
-        </p:nvSpPr>
-        <p:spPr>
-          <a:xfrm>
-            <a:off x="365760" y="1005840"/>
-            <a:ext cx="11460175" cy="731520"/>
-          </a:xfrm>
-          <a:prstGeom prst="rect">
-            <a:avLst/>
-          </a:prstGeom>
-          <a:noFill/>
-          <a:ln/>
-        </p:spPr>
-        <p:txBody>
-          <a:bodyPr wrap="square" lIns="0" tIns="0" rIns="0" bIns="0" rtlCol="0" anchor="ctr">
-            <a:normAutofit/>
-          </a:bodyPr>
-          <a:lstStyle/>
-          <a:p>
-            <a:pPr algn="ctr" indent="0" marL="0">
-              <a:buNone/>
-            </a:pPr>
-            <a:r>
-              <a:rPr lang="en-US" sz="3600" b="1" dirty="0">
-                <a:solidFill>
-                  <a:srgbClr val="990011"/>
-                </a:solidFill>
-                <a:latin typeface="Times New Roman" pitchFamily="34" charset="0"/>
-                <a:ea typeface="Times New Roman" pitchFamily="34" charset="-122"/>
-                <a:cs typeface="Times New Roman" pitchFamily="34" charset="-120"/>
-              </a:rPr>
-              <a:t>1. Characteristics of Mountain Climates</a:t>
-            </a:r>
-            <a:endParaRPr lang="en-US" sz="3600" dirty="0"/>
-          </a:p>
-        </p:txBody>
-      </p:sp>
-      <p:sp>
-        <p:nvSpPr>
-          <p:cNvPr id="4" name="Text 2"/>
-          <p:cNvSpPr/>
-          <p:nvPr/>
-        </p:nvSpPr>
-        <p:spPr>
-          <a:xfrm>
-            <a:off x="365760" y="1783080"/>
-            <a:ext cx="4846320" cy="4617720"/>
-          </a:xfrm>
-          <a:prstGeom prst="rect">
-            <a:avLst/>
-          </a:prstGeom>
-          <a:noFill/>
-          <a:ln/>
-        </p:spPr>
-        <p:txBody>
-          <a:bodyPr wrap="square" lIns="0" tIns="0" rIns="0" bIns="0" rtlCol="0" anchor="t"/>
-          <a:lstStyle/>
-          <a:p>
-            <a:pPr algn="l" indent="0" marL="0">
-              <a:spcAft>
-                <a:spcPts val="800"/>
-              </a:spcAft>
-              <a:buNone/>
-            </a:pPr>
-            <a:r>
-              <a:rPr lang="en-US" sz="3600" b="1" dirty="0">
-                <a:solidFill>
-                  <a:srgbClr val="111111"/>
-                </a:solidFill>
-                <a:latin typeface="Times New Roman" pitchFamily="34" charset="0"/>
-                <a:ea typeface="Times New Roman" pitchFamily="34" charset="-122"/>
-                <a:cs typeface="Times New Roman" pitchFamily="34" charset="-120"/>
-              </a:rPr>
-              <a:t>Large daily range: </a:t>
-            </a:r>
-            <a:pPr algn="l" indent="0" marL="0">
-              <a:spcAft>
-                <a:spcPts val="800"/>
-              </a:spcAft>
-              <a:buNone/>
-            </a:pPr>
-            <a:r>
-              <a:rPr lang="en-US" sz="3600" dirty="0">
-                <a:solidFill>
-                  <a:srgbClr val="111111"/>
-                </a:solidFill>
-                <a:latin typeface="Times New Roman" pitchFamily="34" charset="0"/>
-                <a:ea typeface="Times New Roman" pitchFamily="34" charset="-122"/>
-                <a:cs typeface="Times New Roman" pitchFamily="34" charset="-120"/>
-              </a:rPr>
-              <a:t>Days are warm in the sun, but nights are very cold, with frost on high summits.</a:t>
-            </a:r>
-            <a:endParaRPr lang="en-US" sz="3600" dirty="0"/>
-          </a:p>
-        </p:txBody>
-      </p:sp>
       <p:pic>
         <p:nvPicPr>
-          <p:cNvPr id="5" name="Image 0" descr="/home/claude/f4/img/v2/clim2_mountain.png">    </p:cNvPr>
+          <p:cNvPr id="3" name="Image 0" descr="/home/claude/f4/img/minesec_sheet.png">    </p:cNvPr>
           <p:cNvPicPr>
             <a:picLocks noChangeAspect="1"/>
           </p:cNvPicPr>
@@ -16699,8 +16872,8 @@
         </p:blipFill>
         <p:spPr>
           <a:xfrm>
-            <a:off x="5349240" y="2617506"/>
-            <a:ext cx="6659575" cy="2601397"/>
+            <a:off x="0" y="658368"/>
+            <a:ext cx="5120640" cy="5833872"/>
           </a:xfrm>
           <a:prstGeom prst="rect">
             <a:avLst/>
@@ -16709,14 +16882,14 @@
       </p:pic>
       <p:sp>
         <p:nvSpPr>
-          <p:cNvPr id="6" name="Text 3"/>
+          <p:cNvPr id="4" name="Text 1"/>
           <p:cNvSpPr/>
           <p:nvPr/>
         </p:nvSpPr>
         <p:spPr>
           <a:xfrm>
-            <a:off x="5349240" y="6089904"/>
-            <a:ext cx="6659575" cy="347472"/>
+            <a:off x="5349240" y="1005840"/>
+            <a:ext cx="6522415" cy="731520"/>
           </a:xfrm>
           <a:prstGeom prst="rect">
             <a:avLst/>
@@ -16725,24 +16898,124 @@
           <a:ln/>
         </p:spPr>
         <p:txBody>
-          <a:bodyPr wrap="square" lIns="0" tIns="0" rIns="0" bIns="0" rtlCol="0" anchor="ctr"/>
+          <a:bodyPr wrap="square" lIns="0" tIns="0" rIns="0" bIns="0" rtlCol="0" anchor="ctr">
+            <a:normAutofit/>
+          </a:bodyPr>
           <a:lstStyle/>
           <a:p>
             <a:pPr algn="ctr" indent="0" marL="0">
               <a:buNone/>
             </a:pPr>
             <a:r>
-              <a:rPr lang="en-US" sz="1600" i="1" dirty="0">
-                <a:solidFill>
-                  <a:srgbClr val="555555"/>
+              <a:rPr lang="en-US" sz="3600" b="1" dirty="0">
+                <a:solidFill>
+                  <a:srgbClr val="990011"/>
                 </a:solidFill>
                 <a:latin typeface="Times New Roman" pitchFamily="34" charset="0"/>
                 <a:ea typeface="Times New Roman" pitchFamily="34" charset="-122"/>
                 <a:cs typeface="Times New Roman" pitchFamily="34" charset="-120"/>
               </a:rPr>
-              <a:t>Illustration: characteristics of mountain climates</a:t>
-            </a:r>
-            <a:endParaRPr lang="en-US" sz="1600" dirty="0"/>
+              <a:t>1. Characteristics of Mountain Climates</a:t>
+            </a:r>
+            <a:endParaRPr lang="en-US" sz="3600" dirty="0"/>
+          </a:p>
+        </p:txBody>
+      </p:sp>
+      <p:sp>
+        <p:nvSpPr>
+          <p:cNvPr id="5" name="Text 2"/>
+          <p:cNvSpPr/>
+          <p:nvPr/>
+        </p:nvSpPr>
+        <p:spPr>
+          <a:xfrm>
+            <a:off x="5349240" y="1737360"/>
+            <a:ext cx="6522415" cy="457200"/>
+          </a:xfrm>
+          <a:prstGeom prst="rect">
+            <a:avLst/>
+          </a:prstGeom>
+          <a:noFill/>
+          <a:ln/>
+        </p:spPr>
+        <p:txBody>
+          <a:bodyPr wrap="square" lIns="0" tIns="0" rIns="0" bIns="0" rtlCol="0" anchor="ctr"/>
+          <a:lstStyle/>
+          <a:p>
+            <a:pPr algn="l" indent="0" marL="0">
+              <a:buNone/>
+            </a:pPr>
+            <a:r>
+              <a:rPr lang="en-US" sz="3200" b="1" dirty="0">
+                <a:solidFill>
+                  <a:srgbClr val="990011"/>
+                </a:solidFill>
+                <a:latin typeface="Times New Roman" pitchFamily="34" charset="0"/>
+                <a:ea typeface="Times New Roman" pitchFamily="34" charset="-122"/>
+                <a:cs typeface="Times New Roman" pitchFamily="34" charset="-120"/>
+              </a:rPr>
+              <a:t>B) Rainfall and Radiation</a:t>
+            </a:r>
+            <a:endParaRPr lang="en-US" sz="3200" dirty="0"/>
+          </a:p>
+        </p:txBody>
+      </p:sp>
+      <p:sp>
+        <p:nvSpPr>
+          <p:cNvPr id="6" name="Text 3"/>
+          <p:cNvSpPr/>
+          <p:nvPr/>
+        </p:nvSpPr>
+        <p:spPr>
+          <a:xfrm>
+            <a:off x="5349240" y="2240280"/>
+            <a:ext cx="6522415" cy="4206240"/>
+          </a:xfrm>
+          <a:prstGeom prst="rect">
+            <a:avLst/>
+          </a:prstGeom>
+          <a:noFill/>
+          <a:ln/>
+        </p:spPr>
+        <p:txBody>
+          <a:bodyPr wrap="square" lIns="0" tIns="0" rIns="0" bIns="0" rtlCol="0" anchor="t"/>
+          <a:lstStyle/>
+          <a:p>
+            <a:pPr algn="l" indent="0" marL="0">
+              <a:spcAft>
+                <a:spcPts val="800"/>
+              </a:spcAft>
+              <a:buNone/>
+            </a:pPr>
+            <a:r>
+              <a:rPr lang="en-US" sz="4000" b="1" dirty="0">
+                <a:solidFill>
+                  <a:srgbClr val="111111"/>
+                </a:solidFill>
+                <a:latin typeface="Times New Roman" pitchFamily="34" charset="0"/>
+                <a:ea typeface="Times New Roman" pitchFamily="34" charset="-122"/>
+                <a:cs typeface="Times New Roman" pitchFamily="34" charset="-120"/>
+              </a:rPr>
+              <a:t>Mist and cloud: </a:t>
+            </a:r>
+            <a:pPr algn="l" indent="0" marL="0">
+              <a:spcAft>
+                <a:spcPts val="800"/>
+              </a:spcAft>
+              <a:buNone/>
+            </a:pPr>
+            <a:r>
+              <a:rPr lang="en-US" sz="4000" dirty="0">
+                <a:solidFill>
+                  <a:srgbClr val="111111"/>
+                </a:solidFill>
+                <a:latin typeface="Times New Roman" pitchFamily="34" charset="0"/>
+                <a:ea typeface="Times New Roman" pitchFamily="34" charset="-122"/>
+                <a:cs typeface="Times New Roman" pitchFamily="34" charset="-120"/>
+              </a:rPr>
+              <a:t>The slopes are often in the clouds, especially in the rainy season. Mist and drizzle keep the air humid on the middle slopes.</a:t>
+            </a:r>
+            <a:endParaRPr lang="en-US" sz="4000" dirty="0"/>
           </a:p>
         </p:txBody>
       </p:sp>
@@ -16875,7 +17148,7 @@
         <p:spPr>
           <a:xfrm>
             <a:off x="0" y="658368"/>
-            <a:ext cx="5120640" cy="5833872"/>
+            <a:ext cx="3840480" cy="5833872"/>
           </a:xfrm>
           <a:prstGeom prst="rect">
             <a:avLst/>
@@ -16890,8 +17163,8 @@
         </p:nvSpPr>
         <p:spPr>
           <a:xfrm>
-            <a:off x="5349240" y="1005840"/>
-            <a:ext cx="6522415" cy="731520"/>
+            <a:off x="4069080" y="1005840"/>
+            <a:ext cx="7802575" cy="731520"/>
           </a:xfrm>
           <a:prstGeom prst="rect">
             <a:avLst/>
@@ -16931,8 +17204,47 @@
         </p:nvSpPr>
         <p:spPr>
           <a:xfrm>
-            <a:off x="5349240" y="1783080"/>
-            <a:ext cx="6522415" cy="4663440"/>
+            <a:off x="4069080" y="1737360"/>
+            <a:ext cx="7802575" cy="457200"/>
+          </a:xfrm>
+          <a:prstGeom prst="rect">
+            <a:avLst/>
+          </a:prstGeom>
+          <a:noFill/>
+          <a:ln/>
+        </p:spPr>
+        <p:txBody>
+          <a:bodyPr wrap="square" lIns="0" tIns="0" rIns="0" bIns="0" rtlCol="0" anchor="ctr"/>
+          <a:lstStyle/>
+          <a:p>
+            <a:pPr algn="l" indent="0" marL="0">
+              <a:buNone/>
+            </a:pPr>
+            <a:r>
+              <a:rPr lang="en-US" sz="3200" b="1" dirty="0">
+                <a:solidFill>
+                  <a:srgbClr val="990011"/>
+                </a:solidFill>
+                <a:latin typeface="Times New Roman" pitchFamily="34" charset="0"/>
+                <a:ea typeface="Times New Roman" pitchFamily="34" charset="-122"/>
+                <a:cs typeface="Times New Roman" pitchFamily="34" charset="-120"/>
+              </a:rPr>
+              <a:t>B) Rainfall and Radiation</a:t>
+            </a:r>
+            <a:endParaRPr lang="en-US" sz="3200" dirty="0"/>
+          </a:p>
+        </p:txBody>
+      </p:sp>
+      <p:sp>
+        <p:nvSpPr>
+          <p:cNvPr id="6" name="Text 3"/>
+          <p:cNvSpPr/>
+          <p:nvPr/>
+        </p:nvSpPr>
+        <p:spPr>
+          <a:xfrm>
+            <a:off x="4069080" y="2240280"/>
+            <a:ext cx="7802575" cy="4206240"/>
           </a:xfrm>
           <a:prstGeom prst="rect">
             <a:avLst/>
@@ -16959,7 +17271,7 @@
                 <a:ea typeface="Times New Roman" pitchFamily="34" charset="-122"/>
                 <a:cs typeface="Times New Roman" pitchFamily="34" charset="-120"/>
               </a:rPr>
-              <a:t>Vertical zonation: </a:t>
+              <a:t>Strong solar radiation: </a:t>
             </a:r>
             <a:pPr algn="l" indent="0" marL="0">
               <a:spcAft>
@@ -16976,7 +17288,7 @@
                 <a:ea typeface="Times New Roman" pitchFamily="34" charset="-122"/>
                 <a:cs typeface="Times New Roman" pitchFamily="34" charset="-120"/>
               </a:rPr>
-              <a:t>Climbing a mountain is like travelling from the Equator towards the poles.</a:t>
+              <a:t>The thin, clean air lets more sunshine and ultraviolet rays through than in the lowlands. People can therefore get sunburnt quickly even when the air is cool.</a:t>
             </a:r>
             <a:endParaRPr lang="en-US" sz="4000" dirty="0"/>
           </a:p>
@@ -17144,7 +17456,7 @@
         <p:spPr>
           <a:xfrm>
             <a:off x="365760" y="1783080"/>
-            <a:ext cx="4846320" cy="4617720"/>
+            <a:ext cx="6035040" cy="4617720"/>
           </a:xfrm>
           <a:prstGeom prst="rect">
             <a:avLst/>
@@ -17163,7 +17475,7 @@
               <a:buNone/>
             </a:pPr>
             <a:r>
-              <a:rPr lang="en-US" sz="3600" i="1" dirty="0">
+              <a:rPr lang="en-US" sz="2800" i="1" dirty="0">
                 <a:solidFill>
                   <a:srgbClr val="111111"/>
                 </a:solidFill>
@@ -17173,7 +17485,7 @@
               </a:rPr>
               <a:t>On Mount Cameroon, climate and vegetation change with height as follows:</a:t>
             </a:r>
-            <a:endParaRPr lang="en-US" sz="3600" dirty="0"/>
+            <a:endParaRPr lang="en-US" sz="2800" dirty="0"/>
           </a:p>
           <a:p>
             <a:pPr algn="l" indent="0" marL="0">
@@ -17183,7 +17495,7 @@
               <a:buNone/>
             </a:pPr>
             <a:r>
-              <a:rPr lang="en-US" sz="3600" b="1" dirty="0">
+              <a:rPr lang="en-US" sz="2800" b="1" dirty="0">
                 <a:solidFill>
                   <a:srgbClr val="111111"/>
                 </a:solidFill>
@@ -17191,7 +17503,7 @@
                 <a:ea typeface="Times New Roman" pitchFamily="34" charset="-122"/>
                 <a:cs typeface="Times New Roman" pitchFamily="34" charset="-120"/>
               </a:rPr>
-              <a:t>Lower slopes (0–800 m): </a:t>
+              <a:t>Lower slopes (0 to 800 m): </a:t>
             </a:r>
             <a:pPr algn="l" indent="0" marL="0">
               <a:spcAft>
@@ -17200,7 +17512,7 @@
               <a:buNone/>
             </a:pPr>
             <a:r>
-              <a:rPr lang="en-US" sz="3600" dirty="0">
+              <a:rPr lang="en-US" sz="2800" dirty="0">
                 <a:solidFill>
                   <a:srgbClr val="111111"/>
                 </a:solidFill>
@@ -17208,9 +17520,9 @@
                 <a:ea typeface="Times New Roman" pitchFamily="34" charset="-122"/>
                 <a:cs typeface="Times New Roman" pitchFamily="34" charset="-120"/>
               </a:rPr>
-              <a:t>Hot and very wet, with lowland rainforest and plantations of the CDC.</a:t>
-            </a:r>
-            <a:endParaRPr lang="en-US" sz="3600" dirty="0"/>
+              <a:t>The climate is hot and very wet, with more than 3,000 mm of rain on the seaward side. The natural vegetation is lowland rainforest, largely replaced by plantations of the CDC.</a:t>
+            </a:r>
+            <a:endParaRPr lang="en-US" sz="2800" dirty="0"/>
           </a:p>
         </p:txBody>
       </p:sp>
@@ -17230,8 +17542,8 @@
         </p:blipFill>
         <p:spPr>
           <a:xfrm>
-            <a:off x="5349240" y="2617506"/>
-            <a:ext cx="6659575" cy="2601397"/>
+            <a:off x="6537960" y="2849678"/>
+            <a:ext cx="5470855" cy="2137053"/>
           </a:xfrm>
           <a:prstGeom prst="rect">
             <a:avLst/>
@@ -17246,8 +17558,8 @@
         </p:nvSpPr>
         <p:spPr>
           <a:xfrm>
-            <a:off x="5349240" y="6089904"/>
-            <a:ext cx="6659575" cy="347472"/>
+            <a:off x="6537960" y="6089904"/>
+            <a:ext cx="5470855" cy="347472"/>
           </a:xfrm>
           <a:prstGeom prst="rect">
             <a:avLst/>
@@ -17271,7 +17583,7 @@
                 <a:ea typeface="Times New Roman" pitchFamily="34" charset="-122"/>
                 <a:cs typeface="Times New Roman" pitchFamily="34" charset="-120"/>
               </a:rPr>
-              <a:t>Illustration: vegetation zones on Mount Cameroon</a:t>
+              <a:t>Illustration: vertical zonation</a:t>
             </a:r>
             <a:endParaRPr lang="en-US" sz="1600" dirty="0"/>
           </a:p>
@@ -17406,7 +17718,7 @@
         <p:spPr>
           <a:xfrm>
             <a:off x="0" y="658368"/>
-            <a:ext cx="1463040" cy="5833872"/>
+            <a:ext cx="5120640" cy="5833872"/>
           </a:xfrm>
           <a:prstGeom prst="rect">
             <a:avLst/>
@@ -17421,8 +17733,8 @@
         </p:nvSpPr>
         <p:spPr>
           <a:xfrm>
-            <a:off x="1691640" y="1005840"/>
-            <a:ext cx="10180015" cy="731520"/>
+            <a:off x="5349240" y="1005840"/>
+            <a:ext cx="6522415" cy="731520"/>
           </a:xfrm>
           <a:prstGeom prst="rect">
             <a:avLst/>
@@ -17462,8 +17774,8 @@
         </p:nvSpPr>
         <p:spPr>
           <a:xfrm>
-            <a:off x="1691640" y="1783080"/>
-            <a:ext cx="10180015" cy="4663440"/>
+            <a:off x="5349240" y="1783080"/>
+            <a:ext cx="6522415" cy="4663440"/>
           </a:xfrm>
           <a:prstGeom prst="rect">
             <a:avLst/>
@@ -17490,7 +17802,7 @@
                 <a:ea typeface="Times New Roman" pitchFamily="34" charset="-122"/>
                 <a:cs typeface="Times New Roman" pitchFamily="34" charset="-120"/>
               </a:rPr>
-              <a:t>Middle slopes (800–2,400 m): </a:t>
+              <a:t>Middle slopes (800 to 2,400 m): </a:t>
             </a:r>
             <a:pPr algn="l" indent="0" marL="0">
               <a:spcAft>
@@ -17507,81 +17819,7 @@
                 <a:ea typeface="Times New Roman" pitchFamily="34" charset="-122"/>
                 <a:cs typeface="Times New Roman" pitchFamily="34" charset="-120"/>
               </a:rPr>
-              <a:t>Cooler and misty, with submontane and montane forest.</a:t>
-            </a:r>
-            <a:endParaRPr lang="en-US" sz="4000" dirty="0"/>
-          </a:p>
-          <a:p>
-            <a:pPr algn="l" indent="0" marL="0">
-              <a:spcAft>
-                <a:spcPts val="800"/>
-              </a:spcAft>
-              <a:buNone/>
-            </a:pPr>
-            <a:r>
-              <a:rPr lang="en-US" sz="4000" b="1" dirty="0">
-                <a:solidFill>
-                  <a:srgbClr val="111111"/>
-                </a:solidFill>
-                <a:latin typeface="Times New Roman" pitchFamily="34" charset="0"/>
-                <a:ea typeface="Times New Roman" pitchFamily="34" charset="-122"/>
-                <a:cs typeface="Times New Roman" pitchFamily="34" charset="-120"/>
-              </a:rPr>
-              <a:t>Upper slopes (2,400–3,800 m): </a:t>
-            </a:r>
-            <a:pPr algn="l" indent="0" marL="0">
-              <a:spcAft>
-                <a:spcPts val="800"/>
-              </a:spcAft>
-              <a:buNone/>
-            </a:pPr>
-            <a:r>
-              <a:rPr lang="en-US" sz="4000" dirty="0">
-                <a:solidFill>
-                  <a:srgbClr val="111111"/>
-                </a:solidFill>
-                <a:latin typeface="Times New Roman" pitchFamily="34" charset="0"/>
-                <a:ea typeface="Times New Roman" pitchFamily="34" charset="-122"/>
-                <a:cs typeface="Times New Roman" pitchFamily="34" charset="-120"/>
-              </a:rPr>
-              <a:t>Cool to cold, with montane grassland.</a:t>
-            </a:r>
-            <a:endParaRPr lang="en-US" sz="4000" dirty="0"/>
-          </a:p>
-          <a:p>
-            <a:pPr algn="l" indent="0" marL="0">
-              <a:spcAft>
-                <a:spcPts val="800"/>
-              </a:spcAft>
-              <a:buNone/>
-            </a:pPr>
-            <a:r>
-              <a:rPr lang="en-US" sz="4000" b="1" dirty="0">
-                <a:solidFill>
-                  <a:srgbClr val="111111"/>
-                </a:solidFill>
-                <a:latin typeface="Times New Roman" pitchFamily="34" charset="0"/>
-                <a:ea typeface="Times New Roman" pitchFamily="34" charset="-122"/>
-                <a:cs typeface="Times New Roman" pitchFamily="34" charset="-120"/>
-              </a:rPr>
-              <a:t>Summit (above 3,800 m): </a:t>
-            </a:r>
-            <a:pPr algn="l" indent="0" marL="0">
-              <a:spcAft>
-                <a:spcPts val="800"/>
-              </a:spcAft>
-              <a:buNone/>
-            </a:pPr>
-            <a:r>
-              <a:rPr lang="en-US" sz="4000" dirty="0">
-                <a:solidFill>
-                  <a:srgbClr val="111111"/>
-                </a:solidFill>
-                <a:latin typeface="Times New Roman" pitchFamily="34" charset="0"/>
-                <a:ea typeface="Times New Roman" pitchFamily="34" charset="-122"/>
-                <a:cs typeface="Times New Roman" pitchFamily="34" charset="-120"/>
-              </a:rPr>
-              <a:t>Cold, windy and dry, with bare lava and rock and frost at night.</a:t>
+              <a:t>The climate is cooler and often misty. It supports submontane and montane forest with tree ferns, mosses and epiphytes.</a:t>
             </a:r>
             <a:endParaRPr lang="en-US" sz="4000" dirty="0"/>
           </a:p>
@@ -17758,7 +17996,7 @@
                 <a:ea typeface="Times New Roman" pitchFamily="34" charset="-122"/>
                 <a:cs typeface="Times New Roman" pitchFamily="34" charset="-120"/>
               </a:rPr>
-              <a:t>3. Factors of Mountain Climates</a:t>
+              <a:t>2. Vertical Zonation: Mount Cameroon</a:t>
             </a:r>
             <a:endParaRPr lang="en-US" sz="3600" dirty="0"/>
           </a:p>
@@ -17792,7 +18030,7 @@
               <a:buNone/>
             </a:pPr>
             <a:r>
-              <a:rPr lang="en-US" sz="4000" i="1" dirty="0">
+              <a:rPr lang="en-US" sz="4000" b="1" dirty="0">
                 <a:solidFill>
                   <a:srgbClr val="111111"/>
                 </a:solidFill>
@@ -17800,11 +18038,8 @@
                 <a:ea typeface="Times New Roman" pitchFamily="34" charset="-122"/>
                 <a:cs typeface="Times New Roman" pitchFamily="34" charset="-120"/>
               </a:rPr>
-              <a:t>Mountain climates are controlled by the following factors:</a:t>
-            </a:r>
-            <a:endParaRPr lang="en-US" sz="4000" dirty="0"/>
-          </a:p>
-          <a:p>
+              <a:t>Upper slopes (2,400 to 3,800 m): </a:t>
+            </a:r>
             <a:pPr algn="l" indent="0" marL="0">
               <a:spcAft>
                 <a:spcPts val="800"/>
@@ -17812,7 +18047,7 @@
               <a:buNone/>
             </a:pPr>
             <a:r>
-              <a:rPr lang="en-US" sz="4000" b="1" dirty="0">
+              <a:rPr lang="en-US" sz="4000" dirty="0">
                 <a:solidFill>
                   <a:srgbClr val="111111"/>
                 </a:solidFill>
@@ -17820,24 +18055,7 @@
                 <a:ea typeface="Times New Roman" pitchFamily="34" charset="-122"/>
                 <a:cs typeface="Times New Roman" pitchFamily="34" charset="-120"/>
               </a:rPr>
-              <a:t>Altitude: </a:t>
-            </a:r>
-            <a:pPr algn="l" indent="0" marL="0">
-              <a:spcAft>
-                <a:spcPts val="800"/>
-              </a:spcAft>
-              <a:buNone/>
-            </a:pPr>
-            <a:r>
-              <a:rPr lang="en-US" sz="4000" dirty="0">
-                <a:solidFill>
-                  <a:srgbClr val="111111"/>
-                </a:solidFill>
-                <a:latin typeface="Times New Roman" pitchFamily="34" charset="0"/>
-                <a:ea typeface="Times New Roman" pitchFamily="34" charset="-122"/>
-                <a:cs typeface="Times New Roman" pitchFamily="34" charset="-120"/>
-              </a:rPr>
-              <a:t>It is the most important factor: height lowers temperature and pressure.</a:t>
+              <a:t>The climate is cool to cold, with less rain above the cloud layer. Montane grassland replaces the forest.</a:t>
             </a:r>
             <a:endParaRPr lang="en-US" sz="4000" dirty="0"/>
           </a:p>
@@ -18014,7 +18232,7 @@
                 <a:ea typeface="Times New Roman" pitchFamily="34" charset="-122"/>
                 <a:cs typeface="Times New Roman" pitchFamily="34" charset="-120"/>
               </a:rPr>
-              <a:t>3. Factors of Mountain Climates (continued)</a:t>
+              <a:t>2. Vertical Zonation: Mount Cameroon</a:t>
             </a:r>
             <a:endParaRPr lang="en-US" sz="3600" dirty="0"/>
           </a:p>
@@ -18056,7 +18274,7 @@
                 <a:ea typeface="Times New Roman" pitchFamily="34" charset="-122"/>
                 <a:cs typeface="Times New Roman" pitchFamily="34" charset="-120"/>
               </a:rPr>
-              <a:t>Relief: </a:t>
+              <a:t>Summit (above 3,800 m): </a:t>
             </a:r>
             <a:pPr algn="l" indent="0" marL="0">
               <a:spcAft>
@@ -18073,7 +18291,7 @@
                 <a:ea typeface="Times New Roman" pitchFamily="34" charset="-122"/>
                 <a:cs typeface="Times New Roman" pitchFamily="34" charset="-120"/>
               </a:rPr>
-              <a:t>The shape and orientation of mountains force air to rise, giving rain on the windward side and a dry rain shadow on the leeward side.</a:t>
+              <a:t>The climate is cold, windy and dry, with frost at night. The ground is mostly bare lava and rock with few plants.</a:t>
             </a:r>
             <a:endParaRPr lang="en-US" sz="4000" dirty="0"/>
           </a:p>
@@ -18191,109 +18409,9 @@
           </a:p>
         </p:txBody>
       </p:sp>
-      <p:sp>
-        <p:nvSpPr>
-          <p:cNvPr id="3" name="Text 1"/>
-          <p:cNvSpPr/>
-          <p:nvPr/>
-        </p:nvSpPr>
-        <p:spPr>
-          <a:xfrm>
-            <a:off x="365760" y="1005840"/>
-            <a:ext cx="11460175" cy="731520"/>
-          </a:xfrm>
-          <a:prstGeom prst="rect">
-            <a:avLst/>
-          </a:prstGeom>
-          <a:noFill/>
-          <a:ln/>
-        </p:spPr>
-        <p:txBody>
-          <a:bodyPr wrap="square" lIns="0" tIns="0" rIns="0" bIns="0" rtlCol="0" anchor="ctr">
-            <a:normAutofit/>
-          </a:bodyPr>
-          <a:lstStyle/>
-          <a:p>
-            <a:pPr algn="ctr" indent="0" marL="0">
-              <a:buNone/>
-            </a:pPr>
-            <a:r>
-              <a:rPr lang="en-US" sz="3600" b="1" dirty="0">
-                <a:solidFill>
-                  <a:srgbClr val="990011"/>
-                </a:solidFill>
-                <a:latin typeface="Times New Roman" pitchFamily="34" charset="0"/>
-                <a:ea typeface="Times New Roman" pitchFamily="34" charset="-122"/>
-                <a:cs typeface="Times New Roman" pitchFamily="34" charset="-120"/>
-              </a:rPr>
-              <a:t>3. Factors of Mountain Climates</a:t>
-            </a:r>
-            <a:endParaRPr lang="en-US" sz="3600" dirty="0"/>
-          </a:p>
-        </p:txBody>
-      </p:sp>
-      <p:sp>
-        <p:nvSpPr>
-          <p:cNvPr id="4" name="Text 2"/>
-          <p:cNvSpPr/>
-          <p:nvPr/>
-        </p:nvSpPr>
-        <p:spPr>
-          <a:xfrm>
-            <a:off x="365760" y="1783080"/>
-            <a:ext cx="4846320" cy="4617720"/>
-          </a:xfrm>
-          <a:prstGeom prst="rect">
-            <a:avLst/>
-          </a:prstGeom>
-          <a:noFill/>
-          <a:ln/>
-        </p:spPr>
-        <p:txBody>
-          <a:bodyPr wrap="square" lIns="0" tIns="0" rIns="0" bIns="0" rtlCol="0" anchor="t"/>
-          <a:lstStyle/>
-          <a:p>
-            <a:pPr algn="l" indent="0" marL="0">
-              <a:spcAft>
-                <a:spcPts val="800"/>
-              </a:spcAft>
-              <a:buNone/>
-            </a:pPr>
-            <a:r>
-              <a:rPr lang="en-US" sz="3600" b="1" dirty="0">
-                <a:solidFill>
-                  <a:srgbClr val="111111"/>
-                </a:solidFill>
-                <a:latin typeface="Times New Roman" pitchFamily="34" charset="0"/>
-                <a:ea typeface="Times New Roman" pitchFamily="34" charset="-122"/>
-                <a:cs typeface="Times New Roman" pitchFamily="34" charset="-120"/>
-              </a:rPr>
-              <a:t>Aspect: </a:t>
-            </a:r>
-            <a:pPr algn="l" indent="0" marL="0">
-              <a:spcAft>
-                <a:spcPts val="800"/>
-              </a:spcAft>
-              <a:buNone/>
-            </a:pPr>
-            <a:r>
-              <a:rPr lang="en-US" sz="3600" dirty="0">
-                <a:solidFill>
-                  <a:srgbClr val="111111"/>
-                </a:solidFill>
-                <a:latin typeface="Times New Roman" pitchFamily="34" charset="0"/>
-                <a:ea typeface="Times New Roman" pitchFamily="34" charset="-122"/>
-                <a:cs typeface="Times New Roman" pitchFamily="34" charset="-120"/>
-              </a:rPr>
-              <a:t>Slopes facing the sun are warmer and drier, while slopes facing away are cooler, shadier and moister.</a:t>
-            </a:r>
-            <a:endParaRPr lang="en-US" sz="3600" dirty="0"/>
-          </a:p>
-        </p:txBody>
-      </p:sp>
       <p:pic>
         <p:nvPicPr>
-          <p:cNvPr id="5" name="Image 0" descr="/home/claude/f4/img/v2/aspect_big.png">    </p:cNvPr>
+          <p:cNvPr id="3" name="Image 0" descr="/home/claude/f4/img/minesec_sheet.png">    </p:cNvPr>
           <p:cNvPicPr>
             <a:picLocks noChangeAspect="1"/>
           </p:cNvPicPr>
@@ -18307,8 +18425,8 @@
         </p:blipFill>
         <p:spPr>
           <a:xfrm>
-            <a:off x="5349240" y="2617506"/>
-            <a:ext cx="6659575" cy="2601397"/>
+            <a:off x="0" y="658368"/>
+            <a:ext cx="3840480" cy="5833872"/>
           </a:xfrm>
           <a:prstGeom prst="rect">
             <a:avLst/>
@@ -18317,14 +18435,14 @@
       </p:pic>
       <p:sp>
         <p:nvSpPr>
-          <p:cNvPr id="6" name="Text 3"/>
+          <p:cNvPr id="4" name="Text 1"/>
           <p:cNvSpPr/>
           <p:nvPr/>
         </p:nvSpPr>
         <p:spPr>
           <a:xfrm>
-            <a:off x="5349240" y="6089904"/>
-            <a:ext cx="6659575" cy="347472"/>
+            <a:off x="4069080" y="1005840"/>
+            <a:ext cx="7802575" cy="731520"/>
           </a:xfrm>
           <a:prstGeom prst="rect">
             <a:avLst/>
@@ -18333,24 +18451,105 @@
           <a:ln/>
         </p:spPr>
         <p:txBody>
-          <a:bodyPr wrap="square" lIns="0" tIns="0" rIns="0" bIns="0" rtlCol="0" anchor="ctr"/>
+          <a:bodyPr wrap="square" lIns="0" tIns="0" rIns="0" bIns="0" rtlCol="0" anchor="ctr">
+            <a:normAutofit/>
+          </a:bodyPr>
           <a:lstStyle/>
           <a:p>
             <a:pPr algn="ctr" indent="0" marL="0">
               <a:buNone/>
             </a:pPr>
             <a:r>
-              <a:rPr lang="en-US" sz="1600" i="1" dirty="0">
-                <a:solidFill>
-                  <a:srgbClr val="555555"/>
+              <a:rPr lang="en-US" sz="3600" b="1" dirty="0">
+                <a:solidFill>
+                  <a:srgbClr val="990011"/>
                 </a:solidFill>
                 <a:latin typeface="Times New Roman" pitchFamily="34" charset="0"/>
                 <a:ea typeface="Times New Roman" pitchFamily="34" charset="-122"/>
                 <a:cs typeface="Times New Roman" pitchFamily="34" charset="-120"/>
               </a:rPr>
-              <a:t>Illustration: the aspect of slopes</a:t>
-            </a:r>
-            <a:endParaRPr lang="en-US" sz="1600" dirty="0"/>
+              <a:t>3. Factors of Mountain Climates</a:t>
+            </a:r>
+            <a:endParaRPr lang="en-US" sz="3600" dirty="0"/>
+          </a:p>
+        </p:txBody>
+      </p:sp>
+      <p:sp>
+        <p:nvSpPr>
+          <p:cNvPr id="5" name="Text 2"/>
+          <p:cNvSpPr/>
+          <p:nvPr/>
+        </p:nvSpPr>
+        <p:spPr>
+          <a:xfrm>
+            <a:off x="4069080" y="1783080"/>
+            <a:ext cx="7802575" cy="4663440"/>
+          </a:xfrm>
+          <a:prstGeom prst="rect">
+            <a:avLst/>
+          </a:prstGeom>
+          <a:noFill/>
+          <a:ln/>
+        </p:spPr>
+        <p:txBody>
+          <a:bodyPr wrap="square" lIns="0" tIns="0" rIns="0" bIns="0" rtlCol="0" anchor="t"/>
+          <a:lstStyle/>
+          <a:p>
+            <a:pPr algn="l" indent="0" marL="0">
+              <a:spcAft>
+                <a:spcPts val="800"/>
+              </a:spcAft>
+              <a:buNone/>
+            </a:pPr>
+            <a:r>
+              <a:rPr lang="en-US" sz="4000" i="1" dirty="0">
+                <a:solidFill>
+                  <a:srgbClr val="111111"/>
+                </a:solidFill>
+                <a:latin typeface="Times New Roman" pitchFamily="34" charset="0"/>
+                <a:ea typeface="Times New Roman" pitchFamily="34" charset="-122"/>
+                <a:cs typeface="Times New Roman" pitchFamily="34" charset="-120"/>
+              </a:rPr>
+              <a:t>Mountain climates are controlled by the following factors:</a:t>
+            </a:r>
+            <a:endParaRPr lang="en-US" sz="4000" dirty="0"/>
+          </a:p>
+          <a:p>
+            <a:pPr algn="l" indent="0" marL="0">
+              <a:spcAft>
+                <a:spcPts val="800"/>
+              </a:spcAft>
+              <a:buNone/>
+            </a:pPr>
+            <a:r>
+              <a:rPr lang="en-US" sz="4000" b="1" dirty="0">
+                <a:solidFill>
+                  <a:srgbClr val="111111"/>
+                </a:solidFill>
+                <a:latin typeface="Times New Roman" pitchFamily="34" charset="0"/>
+                <a:ea typeface="Times New Roman" pitchFamily="34" charset="-122"/>
+                <a:cs typeface="Times New Roman" pitchFamily="34" charset="-120"/>
+              </a:rPr>
+              <a:t>Altitude: </a:t>
+            </a:r>
+            <a:pPr algn="l" indent="0" marL="0">
+              <a:spcAft>
+                <a:spcPts val="800"/>
+              </a:spcAft>
+              <a:buNone/>
+            </a:pPr>
+            <a:r>
+              <a:rPr lang="en-US" sz="4000" dirty="0">
+                <a:solidFill>
+                  <a:srgbClr val="111111"/>
+                </a:solidFill>
+                <a:latin typeface="Times New Roman" pitchFamily="34" charset="0"/>
+                <a:ea typeface="Times New Roman" pitchFamily="34" charset="-122"/>
+                <a:cs typeface="Times New Roman" pitchFamily="34" charset="-120"/>
+              </a:rPr>
+              <a:t>Altitude is the most important factor, because height lowers both temperature and pressure. Each rise of 1,000 m cools the air by about 6.5 °C.</a:t>
+            </a:r>
+            <a:endParaRPr lang="en-US" sz="4000" dirty="0"/>
           </a:p>
         </p:txBody>
       </p:sp>
@@ -18483,7 +18682,7 @@
         <p:spPr>
           <a:xfrm>
             <a:off x="0" y="658368"/>
-            <a:ext cx="5120640" cy="5833872"/>
+            <a:ext cx="3840480" cy="5833872"/>
           </a:xfrm>
           <a:prstGeom prst="rect">
             <a:avLst/>
@@ -18498,8 +18697,8 @@
         </p:nvSpPr>
         <p:spPr>
           <a:xfrm>
-            <a:off x="5349240" y="1005840"/>
-            <a:ext cx="6522415" cy="731520"/>
+            <a:off x="4069080" y="1005840"/>
+            <a:ext cx="7802575" cy="731520"/>
           </a:xfrm>
           <a:prstGeom prst="rect">
             <a:avLst/>
@@ -18539,8 +18738,8 @@
         </p:nvSpPr>
         <p:spPr>
           <a:xfrm>
-            <a:off x="5349240" y="1783080"/>
-            <a:ext cx="6522415" cy="4663440"/>
+            <a:off x="4069080" y="1783080"/>
+            <a:ext cx="7802575" cy="4663440"/>
           </a:xfrm>
           <a:prstGeom prst="rect">
             <a:avLst/>
@@ -18567,7 +18766,7 @@
                 <a:ea typeface="Times New Roman" pitchFamily="34" charset="-122"/>
                 <a:cs typeface="Times New Roman" pitchFamily="34" charset="-120"/>
               </a:rPr>
-              <a:t>Latitude: </a:t>
+              <a:t>Relief (mountain barrier): </a:t>
             </a:r>
             <a:pPr algn="l" indent="0" marL="0">
               <a:spcAft>
@@ -18584,7 +18783,7 @@
                 <a:ea typeface="Times New Roman" pitchFamily="34" charset="-122"/>
                 <a:cs typeface="Times New Roman" pitchFamily="34" charset="-120"/>
               </a:rPr>
-              <a:t>It sets the base temperature: a mountain near Garoua has a much warmer base than a mountain of the same height in Europe.</a:t>
+              <a:t>The shape and direction of a mountain range force moving air to rise on one side and descend on the other. This gives rain on the windward side and a dry, warm rain shadow on the leeward side.</a:t>
             </a:r>
             <a:endParaRPr lang="en-US" sz="4000" dirty="0"/>
           </a:p>
@@ -18971,7 +19170,7 @@
         <p:spPr>
           <a:xfrm>
             <a:off x="365760" y="1783080"/>
-            <a:ext cx="4846320" cy="4617720"/>
+            <a:ext cx="6035040" cy="4617720"/>
           </a:xfrm>
           <a:prstGeom prst="rect">
             <a:avLst/>
@@ -18998,7 +19197,7 @@
                 <a:ea typeface="Times New Roman" pitchFamily="34" charset="-122"/>
                 <a:cs typeface="Times New Roman" pitchFamily="34" charset="-120"/>
               </a:rPr>
-              <a:t>Human use: </a:t>
+              <a:t>Aspect: </a:t>
             </a:r>
             <a:pPr algn="l" indent="0" marL="0">
               <a:spcAft>
@@ -19015,7 +19214,7 @@
                 <a:ea typeface="Times New Roman" pitchFamily="34" charset="-122"/>
                 <a:cs typeface="Times New Roman" pitchFamily="34" charset="-120"/>
               </a:rPr>
-              <a:t>The cool, healthy highlands of the West support dense populations, tea, coffee and tourism.</a:t>
+              <a:t>Slopes facing the sun (adret) receive more heat and are warmer and drier. Slopes facing away from it (ubac) are cooler, shadier and moister.</a:t>
             </a:r>
             <a:endParaRPr lang="en-US" sz="3600" dirty="0"/>
           </a:p>
@@ -19023,7 +19222,7 @@
       </p:sp>
       <p:pic>
         <p:nvPicPr>
-          <p:cNvPr id="5" name="Image 0" descr="/home/claude/f4/img/v2/f2t_tea_highlands.jpg">    </p:cNvPr>
+          <p:cNvPr id="5" name="Image 0" descr="/home/claude/f4/img/v2/aspect_big.png">    </p:cNvPr>
           <p:cNvPicPr>
             <a:picLocks noChangeAspect="1"/>
           </p:cNvPicPr>
@@ -19037,8 +19236,8 @@
         </p:blipFill>
         <p:spPr>
           <a:xfrm>
-            <a:off x="5349240" y="2451667"/>
-            <a:ext cx="6659575" cy="2933075"/>
+            <a:off x="6537960" y="2849678"/>
+            <a:ext cx="5470855" cy="2137053"/>
           </a:xfrm>
           <a:prstGeom prst="rect">
             <a:avLst/>
@@ -19053,8 +19252,8 @@
         </p:nvSpPr>
         <p:spPr>
           <a:xfrm>
-            <a:off x="5349240" y="6089904"/>
-            <a:ext cx="6659575" cy="347472"/>
+            <a:off x="6537960" y="6089904"/>
+            <a:ext cx="5470855" cy="347472"/>
           </a:xfrm>
           <a:prstGeom prst="rect">
             <a:avLst/>
@@ -19078,7 +19277,7 @@
                 <a:ea typeface="Times New Roman" pitchFamily="34" charset="-122"/>
                 <a:cs typeface="Times New Roman" pitchFamily="34" charset="-120"/>
               </a:rPr>
-              <a:t>Illustration: tea on highlands</a:t>
+              <a:t>Illustration: adret and ubac</a:t>
             </a:r>
             <a:endParaRPr lang="en-US" sz="1600" dirty="0"/>
           </a:p>
@@ -19190,7 +19389,7 @@
                 <a:ea typeface="Calibri" pitchFamily="34" charset="-122"/>
                 <a:cs typeface="Calibri" pitchFamily="34" charset="-120"/>
               </a:rPr>
-              <a:t>FORMATIVE EVALUATION</a:t>
+              <a:t>BOARD SUMMARY</a:t>
             </a:r>
             <a:endParaRPr lang="en-US" sz="1400" dirty="0"/>
           </a:p>
@@ -19255,7 +19454,7 @@
                 <a:ea typeface="Times New Roman" pitchFamily="34" charset="-122"/>
                 <a:cs typeface="Times New Roman" pitchFamily="34" charset="-120"/>
               </a:rPr>
-              <a:t>Evaluation 1</a:t>
+              <a:t>3. Factors of Mountain Climates</a:t>
             </a:r>
             <a:endParaRPr lang="en-US" sz="3600" dirty="0"/>
           </a:p>
@@ -19289,7 +19488,7 @@
               <a:buNone/>
             </a:pPr>
             <a:r>
-              <a:rPr lang="en-US" sz="4000" dirty="0">
+              <a:rPr lang="en-US" sz="4000" b="1" dirty="0">
                 <a:solidFill>
                   <a:srgbClr val="111111"/>
                 </a:solidFill>
@@ -19297,7 +19496,24 @@
                 <a:ea typeface="Times New Roman" pitchFamily="34" charset="-122"/>
                 <a:cs typeface="Times New Roman" pitchFamily="34" charset="-120"/>
               </a:rPr>
-              <a:t>Give three characteristics of mountain climates.</a:t>
+              <a:t>Latitude: </a:t>
+            </a:r>
+            <a:pPr algn="l" indent="0" marL="0">
+              <a:spcAft>
+                <a:spcPts val="800"/>
+              </a:spcAft>
+              <a:buNone/>
+            </a:pPr>
+            <a:r>
+              <a:rPr lang="en-US" sz="4000" dirty="0">
+                <a:solidFill>
+                  <a:srgbClr val="111111"/>
+                </a:solidFill>
+                <a:latin typeface="Times New Roman" pitchFamily="34" charset="0"/>
+                <a:ea typeface="Times New Roman" pitchFamily="34" charset="-122"/>
+                <a:cs typeface="Times New Roman" pitchFamily="34" charset="-120"/>
+              </a:rPr>
+              <a:t>Latitude sets the base temperature of the mountain. A mountain near Garoua has a much warmer foot, and a higher snow line, than a mountain of the same height in Europe.</a:t>
             </a:r>
             <a:endParaRPr lang="en-US" sz="4000" dirty="0"/>
           </a:p>
@@ -19474,7 +19690,7 @@
                 <a:ea typeface="Times New Roman" pitchFamily="34" charset="-122"/>
                 <a:cs typeface="Times New Roman" pitchFamily="34" charset="-120"/>
               </a:rPr>
-              <a:t>Expected Answer</a:t>
+              <a:t>Evaluation 1</a:t>
             </a:r>
             <a:endParaRPr lang="en-US" sz="3600" dirty="0"/>
           </a:p>
@@ -19516,7 +19732,7 @@
                 <a:ea typeface="Times New Roman" pitchFamily="34" charset="-122"/>
                 <a:cs typeface="Times New Roman" pitchFamily="34" charset="-120"/>
               </a:rPr>
-              <a:t>Lower temperatures, lower pressure, heavy windward rain, strong sunshine, large daily range (any three).</a:t>
+              <a:t>Give three characteristics of mountain climates.</a:t>
             </a:r>
             <a:endParaRPr lang="en-US" sz="4000" dirty="0"/>
           </a:p>
@@ -19693,7 +19909,7 @@
                 <a:ea typeface="Times New Roman" pitchFamily="34" charset="-122"/>
                 <a:cs typeface="Times New Roman" pitchFamily="34" charset="-120"/>
               </a:rPr>
-              <a:t>Evaluation 2</a:t>
+              <a:t>Expected Answer</a:t>
             </a:r>
             <a:endParaRPr lang="en-US" sz="3600" dirty="0"/>
           </a:p>
@@ -19735,7 +19951,7 @@
                 <a:ea typeface="Times New Roman" pitchFamily="34" charset="-122"/>
                 <a:cs typeface="Times New Roman" pitchFamily="34" charset="-120"/>
               </a:rPr>
-              <a:t>Explain why the sun feels stronger in the mountains although the air is cooler.</a:t>
+              <a:t>Lower temperatures, lower pressure, heavy windward rain, strong sunshine, large daily range (any three).</a:t>
             </a:r>
             <a:endParaRPr lang="en-US" sz="4000" dirty="0"/>
           </a:p>
@@ -19912,7 +20128,7 @@
                 <a:ea typeface="Times New Roman" pitchFamily="34" charset="-122"/>
                 <a:cs typeface="Times New Roman" pitchFamily="34" charset="-120"/>
               </a:rPr>
-              <a:t>Expected Answer</a:t>
+              <a:t>Evaluation 2</a:t>
             </a:r>
             <a:endParaRPr lang="en-US" sz="3600" dirty="0"/>
           </a:p>
@@ -19954,7 +20170,7 @@
                 <a:ea typeface="Times New Roman" pitchFamily="34" charset="-122"/>
                 <a:cs typeface="Times New Roman" pitchFamily="34" charset="-120"/>
               </a:rPr>
-              <a:t>The thin, clean air filters less solar and ultraviolet radiation.</a:t>
+              <a:t>Explain why the sun feels stronger in the mountains although the air is cooler.</a:t>
             </a:r>
             <a:endParaRPr lang="en-US" sz="4000" dirty="0"/>
           </a:p>
@@ -20066,7 +20282,7 @@
                 <a:ea typeface="Calibri" pitchFamily="34" charset="-122"/>
                 <a:cs typeface="Calibri" pitchFamily="34" charset="-120"/>
               </a:rPr>
-              <a:t>REMEDIATION</a:t>
+              <a:t>FORMATIVE EVALUATION</a:t>
             </a:r>
             <a:endParaRPr lang="en-US" sz="1400" dirty="0"/>
           </a:p>
@@ -20131,7 +20347,7 @@
                 <a:ea typeface="Times New Roman" pitchFamily="34" charset="-122"/>
                 <a:cs typeface="Times New Roman" pitchFamily="34" charset="-120"/>
               </a:rPr>
-              <a:t>Remediation</a:t>
+              <a:t>Expected Answer</a:t>
             </a:r>
             <a:endParaRPr lang="en-US" sz="3600" dirty="0"/>
           </a:p>
@@ -20165,7 +20381,7 @@
               <a:buNone/>
             </a:pPr>
             <a:r>
-              <a:rPr lang="en-US" sz="4000" b="1" dirty="0">
+              <a:rPr lang="en-US" sz="4000" dirty="0">
                 <a:solidFill>
                   <a:srgbClr val="111111"/>
                 </a:solidFill>
@@ -20173,51 +20389,7 @@
                 <a:ea typeface="Times New Roman" pitchFamily="34" charset="-122"/>
                 <a:cs typeface="Times New Roman" pitchFamily="34" charset="-120"/>
               </a:rPr>
-              <a:t>Fill in the blanks:</a:t>
-            </a:r>
-            <a:endParaRPr lang="en-US" sz="4000" dirty="0"/>
-          </a:p>
-          <a:p>
-            <a:pPr algn="l" marL="342900" indent="-342900">
-              <a:spcAft>
-                <a:spcPts val="800"/>
-              </a:spcAft>
-              <a:buSzPct val="100000"/>
-              <a:buFont typeface="+mj-lt"/>
-              <a:buAutoNum type="arabicPeriod" startAt="1"/>
-            </a:pPr>
-            <a:r>
-              <a:rPr lang="en-US" sz="4000" dirty="0">
-                <a:solidFill>
-                  <a:srgbClr val="111111"/>
-                </a:solidFill>
-                <a:latin typeface="Times New Roman" pitchFamily="34" charset="0"/>
-                <a:ea typeface="Times New Roman" pitchFamily="34" charset="-122"/>
-                <a:cs typeface="Times New Roman" pitchFamily="34" charset="-120"/>
-              </a:rPr>
-              <a:t>The most important factor of mountain climates is ______.</a:t>
-            </a:r>
-            <a:endParaRPr lang="en-US" sz="4000" dirty="0"/>
-          </a:p>
-          <a:p>
-            <a:pPr algn="l" marL="342900" indent="-342900">
-              <a:spcAft>
-                <a:spcPts val="800"/>
-              </a:spcAft>
-              <a:buSzPct val="100000"/>
-              <a:buFont typeface="+mj-lt"/>
-              <a:buAutoNum type="arabicPeriod" startAt="1"/>
-            </a:pPr>
-            <a:r>
-              <a:rPr lang="en-US" sz="4000" dirty="0">
-                <a:solidFill>
-                  <a:srgbClr val="111111"/>
-                </a:solidFill>
-                <a:latin typeface="Times New Roman" pitchFamily="34" charset="0"/>
-                <a:ea typeface="Times New Roman" pitchFamily="34" charset="-122"/>
-                <a:cs typeface="Times New Roman" pitchFamily="34" charset="-120"/>
-              </a:rPr>
-              <a:t>The sheltered side of a mountain is the ______ side.</a:t>
+              <a:t>The thin, clean air filters less solar and ultraviolet radiation.</a:t>
             </a:r>
             <a:endParaRPr lang="en-US" sz="4000" dirty="0"/>
           </a:p>
@@ -20394,7 +20566,7 @@
                 <a:ea typeface="Times New Roman" pitchFamily="34" charset="-122"/>
                 <a:cs typeface="Times New Roman" pitchFamily="34" charset="-120"/>
               </a:rPr>
-              <a:t>Remediation (continued)</a:t>
+              <a:t>Remediation</a:t>
             </a:r>
             <a:endParaRPr lang="en-US" sz="3600" dirty="0"/>
           </a:p>
@@ -20420,6 +20592,26 @@
         <p:txBody>
           <a:bodyPr wrap="square" lIns="0" tIns="0" rIns="0" bIns="0" rtlCol="0" anchor="t"/>
           <a:lstStyle/>
+          <a:p>
+            <a:pPr algn="l" indent="0" marL="0">
+              <a:spcAft>
+                <a:spcPts val="800"/>
+              </a:spcAft>
+              <a:buNone/>
+            </a:pPr>
+            <a:r>
+              <a:rPr lang="en-US" sz="4000" b="1" dirty="0">
+                <a:solidFill>
+                  <a:srgbClr val="111111"/>
+                </a:solidFill>
+                <a:latin typeface="Times New Roman" pitchFamily="34" charset="0"/>
+                <a:ea typeface="Times New Roman" pitchFamily="34" charset="-122"/>
+                <a:cs typeface="Times New Roman" pitchFamily="34" charset="-120"/>
+              </a:rPr>
+              <a:t>Fill in the blanks:</a:t>
+            </a:r>
+            <a:endParaRPr lang="en-US" sz="4000" dirty="0"/>
+          </a:p>
           <a:p>
             <a:pPr algn="l" marL="342900" indent="-342900">
               <a:spcAft>
@@ -20438,7 +20630,29 @@
                 <a:ea typeface="Times New Roman" pitchFamily="34" charset="-122"/>
                 <a:cs typeface="Times New Roman" pitchFamily="34" charset="-120"/>
               </a:rPr>
-              <a:t>The change of vegetation with height is vertical ______.</a:t>
+              <a:t>The most important factor of mountain climates is ______.</a:t>
+            </a:r>
+            <a:endParaRPr lang="en-US" sz="4000" dirty="0"/>
+          </a:p>
+          <a:p>
+            <a:pPr algn="l" marL="342900" indent="-342900">
+              <a:spcAft>
+                <a:spcPts val="800"/>
+              </a:spcAft>
+              <a:buSzPct val="100000"/>
+              <a:buFont typeface="+mj-lt"/>
+              <a:buAutoNum type="arabicPeriod" startAt="1"/>
+            </a:pPr>
+            <a:r>
+              <a:rPr lang="en-US" sz="4000" dirty="0">
+                <a:solidFill>
+                  <a:srgbClr val="111111"/>
+                </a:solidFill>
+                <a:latin typeface="Times New Roman" pitchFamily="34" charset="0"/>
+                <a:ea typeface="Times New Roman" pitchFamily="34" charset="-122"/>
+                <a:cs typeface="Times New Roman" pitchFamily="34" charset="-120"/>
+              </a:rPr>
+              <a:t>The sheltered side of a mountain is the ______ side.</a:t>
             </a:r>
             <a:endParaRPr lang="en-US" sz="4000" dirty="0"/>
           </a:p>
@@ -20550,7 +20764,7 @@
                 <a:ea typeface="Calibri" pitchFamily="34" charset="-122"/>
                 <a:cs typeface="Calibri" pitchFamily="34" charset="-120"/>
               </a:rPr>
-              <a:t>HOMEWORK</a:t>
+              <a:t>REMEDIATION</a:t>
             </a:r>
             <a:endParaRPr lang="en-US" sz="1400" dirty="0"/>
           </a:p>
@@ -20615,7 +20829,7 @@
                 <a:ea typeface="Times New Roman" pitchFamily="34" charset="-122"/>
                 <a:cs typeface="Times New Roman" pitchFamily="34" charset="-120"/>
               </a:rPr>
-              <a:t>Homework</a:t>
+              <a:t>Remediation (continued)</a:t>
             </a:r>
             <a:endParaRPr lang="en-US" sz="3600" dirty="0"/>
           </a:p>
@@ -20642,11 +20856,13 @@
           <a:bodyPr wrap="square" lIns="0" tIns="0" rIns="0" bIns="0" rtlCol="0" anchor="t"/>
           <a:lstStyle/>
           <a:p>
-            <a:pPr algn="l" indent="0" marL="0">
+            <a:pPr algn="l" marL="342900" indent="-342900">
               <a:spcAft>
                 <a:spcPts val="800"/>
               </a:spcAft>
-              <a:buNone/>
+              <a:buSzPct val="100000"/>
+              <a:buFont typeface="+mj-lt"/>
+              <a:buAutoNum type="arabicPeriod" startAt="1"/>
             </a:pPr>
             <a:r>
               <a:rPr lang="en-US" sz="4000" dirty="0">
@@ -20657,7 +20873,7 @@
                 <a:ea typeface="Times New Roman" pitchFamily="34" charset="-122"/>
                 <a:cs typeface="Times New Roman" pitchFamily="34" charset="-120"/>
               </a:rPr>
-              <a:t>Name one instrument of a weather station.</a:t>
+              <a:t>The change of vegetation with height is vertical ______.</a:t>
             </a:r>
             <a:endParaRPr lang="en-US" sz="4000" dirty="0"/>
           </a:p>
@@ -20769,7 +20985,7 @@
                 <a:ea typeface="Calibri" pitchFamily="34" charset="-122"/>
                 <a:cs typeface="Calibri" pitchFamily="34" charset="-120"/>
               </a:rPr>
-              <a:t>NEXT LESSON</a:t>
+              <a:t>HOMEWORK</a:t>
             </a:r>
             <a:endParaRPr lang="en-US" sz="1400" dirty="0"/>
           </a:p>
@@ -20834,7 +21050,7 @@
                 <a:ea typeface="Times New Roman" pitchFamily="34" charset="-122"/>
                 <a:cs typeface="Times New Roman" pitchFamily="34" charset="-120"/>
               </a:rPr>
-              <a:t>Next Lesson</a:t>
+              <a:t>Homework</a:t>
             </a:r>
             <a:endParaRPr lang="en-US" sz="3600" dirty="0"/>
           </a:p>
@@ -20858,17 +21074,17 @@
           <a:ln/>
         </p:spPr>
         <p:txBody>
-          <a:bodyPr wrap="square" lIns="0" tIns="0" rIns="0" bIns="0" rtlCol="0" anchor="ctr"/>
-          <a:lstStyle/>
-          <a:p>
-            <a:pPr algn="ctr" indent="0" marL="0">
+          <a:bodyPr wrap="square" lIns="0" tIns="0" rIns="0" bIns="0" rtlCol="0" anchor="t"/>
+          <a:lstStyle/>
+          <a:p>
+            <a:pPr algn="l" indent="0" marL="0">
               <a:spcAft>
                 <a:spcPts val="800"/>
               </a:spcAft>
               <a:buNone/>
             </a:pPr>
             <a:r>
-              <a:rPr lang="en-US" sz="4000" b="1" dirty="0">
+              <a:rPr lang="en-US" sz="4000" dirty="0">
                 <a:solidFill>
                   <a:srgbClr val="111111"/>
                 </a:solidFill>
@@ -20876,27 +21092,7 @@
                 <a:ea typeface="Times New Roman" pitchFamily="34" charset="-122"/>
                 <a:cs typeface="Times New Roman" pitchFamily="34" charset="-120"/>
               </a:rPr>
-              <a:t>Our next lesson will be on:</a:t>
-            </a:r>
-            <a:endParaRPr lang="en-US" sz="4000" dirty="0"/>
-          </a:p>
-          <a:p>
-            <a:pPr algn="ctr" indent="0" marL="0">
-              <a:spcAft>
-                <a:spcPts val="800"/>
-              </a:spcAft>
-              <a:buNone/>
-            </a:pPr>
-            <a:r>
-              <a:rPr lang="en-US" sz="4000" b="1" dirty="0">
-                <a:solidFill>
-                  <a:srgbClr val="990011"/>
-                </a:solidFill>
-                <a:latin typeface="Times New Roman" pitchFamily="34" charset="0"/>
-                <a:ea typeface="Times New Roman" pitchFamily="34" charset="-122"/>
-                <a:cs typeface="Times New Roman" pitchFamily="34" charset="-120"/>
-              </a:rPr>
-              <a:t>Further Study 2: Weather Observation, Prediction, Modification and Mapping</a:t>
+              <a:t>Name one instrument of a weather station.</a:t>
             </a:r>
             <a:endParaRPr lang="en-US" sz="4000" dirty="0"/>
           </a:p>
@@ -21008,6 +21204,576 @@
                 <a:ea typeface="Calibri" pitchFamily="34" charset="-122"/>
                 <a:cs typeface="Calibri" pitchFamily="34" charset="-120"/>
               </a:rPr>
+              <a:t>NEXT LESSON</a:t>
+            </a:r>
+            <a:endParaRPr lang="en-US" sz="1400" dirty="0"/>
+          </a:p>
+        </p:txBody>
+      </p:sp>
+      <p:pic>
+        <p:nvPicPr>
+          <p:cNvPr id="3" name="Image 0" descr="/home/claude/f4/img/minesec_sheet.png">    </p:cNvPr>
+          <p:cNvPicPr>
+            <a:picLocks noChangeAspect="1"/>
+          </p:cNvPicPr>
+          <p:nvPr/>
+        </p:nvPicPr>
+        <p:blipFill>
+          <a:blip r:embed="rId1"/>
+          <a:stretch>
+            <a:fillRect/>
+          </a:stretch>
+        </p:blipFill>
+        <p:spPr>
+          <a:xfrm>
+            <a:off x="0" y="658368"/>
+            <a:ext cx="5120640" cy="5833872"/>
+          </a:xfrm>
+          <a:prstGeom prst="rect">
+            <a:avLst/>
+          </a:prstGeom>
+        </p:spPr>
+      </p:pic>
+      <p:sp>
+        <p:nvSpPr>
+          <p:cNvPr id="4" name="Text 1"/>
+          <p:cNvSpPr/>
+          <p:nvPr/>
+        </p:nvSpPr>
+        <p:spPr>
+          <a:xfrm>
+            <a:off x="5349240" y="1005840"/>
+            <a:ext cx="6522415" cy="731520"/>
+          </a:xfrm>
+          <a:prstGeom prst="rect">
+            <a:avLst/>
+          </a:prstGeom>
+          <a:noFill/>
+          <a:ln/>
+        </p:spPr>
+        <p:txBody>
+          <a:bodyPr wrap="square" lIns="0" tIns="0" rIns="0" bIns="0" rtlCol="0" anchor="ctr">
+            <a:normAutofit/>
+          </a:bodyPr>
+          <a:lstStyle/>
+          <a:p>
+            <a:pPr algn="ctr" indent="0" marL="0">
+              <a:buNone/>
+            </a:pPr>
+            <a:r>
+              <a:rPr lang="en-US" sz="3600" b="1" dirty="0">
+                <a:solidFill>
+                  <a:srgbClr val="990011"/>
+                </a:solidFill>
+                <a:latin typeface="Times New Roman" pitchFamily="34" charset="0"/>
+                <a:ea typeface="Times New Roman" pitchFamily="34" charset="-122"/>
+                <a:cs typeface="Times New Roman" pitchFamily="34" charset="-120"/>
+              </a:rPr>
+              <a:t>Next Lesson</a:t>
+            </a:r>
+            <a:endParaRPr lang="en-US" sz="3600" dirty="0"/>
+          </a:p>
+        </p:txBody>
+      </p:sp>
+      <p:sp>
+        <p:nvSpPr>
+          <p:cNvPr id="5" name="Text 2"/>
+          <p:cNvSpPr/>
+          <p:nvPr/>
+        </p:nvSpPr>
+        <p:spPr>
+          <a:xfrm>
+            <a:off x="5349240" y="1783080"/>
+            <a:ext cx="6522415" cy="4663440"/>
+          </a:xfrm>
+          <a:prstGeom prst="rect">
+            <a:avLst/>
+          </a:prstGeom>
+          <a:noFill/>
+          <a:ln/>
+        </p:spPr>
+        <p:txBody>
+          <a:bodyPr wrap="square" lIns="0" tIns="0" rIns="0" bIns="0" rtlCol="0" anchor="ctr"/>
+          <a:lstStyle/>
+          <a:p>
+            <a:pPr algn="ctr" indent="0" marL="0">
+              <a:spcAft>
+                <a:spcPts val="800"/>
+              </a:spcAft>
+              <a:buNone/>
+            </a:pPr>
+            <a:r>
+              <a:rPr lang="en-US" sz="4000" b="1" dirty="0">
+                <a:solidFill>
+                  <a:srgbClr val="111111"/>
+                </a:solidFill>
+                <a:latin typeface="Times New Roman" pitchFamily="34" charset="0"/>
+                <a:ea typeface="Times New Roman" pitchFamily="34" charset="-122"/>
+                <a:cs typeface="Times New Roman" pitchFamily="34" charset="-120"/>
+              </a:rPr>
+              <a:t>Our next lesson will be on:</a:t>
+            </a:r>
+            <a:endParaRPr lang="en-US" sz="4000" dirty="0"/>
+          </a:p>
+          <a:p>
+            <a:pPr algn="ctr" indent="0" marL="0">
+              <a:spcAft>
+                <a:spcPts val="800"/>
+              </a:spcAft>
+              <a:buNone/>
+            </a:pPr>
+            <a:r>
+              <a:rPr lang="en-US" sz="4000" b="1" dirty="0">
+                <a:solidFill>
+                  <a:srgbClr val="990011"/>
+                </a:solidFill>
+                <a:latin typeface="Times New Roman" pitchFamily="34" charset="0"/>
+                <a:ea typeface="Times New Roman" pitchFamily="34" charset="-122"/>
+                <a:cs typeface="Times New Roman" pitchFamily="34" charset="-120"/>
+              </a:rPr>
+              <a:t>Further Study 2: Weather Observation, Prediction, Modification and Mapping</a:t>
+            </a:r>
+            <a:endParaRPr lang="en-US" sz="4000" dirty="0"/>
+          </a:p>
+        </p:txBody>
+      </p:sp>
+      <p:sp>
+        <p:nvSpPr>
+          <p:cNvPr id="25" name="Slide Number Placeholder 0"/>
+          <p:cNvSpPr>
+            <a:spLocks noGrp="1"/>
+          </p:cNvSpPr>
+          <p:nvPr>
+            <p:ph type="sldNum" sz="quarter" idx="4294967295"/>
+          </p:nvPr>
+        </p:nvSpPr>
+        <p:spPr>
+          <a:xfrm>
+            <a:off x="27432" y="91440"/>
+            <a:ext cx="585216" cy="475488"/>
+          </a:xfrm>
+          <a:prstGeom prst="rect">
+            <a:avLst/>
+          </a:prstGeom>
+          <a:extLst>
+            <a:ext uri="{C572A759-6A51-4108-AA02-DFA0A04FC94B}">
+              <ma14:wrappingTextBoxFlag xmlns:ma14="http://schemas.microsoft.com/office/mac/drawingml/2011/main" val="0"/>
+            </a:ext>
+          </a:extLst>
+        </p:spPr>
+        <p:txBody>
+          <a:bodyPr/>
+          <a:lstStyle>
+            <a:lvl1pPr>
+              <a:defRPr sz="2000">
+                <a:solidFill>
+                  <a:srgbClr val="FFFFFF"/>
+                </a:solidFill>
+                <a:latin typeface="Calibri"/>
+                <a:ea typeface="Calibri"/>
+                <a:cs typeface="Calibri"/>
+              </a:defRPr>
+            </a:lvl1pPr>
+          </a:lstStyle>
+          <a:p>
+            <a:pPr algn="ctr"/>
+            <a:fld id="{F7021451-1387-4CA6-816F-3879F97B5CBC}" type="slidenum">
+              <a:rPr b="1" lang="en-US"/>
+              <a:t>59</a:t>
+            </a:fld>
+            <a:endParaRPr lang="en-US"/>
+          </a:p>
+        </p:txBody>
+      </p:sp>
+    </p:spTree>
+  </p:cSld>
+  <p:clrMapOvr>
+    <a:masterClrMapping/>
+  </p:clrMapOvr>
+</p:sld>
+</file>
+
+<file path=ppt/slides/slide6.xml><?xml version="1.0" encoding="utf-8"?>
+<p:sld xmlns:a="http://schemas.openxmlformats.org/drawingml/2006/main" xmlns:r="http://schemas.openxmlformats.org/officeDocument/2006/relationships" xmlns:p="http://schemas.openxmlformats.org/presentationml/2006/main">
+  <p:cSld name="Slide 6">
+    <p:spTree>
+      <p:nvGrpSpPr>
+        <p:cNvPr id="1" name=""/>
+        <p:cNvGrpSpPr/>
+        <p:nvPr/>
+      </p:nvGrpSpPr>
+      <p:grpSpPr>
+        <a:xfrm>
+          <a:off x="0" y="0"/>
+          <a:ext cx="0" cy="0"/>
+          <a:chOff x="0" y="0"/>
+          <a:chExt cx="0" cy="0"/>
+        </a:xfrm>
+      </p:grpSpPr>
+      <p:sp>
+        <p:nvSpPr>
+          <p:cNvPr id="2" name="Text 0"/>
+          <p:cNvSpPr/>
+          <p:nvPr/>
+        </p:nvSpPr>
+        <p:spPr>
+          <a:xfrm>
+            <a:off x="457200" y="713232"/>
+            <a:ext cx="11368735" cy="274320"/>
+          </a:xfrm>
+          <a:prstGeom prst="rect">
+            <a:avLst/>
+          </a:prstGeom>
+          <a:noFill/>
+          <a:ln/>
+        </p:spPr>
+        <p:txBody>
+          <a:bodyPr wrap="square" lIns="0" tIns="0" rIns="0" bIns="0" rtlCol="0" anchor="ctr"/>
+          <a:lstStyle/>
+          <a:p>
+            <a:pPr algn="r" indent="0" marL="0">
+              <a:buNone/>
+            </a:pPr>
+            <a:r>
+              <a:rPr lang="en-US" sz="1400" b="1" dirty="0">
+                <a:solidFill>
+                  <a:srgbClr val="1C3F6E"/>
+                </a:solidFill>
+                <a:latin typeface="Calibri" pitchFamily="34" charset="0"/>
+                <a:ea typeface="Calibri" pitchFamily="34" charset="-122"/>
+                <a:cs typeface="Calibri" pitchFamily="34" charset="-120"/>
+              </a:rPr>
+              <a:t>LESSON PLAN</a:t>
+            </a:r>
+            <a:endParaRPr lang="en-US" sz="1400" dirty="0"/>
+          </a:p>
+        </p:txBody>
+      </p:sp>
+      <p:pic>
+        <p:nvPicPr>
+          <p:cNvPr id="3" name="Image 0" descr="/home/claude/f4/img/minesec_sheet.png">    </p:cNvPr>
+          <p:cNvPicPr>
+            <a:picLocks noChangeAspect="1"/>
+          </p:cNvPicPr>
+          <p:nvPr/>
+        </p:nvPicPr>
+        <p:blipFill>
+          <a:blip r:embed="rId1"/>
+          <a:stretch>
+            <a:fillRect/>
+          </a:stretch>
+        </p:blipFill>
+        <p:spPr>
+          <a:xfrm>
+            <a:off x="0" y="658368"/>
+            <a:ext cx="2468880" cy="5833872"/>
+          </a:xfrm>
+          <a:prstGeom prst="rect">
+            <a:avLst/>
+          </a:prstGeom>
+        </p:spPr>
+      </p:pic>
+      <p:sp>
+        <p:nvSpPr>
+          <p:cNvPr id="4" name="Text 1"/>
+          <p:cNvSpPr/>
+          <p:nvPr/>
+        </p:nvSpPr>
+        <p:spPr>
+          <a:xfrm>
+            <a:off x="2697480" y="1005840"/>
+            <a:ext cx="9174175" cy="731520"/>
+          </a:xfrm>
+          <a:prstGeom prst="rect">
+            <a:avLst/>
+          </a:prstGeom>
+          <a:noFill/>
+          <a:ln/>
+        </p:spPr>
+        <p:txBody>
+          <a:bodyPr wrap="square" lIns="0" tIns="0" rIns="0" bIns="0" rtlCol="0" anchor="ctr">
+            <a:normAutofit/>
+          </a:bodyPr>
+          <a:lstStyle/>
+          <a:p>
+            <a:pPr algn="ctr" indent="0" marL="0">
+              <a:buNone/>
+            </a:pPr>
+            <a:r>
+              <a:rPr lang="en-US" sz="3600" b="1" dirty="0">
+                <a:solidFill>
+                  <a:srgbClr val="990011"/>
+                </a:solidFill>
+                <a:latin typeface="Times New Roman" pitchFamily="34" charset="0"/>
+                <a:ea typeface="Times New Roman" pitchFamily="34" charset="-122"/>
+                <a:cs typeface="Times New Roman" pitchFamily="34" charset="-120"/>
+              </a:rPr>
+              <a:t>Lesson Plan</a:t>
+            </a:r>
+            <a:endParaRPr lang="en-US" sz="3600" dirty="0"/>
+          </a:p>
+        </p:txBody>
+      </p:sp>
+      <p:sp>
+        <p:nvSpPr>
+          <p:cNvPr id="5" name="Text 2"/>
+          <p:cNvSpPr/>
+          <p:nvPr/>
+        </p:nvSpPr>
+        <p:spPr>
+          <a:xfrm>
+            <a:off x="2697480" y="1783080"/>
+            <a:ext cx="9174175" cy="4663440"/>
+          </a:xfrm>
+          <a:prstGeom prst="rect">
+            <a:avLst/>
+          </a:prstGeom>
+          <a:noFill/>
+          <a:ln/>
+        </p:spPr>
+        <p:txBody>
+          <a:bodyPr wrap="square" lIns="0" tIns="0" rIns="0" bIns="0" rtlCol="0" anchor="t"/>
+          <a:lstStyle/>
+          <a:p>
+            <a:pPr algn="l" marL="342900" indent="-342900">
+              <a:spcAft>
+                <a:spcPts val="800"/>
+              </a:spcAft>
+              <a:buSzPct val="100000"/>
+              <a:buFont typeface="+mj-lt"/>
+              <a:buAutoNum type="arabicPeriod" startAt="1"/>
+            </a:pPr>
+            <a:r>
+              <a:rPr lang="en-US" sz="4000" dirty="0">
+                <a:solidFill>
+                  <a:srgbClr val="111111"/>
+                </a:solidFill>
+                <a:latin typeface="Times New Roman" pitchFamily="34" charset="0"/>
+                <a:ea typeface="Times New Roman" pitchFamily="34" charset="-122"/>
+                <a:cs typeface="Times New Roman" pitchFamily="34" charset="-120"/>
+              </a:rPr>
+              <a:t>Correction of the homework</a:t>
+            </a:r>
+            <a:endParaRPr lang="en-US" sz="4000" dirty="0"/>
+          </a:p>
+          <a:p>
+            <a:pPr algn="l" marL="342900" indent="-342900">
+              <a:spcAft>
+                <a:spcPts val="800"/>
+              </a:spcAft>
+              <a:buSzPct val="100000"/>
+              <a:buFont typeface="+mj-lt"/>
+              <a:buAutoNum type="arabicPeriod" startAt="1"/>
+            </a:pPr>
+            <a:r>
+              <a:rPr lang="en-US" sz="4000" dirty="0">
+                <a:solidFill>
+                  <a:srgbClr val="111111"/>
+                </a:solidFill>
+                <a:latin typeface="Times New Roman" pitchFamily="34" charset="0"/>
+                <a:ea typeface="Times New Roman" pitchFamily="34" charset="-122"/>
+                <a:cs typeface="Times New Roman" pitchFamily="34" charset="-120"/>
+              </a:rPr>
+              <a:t>Objectives and recall</a:t>
+            </a:r>
+            <a:endParaRPr lang="en-US" sz="4000" dirty="0"/>
+          </a:p>
+          <a:p>
+            <a:pPr algn="l" marL="342900" indent="-342900">
+              <a:spcAft>
+                <a:spcPts val="800"/>
+              </a:spcAft>
+              <a:buSzPct val="100000"/>
+              <a:buFont typeface="+mj-lt"/>
+              <a:buAutoNum type="arabicPeriod" startAt="1"/>
+            </a:pPr>
+            <a:r>
+              <a:rPr lang="en-US" sz="4000" dirty="0">
+                <a:solidFill>
+                  <a:srgbClr val="111111"/>
+                </a:solidFill>
+                <a:latin typeface="Times New Roman" pitchFamily="34" charset="0"/>
+                <a:ea typeface="Times New Roman" pitchFamily="34" charset="-122"/>
+                <a:cs typeface="Times New Roman" pitchFamily="34" charset="-120"/>
+              </a:rPr>
+              <a:t>Real-life situation and action to take</a:t>
+            </a:r>
+            <a:endParaRPr lang="en-US" sz="4000" dirty="0"/>
+          </a:p>
+          <a:p>
+            <a:pPr algn="l" marL="342900" indent="-342900">
+              <a:spcAft>
+                <a:spcPts val="800"/>
+              </a:spcAft>
+              <a:buSzPct val="100000"/>
+              <a:buFont typeface="+mj-lt"/>
+              <a:buAutoNum type="arabicPeriod" startAt="1"/>
+            </a:pPr>
+            <a:r>
+              <a:rPr lang="en-US" sz="4000" dirty="0">
+                <a:solidFill>
+                  <a:srgbClr val="111111"/>
+                </a:solidFill>
+                <a:latin typeface="Times New Roman" pitchFamily="34" charset="0"/>
+                <a:ea typeface="Times New Roman" pitchFamily="34" charset="-122"/>
+                <a:cs typeface="Times New Roman" pitchFamily="34" charset="-120"/>
+              </a:rPr>
+              <a:t>Learning activities</a:t>
+            </a:r>
+            <a:endParaRPr lang="en-US" sz="4000" dirty="0"/>
+          </a:p>
+          <a:p>
+            <a:pPr algn="l" marL="342900" indent="-342900">
+              <a:spcAft>
+                <a:spcPts val="800"/>
+              </a:spcAft>
+              <a:buSzPct val="100000"/>
+              <a:buFont typeface="+mj-lt"/>
+              <a:buAutoNum type="arabicPeriod" startAt="1"/>
+            </a:pPr>
+            <a:r>
+              <a:rPr lang="en-US" sz="4000" dirty="0">
+                <a:solidFill>
+                  <a:srgbClr val="111111"/>
+                </a:solidFill>
+                <a:latin typeface="Times New Roman" pitchFamily="34" charset="0"/>
+                <a:ea typeface="Times New Roman" pitchFamily="34" charset="-122"/>
+                <a:cs typeface="Times New Roman" pitchFamily="34" charset="-120"/>
+              </a:rPr>
+              <a:t>Board summary</a:t>
+            </a:r>
+            <a:endParaRPr lang="en-US" sz="4000" dirty="0"/>
+          </a:p>
+          <a:p>
+            <a:pPr algn="l" marL="342900" indent="-342900">
+              <a:spcAft>
+                <a:spcPts val="800"/>
+              </a:spcAft>
+              <a:buSzPct val="100000"/>
+              <a:buFont typeface="+mj-lt"/>
+              <a:buAutoNum type="arabicPeriod" startAt="1"/>
+            </a:pPr>
+            <a:r>
+              <a:rPr lang="en-US" sz="4000" dirty="0">
+                <a:solidFill>
+                  <a:srgbClr val="111111"/>
+                </a:solidFill>
+                <a:latin typeface="Times New Roman" pitchFamily="34" charset="0"/>
+                <a:ea typeface="Times New Roman" pitchFamily="34" charset="-122"/>
+                <a:cs typeface="Times New Roman" pitchFamily="34" charset="-120"/>
+              </a:rPr>
+              <a:t>Evaluation, remediation and homework</a:t>
+            </a:r>
+            <a:endParaRPr lang="en-US" sz="4000" dirty="0"/>
+          </a:p>
+        </p:txBody>
+      </p:sp>
+      <p:sp>
+        <p:nvSpPr>
+          <p:cNvPr id="25" name="Slide Number Placeholder 0"/>
+          <p:cNvSpPr>
+            <a:spLocks noGrp="1"/>
+          </p:cNvSpPr>
+          <p:nvPr>
+            <p:ph type="sldNum" sz="quarter" idx="4294967295"/>
+          </p:nvPr>
+        </p:nvSpPr>
+        <p:spPr>
+          <a:xfrm>
+            <a:off x="27432" y="91440"/>
+            <a:ext cx="585216" cy="475488"/>
+          </a:xfrm>
+          <a:prstGeom prst="rect">
+            <a:avLst/>
+          </a:prstGeom>
+          <a:extLst>
+            <a:ext uri="{C572A759-6A51-4108-AA02-DFA0A04FC94B}">
+              <ma14:wrappingTextBoxFlag xmlns:ma14="http://schemas.microsoft.com/office/mac/drawingml/2011/main" val="0"/>
+            </a:ext>
+          </a:extLst>
+        </p:spPr>
+        <p:txBody>
+          <a:bodyPr/>
+          <a:lstStyle>
+            <a:lvl1pPr>
+              <a:defRPr sz="2000">
+                <a:solidFill>
+                  <a:srgbClr val="FFFFFF"/>
+                </a:solidFill>
+                <a:latin typeface="Calibri"/>
+                <a:ea typeface="Calibri"/>
+                <a:cs typeface="Calibri"/>
+              </a:defRPr>
+            </a:lvl1pPr>
+          </a:lstStyle>
+          <a:p>
+            <a:pPr algn="ctr"/>
+            <a:fld id="{F7021451-1387-4CA6-816F-3879F97B5CBC}" type="slidenum">
+              <a:rPr b="1" lang="en-US"/>
+              <a:t>6</a:t>
+            </a:fld>
+            <a:endParaRPr lang="en-US"/>
+          </a:p>
+        </p:txBody>
+      </p:sp>
+    </p:spTree>
+  </p:cSld>
+  <p:clrMapOvr>
+    <a:masterClrMapping/>
+  </p:clrMapOvr>
+</p:sld>
+</file>
+
+<file path=ppt/slides/slide60.xml><?xml version="1.0" encoding="utf-8"?>
+<p:sld xmlns:a="http://schemas.openxmlformats.org/drawingml/2006/main" xmlns:r="http://schemas.openxmlformats.org/officeDocument/2006/relationships" xmlns:p="http://schemas.openxmlformats.org/presentationml/2006/main">
+  <p:cSld name="Slide 60">
+    <p:spTree>
+      <p:nvGrpSpPr>
+        <p:cNvPr id="1" name=""/>
+        <p:cNvGrpSpPr/>
+        <p:nvPr/>
+      </p:nvGrpSpPr>
+      <p:grpSpPr>
+        <a:xfrm>
+          <a:off x="0" y="0"/>
+          <a:ext cx="0" cy="0"/>
+          <a:chOff x="0" y="0"/>
+          <a:chExt cx="0" cy="0"/>
+        </a:xfrm>
+      </p:grpSpPr>
+      <p:sp>
+        <p:nvSpPr>
+          <p:cNvPr id="2" name="Text 0"/>
+          <p:cNvSpPr/>
+          <p:nvPr/>
+        </p:nvSpPr>
+        <p:spPr>
+          <a:xfrm>
+            <a:off x="457200" y="713232"/>
+            <a:ext cx="11368735" cy="274320"/>
+          </a:xfrm>
+          <a:prstGeom prst="rect">
+            <a:avLst/>
+          </a:prstGeom>
+          <a:noFill/>
+          <a:ln/>
+        </p:spPr>
+        <p:txBody>
+          <a:bodyPr wrap="square" lIns="0" tIns="0" rIns="0" bIns="0" rtlCol="0" anchor="ctr"/>
+          <a:lstStyle/>
+          <a:p>
+            <a:pPr algn="r" indent="0" marL="0">
+              <a:buNone/>
+            </a:pPr>
+            <a:r>
+              <a:rPr lang="en-US" sz="1400" b="1" dirty="0">
+                <a:solidFill>
+                  <a:srgbClr val="1C3F6E"/>
+                </a:solidFill>
+                <a:latin typeface="Calibri" pitchFamily="34" charset="0"/>
+                <a:ea typeface="Calibri" pitchFamily="34" charset="-122"/>
+                <a:cs typeface="Calibri" pitchFamily="34" charset="-120"/>
+              </a:rPr>
               <a:t>BILINGUAL GAME</a:t>
             </a:r>
             <a:endParaRPr lang="en-US" sz="1400" dirty="0"/>
@@ -21055,7 +21821,7 @@
       </p:sp>
       <p:graphicFrame>
         <p:nvGraphicFramePr>
-          <p:cNvPr id="60" name="Table 0"/>
+          <p:cNvPr id="61" name="Table 0"/>
           <p:cNvGraphicFramePr>
             <a:graphicFrameLocks noGrp="1"/>
           </p:cNvGraphicFramePr>
@@ -22091,7 +22857,7 @@
             <a:pPr algn="ctr"/>
             <a:fld id="{F7021451-1387-4CA6-816F-3879F97B5CBC}" type="slidenum">
               <a:rPr b="1" lang="en-US"/>
-              <a:t>59</a:t>
+              <a:t>60</a:t>
             </a:fld>
             <a:endParaRPr lang="en-US"/>
           </a:p>
@@ -22105,9 +22871,9 @@
 </p:sld>
 </file>
 
-<file path=ppt/slides/slide6.xml><?xml version="1.0" encoding="utf-8"?>
+<file path=ppt/slides/slide61.xml><?xml version="1.0" encoding="utf-8"?>
 <p:sld xmlns:a="http://schemas.openxmlformats.org/drawingml/2006/main" xmlns:r="http://schemas.openxmlformats.org/officeDocument/2006/relationships" xmlns:p="http://schemas.openxmlformats.org/presentationml/2006/main">
-  <p:cSld name="Slide 6">
+  <p:cSld name="Slide 61">
     <p:spTree>
       <p:nvGrpSpPr>
         <p:cNvPr id="1" name=""/>
@@ -22155,337 +22921,6 @@
                 <a:ea typeface="Calibri" pitchFamily="34" charset="-122"/>
                 <a:cs typeface="Calibri" pitchFamily="34" charset="-120"/>
               </a:rPr>
-              <a:t>LESSON PLAN</a:t>
-            </a:r>
-            <a:endParaRPr lang="en-US" sz="1400" dirty="0"/>
-          </a:p>
-        </p:txBody>
-      </p:sp>
-      <p:pic>
-        <p:nvPicPr>
-          <p:cNvPr id="3" name="Image 0" descr="/home/claude/f4/img/minesec_sheet.png">    </p:cNvPr>
-          <p:cNvPicPr>
-            <a:picLocks noChangeAspect="1"/>
-          </p:cNvPicPr>
-          <p:nvPr/>
-        </p:nvPicPr>
-        <p:blipFill>
-          <a:blip r:embed="rId1"/>
-          <a:stretch>
-            <a:fillRect/>
-          </a:stretch>
-        </p:blipFill>
-        <p:spPr>
-          <a:xfrm>
-            <a:off x="0" y="658368"/>
-            <a:ext cx="2468880" cy="5833872"/>
-          </a:xfrm>
-          <a:prstGeom prst="rect">
-            <a:avLst/>
-          </a:prstGeom>
-        </p:spPr>
-      </p:pic>
-      <p:sp>
-        <p:nvSpPr>
-          <p:cNvPr id="4" name="Text 1"/>
-          <p:cNvSpPr/>
-          <p:nvPr/>
-        </p:nvSpPr>
-        <p:spPr>
-          <a:xfrm>
-            <a:off x="2697480" y="1005840"/>
-            <a:ext cx="9174175" cy="731520"/>
-          </a:xfrm>
-          <a:prstGeom prst="rect">
-            <a:avLst/>
-          </a:prstGeom>
-          <a:noFill/>
-          <a:ln/>
-        </p:spPr>
-        <p:txBody>
-          <a:bodyPr wrap="square" lIns="0" tIns="0" rIns="0" bIns="0" rtlCol="0" anchor="ctr">
-            <a:normAutofit/>
-          </a:bodyPr>
-          <a:lstStyle/>
-          <a:p>
-            <a:pPr algn="ctr" indent="0" marL="0">
-              <a:buNone/>
-            </a:pPr>
-            <a:r>
-              <a:rPr lang="en-US" sz="3600" b="1" dirty="0">
-                <a:solidFill>
-                  <a:srgbClr val="990011"/>
-                </a:solidFill>
-                <a:latin typeface="Times New Roman" pitchFamily="34" charset="0"/>
-                <a:ea typeface="Times New Roman" pitchFamily="34" charset="-122"/>
-                <a:cs typeface="Times New Roman" pitchFamily="34" charset="-120"/>
-              </a:rPr>
-              <a:t>Lesson Plan</a:t>
-            </a:r>
-            <a:endParaRPr lang="en-US" sz="3600" dirty="0"/>
-          </a:p>
-        </p:txBody>
-      </p:sp>
-      <p:sp>
-        <p:nvSpPr>
-          <p:cNvPr id="5" name="Text 2"/>
-          <p:cNvSpPr/>
-          <p:nvPr/>
-        </p:nvSpPr>
-        <p:spPr>
-          <a:xfrm>
-            <a:off x="2697480" y="1783080"/>
-            <a:ext cx="9174175" cy="4663440"/>
-          </a:xfrm>
-          <a:prstGeom prst="rect">
-            <a:avLst/>
-          </a:prstGeom>
-          <a:noFill/>
-          <a:ln/>
-        </p:spPr>
-        <p:txBody>
-          <a:bodyPr wrap="square" lIns="0" tIns="0" rIns="0" bIns="0" rtlCol="0" anchor="t"/>
-          <a:lstStyle/>
-          <a:p>
-            <a:pPr algn="l" marL="342900" indent="-342900">
-              <a:spcAft>
-                <a:spcPts val="800"/>
-              </a:spcAft>
-              <a:buSzPct val="100000"/>
-              <a:buFont typeface="+mj-lt"/>
-              <a:buAutoNum type="arabicPeriod" startAt="1"/>
-            </a:pPr>
-            <a:r>
-              <a:rPr lang="en-US" sz="4000" dirty="0">
-                <a:solidFill>
-                  <a:srgbClr val="111111"/>
-                </a:solidFill>
-                <a:latin typeface="Times New Roman" pitchFamily="34" charset="0"/>
-                <a:ea typeface="Times New Roman" pitchFamily="34" charset="-122"/>
-                <a:cs typeface="Times New Roman" pitchFamily="34" charset="-120"/>
-              </a:rPr>
-              <a:t>Correction of the homework</a:t>
-            </a:r>
-            <a:endParaRPr lang="en-US" sz="4000" dirty="0"/>
-          </a:p>
-          <a:p>
-            <a:pPr algn="l" marL="342900" indent="-342900">
-              <a:spcAft>
-                <a:spcPts val="800"/>
-              </a:spcAft>
-              <a:buSzPct val="100000"/>
-              <a:buFont typeface="+mj-lt"/>
-              <a:buAutoNum type="arabicPeriod" startAt="1"/>
-            </a:pPr>
-            <a:r>
-              <a:rPr lang="en-US" sz="4000" dirty="0">
-                <a:solidFill>
-                  <a:srgbClr val="111111"/>
-                </a:solidFill>
-                <a:latin typeface="Times New Roman" pitchFamily="34" charset="0"/>
-                <a:ea typeface="Times New Roman" pitchFamily="34" charset="-122"/>
-                <a:cs typeface="Times New Roman" pitchFamily="34" charset="-120"/>
-              </a:rPr>
-              <a:t>Objectives and recall</a:t>
-            </a:r>
-            <a:endParaRPr lang="en-US" sz="4000" dirty="0"/>
-          </a:p>
-          <a:p>
-            <a:pPr algn="l" marL="342900" indent="-342900">
-              <a:spcAft>
-                <a:spcPts val="800"/>
-              </a:spcAft>
-              <a:buSzPct val="100000"/>
-              <a:buFont typeface="+mj-lt"/>
-              <a:buAutoNum type="arabicPeriod" startAt="1"/>
-            </a:pPr>
-            <a:r>
-              <a:rPr lang="en-US" sz="4000" dirty="0">
-                <a:solidFill>
-                  <a:srgbClr val="111111"/>
-                </a:solidFill>
-                <a:latin typeface="Times New Roman" pitchFamily="34" charset="0"/>
-                <a:ea typeface="Times New Roman" pitchFamily="34" charset="-122"/>
-                <a:cs typeface="Times New Roman" pitchFamily="34" charset="-120"/>
-              </a:rPr>
-              <a:t>Real-life situation and action to take</a:t>
-            </a:r>
-            <a:endParaRPr lang="en-US" sz="4000" dirty="0"/>
-          </a:p>
-          <a:p>
-            <a:pPr algn="l" marL="342900" indent="-342900">
-              <a:spcAft>
-                <a:spcPts val="800"/>
-              </a:spcAft>
-              <a:buSzPct val="100000"/>
-              <a:buFont typeface="+mj-lt"/>
-              <a:buAutoNum type="arabicPeriod" startAt="1"/>
-            </a:pPr>
-            <a:r>
-              <a:rPr lang="en-US" sz="4000" dirty="0">
-                <a:solidFill>
-                  <a:srgbClr val="111111"/>
-                </a:solidFill>
-                <a:latin typeface="Times New Roman" pitchFamily="34" charset="0"/>
-                <a:ea typeface="Times New Roman" pitchFamily="34" charset="-122"/>
-                <a:cs typeface="Times New Roman" pitchFamily="34" charset="-120"/>
-              </a:rPr>
-              <a:t>Learning activities</a:t>
-            </a:r>
-            <a:endParaRPr lang="en-US" sz="4000" dirty="0"/>
-          </a:p>
-          <a:p>
-            <a:pPr algn="l" marL="342900" indent="-342900">
-              <a:spcAft>
-                <a:spcPts val="800"/>
-              </a:spcAft>
-              <a:buSzPct val="100000"/>
-              <a:buFont typeface="+mj-lt"/>
-              <a:buAutoNum type="arabicPeriod" startAt="1"/>
-            </a:pPr>
-            <a:r>
-              <a:rPr lang="en-US" sz="4000" dirty="0">
-                <a:solidFill>
-                  <a:srgbClr val="111111"/>
-                </a:solidFill>
-                <a:latin typeface="Times New Roman" pitchFamily="34" charset="0"/>
-                <a:ea typeface="Times New Roman" pitchFamily="34" charset="-122"/>
-                <a:cs typeface="Times New Roman" pitchFamily="34" charset="-120"/>
-              </a:rPr>
-              <a:t>Board summary</a:t>
-            </a:r>
-            <a:endParaRPr lang="en-US" sz="4000" dirty="0"/>
-          </a:p>
-          <a:p>
-            <a:pPr algn="l" marL="342900" indent="-342900">
-              <a:spcAft>
-                <a:spcPts val="800"/>
-              </a:spcAft>
-              <a:buSzPct val="100000"/>
-              <a:buFont typeface="+mj-lt"/>
-              <a:buAutoNum type="arabicPeriod" startAt="1"/>
-            </a:pPr>
-            <a:r>
-              <a:rPr lang="en-US" sz="4000" dirty="0">
-                <a:solidFill>
-                  <a:srgbClr val="111111"/>
-                </a:solidFill>
-                <a:latin typeface="Times New Roman" pitchFamily="34" charset="0"/>
-                <a:ea typeface="Times New Roman" pitchFamily="34" charset="-122"/>
-                <a:cs typeface="Times New Roman" pitchFamily="34" charset="-120"/>
-              </a:rPr>
-              <a:t>Evaluation, remediation and homework</a:t>
-            </a:r>
-            <a:endParaRPr lang="en-US" sz="4000" dirty="0"/>
-          </a:p>
-        </p:txBody>
-      </p:sp>
-      <p:sp>
-        <p:nvSpPr>
-          <p:cNvPr id="25" name="Slide Number Placeholder 0"/>
-          <p:cNvSpPr>
-            <a:spLocks noGrp="1"/>
-          </p:cNvSpPr>
-          <p:nvPr>
-            <p:ph type="sldNum" sz="quarter" idx="4294967295"/>
-          </p:nvPr>
-        </p:nvSpPr>
-        <p:spPr>
-          <a:xfrm>
-            <a:off x="27432" y="91440"/>
-            <a:ext cx="585216" cy="475488"/>
-          </a:xfrm>
-          <a:prstGeom prst="rect">
-            <a:avLst/>
-          </a:prstGeom>
-          <a:extLst>
-            <a:ext uri="{C572A759-6A51-4108-AA02-DFA0A04FC94B}">
-              <ma14:wrappingTextBoxFlag xmlns:ma14="http://schemas.microsoft.com/office/mac/drawingml/2011/main" val="0"/>
-            </a:ext>
-          </a:extLst>
-        </p:spPr>
-        <p:txBody>
-          <a:bodyPr/>
-          <a:lstStyle>
-            <a:lvl1pPr>
-              <a:defRPr sz="2000">
-                <a:solidFill>
-                  <a:srgbClr val="FFFFFF"/>
-                </a:solidFill>
-                <a:latin typeface="Calibri"/>
-                <a:ea typeface="Calibri"/>
-                <a:cs typeface="Calibri"/>
-              </a:defRPr>
-            </a:lvl1pPr>
-          </a:lstStyle>
-          <a:p>
-            <a:pPr algn="ctr"/>
-            <a:fld id="{F7021451-1387-4CA6-816F-3879F97B5CBC}" type="slidenum">
-              <a:rPr b="1" lang="en-US"/>
-              <a:t>6</a:t>
-            </a:fld>
-            <a:endParaRPr lang="en-US"/>
-          </a:p>
-        </p:txBody>
-      </p:sp>
-    </p:spTree>
-  </p:cSld>
-  <p:clrMapOvr>
-    <a:masterClrMapping/>
-  </p:clrMapOvr>
-</p:sld>
-</file>
-
-<file path=ppt/slides/slide60.xml><?xml version="1.0" encoding="utf-8"?>
-<p:sld xmlns:a="http://schemas.openxmlformats.org/drawingml/2006/main" xmlns:r="http://schemas.openxmlformats.org/officeDocument/2006/relationships" xmlns:p="http://schemas.openxmlformats.org/presentationml/2006/main">
-  <p:cSld name="Slide 60">
-    <p:spTree>
-      <p:nvGrpSpPr>
-        <p:cNvPr id="1" name=""/>
-        <p:cNvGrpSpPr/>
-        <p:nvPr/>
-      </p:nvGrpSpPr>
-      <p:grpSpPr>
-        <a:xfrm>
-          <a:off x="0" y="0"/>
-          <a:ext cx="0" cy="0"/>
-          <a:chOff x="0" y="0"/>
-          <a:chExt cx="0" cy="0"/>
-        </a:xfrm>
-      </p:grpSpPr>
-      <p:sp>
-        <p:nvSpPr>
-          <p:cNvPr id="2" name="Text 0"/>
-          <p:cNvSpPr/>
-          <p:nvPr/>
-        </p:nvSpPr>
-        <p:spPr>
-          <a:xfrm>
-            <a:off x="457200" y="713232"/>
-            <a:ext cx="11368735" cy="274320"/>
-          </a:xfrm>
-          <a:prstGeom prst="rect">
-            <a:avLst/>
-          </a:prstGeom>
-          <a:noFill/>
-          <a:ln/>
-        </p:spPr>
-        <p:txBody>
-          <a:bodyPr wrap="square" lIns="0" tIns="0" rIns="0" bIns="0" rtlCol="0" anchor="ctr"/>
-          <a:lstStyle/>
-          <a:p>
-            <a:pPr algn="r" indent="0" marL="0">
-              <a:buNone/>
-            </a:pPr>
-            <a:r>
-              <a:rPr lang="en-US" sz="1400" b="1" dirty="0">
-                <a:solidFill>
-                  <a:srgbClr val="1C3F6E"/>
-                </a:solidFill>
-                <a:latin typeface="Calibri" pitchFamily="34" charset="0"/>
-                <a:ea typeface="Calibri" pitchFamily="34" charset="-122"/>
-                <a:cs typeface="Calibri" pitchFamily="34" charset="-120"/>
-              </a:rPr>
               <a:t>LOGBOOK</a:t>
             </a:r>
             <a:endParaRPr lang="en-US" sz="1400" dirty="0"/>
@@ -22533,7 +22968,7 @@
       </p:sp>
       <p:graphicFrame>
         <p:nvGraphicFramePr>
-          <p:cNvPr id="61" name="Table 0"/>
+          <p:cNvPr id="62" name="Table 0"/>
           <p:cNvGraphicFramePr>
             <a:graphicFrameLocks noGrp="1"/>
           </p:cNvGraphicFramePr>
@@ -23155,7 +23590,7 @@
             <a:pPr algn="ctr"/>
             <a:fld id="{F7021451-1387-4CA6-816F-3879F97B5CBC}" type="slidenum">
               <a:rPr b="1" lang="en-US"/>
-              <a:t>60</a:t>
+              <a:t>61</a:t>
             </a:fld>
             <a:endParaRPr lang="en-US"/>
           </a:p>
@@ -23169,9 +23604,9 @@
 </p:sld>
 </file>
 
-<file path=ppt/slides/slide61.xml><?xml version="1.0" encoding="utf-8"?>
+<file path=ppt/slides/slide62.xml><?xml version="1.0" encoding="utf-8"?>
 <p:sld xmlns:a="http://schemas.openxmlformats.org/drawingml/2006/main" xmlns:r="http://schemas.openxmlformats.org/officeDocument/2006/relationships" xmlns:p="http://schemas.openxmlformats.org/presentationml/2006/main">
-  <p:cSld name="Slide 61">
+  <p:cSld name="Slide 62">
     <p:spTree>
       <p:nvGrpSpPr>
         <p:cNvPr id="1" name=""/>
@@ -23266,7 +23701,7 @@
       </p:sp>
       <p:graphicFrame>
         <p:nvGraphicFramePr>
-          <p:cNvPr id="62" name="Table 0"/>
+          <p:cNvPr id="63" name="Table 0"/>
           <p:cNvGraphicFramePr>
             <a:graphicFrameLocks noGrp="1"/>
           </p:cNvGraphicFramePr>
@@ -23376,7 +23811,7 @@
                           <a:ea typeface="Calibri" pitchFamily="34" charset="-122"/>
                           <a:cs typeface="Calibri" pitchFamily="34" charset="-120"/>
                         </a:rPr>
-                        <a:t>DEFINITIONS; Characteristics of Mountain Climates; Vertical Zonation: Mount Cameroon; Factors of Mountain Climates.</a:t>
+                        <a:t>DEFINITIONS; Temperature and Pressure; Rainfall and Radiation; Vertical Zonation: Mount Cameroon; Factors of Mountain Climates.</a:t>
                       </a:r>
                       <a:endParaRPr lang="en-US" sz="1600" dirty="0">
                         <a:latin typeface="Calibri" charset="0"/>
@@ -24026,331 +24461,6 @@
             <a:pPr algn="ctr"/>
             <a:fld id="{F7021451-1387-4CA6-816F-3879F97B5CBC}" type="slidenum">
               <a:rPr b="1" lang="en-US"/>
-              <a:t>61</a:t>
-            </a:fld>
-            <a:endParaRPr lang="en-US"/>
-          </a:p>
-        </p:txBody>
-      </p:sp>
-    </p:spTree>
-  </p:cSld>
-  <p:clrMapOvr>
-    <a:masterClrMapping/>
-  </p:clrMapOvr>
-</p:sld>
-</file>
-
-<file path=ppt/slides/slide62.xml><?xml version="1.0" encoding="utf-8"?>
-<p:sld xmlns:a="http://schemas.openxmlformats.org/drawingml/2006/main" xmlns:r="http://schemas.openxmlformats.org/officeDocument/2006/relationships" xmlns:p="http://schemas.openxmlformats.org/presentationml/2006/main">
-  <p:cSld name="Slide 62">
-    <p:spTree>
-      <p:nvGrpSpPr>
-        <p:cNvPr id="1" name=""/>
-        <p:cNvGrpSpPr/>
-        <p:nvPr/>
-      </p:nvGrpSpPr>
-      <p:grpSpPr>
-        <a:xfrm>
-          <a:off x="0" y="0"/>
-          <a:ext cx="0" cy="0"/>
-          <a:chOff x="0" y="0"/>
-          <a:chExt cx="0" cy="0"/>
-        </a:xfrm>
-      </p:grpSpPr>
-      <p:sp>
-        <p:nvSpPr>
-          <p:cNvPr id="2" name="Text 0"/>
-          <p:cNvSpPr/>
-          <p:nvPr/>
-        </p:nvSpPr>
-        <p:spPr>
-          <a:xfrm>
-            <a:off x="457200" y="713232"/>
-            <a:ext cx="11368735" cy="274320"/>
-          </a:xfrm>
-          <a:prstGeom prst="rect">
-            <a:avLst/>
-          </a:prstGeom>
-          <a:noFill/>
-          <a:ln/>
-        </p:spPr>
-        <p:txBody>
-          <a:bodyPr wrap="square" lIns="0" tIns="0" rIns="0" bIns="0" rtlCol="0" anchor="ctr"/>
-          <a:lstStyle/>
-          <a:p>
-            <a:pPr algn="r" indent="0" marL="0">
-              <a:buNone/>
-            </a:pPr>
-            <a:r>
-              <a:rPr lang="en-US" sz="1400" b="1" dirty="0">
-                <a:solidFill>
-                  <a:srgbClr val="1C3F6E"/>
-                </a:solidFill>
-                <a:latin typeface="Calibri" pitchFamily="34" charset="0"/>
-                <a:ea typeface="Calibri" pitchFamily="34" charset="-122"/>
-                <a:cs typeface="Calibri" pitchFamily="34" charset="-120"/>
-              </a:rPr>
-              <a:t>TEACHER'S NOTE</a:t>
-            </a:r>
-            <a:endParaRPr lang="en-US" sz="1400" dirty="0"/>
-          </a:p>
-        </p:txBody>
-      </p:sp>
-      <p:pic>
-        <p:nvPicPr>
-          <p:cNvPr id="3" name="Image 0" descr="/home/claude/f4/img/minesec_sheet.png">    </p:cNvPr>
-          <p:cNvPicPr>
-            <a:picLocks noChangeAspect="1"/>
-          </p:cNvPicPr>
-          <p:nvPr/>
-        </p:nvPicPr>
-        <p:blipFill>
-          <a:blip r:embed="rId1"/>
-          <a:stretch>
-            <a:fillRect/>
-          </a:stretch>
-        </p:blipFill>
-        <p:spPr>
-          <a:xfrm>
-            <a:off x="0" y="658368"/>
-            <a:ext cx="3840480" cy="5833872"/>
-          </a:xfrm>
-          <a:prstGeom prst="rect">
-            <a:avLst/>
-          </a:prstGeom>
-        </p:spPr>
-      </p:pic>
-      <p:sp>
-        <p:nvSpPr>
-          <p:cNvPr id="4" name="Text 1"/>
-          <p:cNvSpPr/>
-          <p:nvPr/>
-        </p:nvSpPr>
-        <p:spPr>
-          <a:xfrm>
-            <a:off x="4069080" y="1005840"/>
-            <a:ext cx="7802575" cy="731520"/>
-          </a:xfrm>
-          <a:prstGeom prst="rect">
-            <a:avLst/>
-          </a:prstGeom>
-          <a:noFill/>
-          <a:ln/>
-        </p:spPr>
-        <p:txBody>
-          <a:bodyPr wrap="square" lIns="0" tIns="0" rIns="0" bIns="0" rtlCol="0" anchor="ctr">
-            <a:normAutofit/>
-          </a:bodyPr>
-          <a:lstStyle/>
-          <a:p>
-            <a:pPr algn="ctr" indent="0" marL="0">
-              <a:buNone/>
-            </a:pPr>
-            <a:r>
-              <a:rPr lang="en-US" sz="3600" b="1" dirty="0">
-                <a:solidFill>
-                  <a:srgbClr val="990011"/>
-                </a:solidFill>
-                <a:latin typeface="Times New Roman" pitchFamily="34" charset="0"/>
-                <a:ea typeface="Times New Roman" pitchFamily="34" charset="-122"/>
-                <a:cs typeface="Times New Roman" pitchFamily="34" charset="-120"/>
-              </a:rPr>
-              <a:t>Teacher's Note</a:t>
-            </a:r>
-            <a:endParaRPr lang="en-US" sz="3600" dirty="0"/>
-          </a:p>
-        </p:txBody>
-      </p:sp>
-      <p:sp>
-        <p:nvSpPr>
-          <p:cNvPr id="5" name="Text 2"/>
-          <p:cNvSpPr/>
-          <p:nvPr/>
-        </p:nvSpPr>
-        <p:spPr>
-          <a:xfrm>
-            <a:off x="4069080" y="1783080"/>
-            <a:ext cx="7802575" cy="4663440"/>
-          </a:xfrm>
-          <a:prstGeom prst="rect">
-            <a:avLst/>
-          </a:prstGeom>
-          <a:noFill/>
-          <a:ln/>
-        </p:spPr>
-        <p:txBody>
-          <a:bodyPr wrap="square" lIns="0" tIns="0" rIns="0" bIns="0" rtlCol="0" anchor="t"/>
-          <a:lstStyle/>
-          <a:p>
-            <a:pPr algn="l" marL="342900" indent="-342900">
-              <a:spcAft>
-                <a:spcPts val="800"/>
-              </a:spcAft>
-              <a:buSzPct val="100000"/>
-              <a:buChar char="•"/>
-            </a:pPr>
-            <a:r>
-              <a:rPr lang="en-US" sz="2000" dirty="0">
-                <a:solidFill>
-                  <a:srgbClr val="111111"/>
-                </a:solidFill>
-                <a:latin typeface="Calibri" pitchFamily="34" charset="0"/>
-                <a:ea typeface="Calibri" pitchFamily="34" charset="-122"/>
-                <a:cs typeface="Calibri" pitchFamily="34" charset="-120"/>
-              </a:rPr>
-              <a:t>Timing: Homework correction, plan, objectives 8 min | Recall, situation, action 10 min | 5 activities 30 min | Board summary (copying) 30 min | Evaluation, remediation 10 min | Homework, next lesson 5 min | Logbook 7 min</a:t>
-            </a:r>
-            <a:endParaRPr lang="en-US" sz="2000" dirty="0"/>
-          </a:p>
-          <a:p>
-            <a:pPr algn="l" marL="342900" indent="-342900">
-              <a:spcAft>
-                <a:spcPts val="800"/>
-              </a:spcAft>
-              <a:buSzPct val="100000"/>
-              <a:buChar char="•"/>
-            </a:pPr>
-            <a:r>
-              <a:rPr lang="en-US" sz="2000" dirty="0">
-                <a:solidFill>
-                  <a:srgbClr val="111111"/>
-                </a:solidFill>
-                <a:latin typeface="Calibri" pitchFamily="34" charset="0"/>
-                <a:ea typeface="Calibri" pitchFamily="34" charset="-122"/>
-                <a:cs typeface="Calibri" pitchFamily="34" charset="-120"/>
-              </a:rPr>
-              <a:t>Without the projector (Activity 1): calculate on the board.</a:t>
-            </a:r>
-            <a:endParaRPr lang="en-US" sz="2000" dirty="0"/>
-          </a:p>
-          <a:p>
-            <a:pPr algn="l" marL="342900" indent="-342900">
-              <a:spcAft>
-                <a:spcPts val="800"/>
-              </a:spcAft>
-              <a:buSzPct val="100000"/>
-              <a:buChar char="•"/>
-            </a:pPr>
-            <a:r>
-              <a:rPr lang="en-US" sz="2000" dirty="0">
-                <a:solidFill>
-                  <a:srgbClr val="111111"/>
-                </a:solidFill>
-                <a:latin typeface="Calibri" pitchFamily="34" charset="0"/>
-                <a:ea typeface="Calibri" pitchFamily="34" charset="-122"/>
-                <a:cs typeface="Calibri" pitchFamily="34" charset="-120"/>
-              </a:rPr>
-              <a:t>Without the projector (Activity 2): draw a mountain with wind and rain.</a:t>
-            </a:r>
-            <a:endParaRPr lang="en-US" sz="2000" dirty="0"/>
-          </a:p>
-          <a:p>
-            <a:pPr algn="l" marL="342900" indent="-342900">
-              <a:spcAft>
-                <a:spcPts val="800"/>
-              </a:spcAft>
-              <a:buSzPct val="100000"/>
-              <a:buChar char="•"/>
-            </a:pPr>
-            <a:r>
-              <a:rPr lang="en-US" sz="2000" dirty="0">
-                <a:solidFill>
-                  <a:srgbClr val="111111"/>
-                </a:solidFill>
-                <a:latin typeface="Calibri" pitchFamily="34" charset="0"/>
-                <a:ea typeface="Calibri" pitchFamily="34" charset="-122"/>
-                <a:cs typeface="Calibri" pitchFamily="34" charset="-120"/>
-              </a:rPr>
-              <a:t>Without the projector (Activity 3): list the five characteristics.</a:t>
-            </a:r>
-            <a:endParaRPr lang="en-US" sz="2000" dirty="0"/>
-          </a:p>
-          <a:p>
-            <a:pPr algn="l" marL="342900" indent="-342900">
-              <a:spcAft>
-                <a:spcPts val="800"/>
-              </a:spcAft>
-              <a:buSzPct val="100000"/>
-              <a:buChar char="•"/>
-            </a:pPr>
-            <a:r>
-              <a:rPr lang="en-US" sz="2000" dirty="0">
-                <a:solidFill>
-                  <a:srgbClr val="111111"/>
-                </a:solidFill>
-                <a:latin typeface="Calibri" pitchFamily="34" charset="0"/>
-                <a:ea typeface="Calibri" pitchFamily="34" charset="-122"/>
-                <a:cs typeface="Calibri" pitchFamily="34" charset="-120"/>
-              </a:rPr>
-              <a:t>Without the projector (Activity 4): draw the zones on a mountain.</a:t>
-            </a:r>
-            <a:endParaRPr lang="en-US" sz="2000" dirty="0"/>
-          </a:p>
-          <a:p>
-            <a:pPr algn="l" marL="342900" indent="-342900">
-              <a:spcAft>
-                <a:spcPts val="800"/>
-              </a:spcAft>
-              <a:buSzPct val="100000"/>
-              <a:buChar char="•"/>
-            </a:pPr>
-            <a:r>
-              <a:rPr lang="en-US" sz="2000" dirty="0">
-                <a:solidFill>
-                  <a:srgbClr val="111111"/>
-                </a:solidFill>
-                <a:latin typeface="Calibri" pitchFamily="34" charset="0"/>
-                <a:ea typeface="Calibri" pitchFamily="34" charset="-122"/>
-                <a:cs typeface="Calibri" pitchFamily="34" charset="-120"/>
-              </a:rPr>
-              <a:t>Without the projector (Activity 5): compare two sides of a hill.</a:t>
-            </a:r>
-            <a:endParaRPr lang="en-US" sz="2000" dirty="0"/>
-          </a:p>
-        </p:txBody>
-      </p:sp>
-      <p:sp>
-        <p:nvSpPr>
-          <p:cNvPr id="25" name="Slide Number Placeholder 0"/>
-          <p:cNvSpPr>
-            <a:spLocks noGrp="1"/>
-          </p:cNvSpPr>
-          <p:nvPr>
-            <p:ph type="sldNum" sz="quarter" idx="4294967295"/>
-          </p:nvPr>
-        </p:nvSpPr>
-        <p:spPr>
-          <a:xfrm>
-            <a:off x="27432" y="91440"/>
-            <a:ext cx="585216" cy="475488"/>
-          </a:xfrm>
-          <a:prstGeom prst="rect">
-            <a:avLst/>
-          </a:prstGeom>
-          <a:extLst>
-            <a:ext uri="{C572A759-6A51-4108-AA02-DFA0A04FC94B}">
-              <ma14:wrappingTextBoxFlag xmlns:ma14="http://schemas.microsoft.com/office/mac/drawingml/2011/main" val="0"/>
-            </a:ext>
-          </a:extLst>
-        </p:spPr>
-        <p:txBody>
-          <a:bodyPr/>
-          <a:lstStyle>
-            <a:lvl1pPr>
-              <a:defRPr sz="2000">
-                <a:solidFill>
-                  <a:srgbClr val="FFFFFF"/>
-                </a:solidFill>
-                <a:latin typeface="Calibri"/>
-                <a:ea typeface="Calibri"/>
-                <a:cs typeface="Calibri"/>
-              </a:defRPr>
-            </a:lvl1pPr>
-          </a:lstStyle>
-          <a:p>
-            <a:pPr algn="ctr"/>
-            <a:fld id="{F7021451-1387-4CA6-816F-3879F97B5CBC}" type="slidenum">
-              <a:rPr b="1" lang="en-US"/>
               <a:t>62</a:t>
             </a:fld>
             <a:endParaRPr lang="en-US"/>
@@ -24415,7 +24525,7 @@
                 <a:ea typeface="Calibri" pitchFamily="34" charset="-122"/>
                 <a:cs typeface="Calibri" pitchFamily="34" charset="-120"/>
               </a:rPr>
-              <a:t>REFERENCES</a:t>
+              <a:t>TEACHER'S NOTE</a:t>
             </a:r>
             <a:endParaRPr lang="en-US" sz="1400" dirty="0"/>
           </a:p>
@@ -24438,7 +24548,7 @@
         <p:spPr>
           <a:xfrm>
             <a:off x="0" y="658368"/>
-            <a:ext cx="5120640" cy="5833872"/>
+            <a:ext cx="3840480" cy="5833872"/>
           </a:xfrm>
           <a:prstGeom prst="rect">
             <a:avLst/>
@@ -24453,8 +24563,8 @@
         </p:nvSpPr>
         <p:spPr>
           <a:xfrm>
-            <a:off x="5349240" y="1005840"/>
-            <a:ext cx="6522415" cy="731520"/>
+            <a:off x="4069080" y="1005840"/>
+            <a:ext cx="7802575" cy="731520"/>
           </a:xfrm>
           <a:prstGeom prst="rect">
             <a:avLst/>
@@ -24480,7 +24590,7 @@
                 <a:ea typeface="Times New Roman" pitchFamily="34" charset="-122"/>
                 <a:cs typeface="Times New Roman" pitchFamily="34" charset="-120"/>
               </a:rPr>
-              <a:t>References</a:t>
+              <a:t>Teacher's Note</a:t>
             </a:r>
             <a:endParaRPr lang="en-US" sz="3600" dirty="0"/>
           </a:p>
@@ -24494,8 +24604,8 @@
         </p:nvSpPr>
         <p:spPr>
           <a:xfrm>
-            <a:off x="5349240" y="1783080"/>
-            <a:ext cx="6522415" cy="4663440"/>
+            <a:off x="4069080" y="1783080"/>
+            <a:ext cx="7802575" cy="4663440"/>
           </a:xfrm>
           <a:prstGeom prst="rect">
             <a:avLst/>
@@ -24515,7 +24625,7 @@
               <a:buChar char="•"/>
             </a:pPr>
             <a:r>
-              <a:rPr lang="en-US" sz="1800" dirty="0">
+              <a:rPr lang="en-US" sz="2000" dirty="0">
                 <a:solidFill>
                   <a:srgbClr val="111111"/>
                 </a:solidFill>
@@ -24523,9 +24633,9 @@
                 <a:ea typeface="Calibri" pitchFamily="34" charset="-122"/>
                 <a:cs typeface="Calibri" pitchFamily="34" charset="-120"/>
               </a:rPr>
-              <a:t>Geography Syllabus for Sixth Forms (Lower and Upper Sixth), MINESEC, 2019 — Module 1 (Meteorology, Climatology &amp; Hydrology).</a:t>
-            </a:r>
-            <a:endParaRPr lang="en-US" sz="1800" dirty="0"/>
+              <a:t>Timing: Homework correction, plan, objectives 8 min | Recall, situation, action 10 min | 5 activities 30 min | Board summary (copying) 30 min | Evaluation, remediation 10 min | Homework, next lesson 5 min | Logbook 7 min</a:t>
+            </a:r>
+            <a:endParaRPr lang="en-US" sz="2000" dirty="0"/>
           </a:p>
           <a:p>
             <a:pPr algn="l" marL="342900" indent="-342900">
@@ -24536,7 +24646,7 @@
               <a:buChar char="•"/>
             </a:pPr>
             <a:r>
-              <a:rPr lang="en-US" sz="1800" dirty="0">
+              <a:rPr lang="en-US" sz="2000" dirty="0">
                 <a:solidFill>
                   <a:srgbClr val="111111"/>
                 </a:solidFill>
@@ -24544,9 +24654,9 @@
                 <a:ea typeface="Calibri" pitchFamily="34" charset="-122"/>
                 <a:cs typeface="Calibri" pitchFamily="34" charset="-120"/>
               </a:rPr>
-              <a:t>Teacher's course notes: Mr KAMDEM E., Meteorology and Climatology (LSA), GBHS Garoua, 2026.</a:t>
-            </a:r>
-            <a:endParaRPr lang="en-US" sz="1800" dirty="0"/>
+              <a:t>Without the projector (Activity 1): calculate on the board.</a:t>
+            </a:r>
+            <a:endParaRPr lang="en-US" sz="2000" dirty="0"/>
           </a:p>
           <a:p>
             <a:pPr algn="l" marL="342900" indent="-342900">
@@ -24557,7 +24667,7 @@
               <a:buChar char="•"/>
             </a:pPr>
             <a:r>
-              <a:rPr lang="en-US" sz="1800" dirty="0">
+              <a:rPr lang="en-US" sz="2000" dirty="0">
                 <a:solidFill>
                   <a:srgbClr val="111111"/>
                 </a:solidFill>
@@ -24565,9 +24675,9 @@
                 <a:ea typeface="Calibri" pitchFamily="34" charset="-122"/>
                 <a:cs typeface="Calibri" pitchFamily="34" charset="-120"/>
               </a:rPr>
-              <a:t>Photo, board summary (Human use): “Carlo in the tea” by luigig, CC BY 2.0, via Flickr (https://www.flickr.com/photos/51035803402@N01/3175986747)</a:t>
-            </a:r>
-            <a:endParaRPr lang="en-US" sz="1800" dirty="0"/>
+              <a:t>Without the projector (Activity 2): draw a mountain with wind and rain.</a:t>
+            </a:r>
+            <a:endParaRPr lang="en-US" sz="2000" dirty="0"/>
           </a:p>
           <a:p>
             <a:pPr algn="l" marL="342900" indent="-342900">
@@ -24578,7 +24688,7 @@
               <a:buChar char="•"/>
             </a:pPr>
             <a:r>
-              <a:rPr lang="en-US" sz="1800" dirty="0">
+              <a:rPr lang="en-US" sz="2000" dirty="0">
                 <a:solidFill>
                   <a:srgbClr val="111111"/>
                 </a:solidFill>
@@ -24586,9 +24696,51 @@
                 <a:ea typeface="Calibri" pitchFamily="34" charset="-122"/>
                 <a:cs typeface="Calibri" pitchFamily="34" charset="-120"/>
               </a:rPr>
-              <a:t>Diagrams and animations: drawn for this lesson (Geography Department).</a:t>
-            </a:r>
-            <a:endParaRPr lang="en-US" sz="1800" dirty="0"/>
+              <a:t>Without the projector (Activity 3): list the five characteristics.</a:t>
+            </a:r>
+            <a:endParaRPr lang="en-US" sz="2000" dirty="0"/>
+          </a:p>
+          <a:p>
+            <a:pPr algn="l" marL="342900" indent="-342900">
+              <a:spcAft>
+                <a:spcPts val="800"/>
+              </a:spcAft>
+              <a:buSzPct val="100000"/>
+              <a:buChar char="•"/>
+            </a:pPr>
+            <a:r>
+              <a:rPr lang="en-US" sz="2000" dirty="0">
+                <a:solidFill>
+                  <a:srgbClr val="111111"/>
+                </a:solidFill>
+                <a:latin typeface="Calibri" pitchFamily="34" charset="0"/>
+                <a:ea typeface="Calibri" pitchFamily="34" charset="-122"/>
+                <a:cs typeface="Calibri" pitchFamily="34" charset="-120"/>
+              </a:rPr>
+              <a:t>Without the projector (Activity 4): draw the zones on a mountain.</a:t>
+            </a:r>
+            <a:endParaRPr lang="en-US" sz="2000" dirty="0"/>
+          </a:p>
+          <a:p>
+            <a:pPr algn="l" marL="342900" indent="-342900">
+              <a:spcAft>
+                <a:spcPts val="800"/>
+              </a:spcAft>
+              <a:buSzPct val="100000"/>
+              <a:buChar char="•"/>
+            </a:pPr>
+            <a:r>
+              <a:rPr lang="en-US" sz="2000" dirty="0">
+                <a:solidFill>
+                  <a:srgbClr val="111111"/>
+                </a:solidFill>
+                <a:latin typeface="Calibri" pitchFamily="34" charset="0"/>
+                <a:ea typeface="Calibri" pitchFamily="34" charset="-122"/>
+                <a:cs typeface="Calibri" pitchFamily="34" charset="-120"/>
+              </a:rPr>
+              <a:t>Without the projector (Activity 5): compare two sides of a hill.</a:t>
+            </a:r>
+            <a:endParaRPr lang="en-US" sz="2000" dirty="0"/>
           </a:p>
         </p:txBody>
       </p:sp>
@@ -24635,6 +24787,268 @@
             <a:fld id="{F7021451-1387-4CA6-816F-3879F97B5CBC}" type="slidenum">
               <a:rPr b="1" lang="en-US"/>
               <a:t>63</a:t>
+            </a:fld>
+            <a:endParaRPr lang="en-US"/>
+          </a:p>
+        </p:txBody>
+      </p:sp>
+    </p:spTree>
+  </p:cSld>
+  <p:clrMapOvr>
+    <a:masterClrMapping/>
+  </p:clrMapOvr>
+</p:sld>
+</file>
+
+<file path=ppt/slides/slide64.xml><?xml version="1.0" encoding="utf-8"?>
+<p:sld xmlns:a="http://schemas.openxmlformats.org/drawingml/2006/main" xmlns:r="http://schemas.openxmlformats.org/officeDocument/2006/relationships" xmlns:p="http://schemas.openxmlformats.org/presentationml/2006/main">
+  <p:cSld name="Slide 64">
+    <p:spTree>
+      <p:nvGrpSpPr>
+        <p:cNvPr id="1" name=""/>
+        <p:cNvGrpSpPr/>
+        <p:nvPr/>
+      </p:nvGrpSpPr>
+      <p:grpSpPr>
+        <a:xfrm>
+          <a:off x="0" y="0"/>
+          <a:ext cx="0" cy="0"/>
+          <a:chOff x="0" y="0"/>
+          <a:chExt cx="0" cy="0"/>
+        </a:xfrm>
+      </p:grpSpPr>
+      <p:sp>
+        <p:nvSpPr>
+          <p:cNvPr id="2" name="Text 0"/>
+          <p:cNvSpPr/>
+          <p:nvPr/>
+        </p:nvSpPr>
+        <p:spPr>
+          <a:xfrm>
+            <a:off x="457200" y="713232"/>
+            <a:ext cx="11368735" cy="274320"/>
+          </a:xfrm>
+          <a:prstGeom prst="rect">
+            <a:avLst/>
+          </a:prstGeom>
+          <a:noFill/>
+          <a:ln/>
+        </p:spPr>
+        <p:txBody>
+          <a:bodyPr wrap="square" lIns="0" tIns="0" rIns="0" bIns="0" rtlCol="0" anchor="ctr"/>
+          <a:lstStyle/>
+          <a:p>
+            <a:pPr algn="r" indent="0" marL="0">
+              <a:buNone/>
+            </a:pPr>
+            <a:r>
+              <a:rPr lang="en-US" sz="1400" b="1" dirty="0">
+                <a:solidFill>
+                  <a:srgbClr val="1C3F6E"/>
+                </a:solidFill>
+                <a:latin typeface="Calibri" pitchFamily="34" charset="0"/>
+                <a:ea typeface="Calibri" pitchFamily="34" charset="-122"/>
+                <a:cs typeface="Calibri" pitchFamily="34" charset="-120"/>
+              </a:rPr>
+              <a:t>REFERENCES</a:t>
+            </a:r>
+            <a:endParaRPr lang="en-US" sz="1400" dirty="0"/>
+          </a:p>
+        </p:txBody>
+      </p:sp>
+      <p:pic>
+        <p:nvPicPr>
+          <p:cNvPr id="3" name="Image 0" descr="/home/claude/f4/img/minesec_sheet.png">    </p:cNvPr>
+          <p:cNvPicPr>
+            <a:picLocks noChangeAspect="1"/>
+          </p:cNvPicPr>
+          <p:nvPr/>
+        </p:nvPicPr>
+        <p:blipFill>
+          <a:blip r:embed="rId1"/>
+          <a:stretch>
+            <a:fillRect/>
+          </a:stretch>
+        </p:blipFill>
+        <p:spPr>
+          <a:xfrm>
+            <a:off x="0" y="658368"/>
+            <a:ext cx="5120640" cy="5833872"/>
+          </a:xfrm>
+          <a:prstGeom prst="rect">
+            <a:avLst/>
+          </a:prstGeom>
+        </p:spPr>
+      </p:pic>
+      <p:sp>
+        <p:nvSpPr>
+          <p:cNvPr id="4" name="Text 1"/>
+          <p:cNvSpPr/>
+          <p:nvPr/>
+        </p:nvSpPr>
+        <p:spPr>
+          <a:xfrm>
+            <a:off x="5349240" y="1005840"/>
+            <a:ext cx="6522415" cy="731520"/>
+          </a:xfrm>
+          <a:prstGeom prst="rect">
+            <a:avLst/>
+          </a:prstGeom>
+          <a:noFill/>
+          <a:ln/>
+        </p:spPr>
+        <p:txBody>
+          <a:bodyPr wrap="square" lIns="0" tIns="0" rIns="0" bIns="0" rtlCol="0" anchor="ctr">
+            <a:normAutofit/>
+          </a:bodyPr>
+          <a:lstStyle/>
+          <a:p>
+            <a:pPr algn="ctr" indent="0" marL="0">
+              <a:buNone/>
+            </a:pPr>
+            <a:r>
+              <a:rPr lang="en-US" sz="3600" b="1" dirty="0">
+                <a:solidFill>
+                  <a:srgbClr val="990011"/>
+                </a:solidFill>
+                <a:latin typeface="Times New Roman" pitchFamily="34" charset="0"/>
+                <a:ea typeface="Times New Roman" pitchFamily="34" charset="-122"/>
+                <a:cs typeface="Times New Roman" pitchFamily="34" charset="-120"/>
+              </a:rPr>
+              <a:t>References</a:t>
+            </a:r>
+            <a:endParaRPr lang="en-US" sz="3600" dirty="0"/>
+          </a:p>
+        </p:txBody>
+      </p:sp>
+      <p:sp>
+        <p:nvSpPr>
+          <p:cNvPr id="5" name="Text 2"/>
+          <p:cNvSpPr/>
+          <p:nvPr/>
+        </p:nvSpPr>
+        <p:spPr>
+          <a:xfrm>
+            <a:off x="5349240" y="1783080"/>
+            <a:ext cx="6522415" cy="4663440"/>
+          </a:xfrm>
+          <a:prstGeom prst="rect">
+            <a:avLst/>
+          </a:prstGeom>
+          <a:noFill/>
+          <a:ln/>
+        </p:spPr>
+        <p:txBody>
+          <a:bodyPr wrap="square" lIns="0" tIns="0" rIns="0" bIns="0" rtlCol="0" anchor="t"/>
+          <a:lstStyle/>
+          <a:p>
+            <a:pPr algn="l" marL="342900" indent="-342900">
+              <a:spcAft>
+                <a:spcPts val="800"/>
+              </a:spcAft>
+              <a:buSzPct val="100000"/>
+              <a:buChar char="•"/>
+            </a:pPr>
+            <a:r>
+              <a:rPr lang="en-US" sz="1800" dirty="0">
+                <a:solidFill>
+                  <a:srgbClr val="111111"/>
+                </a:solidFill>
+                <a:latin typeface="Calibri" pitchFamily="34" charset="0"/>
+                <a:ea typeface="Calibri" pitchFamily="34" charset="-122"/>
+                <a:cs typeface="Calibri" pitchFamily="34" charset="-120"/>
+              </a:rPr>
+              <a:t>Geography Syllabus for Sixth Forms (Lower and Upper Sixth), MINESEC, 2019 — Module 1 (Meteorology, Climatology &amp; Hydrology).</a:t>
+            </a:r>
+            <a:endParaRPr lang="en-US" sz="1800" dirty="0"/>
+          </a:p>
+          <a:p>
+            <a:pPr algn="l" marL="342900" indent="-342900">
+              <a:spcAft>
+                <a:spcPts val="800"/>
+              </a:spcAft>
+              <a:buSzPct val="100000"/>
+              <a:buChar char="•"/>
+            </a:pPr>
+            <a:r>
+              <a:rPr lang="en-US" sz="1800" dirty="0">
+                <a:solidFill>
+                  <a:srgbClr val="111111"/>
+                </a:solidFill>
+                <a:latin typeface="Calibri" pitchFamily="34" charset="0"/>
+                <a:ea typeface="Calibri" pitchFamily="34" charset="-122"/>
+                <a:cs typeface="Calibri" pitchFamily="34" charset="-120"/>
+              </a:rPr>
+              <a:t>Teacher's course notes: Mr KAMDEM E., Meteorology and Climatology (LSA), GBHS Garoua, 2026.</a:t>
+            </a:r>
+            <a:endParaRPr lang="en-US" sz="1800" dirty="0"/>
+          </a:p>
+          <a:p>
+            <a:pPr algn="l" marL="342900" indent="-342900">
+              <a:spcAft>
+                <a:spcPts val="800"/>
+              </a:spcAft>
+              <a:buSzPct val="100000"/>
+              <a:buChar char="•"/>
+            </a:pPr>
+            <a:r>
+              <a:rPr lang="en-US" sz="1800" dirty="0">
+                <a:solidFill>
+                  <a:srgbClr val="111111"/>
+                </a:solidFill>
+                <a:latin typeface="Calibri" pitchFamily="34" charset="0"/>
+                <a:ea typeface="Calibri" pitchFamily="34" charset="-122"/>
+                <a:cs typeface="Calibri" pitchFamily="34" charset="-120"/>
+              </a:rPr>
+              <a:t>Diagrams and animations: drawn for this lesson (Geography Department).</a:t>
+            </a:r>
+            <a:endParaRPr lang="en-US" sz="1800" dirty="0"/>
+          </a:p>
+        </p:txBody>
+      </p:sp>
+      <p:sp>
+        <p:nvSpPr>
+          <p:cNvPr id="25" name="Slide Number Placeholder 0"/>
+          <p:cNvSpPr>
+            <a:spLocks noGrp="1"/>
+          </p:cNvSpPr>
+          <p:nvPr>
+            <p:ph type="sldNum" sz="quarter" idx="4294967295"/>
+          </p:nvPr>
+        </p:nvSpPr>
+        <p:spPr>
+          <a:xfrm>
+            <a:off x="27432" y="91440"/>
+            <a:ext cx="585216" cy="475488"/>
+          </a:xfrm>
+          <a:prstGeom prst="rect">
+            <a:avLst/>
+          </a:prstGeom>
+          <a:extLst>
+            <a:ext uri="{C572A759-6A51-4108-AA02-DFA0A04FC94B}">
+              <ma14:wrappingTextBoxFlag xmlns:ma14="http://schemas.microsoft.com/office/mac/drawingml/2011/main" val="0"/>
+            </a:ext>
+          </a:extLst>
+        </p:spPr>
+        <p:txBody>
+          <a:bodyPr/>
+          <a:lstStyle>
+            <a:lvl1pPr>
+              <a:defRPr sz="2000">
+                <a:solidFill>
+                  <a:srgbClr val="FFFFFF"/>
+                </a:solidFill>
+                <a:latin typeface="Calibri"/>
+                <a:ea typeface="Calibri"/>
+                <a:cs typeface="Calibri"/>
+              </a:defRPr>
+            </a:lvl1pPr>
+          </a:lstStyle>
+          <a:p>
+            <a:pPr algn="ctr"/>
+            <a:fld id="{F7021451-1387-4CA6-816F-3879F97B5CBC}" type="slidenum">
+              <a:rPr b="1" lang="en-US"/>
+              <a:t>64</a:t>
             </a:fld>
             <a:endParaRPr lang="en-US"/>
           </a:p>
